--- a/paper/cbsafe_deck.pptx
+++ b/paper/cbsafe_deck.pptx
@@ -3140,7 +3140,7 @@
                 </a:solidFill>
                 <a:latin typeface="Segoe UI"/>
               </a:rPr>
-              <a:t>POST-QUANTUM CRYPTOGRAPHY × FEDERATED LEARNING · METHOD &amp; FULL-PAPER TALK</a:t>
+              <a:t>POST-QUANTUM CRYPTOGRAPHY × FEDERATED LEARNING</a:t>
             </a:r>
           </a:p>
         </p:txBody>
@@ -3307,28 +3307,28 @@
         </p:nvSpPr>
         <p:spPr>
           <a:xfrm>
-            <a:off x="685800" y="384048"/>
-            <a:ext cx="10881360" cy="320040"/>
-          </a:xfrm>
-          <a:prstGeom prst="rect">
-            <a:avLst/>
-          </a:prstGeom>
-          <a:noFill/>
-        </p:spPr>
-        <p:txBody>
-          <a:bodyPr wrap="square">
-            <a:spAutoFit/>
-          </a:bodyPr>
-          <a:lstStyle/>
-          <a:p>
-            <a:r>
-              <a:rPr sz="1200" b="1" i="0">
-                <a:solidFill>
-                  <a:srgbClr val="2A78D6"/>
-                </a:solidFill>
-                <a:latin typeface="Segoe UI"/>
-              </a:rPr>
-              <a:t>COMPONENT 2 / 3</a:t>
+            <a:off x="685800" y="438912"/>
+            <a:ext cx="10881360" cy="822960"/>
+          </a:xfrm>
+          <a:prstGeom prst="rect">
+            <a:avLst/>
+          </a:prstGeom>
+          <a:noFill/>
+        </p:spPr>
+        <p:txBody>
+          <a:bodyPr wrap="square">
+            <a:spAutoFit/>
+          </a:bodyPr>
+          <a:lstStyle/>
+          <a:p>
+            <a:r>
+              <a:rPr sz="3000" b="1" i="0">
+                <a:solidFill>
+                  <a:srgbClr val="0B0B0B"/>
+                </a:solidFill>
+                <a:latin typeface="Segoe UI"/>
+              </a:rPr>
+              <a:t>Methodology (Ours): Detection</a:t>
             </a:r>
           </a:p>
         </p:txBody>
@@ -3341,28 +3341,92 @@
         </p:nvSpPr>
         <p:spPr>
           <a:xfrm>
-            <a:off x="685800" y="713232"/>
-            <a:ext cx="10881360" cy="822960"/>
-          </a:xfrm>
-          <a:prstGeom prst="rect">
-            <a:avLst/>
-          </a:prstGeom>
-          <a:noFill/>
-        </p:spPr>
-        <p:txBody>
-          <a:bodyPr wrap="square">
-            <a:spAutoFit/>
-          </a:bodyPr>
-          <a:lstStyle/>
-          <a:p>
-            <a:r>
-              <a:rPr sz="2700" b="1" i="0">
-                <a:solidFill>
-                  <a:srgbClr val="0B0B0B"/>
-                </a:solidFill>
-                <a:latin typeface="Segoe UI"/>
-              </a:rPr>
-              <a:t>Taken from FedGT: group testing for detection</a:t>
+            <a:off x="685800" y="1371600"/>
+            <a:ext cx="10881360" cy="3931920"/>
+          </a:xfrm>
+          <a:prstGeom prst="rect">
+            <a:avLst/>
+          </a:prstGeom>
+          <a:noFill/>
+        </p:spPr>
+        <p:txBody>
+          <a:bodyPr wrap="square">
+            <a:spAutoFit/>
+          </a:bodyPr>
+          <a:lstStyle/>
+          <a:p>
+            <a:pPr>
+              <a:spcAft>
+                <a:spcPts val="800"/>
+              </a:spcAft>
+            </a:pPr>
+            <a:r>
+              <a:rPr sz="1500">
+                <a:solidFill>
+                  <a:srgbClr val="2A78D6"/>
+                </a:solidFill>
+                <a:latin typeface="Segoe UI"/>
+              </a:rPr>
+              <a:t>▪  </a:t>
+            </a:r>
+            <a:r>
+              <a:rPr sz="1500" b="0" i="0">
+                <a:solidFill>
+                  <a:srgbClr val="26251F"/>
+                </a:solidFill>
+                <a:latin typeface="Segoe UI"/>
+              </a:rPr>
+              <a:t>We adopt the core idea: identify malicious clients from group-level observations, never from individual updates.</a:t>
+            </a:r>
+          </a:p>
+          <a:p>
+            <a:pPr>
+              <a:spcAft>
+                <a:spcPts val="800"/>
+              </a:spcAft>
+            </a:pPr>
+            <a:r>
+              <a:rPr sz="1500">
+                <a:solidFill>
+                  <a:srgbClr val="2A78D6"/>
+                </a:solidFill>
+                <a:latin typeface="Segoe UI"/>
+              </a:rPr>
+              <a:t>▪  </a:t>
+            </a:r>
+            <a:r>
+              <a:rPr sz="1500" b="0" i="0">
+                <a:solidFill>
+                  <a:srgbClr val="26251F"/>
+                </a:solidFill>
+                <a:latin typeface="Segoe UI"/>
+              </a:rPr>
+              <a:t>The groups are the privacy-preserving cluster sums (the pools); a probe flags contaminated pools.</a:t>
+            </a:r>
+          </a:p>
+          <a:p>
+            <a:pPr>
+              <a:spcAft>
+                <a:spcPts val="800"/>
+              </a:spcAft>
+            </a:pPr>
+            <a:r>
+              <a:rPr sz="1500">
+                <a:solidFill>
+                  <a:srgbClr val="2A78D6"/>
+                </a:solidFill>
+                <a:latin typeface="Segoe UI"/>
+              </a:rPr>
+              <a:t>▪  </a:t>
+            </a:r>
+            <a:r>
+              <a:rPr sz="1500" b="0" i="0">
+                <a:solidFill>
+                  <a:srgbClr val="26251F"/>
+                </a:solidFill>
+                <a:latin typeface="Segoe UI"/>
+              </a:rPr>
+              <a:t>Our change: tests repeat over re-randomized clusters and accumulate across rounds (temporal group testing).</a:t>
             </a:r>
           </a:p>
         </p:txBody>
@@ -3375,92 +3439,33 @@
         </p:nvSpPr>
         <p:spPr>
           <a:xfrm>
-            <a:off x="685800" y="1572768"/>
-            <a:ext cx="10881360" cy="3931920"/>
-          </a:xfrm>
-          <a:prstGeom prst="rect">
-            <a:avLst/>
-          </a:prstGeom>
-          <a:noFill/>
-        </p:spPr>
-        <p:txBody>
-          <a:bodyPr wrap="square">
-            <a:spAutoFit/>
-          </a:bodyPr>
-          <a:lstStyle/>
-          <a:p>
-            <a:pPr>
-              <a:spcAft>
-                <a:spcPts val="800"/>
-              </a:spcAft>
-            </a:pPr>
-            <a:r>
-              <a:rPr sz="1500">
-                <a:solidFill>
-                  <a:srgbClr val="2A78D6"/>
-                </a:solidFill>
-                <a:latin typeface="Segoe UI"/>
-              </a:rPr>
-              <a:t>▪  </a:t>
-            </a:r>
-            <a:r>
-              <a:rPr sz="1500" b="0" i="0">
-                <a:solidFill>
-                  <a:srgbClr val="26251F"/>
-                </a:solidFill>
-                <a:latin typeface="Segoe UI"/>
-              </a:rPr>
-              <a:t>We adopt the core idea: identify malicious clients from group-level observations, never from individual updates.</a:t>
-            </a:r>
-          </a:p>
-          <a:p>
-            <a:pPr>
-              <a:spcAft>
-                <a:spcPts val="800"/>
-              </a:spcAft>
-            </a:pPr>
-            <a:r>
-              <a:rPr sz="1500">
-                <a:solidFill>
-                  <a:srgbClr val="2A78D6"/>
-                </a:solidFill>
-                <a:latin typeface="Segoe UI"/>
-              </a:rPr>
-              <a:t>▪  </a:t>
-            </a:r>
-            <a:r>
-              <a:rPr sz="1500" b="0" i="0">
-                <a:solidFill>
-                  <a:srgbClr val="26251F"/>
-                </a:solidFill>
-                <a:latin typeface="Segoe UI"/>
-              </a:rPr>
-              <a:t>The groups are the privacy-preserving cluster sums (the pools); a probe flags contaminated pools.</a:t>
-            </a:r>
-          </a:p>
-          <a:p>
-            <a:pPr>
-              <a:spcAft>
-                <a:spcPts val="800"/>
-              </a:spcAft>
-            </a:pPr>
-            <a:r>
-              <a:rPr sz="1500">
-                <a:solidFill>
-                  <a:srgbClr val="2A78D6"/>
-                </a:solidFill>
-                <a:latin typeface="Segoe UI"/>
-              </a:rPr>
-              <a:t>▪  </a:t>
-            </a:r>
-            <a:r>
-              <a:rPr sz="1500" b="0" i="0">
-                <a:solidFill>
-                  <a:srgbClr val="26251F"/>
-                </a:solidFill>
-                <a:latin typeface="Segoe UI"/>
-              </a:rPr>
-              <a:t>Our change: tests repeat over re-randomized clusters and accumulate across rounds (temporal group testing).</a:t>
+            <a:off x="685800" y="5943600"/>
+            <a:ext cx="10881360" cy="502920"/>
+          </a:xfrm>
+          <a:prstGeom prst="rect">
+            <a:avLst/>
+          </a:prstGeom>
+          <a:noFill/>
+        </p:spPr>
+        <p:txBody>
+          <a:bodyPr wrap="square">
+            <a:spAutoFit/>
+          </a:bodyPr>
+          <a:lstStyle/>
+          <a:p>
+            <a:pPr>
+              <a:spcAft>
+                <a:spcPts val="100"/>
+              </a:spcAft>
+            </a:pPr>
+            <a:r>
+              <a:rPr sz="800" b="0" i="1">
+                <a:solidFill>
+                  <a:srgbClr val="2A78D6"/>
+                </a:solidFill>
+                <a:latin typeface="Segoe UI"/>
+              </a:rPr>
+              <a:t>[1] M. Xhemrishi, J. Östman, A. Wachter-Zeh, and A. Graell i Amat, "FedGT: Identification of malicious clients in federated learning with secure aggregation," IEEE Trans. Inf. Forensics Security, vol. 20, pp. 2577–2592, 2025.</a:t>
             </a:r>
           </a:p>
         </p:txBody>
@@ -3468,79 +3473,6 @@
       <p:sp>
         <p:nvSpPr>
           <p:cNvPr id="5" name="TextBox 4"/>
-          <p:cNvSpPr txBox="1"/>
-          <p:nvPr/>
-        </p:nvSpPr>
-        <p:spPr>
-          <a:xfrm>
-            <a:off x="685800" y="5870448"/>
-            <a:ext cx="10881360" cy="530352"/>
-          </a:xfrm>
-          <a:prstGeom prst="rect">
-            <a:avLst/>
-          </a:prstGeom>
-          <a:noFill/>
-        </p:spPr>
-        <p:txBody>
-          <a:bodyPr wrap="square">
-            <a:spAutoFit/>
-          </a:bodyPr>
-          <a:lstStyle/>
-          <a:p>
-            <a:pPr>
-              <a:spcAft>
-                <a:spcPts val="100"/>
-              </a:spcAft>
-            </a:pPr>
-            <a:r>
-              <a:rPr sz="800" b="0" i="1">
-                <a:solidFill>
-                  <a:srgbClr val="2A78D6"/>
-                </a:solidFill>
-                <a:latin typeface="Segoe UI"/>
-              </a:rPr>
-              <a:t>[1] M. Xhemrishi, J. Östman, A. Wachter-Zeh, and A. Graell i Amat, "FedGT: Identification of malicious clients in federated learning with secure aggregation," IEEE Trans. Inf. Forensics Security, vol. 20, pp. 2577–2592, 2025.</a:t>
-            </a:r>
-          </a:p>
-        </p:txBody>
-      </p:sp>
-      <p:sp>
-        <p:nvSpPr>
-          <p:cNvPr id="6" name="TextBox 5"/>
-          <p:cNvSpPr txBox="1"/>
-          <p:nvPr/>
-        </p:nvSpPr>
-        <p:spPr>
-          <a:xfrm>
-            <a:off x="685800" y="6446520"/>
-            <a:ext cx="7680960" cy="274320"/>
-          </a:xfrm>
-          <a:prstGeom prst="rect">
-            <a:avLst/>
-          </a:prstGeom>
-          <a:noFill/>
-        </p:spPr>
-        <p:txBody>
-          <a:bodyPr wrap="square">
-            <a:spAutoFit/>
-          </a:bodyPr>
-          <a:lstStyle/>
-          <a:p>
-            <a:r>
-              <a:rPr sz="1050" b="0" i="0">
-                <a:solidFill>
-                  <a:srgbClr val="898781"/>
-                </a:solidFill>
-                <a:latin typeface="Segoe UI"/>
-              </a:rPr>
-              <a:t>CB-SAFE · Suva &amp; Chowdhury · AIUB</a:t>
-            </a:r>
-          </a:p>
-        </p:txBody>
-      </p:sp>
-      <p:sp>
-        <p:nvSpPr>
-          <p:cNvPr id="7" name="TextBox 6"/>
           <p:cNvSpPr txBox="1"/>
           <p:nvPr/>
         </p:nvSpPr>
@@ -3599,28 +3531,28 @@
         </p:nvSpPr>
         <p:spPr>
           <a:xfrm>
-            <a:off x="685800" y="384048"/>
-            <a:ext cx="10881360" cy="320040"/>
-          </a:xfrm>
-          <a:prstGeom prst="rect">
-            <a:avLst/>
-          </a:prstGeom>
-          <a:noFill/>
-        </p:spPr>
-        <p:txBody>
-          <a:bodyPr wrap="square">
-            <a:spAutoFit/>
-          </a:bodyPr>
-          <a:lstStyle/>
-          <a:p>
-            <a:r>
-              <a:rPr sz="1200" b="1" i="0">
-                <a:solidFill>
-                  <a:srgbClr val="2A78D6"/>
-                </a:solidFill>
-                <a:latin typeface="Segoe UI"/>
-              </a:rPr>
-              <a:t>COMPONENT 3 / 3</a:t>
+            <a:off x="685800" y="438912"/>
+            <a:ext cx="10881360" cy="822960"/>
+          </a:xfrm>
+          <a:prstGeom prst="rect">
+            <a:avLst/>
+          </a:prstGeom>
+          <a:noFill/>
+        </p:spPr>
+        <p:txBody>
+          <a:bodyPr wrap="square">
+            <a:spAutoFit/>
+          </a:bodyPr>
+          <a:lstStyle/>
+          <a:p>
+            <a:r>
+              <a:rPr sz="3000" b="1" i="0">
+                <a:solidFill>
+                  <a:srgbClr val="0B0B0B"/>
+                </a:solidFill>
+                <a:latin typeface="Segoe UI"/>
+              </a:rPr>
+              <a:t>Methodology (Ours): Cryptography</a:t>
             </a:r>
           </a:p>
         </p:txBody>
@@ -3633,28 +3565,92 @@
         </p:nvSpPr>
         <p:spPr>
           <a:xfrm>
-            <a:off x="685800" y="713232"/>
-            <a:ext cx="10881360" cy="822960"/>
-          </a:xfrm>
-          <a:prstGeom prst="rect">
-            <a:avLst/>
-          </a:prstGeom>
-          <a:noFill/>
-        </p:spPr>
-        <p:txBody>
-          <a:bodyPr wrap="square">
-            <a:spAutoFit/>
-          </a:bodyPr>
-          <a:lstStyle/>
-          <a:p>
-            <a:r>
-              <a:rPr sz="2700" b="1" i="0">
-                <a:solidFill>
-                  <a:srgbClr val="0B0B0B"/>
-                </a:solidFill>
-                <a:latin typeface="Segoe UI"/>
-              </a:rPr>
-              <a:t>Taken from NIST PQC: a code-based KEM (HQC)</a:t>
+            <a:off x="685800" y="1371600"/>
+            <a:ext cx="10881360" cy="3931920"/>
+          </a:xfrm>
+          <a:prstGeom prst="rect">
+            <a:avLst/>
+          </a:prstGeom>
+          <a:noFill/>
+        </p:spPr>
+        <p:txBody>
+          <a:bodyPr wrap="square">
+            <a:spAutoFit/>
+          </a:bodyPr>
+          <a:lstStyle/>
+          <a:p>
+            <a:pPr>
+              <a:spcAft>
+                <a:spcPts val="800"/>
+              </a:spcAft>
+            </a:pPr>
+            <a:r>
+              <a:rPr sz="1500">
+                <a:solidFill>
+                  <a:srgbClr val="2A78D6"/>
+                </a:solidFill>
+                <a:latin typeface="Segoe UI"/>
+              </a:rPr>
+              <a:t>▪  </a:t>
+            </a:r>
+            <a:r>
+              <a:rPr sz="1500" b="0" i="0">
+                <a:solidFill>
+                  <a:srgbClr val="26251F"/>
+                </a:solidFill>
+                <a:latin typeface="Segoe UI"/>
+              </a:rPr>
+              <a:t>We adopt HQC, the code-based KEM NIST selected in 2025, for post-quantum confidentiality.</a:t>
+            </a:r>
+          </a:p>
+          <a:p>
+            <a:pPr>
+              <a:spcAft>
+                <a:spcPts val="800"/>
+              </a:spcAft>
+            </a:pPr>
+            <a:r>
+              <a:rPr sz="1500">
+                <a:solidFill>
+                  <a:srgbClr val="2A78D6"/>
+                </a:solidFill>
+                <a:latin typeface="Segoe UI"/>
+              </a:rPr>
+              <a:t>▪  </a:t>
+            </a:r>
+            <a:r>
+              <a:rPr sz="1500" b="0" i="0">
+                <a:solidFill>
+                  <a:srgbClr val="26251F"/>
+                </a:solidFill>
+                <a:latin typeface="Segoe UI"/>
+              </a:rPr>
+              <a:t>Its security rests on syndrome decoding of quasi-cyclic codes, not lattices: genuine cryptographic diversity.</a:t>
+            </a:r>
+          </a:p>
+          <a:p>
+            <a:pPr>
+              <a:spcAft>
+                <a:spcPts val="800"/>
+              </a:spcAft>
+            </a:pPr>
+            <a:r>
+              <a:rPr sz="1500">
+                <a:solidFill>
+                  <a:srgbClr val="2A78D6"/>
+                </a:solidFill>
+                <a:latin typeface="Segoe UI"/>
+              </a:rPr>
+              <a:t>▪  </a:t>
+            </a:r>
+            <a:r>
+              <a:rPr sz="1500" b="0" i="0">
+                <a:solidFill>
+                  <a:srgbClr val="26251F"/>
+                </a:solidFill>
+                <a:latin typeface="Segoe UI"/>
+              </a:rPr>
+              <a:t>Our change: HQC sits behind a KEM-agnostic interface, so ML-KEM swaps in with one configuration line.</a:t>
             </a:r>
           </a:p>
         </p:txBody>
@@ -3667,92 +3663,49 @@
         </p:nvSpPr>
         <p:spPr>
           <a:xfrm>
-            <a:off x="685800" y="1572768"/>
-            <a:ext cx="10881360" cy="3931920"/>
-          </a:xfrm>
-          <a:prstGeom prst="rect">
-            <a:avLst/>
-          </a:prstGeom>
-          <a:noFill/>
-        </p:spPr>
-        <p:txBody>
-          <a:bodyPr wrap="square">
-            <a:spAutoFit/>
-          </a:bodyPr>
-          <a:lstStyle/>
-          <a:p>
-            <a:pPr>
-              <a:spcAft>
-                <a:spcPts val="800"/>
-              </a:spcAft>
-            </a:pPr>
-            <a:r>
-              <a:rPr sz="1500">
-                <a:solidFill>
-                  <a:srgbClr val="2A78D6"/>
-                </a:solidFill>
-                <a:latin typeface="Segoe UI"/>
-              </a:rPr>
-              <a:t>▪  </a:t>
-            </a:r>
-            <a:r>
-              <a:rPr sz="1500" b="0" i="0">
-                <a:solidFill>
-                  <a:srgbClr val="26251F"/>
-                </a:solidFill>
-                <a:latin typeface="Segoe UI"/>
-              </a:rPr>
-              <a:t>We adopt HQC, the code-based KEM NIST selected in 2025, for post-quantum confidentiality.</a:t>
-            </a:r>
-          </a:p>
-          <a:p>
-            <a:pPr>
-              <a:spcAft>
-                <a:spcPts val="800"/>
-              </a:spcAft>
-            </a:pPr>
-            <a:r>
-              <a:rPr sz="1500">
-                <a:solidFill>
-                  <a:srgbClr val="2A78D6"/>
-                </a:solidFill>
-                <a:latin typeface="Segoe UI"/>
-              </a:rPr>
-              <a:t>▪  </a:t>
-            </a:r>
-            <a:r>
-              <a:rPr sz="1500" b="0" i="0">
-                <a:solidFill>
-                  <a:srgbClr val="26251F"/>
-                </a:solidFill>
-                <a:latin typeface="Segoe UI"/>
-              </a:rPr>
-              <a:t>Its security rests on syndrome decoding of quasi-cyclic codes, not lattices: genuine cryptographic diversity.</a:t>
-            </a:r>
-          </a:p>
-          <a:p>
-            <a:pPr>
-              <a:spcAft>
-                <a:spcPts val="800"/>
-              </a:spcAft>
-            </a:pPr>
-            <a:r>
-              <a:rPr sz="1500">
-                <a:solidFill>
-                  <a:srgbClr val="2A78D6"/>
-                </a:solidFill>
-                <a:latin typeface="Segoe UI"/>
-              </a:rPr>
-              <a:t>▪  </a:t>
-            </a:r>
-            <a:r>
-              <a:rPr sz="1500" b="0" i="0">
-                <a:solidFill>
-                  <a:srgbClr val="26251F"/>
-                </a:solidFill>
-                <a:latin typeface="Segoe UI"/>
-              </a:rPr>
-              <a:t>Our change: HQC sits behind a KEM-agnostic interface, so ML-KEM swaps in with one configuration line.</a:t>
+            <a:off x="685800" y="5943600"/>
+            <a:ext cx="10881360" cy="502920"/>
+          </a:xfrm>
+          <a:prstGeom prst="rect">
+            <a:avLst/>
+          </a:prstGeom>
+          <a:noFill/>
+        </p:spPr>
+        <p:txBody>
+          <a:bodyPr wrap="square">
+            <a:spAutoFit/>
+          </a:bodyPr>
+          <a:lstStyle/>
+          <a:p>
+            <a:pPr>
+              <a:spcAft>
+                <a:spcPts val="100"/>
+              </a:spcAft>
+            </a:pPr>
+            <a:r>
+              <a:rPr sz="800" b="0" i="1">
+                <a:solidFill>
+                  <a:srgbClr val="2A78D6"/>
+                </a:solidFill>
+                <a:latin typeface="Segoe UI"/>
+              </a:rPr>
+              <a:t>[3] National Institute of Standards and Technology, "Status report on the fourth round of the NIST post-quantum cryptography standardization process," NIST IR 8545, Mar. 2025.</a:t>
+            </a:r>
+          </a:p>
+          <a:p>
+            <a:pPr>
+              <a:spcAft>
+                <a:spcPts val="100"/>
+              </a:spcAft>
+            </a:pPr>
+            <a:r>
+              <a:rPr sz="800" b="0" i="1">
+                <a:solidFill>
+                  <a:srgbClr val="2A78D6"/>
+                </a:solidFill>
+                <a:latin typeface="Segoe UI"/>
+              </a:rPr>
+              <a:t>[9] National Institute of Standards and Technology, "Module-lattice-based key-encapsulation mechanism standard," FIPS 203, Aug. 2024.</a:t>
             </a:r>
           </a:p>
         </p:txBody>
@@ -3760,95 +3713,6 @@
       <p:sp>
         <p:nvSpPr>
           <p:cNvPr id="5" name="TextBox 4"/>
-          <p:cNvSpPr txBox="1"/>
-          <p:nvPr/>
-        </p:nvSpPr>
-        <p:spPr>
-          <a:xfrm>
-            <a:off x="685800" y="5870448"/>
-            <a:ext cx="10881360" cy="530352"/>
-          </a:xfrm>
-          <a:prstGeom prst="rect">
-            <a:avLst/>
-          </a:prstGeom>
-          <a:noFill/>
-        </p:spPr>
-        <p:txBody>
-          <a:bodyPr wrap="square">
-            <a:spAutoFit/>
-          </a:bodyPr>
-          <a:lstStyle/>
-          <a:p>
-            <a:pPr>
-              <a:spcAft>
-                <a:spcPts val="100"/>
-              </a:spcAft>
-            </a:pPr>
-            <a:r>
-              <a:rPr sz="800" b="0" i="1">
-                <a:solidFill>
-                  <a:srgbClr val="2A78D6"/>
-                </a:solidFill>
-                <a:latin typeface="Segoe UI"/>
-              </a:rPr>
-              <a:t>[3] National Institute of Standards and Technology, "Status report on the fourth round of the NIST post-quantum cryptography standardization process," NIST IR 8545, Mar. 2025.</a:t>
-            </a:r>
-          </a:p>
-          <a:p>
-            <a:pPr>
-              <a:spcAft>
-                <a:spcPts val="100"/>
-              </a:spcAft>
-            </a:pPr>
-            <a:r>
-              <a:rPr sz="800" b="0" i="1">
-                <a:solidFill>
-                  <a:srgbClr val="2A78D6"/>
-                </a:solidFill>
-                <a:latin typeface="Segoe UI"/>
-              </a:rPr>
-              <a:t>[9] National Institute of Standards and Technology, "Module-lattice-based key-encapsulation mechanism standard," FIPS 203, Aug. 2024.</a:t>
-            </a:r>
-          </a:p>
-        </p:txBody>
-      </p:sp>
-      <p:sp>
-        <p:nvSpPr>
-          <p:cNvPr id="6" name="TextBox 5"/>
-          <p:cNvSpPr txBox="1"/>
-          <p:nvPr/>
-        </p:nvSpPr>
-        <p:spPr>
-          <a:xfrm>
-            <a:off x="685800" y="6446520"/>
-            <a:ext cx="7680960" cy="274320"/>
-          </a:xfrm>
-          <a:prstGeom prst="rect">
-            <a:avLst/>
-          </a:prstGeom>
-          <a:noFill/>
-        </p:spPr>
-        <p:txBody>
-          <a:bodyPr wrap="square">
-            <a:spAutoFit/>
-          </a:bodyPr>
-          <a:lstStyle/>
-          <a:p>
-            <a:r>
-              <a:rPr sz="1050" b="0" i="0">
-                <a:solidFill>
-                  <a:srgbClr val="898781"/>
-                </a:solidFill>
-                <a:latin typeface="Segoe UI"/>
-              </a:rPr>
-              <a:t>CB-SAFE · Suva &amp; Chowdhury · AIUB</a:t>
-            </a:r>
-          </a:p>
-        </p:txBody>
-      </p:sp>
-      <p:sp>
-        <p:nvSpPr>
-          <p:cNvPr id="7" name="TextBox 6"/>
           <p:cNvSpPr txBox="1"/>
           <p:nvPr/>
         </p:nvSpPr>
@@ -3907,28 +3771,28 @@
         </p:nvSpPr>
         <p:spPr>
           <a:xfrm>
-            <a:off x="685800" y="384048"/>
-            <a:ext cx="10881360" cy="320040"/>
-          </a:xfrm>
-          <a:prstGeom prst="rect">
-            <a:avLst/>
-          </a:prstGeom>
-          <a:noFill/>
-        </p:spPr>
-        <p:txBody>
-          <a:bodyPr wrap="square">
-            <a:spAutoFit/>
-          </a:bodyPr>
-          <a:lstStyle/>
-          <a:p>
-            <a:r>
-              <a:rPr sz="1200" b="1" i="0">
-                <a:solidFill>
-                  <a:srgbClr val="2A78D6"/>
-                </a:solidFill>
-                <a:latin typeface="Segoe UI"/>
-              </a:rPr>
-              <a:t>COMBINATION</a:t>
+            <a:off x="685800" y="438912"/>
+            <a:ext cx="10881360" cy="822960"/>
+          </a:xfrm>
+          <a:prstGeom prst="rect">
+            <a:avLst/>
+          </a:prstGeom>
+          <a:noFill/>
+        </p:spPr>
+        <p:txBody>
+          <a:bodyPr wrap="square">
+            <a:spAutoFit/>
+          </a:bodyPr>
+          <a:lstStyle/>
+          <a:p>
+            <a:r>
+              <a:rPr sz="3000" b="1" i="0">
+                <a:solidFill>
+                  <a:srgbClr val="0B0B0B"/>
+                </a:solidFill>
+                <a:latin typeface="Segoe UI"/>
+              </a:rPr>
+              <a:t>Methodology (Ours): Integration</a:t>
             </a:r>
           </a:p>
         </p:txBody>
@@ -3941,28 +3805,28 @@
         </p:nvSpPr>
         <p:spPr>
           <a:xfrm>
-            <a:off x="685800" y="713232"/>
-            <a:ext cx="10881360" cy="822960"/>
-          </a:xfrm>
-          <a:prstGeom prst="rect">
-            <a:avLst/>
-          </a:prstGeom>
-          <a:noFill/>
-        </p:spPr>
-        <p:txBody>
-          <a:bodyPr wrap="square">
-            <a:spAutoFit/>
-          </a:bodyPr>
-          <a:lstStyle/>
-          <a:p>
-            <a:r>
-              <a:rPr sz="2700" b="1" i="0">
-                <a:solidFill>
-                  <a:srgbClr val="0B0B0B"/>
-                </a:solidFill>
-                <a:latin typeface="Segoe UI"/>
-              </a:rPr>
-              <a:t>How the three ideas fit together</a:t>
+            <a:off x="685800" y="1371600"/>
+            <a:ext cx="10881360" cy="457200"/>
+          </a:xfrm>
+          <a:prstGeom prst="rect">
+            <a:avLst/>
+          </a:prstGeom>
+          <a:noFill/>
+        </p:spPr>
+        <p:txBody>
+          <a:bodyPr wrap="square">
+            <a:spAutoFit/>
+          </a:bodyPr>
+          <a:lstStyle/>
+          <a:p>
+            <a:r>
+              <a:rPr sz="1400" b="0" i="1">
+                <a:solidFill>
+                  <a:srgbClr val="26251F"/>
+                </a:solidFill>
+                <a:latin typeface="Segoe UI"/>
+              </a:rPr>
+              <a:t>Masking + group testing + a code-based KEM become one coherent framework.</a:t>
             </a:r>
           </a:p>
         </p:txBody>
@@ -3975,28 +3839,117 @@
         </p:nvSpPr>
         <p:spPr>
           <a:xfrm>
-            <a:off x="685800" y="1572768"/>
-            <a:ext cx="10881360" cy="457200"/>
-          </a:xfrm>
-          <a:prstGeom prst="rect">
-            <a:avLst/>
-          </a:prstGeom>
-          <a:noFill/>
-        </p:spPr>
-        <p:txBody>
-          <a:bodyPr wrap="square">
-            <a:spAutoFit/>
-          </a:bodyPr>
-          <a:lstStyle/>
-          <a:p>
-            <a:r>
-              <a:rPr sz="1400" b="0" i="1">
-                <a:solidFill>
-                  <a:srgbClr val="26251F"/>
-                </a:solidFill>
-                <a:latin typeface="Segoe UI"/>
-              </a:rPr>
-              <a:t>Masking + group testing + a code-based KEM become one coherent framework.</a:t>
+            <a:off x="685800" y="1828800"/>
+            <a:ext cx="10881360" cy="3931920"/>
+          </a:xfrm>
+          <a:prstGeom prst="rect">
+            <a:avLst/>
+          </a:prstGeom>
+          <a:noFill/>
+        </p:spPr>
+        <p:txBody>
+          <a:bodyPr wrap="square">
+            <a:spAutoFit/>
+          </a:bodyPr>
+          <a:lstStyle/>
+          <a:p>
+            <a:pPr>
+              <a:spcAft>
+                <a:spcPts val="800"/>
+              </a:spcAft>
+            </a:pPr>
+            <a:r>
+              <a:rPr sz="1500">
+                <a:solidFill>
+                  <a:srgbClr val="2A78D6"/>
+                </a:solidFill>
+                <a:latin typeface="Segoe UI"/>
+              </a:rPr>
+              <a:t>▪  </a:t>
+            </a:r>
+            <a:r>
+              <a:rPr sz="1500" b="0" i="0">
+                <a:solidFill>
+                  <a:srgbClr val="26251F"/>
+                </a:solidFill>
+                <a:latin typeface="Segoe UI"/>
+              </a:rPr>
+              <a:t>HQC-seeded masking [2], [3] hides updates inside clusters, so the server sees only cluster sums.</a:t>
+            </a:r>
+          </a:p>
+          <a:p>
+            <a:pPr>
+              <a:spcAft>
+                <a:spcPts val="800"/>
+              </a:spcAft>
+            </a:pPr>
+            <a:r>
+              <a:rPr sz="1500">
+                <a:solidFill>
+                  <a:srgbClr val="2A78D6"/>
+                </a:solidFill>
+                <a:latin typeface="Segoe UI"/>
+              </a:rPr>
+              <a:t>▪  </a:t>
+            </a:r>
+            <a:r>
+              <a:rPr sz="1500" b="0" i="0">
+                <a:solidFill>
+                  <a:srgbClr val="26251F"/>
+                </a:solidFill>
+                <a:latin typeface="Segoe UI"/>
+              </a:rPr>
+              <a:t>Group testing [1] then runs across those cluster sums, over re-randomized rounds, to name the attackers.</a:t>
+            </a:r>
+          </a:p>
+          <a:p>
+            <a:pPr>
+              <a:spcAft>
+                <a:spcPts val="800"/>
+              </a:spcAft>
+            </a:pPr>
+            <a:r>
+              <a:rPr sz="1500">
+                <a:solidFill>
+                  <a:srgbClr val="2A78D6"/>
+                </a:solidFill>
+                <a:latin typeface="Segoe UI"/>
+              </a:rPr>
+              <a:t>▪  </a:t>
+            </a:r>
+            <a:r>
+              <a:rPr sz="1500" b="0" i="0">
+                <a:solidFill>
+                  <a:srgbClr val="26251F"/>
+                </a:solidFill>
+                <a:latin typeface="Segoe UI"/>
+              </a:rPr>
+              <a:t>Net design: privacy below the cluster boundary, robustness above it, code-based crypto throughout.</a:t>
+            </a:r>
+          </a:p>
+          <a:p>
+            <a:pPr>
+              <a:spcAft>
+                <a:spcPts val="800"/>
+              </a:spcAft>
+            </a:pPr>
+            <a:r>
+              <a:rPr sz="1500">
+                <a:solidFill>
+                  <a:srgbClr val="2A78D6"/>
+                </a:solidFill>
+                <a:latin typeface="Segoe UI"/>
+              </a:rPr>
+              <a:t>▪  </a:t>
+            </a:r>
+            <a:r>
+              <a:rPr sz="1500" b="0" i="0">
+                <a:solidFill>
+                  <a:srgbClr val="26251F"/>
+                </a:solidFill>
+                <a:latin typeface="Segoe UI"/>
+              </a:rPr>
+              <a:t>On top we add our own pieces: the laundering theorem and a server root-loss probe.</a:t>
             </a:r>
           </a:p>
         </p:txBody>
@@ -4009,117 +3962,49 @@
         </p:nvSpPr>
         <p:spPr>
           <a:xfrm>
-            <a:off x="685800" y="2048256"/>
-            <a:ext cx="10881360" cy="3931920"/>
-          </a:xfrm>
-          <a:prstGeom prst="rect">
-            <a:avLst/>
-          </a:prstGeom>
-          <a:noFill/>
-        </p:spPr>
-        <p:txBody>
-          <a:bodyPr wrap="square">
-            <a:spAutoFit/>
-          </a:bodyPr>
-          <a:lstStyle/>
-          <a:p>
-            <a:pPr>
-              <a:spcAft>
-                <a:spcPts val="800"/>
-              </a:spcAft>
-            </a:pPr>
-            <a:r>
-              <a:rPr sz="1500">
-                <a:solidFill>
-                  <a:srgbClr val="2A78D6"/>
-                </a:solidFill>
-                <a:latin typeface="Segoe UI"/>
-              </a:rPr>
-              <a:t>▪  </a:t>
-            </a:r>
-            <a:r>
-              <a:rPr sz="1500" b="0" i="0">
-                <a:solidFill>
-                  <a:srgbClr val="26251F"/>
-                </a:solidFill>
-                <a:latin typeface="Segoe UI"/>
-              </a:rPr>
-              <a:t>HQC-seeded masking [2], [3] hides updates inside clusters, so the server sees only cluster sums.</a:t>
-            </a:r>
-          </a:p>
-          <a:p>
-            <a:pPr>
-              <a:spcAft>
-                <a:spcPts val="800"/>
-              </a:spcAft>
-            </a:pPr>
-            <a:r>
-              <a:rPr sz="1500">
-                <a:solidFill>
-                  <a:srgbClr val="2A78D6"/>
-                </a:solidFill>
-                <a:latin typeface="Segoe UI"/>
-              </a:rPr>
-              <a:t>▪  </a:t>
-            </a:r>
-            <a:r>
-              <a:rPr sz="1500" b="0" i="0">
-                <a:solidFill>
-                  <a:srgbClr val="26251F"/>
-                </a:solidFill>
-                <a:latin typeface="Segoe UI"/>
-              </a:rPr>
-              <a:t>Group testing [1] then runs across those cluster sums, over re-randomized rounds, to name the attackers.</a:t>
-            </a:r>
-          </a:p>
-          <a:p>
-            <a:pPr>
-              <a:spcAft>
-                <a:spcPts val="800"/>
-              </a:spcAft>
-            </a:pPr>
-            <a:r>
-              <a:rPr sz="1500">
-                <a:solidFill>
-                  <a:srgbClr val="2A78D6"/>
-                </a:solidFill>
-                <a:latin typeface="Segoe UI"/>
-              </a:rPr>
-              <a:t>▪  </a:t>
-            </a:r>
-            <a:r>
-              <a:rPr sz="1500" b="0" i="0">
-                <a:solidFill>
-                  <a:srgbClr val="26251F"/>
-                </a:solidFill>
-                <a:latin typeface="Segoe UI"/>
-              </a:rPr>
-              <a:t>Net design: privacy below the cluster boundary, robustness above it, code-based crypto throughout.</a:t>
-            </a:r>
-          </a:p>
-          <a:p>
-            <a:pPr>
-              <a:spcAft>
-                <a:spcPts val="800"/>
-              </a:spcAft>
-            </a:pPr>
-            <a:r>
-              <a:rPr sz="1500">
-                <a:solidFill>
-                  <a:srgbClr val="2A78D6"/>
-                </a:solidFill>
-                <a:latin typeface="Segoe UI"/>
-              </a:rPr>
-              <a:t>▪  </a:t>
-            </a:r>
-            <a:r>
-              <a:rPr sz="1500" b="0" i="0">
-                <a:solidFill>
-                  <a:srgbClr val="26251F"/>
-                </a:solidFill>
-                <a:latin typeface="Segoe UI"/>
-              </a:rPr>
-              <a:t>On top we add our own pieces: the laundering theorem and a server root-loss probe.</a:t>
+            <a:off x="685800" y="5943600"/>
+            <a:ext cx="10881360" cy="502920"/>
+          </a:xfrm>
+          <a:prstGeom prst="rect">
+            <a:avLst/>
+          </a:prstGeom>
+          <a:noFill/>
+        </p:spPr>
+        <p:txBody>
+          <a:bodyPr wrap="square">
+            <a:spAutoFit/>
+          </a:bodyPr>
+          <a:lstStyle/>
+          <a:p>
+            <a:pPr>
+              <a:spcAft>
+                <a:spcPts val="100"/>
+              </a:spcAft>
+            </a:pPr>
+            <a:r>
+              <a:rPr sz="800" b="0" i="1">
+                <a:solidFill>
+                  <a:srgbClr val="2A78D6"/>
+                </a:solidFill>
+                <a:latin typeface="Segoe UI"/>
+              </a:rPr>
+              <a:t>[1] M. Xhemrishi, J. Östman, A. Wachter-Zeh, and A. Graell i Amat, "FedGT: Identification of malicious clients in federated learning with secure aggregation," IEEE Trans. Inf. Forensics Security, vol. 20, pp. 2577–2592, 2025.</a:t>
+            </a:r>
+          </a:p>
+          <a:p>
+            <a:pPr>
+              <a:spcAft>
+                <a:spcPts val="100"/>
+              </a:spcAft>
+            </a:pPr>
+            <a:r>
+              <a:rPr sz="800" b="0" i="1">
+                <a:solidFill>
+                  <a:srgbClr val="2A78D6"/>
+                </a:solidFill>
+                <a:latin typeface="Segoe UI"/>
+              </a:rPr>
+              <a:t>[2] K. Bonawitz, V. Ivanov, B. Kreuter, A. Marcedone, H. B. McMahan, S. Patel, D. Ramage, A. Segal, and K. Seth, "Practical secure aggregation for privacy-preserving machine learning," in Proc. ACM CCS, 2017, pp. 1175–1191.</a:t>
             </a:r>
           </a:p>
         </p:txBody>
@@ -4127,95 +4012,6 @@
       <p:sp>
         <p:nvSpPr>
           <p:cNvPr id="6" name="TextBox 5"/>
-          <p:cNvSpPr txBox="1"/>
-          <p:nvPr/>
-        </p:nvSpPr>
-        <p:spPr>
-          <a:xfrm>
-            <a:off x="685800" y="5870448"/>
-            <a:ext cx="10881360" cy="530352"/>
-          </a:xfrm>
-          <a:prstGeom prst="rect">
-            <a:avLst/>
-          </a:prstGeom>
-          <a:noFill/>
-        </p:spPr>
-        <p:txBody>
-          <a:bodyPr wrap="square">
-            <a:spAutoFit/>
-          </a:bodyPr>
-          <a:lstStyle/>
-          <a:p>
-            <a:pPr>
-              <a:spcAft>
-                <a:spcPts val="100"/>
-              </a:spcAft>
-            </a:pPr>
-            <a:r>
-              <a:rPr sz="800" b="0" i="1">
-                <a:solidFill>
-                  <a:srgbClr val="2A78D6"/>
-                </a:solidFill>
-                <a:latin typeface="Segoe UI"/>
-              </a:rPr>
-              <a:t>[1] M. Xhemrishi, J. Östman, A. Wachter-Zeh, and A. Graell i Amat, "FedGT: Identification of malicious clients in federated learning with secure aggregation," IEEE Trans. Inf. Forensics Security, vol. 20, pp. 2577–2592, 2025.</a:t>
-            </a:r>
-          </a:p>
-          <a:p>
-            <a:pPr>
-              <a:spcAft>
-                <a:spcPts val="100"/>
-              </a:spcAft>
-            </a:pPr>
-            <a:r>
-              <a:rPr sz="800" b="0" i="1">
-                <a:solidFill>
-                  <a:srgbClr val="2A78D6"/>
-                </a:solidFill>
-                <a:latin typeface="Segoe UI"/>
-              </a:rPr>
-              <a:t>[2] K. Bonawitz, V. Ivanov, B. Kreuter, A. Marcedone, H. B. McMahan, S. Patel, D. Ramage, A. Segal, and K. Seth, "Practical secure aggregation for privacy-preserving machine learning," in Proc. ACM CCS, 2017, pp. 1175–1191.</a:t>
-            </a:r>
-          </a:p>
-        </p:txBody>
-      </p:sp>
-      <p:sp>
-        <p:nvSpPr>
-          <p:cNvPr id="7" name="TextBox 6"/>
-          <p:cNvSpPr txBox="1"/>
-          <p:nvPr/>
-        </p:nvSpPr>
-        <p:spPr>
-          <a:xfrm>
-            <a:off x="685800" y="6446520"/>
-            <a:ext cx="7680960" cy="274320"/>
-          </a:xfrm>
-          <a:prstGeom prst="rect">
-            <a:avLst/>
-          </a:prstGeom>
-          <a:noFill/>
-        </p:spPr>
-        <p:txBody>
-          <a:bodyPr wrap="square">
-            <a:spAutoFit/>
-          </a:bodyPr>
-          <a:lstStyle/>
-          <a:p>
-            <a:r>
-              <a:rPr sz="1050" b="0" i="0">
-                <a:solidFill>
-                  <a:srgbClr val="898781"/>
-                </a:solidFill>
-                <a:latin typeface="Segoe UI"/>
-              </a:rPr>
-              <a:t>CB-SAFE · Suva &amp; Chowdhury · AIUB</a:t>
-            </a:r>
-          </a:p>
-        </p:txBody>
-      </p:sp>
-      <p:sp>
-        <p:nvSpPr>
-          <p:cNvPr id="8" name="TextBox 7"/>
           <p:cNvSpPr txBox="1"/>
           <p:nvPr/>
         </p:nvSpPr>
@@ -4274,28 +4070,28 @@
         </p:nvSpPr>
         <p:spPr>
           <a:xfrm>
-            <a:off x="685800" y="384048"/>
-            <a:ext cx="10881360" cy="320040"/>
-          </a:xfrm>
-          <a:prstGeom prst="rect">
-            <a:avLst/>
-          </a:prstGeom>
-          <a:noFill/>
-        </p:spPr>
-        <p:txBody>
-          <a:bodyPr wrap="square">
-            <a:spAutoFit/>
-          </a:bodyPr>
-          <a:lstStyle/>
-          <a:p>
-            <a:r>
-              <a:rPr sz="1200" b="1" i="0">
-                <a:solidFill>
-                  <a:srgbClr val="2A78D6"/>
-                </a:solidFill>
-                <a:latin typeface="Segoe UI"/>
-              </a:rPr>
-              <a:t>COMPARISON</a:t>
+            <a:off x="685800" y="438912"/>
+            <a:ext cx="10881360" cy="822960"/>
+          </a:xfrm>
+          <a:prstGeom prst="rect">
+            <a:avLst/>
+          </a:prstGeom>
+          <a:noFill/>
+        </p:spPr>
+        <p:txBody>
+          <a:bodyPr wrap="square">
+            <a:spAutoFit/>
+          </a:bodyPr>
+          <a:lstStyle/>
+          <a:p>
+            <a:r>
+              <a:rPr sz="3000" b="1" i="0">
+                <a:solidFill>
+                  <a:srgbClr val="0B0B0B"/>
+                </a:solidFill>
+                <a:latin typeface="Segoe UI"/>
+              </a:rPr>
+              <a:t>Comparison</a:t>
             </a:r>
           </a:p>
         </p:txBody>
@@ -4308,53 +4104,62 @@
         </p:nvSpPr>
         <p:spPr>
           <a:xfrm>
-            <a:off x="685800" y="713232"/>
-            <a:ext cx="10881360" cy="822960"/>
-          </a:xfrm>
-          <a:prstGeom prst="rect">
-            <a:avLst/>
-          </a:prstGeom>
-          <a:noFill/>
-        </p:spPr>
-        <p:txBody>
-          <a:bodyPr wrap="square">
-            <a:spAutoFit/>
-          </a:bodyPr>
-          <a:lstStyle/>
-          <a:p>
-            <a:r>
-              <a:rPr sz="2700" b="1" i="0">
+            <a:off x="685800" y="1371600"/>
+            <a:ext cx="6400800" cy="3931920"/>
+          </a:xfrm>
+          <a:prstGeom prst="rect">
+            <a:avLst/>
+          </a:prstGeom>
+          <a:noFill/>
+        </p:spPr>
+        <p:txBody>
+          <a:bodyPr wrap="square">
+            <a:spAutoFit/>
+          </a:bodyPr>
+          <a:lstStyle/>
+          <a:p>
+            <a:pPr>
+              <a:spcAft>
+                <a:spcPts val="800"/>
+              </a:spcAft>
+            </a:pPr>
+            <a:r>
+              <a:rPr sz="1500">
+                <a:solidFill>
+                  <a:srgbClr val="2A78D6"/>
+                </a:solidFill>
+                <a:latin typeface="Segoe UI"/>
+              </a:rPr>
+              <a:t>▪  </a:t>
+            </a:r>
+            <a:r>
+              <a:rPr sz="1500" b="0" i="0">
+                <a:solidFill>
+                  <a:srgbClr val="26251F"/>
+                </a:solidFill>
+                <a:latin typeface="Segoe UI"/>
+              </a:rPr>
+              <a:t>Crypto: FedGT is crypto-agnostic → </a:t>
+            </a:r>
+            <a:r>
+              <a:rPr sz="1500" b="1" i="0">
                 <a:solidFill>
                   <a:srgbClr val="0B0B0B"/>
                 </a:solidFill>
                 <a:latin typeface="Segoe UI"/>
               </a:rPr>
-              <a:t>Previous (FedGT) vs proposed (CB-SAFE)</a:t>
-            </a:r>
-          </a:p>
-        </p:txBody>
-      </p:sp>
-      <p:sp>
-        <p:nvSpPr>
-          <p:cNvPr id="4" name="TextBox 3"/>
-          <p:cNvSpPr txBox="1"/>
-          <p:nvPr/>
-        </p:nvSpPr>
-        <p:spPr>
-          <a:xfrm>
-            <a:off x="685800" y="1572768"/>
-            <a:ext cx="6400800" cy="3931920"/>
-          </a:xfrm>
-          <a:prstGeom prst="rect">
-            <a:avLst/>
-          </a:prstGeom>
-          <a:noFill/>
-        </p:spPr>
-        <p:txBody>
-          <a:bodyPr wrap="square">
-            <a:spAutoFit/>
-          </a:bodyPr>
-          <a:lstStyle/>
+              <a:t>CB-SAFE is code-based post-quantum</a:t>
+            </a:r>
+            <a:r>
+              <a:rPr sz="1500" b="0" i="0">
+                <a:solidFill>
+                  <a:srgbClr val="26251F"/>
+                </a:solidFill>
+                <a:latin typeface="Segoe UI"/>
+              </a:rPr>
+              <a:t>.</a:t>
+            </a:r>
+          </a:p>
           <a:p>
             <a:pPr>
               <a:spcAft>
@@ -4377,7 +4182,7 @@
                 </a:solidFill>
                 <a:latin typeface="Segoe UI"/>
               </a:rPr>
-              <a:t>Crypto: FedGT is crypto-agnostic → </a:t>
+              <a:t>Detection: FedGT uses single-round COMP + a validation set → </a:t>
             </a:r>
             <a:r>
               <a:rPr sz="1500" b="1" i="0">
@@ -4386,7 +4191,7 @@
                 </a:solidFill>
                 <a:latin typeface="Segoe UI"/>
               </a:rPr>
-              <a:t>CB-SAFE is code-based post-quantum</a:t>
+              <a:t>CB-SAFE uses temporal accumulation + a root-loss probe</a:t>
             </a:r>
             <a:r>
               <a:rPr sz="1500" b="0" i="0">
@@ -4396,49 +4201,6 @@
                 <a:latin typeface="Segoe UI"/>
               </a:rPr>
               <a:t>.</a:t>
-            </a:r>
-          </a:p>
-          <a:p>
-            <a:pPr>
-              <a:spcAft>
-                <a:spcPts val="800"/>
-              </a:spcAft>
-            </a:pPr>
-            <a:r>
-              <a:rPr sz="1500">
-                <a:solidFill>
-                  <a:srgbClr val="2A78D6"/>
-                </a:solidFill>
-                <a:latin typeface="Segoe UI"/>
-              </a:rPr>
-              <a:t>▪  </a:t>
-            </a:r>
-            <a:r>
-              <a:rPr sz="1500" b="0" i="0">
-                <a:solidFill>
-                  <a:srgbClr val="26251F"/>
-                </a:solidFill>
-                <a:latin typeface="Segoe UI"/>
-              </a:rPr>
-              <a:t>Detection: FedGT uses single-round COMP + a validation set → </a:t>
-            </a:r>
-            <a:r>
-              <a:rPr sz="1500" b="1" i="0">
-                <a:solidFill>
-                  <a:srgbClr val="0B0B0B"/>
-                </a:solidFill>
-                <a:latin typeface="Segoe UI"/>
-              </a:rPr>
-              <a:t>CB-SAFE uses temporal accumulation + a root-loss probe</a:t>
-            </a:r>
-            <a:r>
-              <a:rPr sz="1500" b="0" i="0">
-                <a:solidFill>
-                  <a:srgbClr val="26251F"/>
-                </a:solidFill>
-                <a:latin typeface="Segoe UI"/>
-              </a:rPr>
-              <a:t> (plus a trust-free variant).</a:t>
             </a:r>
           </a:p>
           <a:p>
@@ -4531,7 +4293,7 @@
       </p:sp>
       <p:pic>
         <p:nvPicPr>
-          <p:cNvPr id="5" name="Picture 4" descr="fig_signflip_acc_slide.png"/>
+          <p:cNvPr id="4" name="Picture 3" descr="fig_signflip_acc_slide.png"/>
           <p:cNvPicPr>
             <a:picLocks noChangeAspect="1"/>
           </p:cNvPicPr>
@@ -4545,7 +4307,7 @@
         </p:blipFill>
         <p:spPr>
           <a:xfrm>
-            <a:off x="7315200" y="1709928"/>
+            <a:off x="7315200" y="1463040"/>
             <a:ext cx="4480560" cy="3669013"/>
           </a:xfrm>
           <a:prstGeom prst="rect">
@@ -4555,80 +4317,46 @@
       </p:pic>
       <p:sp>
         <p:nvSpPr>
+          <p:cNvPr id="5" name="TextBox 4"/>
+          <p:cNvSpPr txBox="1"/>
+          <p:nvPr/>
+        </p:nvSpPr>
+        <p:spPr>
+          <a:xfrm>
+            <a:off x="685800" y="5943600"/>
+            <a:ext cx="10881360" cy="502920"/>
+          </a:xfrm>
+          <a:prstGeom prst="rect">
+            <a:avLst/>
+          </a:prstGeom>
+          <a:noFill/>
+        </p:spPr>
+        <p:txBody>
+          <a:bodyPr wrap="square">
+            <a:spAutoFit/>
+          </a:bodyPr>
+          <a:lstStyle/>
+          <a:p>
+            <a:pPr>
+              <a:spcAft>
+                <a:spcPts val="100"/>
+              </a:spcAft>
+            </a:pPr>
+            <a:r>
+              <a:rPr sz="800" b="0" i="1">
+                <a:solidFill>
+                  <a:srgbClr val="2A78D6"/>
+                </a:solidFill>
+                <a:latin typeface="Segoe UI"/>
+              </a:rPr>
+              <a:t>[1] M. Xhemrishi, J. Östman, A. Wachter-Zeh, and A. Graell i Amat, "FedGT: Identification of malicious clients in federated learning with secure aggregation," IEEE Trans. Inf. Forensics Security, vol. 20, pp. 2577–2592, 2025.</a:t>
+            </a:r>
+          </a:p>
+        </p:txBody>
+      </p:sp>
+      <p:sp>
+        <p:nvSpPr>
           <p:cNvPr id="6" name="TextBox 5"/>
-          <p:cNvSpPr txBox="1"/>
-          <p:nvPr/>
-        </p:nvSpPr>
-        <p:spPr>
-          <a:xfrm>
-            <a:off x="685800" y="5870448"/>
-            <a:ext cx="10881360" cy="530352"/>
-          </a:xfrm>
-          <a:prstGeom prst="rect">
-            <a:avLst/>
-          </a:prstGeom>
-          <a:noFill/>
-        </p:spPr>
-        <p:txBody>
-          <a:bodyPr wrap="square">
-            <a:spAutoFit/>
-          </a:bodyPr>
-          <a:lstStyle/>
-          <a:p>
-            <a:pPr>
-              <a:spcAft>
-                <a:spcPts val="100"/>
-              </a:spcAft>
-            </a:pPr>
-            <a:r>
-              <a:rPr sz="800" b="0" i="1">
-                <a:solidFill>
-                  <a:srgbClr val="2A78D6"/>
-                </a:solidFill>
-                <a:latin typeface="Segoe UI"/>
-              </a:rPr>
-              <a:t>[1] M. Xhemrishi, J. Östman, A. Wachter-Zeh, and A. Graell i Amat, "FedGT: Identification of malicious clients in federated learning with secure aggregation," IEEE Trans. Inf. Forensics Security, vol. 20, pp. 2577–2592, 2025.</a:t>
-            </a:r>
-          </a:p>
-        </p:txBody>
-      </p:sp>
-      <p:sp>
-        <p:nvSpPr>
-          <p:cNvPr id="7" name="TextBox 6"/>
-          <p:cNvSpPr txBox="1"/>
-          <p:nvPr/>
-        </p:nvSpPr>
-        <p:spPr>
-          <a:xfrm>
-            <a:off x="685800" y="6446520"/>
-            <a:ext cx="7680960" cy="274320"/>
-          </a:xfrm>
-          <a:prstGeom prst="rect">
-            <a:avLst/>
-          </a:prstGeom>
-          <a:noFill/>
-        </p:spPr>
-        <p:txBody>
-          <a:bodyPr wrap="square">
-            <a:spAutoFit/>
-          </a:bodyPr>
-          <a:lstStyle/>
-          <a:p>
-            <a:r>
-              <a:rPr sz="1050" b="0" i="0">
-                <a:solidFill>
-                  <a:srgbClr val="898781"/>
-                </a:solidFill>
-                <a:latin typeface="Segoe UI"/>
-              </a:rPr>
-              <a:t>CB-SAFE · Suva &amp; Chowdhury · AIUB</a:t>
-            </a:r>
-          </a:p>
-        </p:txBody>
-      </p:sp>
-      <p:sp>
-        <p:nvSpPr>
-          <p:cNvPr id="8" name="TextBox 7"/>
           <p:cNvSpPr txBox="1"/>
           <p:nvPr/>
         </p:nvSpPr>
@@ -4687,28 +4415,28 @@
         </p:nvSpPr>
         <p:spPr>
           <a:xfrm>
-            <a:off x="685800" y="384048"/>
-            <a:ext cx="10881360" cy="320040"/>
-          </a:xfrm>
-          <a:prstGeom prst="rect">
-            <a:avLst/>
-          </a:prstGeom>
-          <a:noFill/>
-        </p:spPr>
-        <p:txBody>
-          <a:bodyPr wrap="square">
-            <a:spAutoFit/>
-          </a:bodyPr>
-          <a:lstStyle/>
-          <a:p>
-            <a:r>
-              <a:rPr sz="1200" b="1" i="0">
-                <a:solidFill>
-                  <a:srgbClr val="2A78D6"/>
-                </a:solidFill>
-                <a:latin typeface="Segoe UI"/>
-              </a:rPr>
-              <a:t>WHAT IS NEW</a:t>
+            <a:off x="685800" y="438912"/>
+            <a:ext cx="10881360" cy="822960"/>
+          </a:xfrm>
+          <a:prstGeom prst="rect">
+            <a:avLst/>
+          </a:prstGeom>
+          <a:noFill/>
+        </p:spPr>
+        <p:txBody>
+          <a:bodyPr wrap="square">
+            <a:spAutoFit/>
+          </a:bodyPr>
+          <a:lstStyle/>
+          <a:p>
+            <a:r>
+              <a:rPr sz="3000" b="1" i="0">
+                <a:solidFill>
+                  <a:srgbClr val="0B0B0B"/>
+                </a:solidFill>
+                <a:latin typeface="Segoe UI"/>
+              </a:rPr>
+              <a:t>Contributions</a:t>
             </a:r>
           </a:p>
         </p:txBody>
@@ -4721,53 +4449,53 @@
         </p:nvSpPr>
         <p:spPr>
           <a:xfrm>
-            <a:off x="685800" y="713232"/>
-            <a:ext cx="10881360" cy="822960"/>
-          </a:xfrm>
-          <a:prstGeom prst="rect">
-            <a:avLst/>
-          </a:prstGeom>
-          <a:noFill/>
-        </p:spPr>
-        <p:txBody>
-          <a:bodyPr wrap="square">
-            <a:spAutoFit/>
-          </a:bodyPr>
-          <a:lstStyle/>
-          <a:p>
-            <a:r>
-              <a:rPr sz="2700" b="1" i="0">
+            <a:off x="685800" y="1371600"/>
+            <a:ext cx="6400800" cy="3931920"/>
+          </a:xfrm>
+          <a:prstGeom prst="rect">
+            <a:avLst/>
+          </a:prstGeom>
+          <a:noFill/>
+        </p:spPr>
+        <p:txBody>
+          <a:bodyPr wrap="square">
+            <a:spAutoFit/>
+          </a:bodyPr>
+          <a:lstStyle/>
+          <a:p>
+            <a:pPr>
+              <a:spcAft>
+                <a:spcPts val="800"/>
+              </a:spcAft>
+            </a:pPr>
+            <a:r>
+              <a:rPr sz="1500">
+                <a:solidFill>
+                  <a:srgbClr val="2A78D6"/>
+                </a:solidFill>
+                <a:latin typeface="Segoe UI"/>
+              </a:rPr>
+              <a:t>▪  </a:t>
+            </a:r>
+            <a:r>
+              <a:rPr sz="1500" b="1" i="0">
                 <a:solidFill>
                   <a:srgbClr val="0B0B0B"/>
                 </a:solidFill>
                 <a:latin typeface="Segoe UI"/>
               </a:rPr>
-              <a:t>Our genuinely new contributions</a:t>
-            </a:r>
-          </a:p>
-        </p:txBody>
-      </p:sp>
-      <p:sp>
-        <p:nvSpPr>
-          <p:cNvPr id="4" name="TextBox 3"/>
-          <p:cNvSpPr txBox="1"/>
-          <p:nvPr/>
-        </p:nvSpPr>
-        <p:spPr>
-          <a:xfrm>
-            <a:off x="685800" y="1572768"/>
-            <a:ext cx="6400800" cy="3931920"/>
-          </a:xfrm>
-          <a:prstGeom prst="rect">
-            <a:avLst/>
-          </a:prstGeom>
-          <a:noFill/>
-        </p:spPr>
-        <p:txBody>
-          <a:bodyPr wrap="square">
-            <a:spAutoFit/>
-          </a:bodyPr>
-          <a:lstStyle/>
+              <a:t>First code-based post-quantum secure aggregation</a:t>
+            </a:r>
+            <a:r>
+              <a:rPr sz="1500" b="0" i="0">
+                <a:solidFill>
+                  <a:srgbClr val="26251F"/>
+                </a:solidFill>
+                <a:latin typeface="Segoe UI"/>
+              </a:rPr>
+              <a:t> for FL: cryptographic diversity beyond lattices.</a:t>
+            </a:r>
+          </a:p>
           <a:p>
             <a:pPr>
               <a:spcAft>
@@ -4784,13 +4512,22 @@
               <a:t>▪  </a:t>
             </a:r>
             <a:r>
+              <a:rPr sz="1500" b="0" i="0">
+                <a:solidFill>
+                  <a:srgbClr val="26251F"/>
+                </a:solidFill>
+                <a:latin typeface="Segoe UI"/>
+              </a:rPr>
+              <a:t>The </a:t>
+            </a:r>
+            <a:r>
               <a:rPr sz="1500" b="1" i="0">
                 <a:solidFill>
                   <a:srgbClr val="0B0B0B"/>
                 </a:solidFill>
                 <a:latin typeface="Segoe UI"/>
               </a:rPr>
-              <a:t>First code-based post-quantum secure aggregation</a:t>
+              <a:t>laundering theorem</a:t>
             </a:r>
             <a:r>
               <a:rPr sz="1500" b="0" i="0">
@@ -4799,7 +4536,7 @@
                 </a:solidFill>
                 <a:latin typeface="Segoe UI"/>
               </a:rPr>
-              <a:t> for FL: cryptographic diversity beyond lattices.</a:t>
+              <a:t>: at γ*=2c/m−1 a poisoned cluster mean is magnitude-invisible, explaining why robust rules fail.</a:t>
             </a:r>
           </a:p>
           <a:p>
@@ -4818,65 +4555,22 @@
               <a:t>▪  </a:t>
             </a:r>
             <a:r>
+              <a:rPr sz="1500" b="1" i="0">
+                <a:solidFill>
+                  <a:srgbClr val="0B0B0B"/>
+                </a:solidFill>
+                <a:latin typeface="Segoe UI"/>
+              </a:rPr>
+              <a:t>Temporal group testing</a:t>
+            </a:r>
+            <a:r>
               <a:rPr sz="1500" b="0" i="0">
                 <a:solidFill>
                   <a:srgbClr val="26251F"/>
                 </a:solidFill>
                 <a:latin typeface="Segoe UI"/>
               </a:rPr>
-              <a:t>The </a:t>
-            </a:r>
-            <a:r>
-              <a:rPr sz="1500" b="1" i="0">
-                <a:solidFill>
-                  <a:srgbClr val="0B0B0B"/>
-                </a:solidFill>
-                <a:latin typeface="Segoe UI"/>
-              </a:rPr>
-              <a:t>laundering theorem</a:t>
-            </a:r>
-            <a:r>
-              <a:rPr sz="1500" b="0" i="0">
-                <a:solidFill>
-                  <a:srgbClr val="26251F"/>
-                </a:solidFill>
-                <a:latin typeface="Segoe UI"/>
-              </a:rPr>
-              <a:t>: at γ*=2c/m−1 a poisoned cluster mean is magnitude-invisible, which explains why robust rules fail.</a:t>
-            </a:r>
-          </a:p>
-          <a:p>
-            <a:pPr>
-              <a:spcAft>
-                <a:spcPts val="800"/>
-              </a:spcAft>
-            </a:pPr>
-            <a:r>
-              <a:rPr sz="1500">
-                <a:solidFill>
-                  <a:srgbClr val="2A78D6"/>
-                </a:solidFill>
-                <a:latin typeface="Segoe UI"/>
-              </a:rPr>
-              <a:t>▪  </a:t>
-            </a:r>
-            <a:r>
-              <a:rPr sz="1500" b="1" i="0">
-                <a:solidFill>
-                  <a:srgbClr val="0B0B0B"/>
-                </a:solidFill>
-                <a:latin typeface="Segoe UI"/>
-              </a:rPr>
-              <a:t>Temporal group testing</a:t>
-            </a:r>
-            <a:r>
-              <a:rPr sz="1500" b="0" i="0">
-                <a:solidFill>
-                  <a:srgbClr val="26251F"/>
-                </a:solidFill>
-                <a:latin typeface="Segoe UI"/>
-              </a:rPr>
-              <a:t> over re-randomized clusters with a root-loss probe: identifies attackers the server never sees individually.</a:t>
+              <a:t> over re-randomized clusters with a root-loss probe: identifies attackers the server never sees.</a:t>
             </a:r>
           </a:p>
           <a:p>
@@ -4926,7 +4620,7 @@
       </p:sp>
       <p:pic>
         <p:nvPicPr>
-          <p:cNvPr id="5" name="Picture 4" descr="fig_launder_geo.png"/>
+          <p:cNvPr id="4" name="Picture 3" descr="fig_launder_geo.png"/>
           <p:cNvPicPr>
             <a:picLocks noChangeAspect="1"/>
           </p:cNvPicPr>
@@ -4940,7 +4634,7 @@
         </p:blipFill>
         <p:spPr>
           <a:xfrm>
-            <a:off x="7315200" y="1709928"/>
+            <a:off x="7315200" y="1463040"/>
             <a:ext cx="4480560" cy="3312414"/>
           </a:xfrm>
           <a:prstGeom prst="rect">
@@ -4950,96 +4644,62 @@
       </p:pic>
       <p:sp>
         <p:nvSpPr>
+          <p:cNvPr id="5" name="TextBox 4"/>
+          <p:cNvSpPr txBox="1"/>
+          <p:nvPr/>
+        </p:nvSpPr>
+        <p:spPr>
+          <a:xfrm>
+            <a:off x="685800" y="5943600"/>
+            <a:ext cx="10881360" cy="502920"/>
+          </a:xfrm>
+          <a:prstGeom prst="rect">
+            <a:avLst/>
+          </a:prstGeom>
+          <a:noFill/>
+        </p:spPr>
+        <p:txBody>
+          <a:bodyPr wrap="square">
+            <a:spAutoFit/>
+          </a:bodyPr>
+          <a:lstStyle/>
+          <a:p>
+            <a:pPr>
+              <a:spcAft>
+                <a:spcPts val="100"/>
+              </a:spcAft>
+            </a:pPr>
+            <a:r>
+              <a:rPr sz="800" b="0" i="1">
+                <a:solidFill>
+                  <a:srgbClr val="2A78D6"/>
+                </a:solidFill>
+                <a:latin typeface="Segoe UI"/>
+              </a:rPr>
+              <a:t>[1] M. Xhemrishi, J. Östman, A. Wachter-Zeh, and A. Graell i Amat, "FedGT: Identification of malicious clients in federated learning with secure aggregation," IEEE Trans. Inf. Forensics Security, vol. 20, pp. 2577–2592, 2025.</a:t>
+            </a:r>
+          </a:p>
+          <a:p>
+            <a:pPr>
+              <a:spcAft>
+                <a:spcPts val="100"/>
+              </a:spcAft>
+            </a:pPr>
+            <a:r>
+              <a:rPr sz="800" b="0" i="1">
+                <a:solidFill>
+                  <a:srgbClr val="2A78D6"/>
+                </a:solidFill>
+                <a:latin typeface="Segoe UI"/>
+              </a:rPr>
+              <a:t>[5] X. Cao, M. Fang, J. Liu, and N. Z. Gong, "FLTrust: Byzantine-robust federated learning via trust bootstrapping," in Proc. NDSS, 2021.</a:t>
+            </a:r>
+          </a:p>
+        </p:txBody>
+      </p:sp>
+      <p:sp>
+        <p:nvSpPr>
           <p:cNvPr id="6" name="TextBox 5"/>
-          <p:cNvSpPr txBox="1"/>
-          <p:nvPr/>
-        </p:nvSpPr>
-        <p:spPr>
-          <a:xfrm>
-            <a:off x="685800" y="5870448"/>
-            <a:ext cx="10881360" cy="530352"/>
-          </a:xfrm>
-          <a:prstGeom prst="rect">
-            <a:avLst/>
-          </a:prstGeom>
-          <a:noFill/>
-        </p:spPr>
-        <p:txBody>
-          <a:bodyPr wrap="square">
-            <a:spAutoFit/>
-          </a:bodyPr>
-          <a:lstStyle/>
-          <a:p>
-            <a:pPr>
-              <a:spcAft>
-                <a:spcPts val="100"/>
-              </a:spcAft>
-            </a:pPr>
-            <a:r>
-              <a:rPr sz="800" b="0" i="1">
-                <a:solidFill>
-                  <a:srgbClr val="2A78D6"/>
-                </a:solidFill>
-                <a:latin typeface="Segoe UI"/>
-              </a:rPr>
-              <a:t>[1] M. Xhemrishi, J. Östman, A. Wachter-Zeh, and A. Graell i Amat, "FedGT: Identification of malicious clients in federated learning with secure aggregation," IEEE Trans. Inf. Forensics Security, vol. 20, pp. 2577–2592, 2025.</a:t>
-            </a:r>
-          </a:p>
-          <a:p>
-            <a:pPr>
-              <a:spcAft>
-                <a:spcPts val="100"/>
-              </a:spcAft>
-            </a:pPr>
-            <a:r>
-              <a:rPr sz="800" b="0" i="1">
-                <a:solidFill>
-                  <a:srgbClr val="2A78D6"/>
-                </a:solidFill>
-                <a:latin typeface="Segoe UI"/>
-              </a:rPr>
-              <a:t>[5] X. Cao, M. Fang, J. Liu, and N. Z. Gong, "FLTrust: Byzantine-robust federated learning via trust bootstrapping," in Proc. NDSS, 2021.</a:t>
-            </a:r>
-          </a:p>
-        </p:txBody>
-      </p:sp>
-      <p:sp>
-        <p:nvSpPr>
-          <p:cNvPr id="7" name="TextBox 6"/>
-          <p:cNvSpPr txBox="1"/>
-          <p:nvPr/>
-        </p:nvSpPr>
-        <p:spPr>
-          <a:xfrm>
-            <a:off x="685800" y="6446520"/>
-            <a:ext cx="7680960" cy="274320"/>
-          </a:xfrm>
-          <a:prstGeom prst="rect">
-            <a:avLst/>
-          </a:prstGeom>
-          <a:noFill/>
-        </p:spPr>
-        <p:txBody>
-          <a:bodyPr wrap="square">
-            <a:spAutoFit/>
-          </a:bodyPr>
-          <a:lstStyle/>
-          <a:p>
-            <a:r>
-              <a:rPr sz="1050" b="0" i="0">
-                <a:solidFill>
-                  <a:srgbClr val="898781"/>
-                </a:solidFill>
-                <a:latin typeface="Segoe UI"/>
-              </a:rPr>
-              <a:t>CB-SAFE · Suva &amp; Chowdhury · AIUB</a:t>
-            </a:r>
-          </a:p>
-        </p:txBody>
-      </p:sp>
-      <p:sp>
-        <p:nvSpPr>
-          <p:cNvPr id="8" name="TextBox 7"/>
           <p:cNvSpPr txBox="1"/>
           <p:nvPr/>
         </p:nvSpPr>
@@ -5098,28 +4758,28 @@
         </p:nvSpPr>
         <p:spPr>
           <a:xfrm>
-            <a:off x="685800" y="384048"/>
-            <a:ext cx="10881360" cy="320040"/>
-          </a:xfrm>
-          <a:prstGeom prst="rect">
-            <a:avLst/>
-          </a:prstGeom>
-          <a:noFill/>
-        </p:spPr>
-        <p:txBody>
-          <a:bodyPr wrap="square">
-            <a:spAutoFit/>
-          </a:bodyPr>
-          <a:lstStyle/>
-          <a:p>
-            <a:r>
-              <a:rPr sz="1200" b="1" i="0">
-                <a:solidFill>
-                  <a:srgbClr val="2A78D6"/>
-                </a:solidFill>
-                <a:latin typeface="Segoe UI"/>
-              </a:rPr>
-              <a:t>PARAMETERS</a:t>
+            <a:off x="685800" y="438912"/>
+            <a:ext cx="10881360" cy="822960"/>
+          </a:xfrm>
+          <a:prstGeom prst="rect">
+            <a:avLst/>
+          </a:prstGeom>
+          <a:noFill/>
+        </p:spPr>
+        <p:txBody>
+          <a:bodyPr wrap="square">
+            <a:spAutoFit/>
+          </a:bodyPr>
+          <a:lstStyle/>
+          <a:p>
+            <a:r>
+              <a:rPr sz="3000" b="1" i="0">
+                <a:solidFill>
+                  <a:srgbClr val="0B0B0B"/>
+                </a:solidFill>
+                <a:latin typeface="Segoe UI"/>
+              </a:rPr>
+              <a:t>Selection Criteria</a:t>
             </a:r>
           </a:p>
         </p:txBody>
@@ -5132,28 +4792,117 @@
         </p:nvSpPr>
         <p:spPr>
           <a:xfrm>
-            <a:off x="685800" y="713232"/>
-            <a:ext cx="10881360" cy="822960"/>
-          </a:xfrm>
-          <a:prstGeom prst="rect">
-            <a:avLst/>
-          </a:prstGeom>
-          <a:noFill/>
-        </p:spPr>
-        <p:txBody>
-          <a:bodyPr wrap="square">
-            <a:spAutoFit/>
-          </a:bodyPr>
-          <a:lstStyle/>
-          <a:p>
-            <a:r>
-              <a:rPr sz="2700" b="1" i="0">
-                <a:solidFill>
-                  <a:srgbClr val="0B0B0B"/>
-                </a:solidFill>
-                <a:latin typeface="Segoe UI"/>
-              </a:rPr>
-              <a:t>How the selection meets the required criteria</a:t>
+            <a:off x="685800" y="1371600"/>
+            <a:ext cx="10881360" cy="3931920"/>
+          </a:xfrm>
+          <a:prstGeom prst="rect">
+            <a:avLst/>
+          </a:prstGeom>
+          <a:noFill/>
+        </p:spPr>
+        <p:txBody>
+          <a:bodyPr wrap="square">
+            <a:spAutoFit/>
+          </a:bodyPr>
+          <a:lstStyle/>
+          <a:p>
+            <a:pPr>
+              <a:spcAft>
+                <a:spcPts val="800"/>
+              </a:spcAft>
+            </a:pPr>
+            <a:r>
+              <a:rPr sz="1500">
+                <a:solidFill>
+                  <a:srgbClr val="2A78D6"/>
+                </a:solidFill>
+                <a:latin typeface="Segoe UI"/>
+              </a:rPr>
+              <a:t>▪  </a:t>
+            </a:r>
+            <a:r>
+              <a:rPr sz="1500" b="0" i="0">
+                <a:solidFill>
+                  <a:srgbClr val="26251F"/>
+                </a:solidFill>
+                <a:latin typeface="Segoe UI"/>
+              </a:rPr>
+              <a:t>Venue and recency: the basis paper is Q1 (IEEE TIFS), 2025; supporting sources are top-tier (ACM CCS, NIST).</a:t>
+            </a:r>
+          </a:p>
+          <a:p>
+            <a:pPr>
+              <a:spcAft>
+                <a:spcPts val="800"/>
+              </a:spcAft>
+            </a:pPr>
+            <a:r>
+              <a:rPr sz="1500">
+                <a:solidFill>
+                  <a:srgbClr val="2A78D6"/>
+                </a:solidFill>
+                <a:latin typeface="Segoe UI"/>
+              </a:rPr>
+              <a:t>▪  </a:t>
+            </a:r>
+            <a:r>
+              <a:rPr sz="1500" b="0" i="0">
+                <a:solidFill>
+                  <a:srgbClr val="26251F"/>
+                </a:solidFill>
+                <a:latin typeface="Segoe UI"/>
+              </a:rPr>
+              <a:t>Relevance: every borrowed idea maps directly onto a component of our exact problem.</a:t>
+            </a:r>
+          </a:p>
+          <a:p>
+            <a:pPr>
+              <a:spcAft>
+                <a:spcPts val="800"/>
+              </a:spcAft>
+            </a:pPr>
+            <a:r>
+              <a:rPr sz="1500">
+                <a:solidFill>
+                  <a:srgbClr val="2A78D6"/>
+                </a:solidFill>
+                <a:latin typeface="Segoe UI"/>
+              </a:rPr>
+              <a:t>▪  </a:t>
+            </a:r>
+            <a:r>
+              <a:rPr sz="1500" b="0" i="0">
+                <a:solidFill>
+                  <a:srgbClr val="26251F"/>
+                </a:solidFill>
+                <a:latin typeface="Segoe UI"/>
+              </a:rPr>
+              <a:t>Method strength: we match SOTA (FedGT) on robustness at ~4× lower cost, add PQC, and prove the failure mechanism.</a:t>
+            </a:r>
+          </a:p>
+          <a:p>
+            <a:pPr>
+              <a:spcAft>
+                <a:spcPts val="800"/>
+              </a:spcAft>
+            </a:pPr>
+            <a:r>
+              <a:rPr sz="1500">
+                <a:solidFill>
+                  <a:srgbClr val="2A78D6"/>
+                </a:solidFill>
+                <a:latin typeface="Segoe UI"/>
+              </a:rPr>
+              <a:t>▪  </a:t>
+            </a:r>
+            <a:r>
+              <a:rPr sz="1500" b="0" i="0">
+                <a:solidFill>
+                  <a:srgbClr val="26251F"/>
+                </a:solidFill>
+                <a:latin typeface="Segoe UI"/>
+              </a:rPr>
+              <a:t>Breadth and rigor: validated on four datasets and two modalities, multiple seeds, with significance testing.</a:t>
             </a:r>
           </a:p>
         </p:txBody>
@@ -5166,117 +4915,65 @@
         </p:nvSpPr>
         <p:spPr>
           <a:xfrm>
-            <a:off x="685800" y="1572768"/>
-            <a:ext cx="10881360" cy="3931920"/>
-          </a:xfrm>
-          <a:prstGeom prst="rect">
-            <a:avLst/>
-          </a:prstGeom>
-          <a:noFill/>
-        </p:spPr>
-        <p:txBody>
-          <a:bodyPr wrap="square">
-            <a:spAutoFit/>
-          </a:bodyPr>
-          <a:lstStyle/>
-          <a:p>
-            <a:pPr>
-              <a:spcAft>
-                <a:spcPts val="800"/>
-              </a:spcAft>
-            </a:pPr>
-            <a:r>
-              <a:rPr sz="1500">
-                <a:solidFill>
-                  <a:srgbClr val="2A78D6"/>
-                </a:solidFill>
-                <a:latin typeface="Segoe UI"/>
-              </a:rPr>
-              <a:t>▪  </a:t>
-            </a:r>
-            <a:r>
-              <a:rPr sz="1500" b="0" i="0">
-                <a:solidFill>
-                  <a:srgbClr val="26251F"/>
-                </a:solidFill>
-                <a:latin typeface="Segoe UI"/>
-              </a:rPr>
-              <a:t>Venue and recency: the basis paper is Q1 (IEEE TIFS), 2025; supporting sources are top-tier (ACM CCS, NIST).</a:t>
-            </a:r>
-          </a:p>
-          <a:p>
-            <a:pPr>
-              <a:spcAft>
-                <a:spcPts val="800"/>
-              </a:spcAft>
-            </a:pPr>
-            <a:r>
-              <a:rPr sz="1500">
-                <a:solidFill>
-                  <a:srgbClr val="2A78D6"/>
-                </a:solidFill>
-                <a:latin typeface="Segoe UI"/>
-              </a:rPr>
-              <a:t>▪  </a:t>
-            </a:r>
-            <a:r>
-              <a:rPr sz="1500" b="0" i="0">
-                <a:solidFill>
-                  <a:srgbClr val="26251F"/>
-                </a:solidFill>
-                <a:latin typeface="Segoe UI"/>
-              </a:rPr>
-              <a:t>Relevance: every borrowed idea maps directly onto a component of our exact problem.</a:t>
-            </a:r>
-          </a:p>
-          <a:p>
-            <a:pPr>
-              <a:spcAft>
-                <a:spcPts val="800"/>
-              </a:spcAft>
-            </a:pPr>
-            <a:r>
-              <a:rPr sz="1500">
-                <a:solidFill>
-                  <a:srgbClr val="2A78D6"/>
-                </a:solidFill>
-                <a:latin typeface="Segoe UI"/>
-              </a:rPr>
-              <a:t>▪  </a:t>
-            </a:r>
-            <a:r>
-              <a:rPr sz="1500" b="0" i="0">
-                <a:solidFill>
-                  <a:srgbClr val="26251F"/>
-                </a:solidFill>
-                <a:latin typeface="Segoe UI"/>
-              </a:rPr>
-              <a:t>Method strength: we match SOTA (FedGT) on robustness at ~4× lower cost, add PQC, and prove the failure mechanism.</a:t>
-            </a:r>
-          </a:p>
-          <a:p>
-            <a:pPr>
-              <a:spcAft>
-                <a:spcPts val="800"/>
-              </a:spcAft>
-            </a:pPr>
-            <a:r>
-              <a:rPr sz="1500">
-                <a:solidFill>
-                  <a:srgbClr val="2A78D6"/>
-                </a:solidFill>
-                <a:latin typeface="Segoe UI"/>
-              </a:rPr>
-              <a:t>▪  </a:t>
-            </a:r>
-            <a:r>
-              <a:rPr sz="1500" b="0" i="0">
-                <a:solidFill>
-                  <a:srgbClr val="26251F"/>
-                </a:solidFill>
-                <a:latin typeface="Segoe UI"/>
-              </a:rPr>
-              <a:t>Breadth and rigor: validated on four datasets and two modalities, multiple seeds, with significance testing.</a:t>
+            <a:off x="685800" y="5943600"/>
+            <a:ext cx="10881360" cy="502920"/>
+          </a:xfrm>
+          <a:prstGeom prst="rect">
+            <a:avLst/>
+          </a:prstGeom>
+          <a:noFill/>
+        </p:spPr>
+        <p:txBody>
+          <a:bodyPr wrap="square">
+            <a:spAutoFit/>
+          </a:bodyPr>
+          <a:lstStyle/>
+          <a:p>
+            <a:pPr>
+              <a:spcAft>
+                <a:spcPts val="100"/>
+              </a:spcAft>
+            </a:pPr>
+            <a:r>
+              <a:rPr sz="800" b="0" i="1">
+                <a:solidFill>
+                  <a:srgbClr val="2A78D6"/>
+                </a:solidFill>
+                <a:latin typeface="Segoe UI"/>
+              </a:rPr>
+              <a:t>[1] M. Xhemrishi, J. Östman, A. Wachter-Zeh, and A. Graell i Amat, "FedGT: Identification of malicious clients in federated learning with secure aggregation," IEEE Trans. Inf. Forensics Security, vol. 20, pp. 2577–2592, 2025.</a:t>
+            </a:r>
+          </a:p>
+          <a:p>
+            <a:pPr>
+              <a:spcAft>
+                <a:spcPts val="100"/>
+              </a:spcAft>
+            </a:pPr>
+            <a:r>
+              <a:rPr sz="800" b="0" i="1">
+                <a:solidFill>
+                  <a:srgbClr val="2A78D6"/>
+                </a:solidFill>
+                <a:latin typeface="Segoe UI"/>
+              </a:rPr>
+              <a:t>[2] K. Bonawitz, V. Ivanov, B. Kreuter, A. Marcedone, H. B. McMahan, S. Patel, D. Ramage, A. Segal, and K. Seth, "Practical secure aggregation for privacy-preserving machine learning," in Proc. ACM CCS, 2017, pp. 1175–1191.</a:t>
+            </a:r>
+          </a:p>
+          <a:p>
+            <a:pPr>
+              <a:spcAft>
+                <a:spcPts val="100"/>
+              </a:spcAft>
+            </a:pPr>
+            <a:r>
+              <a:rPr sz="800" b="0" i="1">
+                <a:solidFill>
+                  <a:srgbClr val="2A78D6"/>
+                </a:solidFill>
+                <a:latin typeface="Segoe UI"/>
+              </a:rPr>
+              <a:t>[3] National Institute of Standards and Technology, "Status report on the fourth round of the NIST post-quantum cryptography standardization process," NIST IR 8545, Mar. 2025.</a:t>
             </a:r>
           </a:p>
         </p:txBody>
@@ -5284,111 +4981,6 @@
       <p:sp>
         <p:nvSpPr>
           <p:cNvPr id="5" name="TextBox 4"/>
-          <p:cNvSpPr txBox="1"/>
-          <p:nvPr/>
-        </p:nvSpPr>
-        <p:spPr>
-          <a:xfrm>
-            <a:off x="685800" y="5870448"/>
-            <a:ext cx="10881360" cy="530352"/>
-          </a:xfrm>
-          <a:prstGeom prst="rect">
-            <a:avLst/>
-          </a:prstGeom>
-          <a:noFill/>
-        </p:spPr>
-        <p:txBody>
-          <a:bodyPr wrap="square">
-            <a:spAutoFit/>
-          </a:bodyPr>
-          <a:lstStyle/>
-          <a:p>
-            <a:pPr>
-              <a:spcAft>
-                <a:spcPts val="100"/>
-              </a:spcAft>
-            </a:pPr>
-            <a:r>
-              <a:rPr sz="800" b="0" i="1">
-                <a:solidFill>
-                  <a:srgbClr val="2A78D6"/>
-                </a:solidFill>
-                <a:latin typeface="Segoe UI"/>
-              </a:rPr>
-              <a:t>[1] M. Xhemrishi, J. Östman, A. Wachter-Zeh, and A. Graell i Amat, "FedGT: Identification of malicious clients in federated learning with secure aggregation," IEEE Trans. Inf. Forensics Security, vol. 20, pp. 2577–2592, 2025.</a:t>
-            </a:r>
-          </a:p>
-          <a:p>
-            <a:pPr>
-              <a:spcAft>
-                <a:spcPts val="100"/>
-              </a:spcAft>
-            </a:pPr>
-            <a:r>
-              <a:rPr sz="800" b="0" i="1">
-                <a:solidFill>
-                  <a:srgbClr val="2A78D6"/>
-                </a:solidFill>
-                <a:latin typeface="Segoe UI"/>
-              </a:rPr>
-              <a:t>[2] K. Bonawitz, V. Ivanov, B. Kreuter, A. Marcedone, H. B. McMahan, S. Patel, D. Ramage, A. Segal, and K. Seth, "Practical secure aggregation for privacy-preserving machine learning," in Proc. ACM CCS, 2017, pp. 1175–1191.</a:t>
-            </a:r>
-          </a:p>
-          <a:p>
-            <a:pPr>
-              <a:spcAft>
-                <a:spcPts val="100"/>
-              </a:spcAft>
-            </a:pPr>
-            <a:r>
-              <a:rPr sz="800" b="0" i="1">
-                <a:solidFill>
-                  <a:srgbClr val="2A78D6"/>
-                </a:solidFill>
-                <a:latin typeface="Segoe UI"/>
-              </a:rPr>
-              <a:t>[3] National Institute of Standards and Technology, "Status report on the fourth round of the NIST post-quantum cryptography standardization process," NIST IR 8545, Mar. 2025.</a:t>
-            </a:r>
-          </a:p>
-        </p:txBody>
-      </p:sp>
-      <p:sp>
-        <p:nvSpPr>
-          <p:cNvPr id="6" name="TextBox 5"/>
-          <p:cNvSpPr txBox="1"/>
-          <p:nvPr/>
-        </p:nvSpPr>
-        <p:spPr>
-          <a:xfrm>
-            <a:off x="685800" y="6446520"/>
-            <a:ext cx="7680960" cy="274320"/>
-          </a:xfrm>
-          <a:prstGeom prst="rect">
-            <a:avLst/>
-          </a:prstGeom>
-          <a:noFill/>
-        </p:spPr>
-        <p:txBody>
-          <a:bodyPr wrap="square">
-            <a:spAutoFit/>
-          </a:bodyPr>
-          <a:lstStyle/>
-          <a:p>
-            <a:r>
-              <a:rPr sz="1050" b="0" i="0">
-                <a:solidFill>
-                  <a:srgbClr val="898781"/>
-                </a:solidFill>
-                <a:latin typeface="Segoe UI"/>
-              </a:rPr>
-              <a:t>CB-SAFE · Suva &amp; Chowdhury · AIUB</a:t>
-            </a:r>
-          </a:p>
-        </p:txBody>
-      </p:sp>
-      <p:sp>
-        <p:nvSpPr>
-          <p:cNvPr id="7" name="TextBox 6"/>
           <p:cNvSpPr txBox="1"/>
           <p:nvPr/>
         </p:nvSpPr>
@@ -5447,28 +5039,28 @@
         </p:nvSpPr>
         <p:spPr>
           <a:xfrm>
-            <a:off x="685800" y="384048"/>
-            <a:ext cx="10881360" cy="320040"/>
-          </a:xfrm>
-          <a:prstGeom prst="rect">
-            <a:avLst/>
-          </a:prstGeom>
-          <a:noFill/>
-        </p:spPr>
-        <p:txBody>
-          <a:bodyPr wrap="square">
-            <a:spAutoFit/>
-          </a:bodyPr>
-          <a:lstStyle/>
-          <a:p>
-            <a:r>
-              <a:rPr sz="1200" b="1" i="0">
-                <a:solidFill>
-                  <a:srgbClr val="2A78D6"/>
-                </a:solidFill>
-                <a:latin typeface="Segoe UI"/>
-              </a:rPr>
-              <a:t>SUMMARY</a:t>
+            <a:off x="685800" y="438912"/>
+            <a:ext cx="10881360" cy="822960"/>
+          </a:xfrm>
+          <a:prstGeom prst="rect">
+            <a:avLst/>
+          </a:prstGeom>
+          <a:noFill/>
+        </p:spPr>
+        <p:txBody>
+          <a:bodyPr wrap="square">
+            <a:spAutoFit/>
+          </a:bodyPr>
+          <a:lstStyle/>
+          <a:p>
+            <a:r>
+              <a:rPr sz="3000" b="1" i="0">
+                <a:solidFill>
+                  <a:srgbClr val="0B0B0B"/>
+                </a:solidFill>
+                <a:latin typeface="Segoe UI"/>
+              </a:rPr>
+              <a:t>Summary</a:t>
             </a:r>
           </a:p>
         </p:txBody>
@@ -5481,28 +5073,28 @@
         </p:nvSpPr>
         <p:spPr>
           <a:xfrm>
-            <a:off x="685800" y="713232"/>
-            <a:ext cx="10881360" cy="822960"/>
-          </a:xfrm>
-          <a:prstGeom prst="rect">
-            <a:avLst/>
-          </a:prstGeom>
-          <a:noFill/>
-        </p:spPr>
-        <p:txBody>
-          <a:bodyPr wrap="square">
-            <a:spAutoFit/>
-          </a:bodyPr>
-          <a:lstStyle/>
-          <a:p>
-            <a:r>
-              <a:rPr sz="2700" b="1" i="0">
-                <a:solidFill>
-                  <a:srgbClr val="0B0B0B"/>
-                </a:solidFill>
-                <a:latin typeface="Segoe UI"/>
-              </a:rPr>
-              <a:t>What we took, changed, and made new</a:t>
+            <a:off x="685800" y="1371600"/>
+            <a:ext cx="10881360" cy="457200"/>
+          </a:xfrm>
+          <a:prstGeom prst="rect">
+            <a:avLst/>
+          </a:prstGeom>
+          <a:noFill/>
+        </p:spPr>
+        <p:txBody>
+          <a:bodyPr wrap="square">
+            <a:spAutoFit/>
+          </a:bodyPr>
+          <a:lstStyle/>
+          <a:p>
+            <a:r>
+              <a:rPr sz="1400" b="0" i="1">
+                <a:solidFill>
+                  <a:srgbClr val="26251F"/>
+                </a:solidFill>
+                <a:latin typeface="Segoe UI"/>
+              </a:rPr>
+              <a:t>End of the required method presentation. Slides 16–22 present the full paper and results.</a:t>
             </a:r>
           </a:p>
         </p:txBody>
@@ -5515,28 +5107,117 @@
         </p:nvSpPr>
         <p:spPr>
           <a:xfrm>
-            <a:off x="685800" y="1572768"/>
-            <a:ext cx="10881360" cy="457200"/>
-          </a:xfrm>
-          <a:prstGeom prst="rect">
-            <a:avLst/>
-          </a:prstGeom>
-          <a:noFill/>
-        </p:spPr>
-        <p:txBody>
-          <a:bodyPr wrap="square">
-            <a:spAutoFit/>
-          </a:bodyPr>
-          <a:lstStyle/>
-          <a:p>
-            <a:r>
-              <a:rPr sz="1400" b="0" i="1">
-                <a:solidFill>
-                  <a:srgbClr val="26251F"/>
-                </a:solidFill>
-                <a:latin typeface="Segoe UI"/>
-              </a:rPr>
-              <a:t>End of the required method presentation. Slides 16–22 present the full paper and results.</a:t>
+            <a:off x="685800" y="1828800"/>
+            <a:ext cx="10881360" cy="3931920"/>
+          </a:xfrm>
+          <a:prstGeom prst="rect">
+            <a:avLst/>
+          </a:prstGeom>
+          <a:noFill/>
+        </p:spPr>
+        <p:txBody>
+          <a:bodyPr wrap="square">
+            <a:spAutoFit/>
+          </a:bodyPr>
+          <a:lstStyle/>
+          <a:p>
+            <a:pPr>
+              <a:spcAft>
+                <a:spcPts val="800"/>
+              </a:spcAft>
+            </a:pPr>
+            <a:r>
+              <a:rPr sz="1500">
+                <a:solidFill>
+                  <a:srgbClr val="2A78D6"/>
+                </a:solidFill>
+                <a:latin typeface="Segoe UI"/>
+              </a:rPr>
+              <a:t>▪  </a:t>
+            </a:r>
+            <a:r>
+              <a:rPr sz="1500" b="0" i="0">
+                <a:solidFill>
+                  <a:srgbClr val="26251F"/>
+                </a:solidFill>
+                <a:latin typeface="Segoe UI"/>
+              </a:rPr>
+              <a:t>Took: masking [2], group testing [1], and a code-based KEM [3].</a:t>
+            </a:r>
+          </a:p>
+          <a:p>
+            <a:pPr>
+              <a:spcAft>
+                <a:spcPts val="800"/>
+              </a:spcAft>
+            </a:pPr>
+            <a:r>
+              <a:rPr sz="1500">
+                <a:solidFill>
+                  <a:srgbClr val="2A78D6"/>
+                </a:solidFill>
+                <a:latin typeface="Segoe UI"/>
+              </a:rPr>
+              <a:t>▪  </a:t>
+            </a:r>
+            <a:r>
+              <a:rPr sz="1500" b="0" i="0">
+                <a:solidFill>
+                  <a:srgbClr val="26251F"/>
+                </a:solidFill>
+                <a:latin typeface="Segoe UI"/>
+              </a:rPr>
+              <a:t>Changed: temporal group testing over re-randomized clusters; HQC-seeded, KEM-agnostic masking.</a:t>
+            </a:r>
+          </a:p>
+          <a:p>
+            <a:pPr>
+              <a:spcAft>
+                <a:spcPts val="800"/>
+              </a:spcAft>
+            </a:pPr>
+            <a:r>
+              <a:rPr sz="1500">
+                <a:solidFill>
+                  <a:srgbClr val="2A78D6"/>
+                </a:solidFill>
+                <a:latin typeface="Segoe UI"/>
+              </a:rPr>
+              <a:t>▪  </a:t>
+            </a:r>
+            <a:r>
+              <a:rPr sz="1500" b="0" i="0">
+                <a:solidFill>
+                  <a:srgbClr val="26251F"/>
+                </a:solidFill>
+                <a:latin typeface="Segoe UI"/>
+              </a:rPr>
+              <a:t>New: the laundering theorem, the first code-based PQ secure aggregation, and trust-free detection.</a:t>
+            </a:r>
+          </a:p>
+          <a:p>
+            <a:pPr>
+              <a:spcAft>
+                <a:spcPts val="800"/>
+              </a:spcAft>
+            </a:pPr>
+            <a:r>
+              <a:rPr sz="1500">
+                <a:solidFill>
+                  <a:srgbClr val="2A78D6"/>
+                </a:solidFill>
+                <a:latin typeface="Segoe UI"/>
+              </a:rPr>
+              <a:t>▪  </a:t>
+            </a:r>
+            <a:r>
+              <a:rPr sz="1500" b="0" i="0">
+                <a:solidFill>
+                  <a:srgbClr val="26251F"/>
+                </a:solidFill>
+                <a:latin typeface="Segoe UI"/>
+              </a:rPr>
+              <a:t>Payoff: private, post-quantum, and Byzantine-robust FL that ties the state of the art at lower cost.</a:t>
             </a:r>
           </a:p>
         </p:txBody>
@@ -5549,117 +5230,65 @@
         </p:nvSpPr>
         <p:spPr>
           <a:xfrm>
-            <a:off x="685800" y="2048256"/>
-            <a:ext cx="10881360" cy="3931920"/>
-          </a:xfrm>
-          <a:prstGeom prst="rect">
-            <a:avLst/>
-          </a:prstGeom>
-          <a:noFill/>
-        </p:spPr>
-        <p:txBody>
-          <a:bodyPr wrap="square">
-            <a:spAutoFit/>
-          </a:bodyPr>
-          <a:lstStyle/>
-          <a:p>
-            <a:pPr>
-              <a:spcAft>
-                <a:spcPts val="800"/>
-              </a:spcAft>
-            </a:pPr>
-            <a:r>
-              <a:rPr sz="1500">
-                <a:solidFill>
-                  <a:srgbClr val="2A78D6"/>
-                </a:solidFill>
-                <a:latin typeface="Segoe UI"/>
-              </a:rPr>
-              <a:t>▪  </a:t>
-            </a:r>
-            <a:r>
-              <a:rPr sz="1500" b="0" i="0">
-                <a:solidFill>
-                  <a:srgbClr val="26251F"/>
-                </a:solidFill>
-                <a:latin typeface="Segoe UI"/>
-              </a:rPr>
-              <a:t>Took: masking [2], group testing [1], and a code-based KEM [3].</a:t>
-            </a:r>
-          </a:p>
-          <a:p>
-            <a:pPr>
-              <a:spcAft>
-                <a:spcPts val="800"/>
-              </a:spcAft>
-            </a:pPr>
-            <a:r>
-              <a:rPr sz="1500">
-                <a:solidFill>
-                  <a:srgbClr val="2A78D6"/>
-                </a:solidFill>
-                <a:latin typeface="Segoe UI"/>
-              </a:rPr>
-              <a:t>▪  </a:t>
-            </a:r>
-            <a:r>
-              <a:rPr sz="1500" b="0" i="0">
-                <a:solidFill>
-                  <a:srgbClr val="26251F"/>
-                </a:solidFill>
-                <a:latin typeface="Segoe UI"/>
-              </a:rPr>
-              <a:t>Changed: temporal group testing over re-randomized clusters; HQC-seeded, KEM-agnostic masking.</a:t>
-            </a:r>
-          </a:p>
-          <a:p>
-            <a:pPr>
-              <a:spcAft>
-                <a:spcPts val="800"/>
-              </a:spcAft>
-            </a:pPr>
-            <a:r>
-              <a:rPr sz="1500">
-                <a:solidFill>
-                  <a:srgbClr val="2A78D6"/>
-                </a:solidFill>
-                <a:latin typeface="Segoe UI"/>
-              </a:rPr>
-              <a:t>▪  </a:t>
-            </a:r>
-            <a:r>
-              <a:rPr sz="1500" b="0" i="0">
-                <a:solidFill>
-                  <a:srgbClr val="26251F"/>
-                </a:solidFill>
-                <a:latin typeface="Segoe UI"/>
-              </a:rPr>
-              <a:t>New: the laundering theorem, the first code-based PQ secure aggregation, and trust-free detection.</a:t>
-            </a:r>
-          </a:p>
-          <a:p>
-            <a:pPr>
-              <a:spcAft>
-                <a:spcPts val="800"/>
-              </a:spcAft>
-            </a:pPr>
-            <a:r>
-              <a:rPr sz="1500">
-                <a:solidFill>
-                  <a:srgbClr val="2A78D6"/>
-                </a:solidFill>
-                <a:latin typeface="Segoe UI"/>
-              </a:rPr>
-              <a:t>▪  </a:t>
-            </a:r>
-            <a:r>
-              <a:rPr sz="1500" b="0" i="0">
-                <a:solidFill>
-                  <a:srgbClr val="26251F"/>
-                </a:solidFill>
-                <a:latin typeface="Segoe UI"/>
-              </a:rPr>
-              <a:t>Payoff: private, post-quantum, and Byzantine-robust FL that ties the state of the art at lower cost.</a:t>
+            <a:off x="685800" y="5943600"/>
+            <a:ext cx="10881360" cy="502920"/>
+          </a:xfrm>
+          <a:prstGeom prst="rect">
+            <a:avLst/>
+          </a:prstGeom>
+          <a:noFill/>
+        </p:spPr>
+        <p:txBody>
+          <a:bodyPr wrap="square">
+            <a:spAutoFit/>
+          </a:bodyPr>
+          <a:lstStyle/>
+          <a:p>
+            <a:pPr>
+              <a:spcAft>
+                <a:spcPts val="100"/>
+              </a:spcAft>
+            </a:pPr>
+            <a:r>
+              <a:rPr sz="800" b="0" i="1">
+                <a:solidFill>
+                  <a:srgbClr val="2A78D6"/>
+                </a:solidFill>
+                <a:latin typeface="Segoe UI"/>
+              </a:rPr>
+              <a:t>[1] M. Xhemrishi, J. Östman, A. Wachter-Zeh, and A. Graell i Amat, "FedGT: Identification of malicious clients in federated learning with secure aggregation," IEEE Trans. Inf. Forensics Security, vol. 20, pp. 2577–2592, 2025.</a:t>
+            </a:r>
+          </a:p>
+          <a:p>
+            <a:pPr>
+              <a:spcAft>
+                <a:spcPts val="100"/>
+              </a:spcAft>
+            </a:pPr>
+            <a:r>
+              <a:rPr sz="800" b="0" i="1">
+                <a:solidFill>
+                  <a:srgbClr val="2A78D6"/>
+                </a:solidFill>
+                <a:latin typeface="Segoe UI"/>
+              </a:rPr>
+              <a:t>[2] K. Bonawitz, V. Ivanov, B. Kreuter, A. Marcedone, H. B. McMahan, S. Patel, D. Ramage, A. Segal, and K. Seth, "Practical secure aggregation for privacy-preserving machine learning," in Proc. ACM CCS, 2017, pp. 1175–1191.</a:t>
+            </a:r>
+          </a:p>
+          <a:p>
+            <a:pPr>
+              <a:spcAft>
+                <a:spcPts val="100"/>
+              </a:spcAft>
+            </a:pPr>
+            <a:r>
+              <a:rPr sz="800" b="0" i="1">
+                <a:solidFill>
+                  <a:srgbClr val="2A78D6"/>
+                </a:solidFill>
+                <a:latin typeface="Segoe UI"/>
+              </a:rPr>
+              <a:t>[3] National Institute of Standards and Technology, "Status report on the fourth round of the NIST post-quantum cryptography standardization process," NIST IR 8545, Mar. 2025.</a:t>
             </a:r>
           </a:p>
         </p:txBody>
@@ -5667,111 +5296,6 @@
       <p:sp>
         <p:nvSpPr>
           <p:cNvPr id="6" name="TextBox 5"/>
-          <p:cNvSpPr txBox="1"/>
-          <p:nvPr/>
-        </p:nvSpPr>
-        <p:spPr>
-          <a:xfrm>
-            <a:off x="685800" y="5870448"/>
-            <a:ext cx="10881360" cy="530352"/>
-          </a:xfrm>
-          <a:prstGeom prst="rect">
-            <a:avLst/>
-          </a:prstGeom>
-          <a:noFill/>
-        </p:spPr>
-        <p:txBody>
-          <a:bodyPr wrap="square">
-            <a:spAutoFit/>
-          </a:bodyPr>
-          <a:lstStyle/>
-          <a:p>
-            <a:pPr>
-              <a:spcAft>
-                <a:spcPts val="100"/>
-              </a:spcAft>
-            </a:pPr>
-            <a:r>
-              <a:rPr sz="800" b="0" i="1">
-                <a:solidFill>
-                  <a:srgbClr val="2A78D6"/>
-                </a:solidFill>
-                <a:latin typeface="Segoe UI"/>
-              </a:rPr>
-              <a:t>[1] M. Xhemrishi, J. Östman, A. Wachter-Zeh, and A. Graell i Amat, "FedGT: Identification of malicious clients in federated learning with secure aggregation," IEEE Trans. Inf. Forensics Security, vol. 20, pp. 2577–2592, 2025.</a:t>
-            </a:r>
-          </a:p>
-          <a:p>
-            <a:pPr>
-              <a:spcAft>
-                <a:spcPts val="100"/>
-              </a:spcAft>
-            </a:pPr>
-            <a:r>
-              <a:rPr sz="800" b="0" i="1">
-                <a:solidFill>
-                  <a:srgbClr val="2A78D6"/>
-                </a:solidFill>
-                <a:latin typeface="Segoe UI"/>
-              </a:rPr>
-              <a:t>[2] K. Bonawitz, V. Ivanov, B. Kreuter, A. Marcedone, H. B. McMahan, S. Patel, D. Ramage, A. Segal, and K. Seth, "Practical secure aggregation for privacy-preserving machine learning," in Proc. ACM CCS, 2017, pp. 1175–1191.</a:t>
-            </a:r>
-          </a:p>
-          <a:p>
-            <a:pPr>
-              <a:spcAft>
-                <a:spcPts val="100"/>
-              </a:spcAft>
-            </a:pPr>
-            <a:r>
-              <a:rPr sz="800" b="0" i="1">
-                <a:solidFill>
-                  <a:srgbClr val="2A78D6"/>
-                </a:solidFill>
-                <a:latin typeface="Segoe UI"/>
-              </a:rPr>
-              <a:t>[3] National Institute of Standards and Technology, "Status report on the fourth round of the NIST post-quantum cryptography standardization process," NIST IR 8545, Mar. 2025.</a:t>
-            </a:r>
-          </a:p>
-        </p:txBody>
-      </p:sp>
-      <p:sp>
-        <p:nvSpPr>
-          <p:cNvPr id="7" name="TextBox 6"/>
-          <p:cNvSpPr txBox="1"/>
-          <p:nvPr/>
-        </p:nvSpPr>
-        <p:spPr>
-          <a:xfrm>
-            <a:off x="685800" y="6446520"/>
-            <a:ext cx="7680960" cy="274320"/>
-          </a:xfrm>
-          <a:prstGeom prst="rect">
-            <a:avLst/>
-          </a:prstGeom>
-          <a:noFill/>
-        </p:spPr>
-        <p:txBody>
-          <a:bodyPr wrap="square">
-            <a:spAutoFit/>
-          </a:bodyPr>
-          <a:lstStyle/>
-          <a:p>
-            <a:r>
-              <a:rPr sz="1050" b="0" i="0">
-                <a:solidFill>
-                  <a:srgbClr val="898781"/>
-                </a:solidFill>
-                <a:latin typeface="Segoe UI"/>
-              </a:rPr>
-              <a:t>CB-SAFE · Suva &amp; Chowdhury · AIUB</a:t>
-            </a:r>
-          </a:p>
-        </p:txBody>
-      </p:sp>
-      <p:sp>
-        <p:nvSpPr>
-          <p:cNvPr id="8" name="TextBox 7"/>
           <p:cNvSpPr txBox="1"/>
           <p:nvPr/>
         </p:nvSpPr>
@@ -5830,28 +5354,28 @@
         </p:nvSpPr>
         <p:spPr>
           <a:xfrm>
-            <a:off x="685800" y="384048"/>
-            <a:ext cx="10881360" cy="320040"/>
-          </a:xfrm>
-          <a:prstGeom prst="rect">
-            <a:avLst/>
-          </a:prstGeom>
-          <a:noFill/>
-        </p:spPr>
-        <p:txBody>
-          <a:bodyPr wrap="square">
-            <a:spAutoFit/>
-          </a:bodyPr>
-          <a:lstStyle/>
-          <a:p>
-            <a:r>
-              <a:rPr sz="1200" b="1" i="0">
-                <a:solidFill>
-                  <a:srgbClr val="2A78D6"/>
-                </a:solidFill>
-                <a:latin typeface="Segoe UI"/>
-              </a:rPr>
-              <a:t>PART II · SYSTEM ARCHITECTURE</a:t>
+            <a:off x="685800" y="438912"/>
+            <a:ext cx="10881360" cy="822960"/>
+          </a:xfrm>
+          <a:prstGeom prst="rect">
+            <a:avLst/>
+          </a:prstGeom>
+          <a:noFill/>
+        </p:spPr>
+        <p:txBody>
+          <a:bodyPr wrap="square">
+            <a:spAutoFit/>
+          </a:bodyPr>
+          <a:lstStyle/>
+          <a:p>
+            <a:r>
+              <a:rPr sz="3000" b="1" i="0">
+                <a:solidFill>
+                  <a:srgbClr val="0B0B0B"/>
+                </a:solidFill>
+                <a:latin typeface="Segoe UI"/>
+              </a:rPr>
+              <a:t>System Architecture</a:t>
             </a:r>
           </a:p>
         </p:txBody>
@@ -5864,41 +5388,7 @@
         </p:nvSpPr>
         <p:spPr>
           <a:xfrm>
-            <a:off x="685800" y="713232"/>
-            <a:ext cx="10881360" cy="822960"/>
-          </a:xfrm>
-          <a:prstGeom prst="rect">
-            <a:avLst/>
-          </a:prstGeom>
-          <a:noFill/>
-        </p:spPr>
-        <p:txBody>
-          <a:bodyPr wrap="square">
-            <a:spAutoFit/>
-          </a:bodyPr>
-          <a:lstStyle/>
-          <a:p>
-            <a:r>
-              <a:rPr sz="2700" b="1" i="0">
-                <a:solidFill>
-                  <a:srgbClr val="0B0B0B"/>
-                </a:solidFill>
-                <a:latin typeface="Segoe UI"/>
-              </a:rPr>
-              <a:t>CB-SAFE: one training round, end to end</a:t>
-            </a:r>
-          </a:p>
-        </p:txBody>
-      </p:sp>
-      <p:sp>
-        <p:nvSpPr>
-          <p:cNvPr id="4" name="TextBox 3"/>
-          <p:cNvSpPr txBox="1"/>
-          <p:nvPr/>
-        </p:nvSpPr>
-        <p:spPr>
-          <a:xfrm>
-            <a:off x="685800" y="1572768"/>
+            <a:off x="685800" y="1371600"/>
             <a:ext cx="10881360" cy="457200"/>
           </a:xfrm>
           <a:prstGeom prst="rect">
@@ -5919,14 +5409,14 @@
                 </a:solidFill>
                 <a:latin typeface="Segoe UI"/>
               </a:rPr>
-              <a:t>Confidentiality within clusters, then temporal group testing over re-randomized clusters, then robust aggregation.</a:t>
+              <a:t>One training round: confidentiality within clusters, temporal group testing over re-randomized clusters, robust aggregation.</a:t>
             </a:r>
           </a:p>
         </p:txBody>
       </p:sp>
       <p:pic>
         <p:nvPicPr>
-          <p:cNvPr id="5" name="Picture 4" descr="fig_architecture.png"/>
+          <p:cNvPr id="4" name="Picture 3" descr="fig_architecture.png"/>
           <p:cNvPicPr>
             <a:picLocks noChangeAspect="1"/>
           </p:cNvPicPr>
@@ -5940,8 +5430,8 @@
         </p:blipFill>
         <p:spPr>
           <a:xfrm>
-            <a:off x="2229285" y="2331720"/>
-            <a:ext cx="7733124" cy="3566160"/>
+            <a:off x="2179714" y="2240280"/>
+            <a:ext cx="7832267" cy="3611880"/>
           </a:xfrm>
           <a:prstGeom prst="rect">
             <a:avLst/>
@@ -5950,96 +5440,62 @@
       </p:pic>
       <p:sp>
         <p:nvSpPr>
+          <p:cNvPr id="5" name="TextBox 4"/>
+          <p:cNvSpPr txBox="1"/>
+          <p:nvPr/>
+        </p:nvSpPr>
+        <p:spPr>
+          <a:xfrm>
+            <a:off x="685800" y="5943600"/>
+            <a:ext cx="10881360" cy="502920"/>
+          </a:xfrm>
+          <a:prstGeom prst="rect">
+            <a:avLst/>
+          </a:prstGeom>
+          <a:noFill/>
+        </p:spPr>
+        <p:txBody>
+          <a:bodyPr wrap="square">
+            <a:spAutoFit/>
+          </a:bodyPr>
+          <a:lstStyle/>
+          <a:p>
+            <a:pPr>
+              <a:spcAft>
+                <a:spcPts val="100"/>
+              </a:spcAft>
+            </a:pPr>
+            <a:r>
+              <a:rPr sz="800" b="0" i="1">
+                <a:solidFill>
+                  <a:srgbClr val="2A78D6"/>
+                </a:solidFill>
+                <a:latin typeface="Segoe UI"/>
+              </a:rPr>
+              <a:t>[1] M. Xhemrishi, J. Östman, A. Wachter-Zeh, and A. Graell i Amat, "FedGT: Identification of malicious clients in federated learning with secure aggregation," IEEE Trans. Inf. Forensics Security, vol. 20, pp. 2577–2592, 2025.</a:t>
+            </a:r>
+          </a:p>
+          <a:p>
+            <a:pPr>
+              <a:spcAft>
+                <a:spcPts val="100"/>
+              </a:spcAft>
+            </a:pPr>
+            <a:r>
+              <a:rPr sz="800" b="0" i="1">
+                <a:solidFill>
+                  <a:srgbClr val="2A78D6"/>
+                </a:solidFill>
+                <a:latin typeface="Segoe UI"/>
+              </a:rPr>
+              <a:t>[2] K. Bonawitz, V. Ivanov, B. Kreuter, A. Marcedone, H. B. McMahan, S. Patel, D. Ramage, A. Segal, and K. Seth, "Practical secure aggregation for privacy-preserving machine learning," in Proc. ACM CCS, 2017, pp. 1175–1191.</a:t>
+            </a:r>
+          </a:p>
+        </p:txBody>
+      </p:sp>
+      <p:sp>
+        <p:nvSpPr>
           <p:cNvPr id="6" name="TextBox 5"/>
-          <p:cNvSpPr txBox="1"/>
-          <p:nvPr/>
-        </p:nvSpPr>
-        <p:spPr>
-          <a:xfrm>
-            <a:off x="685800" y="5870448"/>
-            <a:ext cx="10881360" cy="530352"/>
-          </a:xfrm>
-          <a:prstGeom prst="rect">
-            <a:avLst/>
-          </a:prstGeom>
-          <a:noFill/>
-        </p:spPr>
-        <p:txBody>
-          <a:bodyPr wrap="square">
-            <a:spAutoFit/>
-          </a:bodyPr>
-          <a:lstStyle/>
-          <a:p>
-            <a:pPr>
-              <a:spcAft>
-                <a:spcPts val="100"/>
-              </a:spcAft>
-            </a:pPr>
-            <a:r>
-              <a:rPr sz="800" b="0" i="1">
-                <a:solidFill>
-                  <a:srgbClr val="2A78D6"/>
-                </a:solidFill>
-                <a:latin typeface="Segoe UI"/>
-              </a:rPr>
-              <a:t>[1] M. Xhemrishi, J. Östman, A. Wachter-Zeh, and A. Graell i Amat, "FedGT: Identification of malicious clients in federated learning with secure aggregation," IEEE Trans. Inf. Forensics Security, vol. 20, pp. 2577–2592, 2025.</a:t>
-            </a:r>
-          </a:p>
-          <a:p>
-            <a:pPr>
-              <a:spcAft>
-                <a:spcPts val="100"/>
-              </a:spcAft>
-            </a:pPr>
-            <a:r>
-              <a:rPr sz="800" b="0" i="1">
-                <a:solidFill>
-                  <a:srgbClr val="2A78D6"/>
-                </a:solidFill>
-                <a:latin typeface="Segoe UI"/>
-              </a:rPr>
-              <a:t>[2] K. Bonawitz, V. Ivanov, B. Kreuter, A. Marcedone, H. B. McMahan, S. Patel, D. Ramage, A. Segal, and K. Seth, "Practical secure aggregation for privacy-preserving machine learning," in Proc. ACM CCS, 2017, pp. 1175–1191.</a:t>
-            </a:r>
-          </a:p>
-        </p:txBody>
-      </p:sp>
-      <p:sp>
-        <p:nvSpPr>
-          <p:cNvPr id="7" name="TextBox 6"/>
-          <p:cNvSpPr txBox="1"/>
-          <p:nvPr/>
-        </p:nvSpPr>
-        <p:spPr>
-          <a:xfrm>
-            <a:off x="685800" y="6446520"/>
-            <a:ext cx="7680960" cy="274320"/>
-          </a:xfrm>
-          <a:prstGeom prst="rect">
-            <a:avLst/>
-          </a:prstGeom>
-          <a:noFill/>
-        </p:spPr>
-        <p:txBody>
-          <a:bodyPr wrap="square">
-            <a:spAutoFit/>
-          </a:bodyPr>
-          <a:lstStyle/>
-          <a:p>
-            <a:r>
-              <a:rPr sz="1050" b="0" i="0">
-                <a:solidFill>
-                  <a:srgbClr val="898781"/>
-                </a:solidFill>
-                <a:latin typeface="Segoe UI"/>
-              </a:rPr>
-              <a:t>CB-SAFE · Suva &amp; Chowdhury · AIUB</a:t>
-            </a:r>
-          </a:p>
-        </p:txBody>
-      </p:sp>
-      <p:sp>
-        <p:nvSpPr>
-          <p:cNvPr id="8" name="TextBox 7"/>
           <p:cNvSpPr txBox="1"/>
           <p:nvPr/>
         </p:nvSpPr>
@@ -6098,28 +5554,28 @@
         </p:nvSpPr>
         <p:spPr>
           <a:xfrm>
-            <a:off x="685800" y="384048"/>
-            <a:ext cx="10881360" cy="320040"/>
-          </a:xfrm>
-          <a:prstGeom prst="rect">
-            <a:avLst/>
-          </a:prstGeom>
-          <a:noFill/>
-        </p:spPr>
-        <p:txBody>
-          <a:bodyPr wrap="square">
-            <a:spAutoFit/>
-          </a:bodyPr>
-          <a:lstStyle/>
-          <a:p>
-            <a:r>
-              <a:rPr sz="1200" b="1" i="0">
-                <a:solidFill>
-                  <a:srgbClr val="2A78D6"/>
-                </a:solidFill>
-                <a:latin typeface="Segoe UI"/>
-              </a:rPr>
-              <a:t>EXPERIMENTAL SETUP</a:t>
+            <a:off x="685800" y="438912"/>
+            <a:ext cx="10881360" cy="822960"/>
+          </a:xfrm>
+          <a:prstGeom prst="rect">
+            <a:avLst/>
+          </a:prstGeom>
+          <a:noFill/>
+        </p:spPr>
+        <p:txBody>
+          <a:bodyPr wrap="square">
+            <a:spAutoFit/>
+          </a:bodyPr>
+          <a:lstStyle/>
+          <a:p>
+            <a:r>
+              <a:rPr sz="3000" b="1" i="0">
+                <a:solidFill>
+                  <a:srgbClr val="0B0B0B"/>
+                </a:solidFill>
+                <a:latin typeface="Segoe UI"/>
+              </a:rPr>
+              <a:t>Experimental Setup</a:t>
             </a:r>
           </a:p>
         </p:txBody>
@@ -6132,42 +5588,8 @@
         </p:nvSpPr>
         <p:spPr>
           <a:xfrm>
-            <a:off x="685800" y="713232"/>
-            <a:ext cx="10881360" cy="822960"/>
-          </a:xfrm>
-          <a:prstGeom prst="rect">
-            <a:avLst/>
-          </a:prstGeom>
-          <a:noFill/>
-        </p:spPr>
-        <p:txBody>
-          <a:bodyPr wrap="square">
-            <a:spAutoFit/>
-          </a:bodyPr>
-          <a:lstStyle/>
-          <a:p>
-            <a:r>
-              <a:rPr sz="2700" b="1" i="0">
-                <a:solidFill>
-                  <a:srgbClr val="0B0B0B"/>
-                </a:solidFill>
-                <a:latin typeface="Segoe UI"/>
-              </a:rPr>
-              <a:t>Four datasets, two modalities, non-IID</a:t>
-            </a:r>
-          </a:p>
-        </p:txBody>
-      </p:sp>
-      <p:sp>
-        <p:nvSpPr>
-          <p:cNvPr id="4" name="TextBox 3"/>
-          <p:cNvSpPr txBox="1"/>
-          <p:nvPr/>
-        </p:nvSpPr>
-        <p:spPr>
-          <a:xfrm>
-            <a:off x="685800" y="1572768"/>
-            <a:ext cx="6400800" cy="3931920"/>
+            <a:off x="685800" y="1371600"/>
+            <a:ext cx="6949440" cy="3931920"/>
           </a:xfrm>
           <a:prstGeom prst="rect">
             <a:avLst/>
@@ -6251,14 +5673,14 @@
                 </a:solidFill>
                 <a:latin typeface="Segoe UI"/>
               </a:rPr>
-              <a:t>Attacks: sign-flip (laundering), label-flip, and backdoor. Baselines: mean, trimmed, median, Krum, Bulyan, RFA, FLTrust, FedGT.</a:t>
+              <a:t>Attacks: sign-flip (laundering), label-flip, backdoor. Baselines: mean, trimmed, median, Krum, Bulyan, RFA, FLTrust, FedGT.</a:t>
             </a:r>
           </a:p>
         </p:txBody>
       </p:sp>
       <p:pic>
         <p:nvPicPr>
-          <p:cNvPr id="5" name="Picture 4" descr="fig_dirichlet_slide.png"/>
+          <p:cNvPr id="4" name="Picture 3" descr="shot_dirichlet_fig.png"/>
           <p:cNvPicPr>
             <a:picLocks noChangeAspect="1"/>
           </p:cNvPicPr>
@@ -6272,8 +5694,8 @@
         </p:blipFill>
         <p:spPr>
           <a:xfrm>
-            <a:off x="7315200" y="1709928"/>
-            <a:ext cx="4480560" cy="3442171"/>
+            <a:off x="7315200" y="1463040"/>
+            <a:ext cx="4480560" cy="4774367"/>
           </a:xfrm>
           <a:prstGeom prst="rect">
             <a:avLst/>
@@ -6282,96 +5704,62 @@
       </p:pic>
       <p:sp>
         <p:nvSpPr>
+          <p:cNvPr id="5" name="TextBox 4"/>
+          <p:cNvSpPr txBox="1"/>
+          <p:nvPr/>
+        </p:nvSpPr>
+        <p:spPr>
+          <a:xfrm>
+            <a:off x="685800" y="5943600"/>
+            <a:ext cx="10881360" cy="502920"/>
+          </a:xfrm>
+          <a:prstGeom prst="rect">
+            <a:avLst/>
+          </a:prstGeom>
+          <a:noFill/>
+        </p:spPr>
+        <p:txBody>
+          <a:bodyPr wrap="square">
+            <a:spAutoFit/>
+          </a:bodyPr>
+          <a:lstStyle/>
+          <a:p>
+            <a:pPr>
+              <a:spcAft>
+                <a:spcPts val="100"/>
+              </a:spcAft>
+            </a:pPr>
+            <a:r>
+              <a:rPr sz="800" b="0" i="1">
+                <a:solidFill>
+                  <a:srgbClr val="2A78D6"/>
+                </a:solidFill>
+                <a:latin typeface="Segoe UI"/>
+              </a:rPr>
+              <a:t>[1] M. Xhemrishi, J. Östman, A. Wachter-Zeh, and A. Graell i Amat, "FedGT: Identification of malicious clients in federated learning with secure aggregation," IEEE Trans. Inf. Forensics Security, vol. 20, pp. 2577–2592, 2025.</a:t>
+            </a:r>
+          </a:p>
+          <a:p>
+            <a:pPr>
+              <a:spcAft>
+                <a:spcPts val="100"/>
+              </a:spcAft>
+            </a:pPr>
+            <a:r>
+              <a:rPr sz="800" b="0" i="1">
+                <a:solidFill>
+                  <a:srgbClr val="2A78D6"/>
+                </a:solidFill>
+                <a:latin typeface="Segoe UI"/>
+              </a:rPr>
+              <a:t>[6] D. Yin, Y. Chen, R. Kannan, and P. Bartlett, "Byzantine-robust distributed learning: Towards optimal statistical rates," in Proc. ICML, 2018, pp. 5650–5659.</a:t>
+            </a:r>
+          </a:p>
+        </p:txBody>
+      </p:sp>
+      <p:sp>
+        <p:nvSpPr>
           <p:cNvPr id="6" name="TextBox 5"/>
-          <p:cNvSpPr txBox="1"/>
-          <p:nvPr/>
-        </p:nvSpPr>
-        <p:spPr>
-          <a:xfrm>
-            <a:off x="685800" y="5870448"/>
-            <a:ext cx="10881360" cy="530352"/>
-          </a:xfrm>
-          <a:prstGeom prst="rect">
-            <a:avLst/>
-          </a:prstGeom>
-          <a:noFill/>
-        </p:spPr>
-        <p:txBody>
-          <a:bodyPr wrap="square">
-            <a:spAutoFit/>
-          </a:bodyPr>
-          <a:lstStyle/>
-          <a:p>
-            <a:pPr>
-              <a:spcAft>
-                <a:spcPts val="100"/>
-              </a:spcAft>
-            </a:pPr>
-            <a:r>
-              <a:rPr sz="800" b="0" i="1">
-                <a:solidFill>
-                  <a:srgbClr val="2A78D6"/>
-                </a:solidFill>
-                <a:latin typeface="Segoe UI"/>
-              </a:rPr>
-              <a:t>[1] M. Xhemrishi, J. Östman, A. Wachter-Zeh, and A. Graell i Amat, "FedGT: Identification of malicious clients in federated learning with secure aggregation," IEEE Trans. Inf. Forensics Security, vol. 20, pp. 2577–2592, 2025.</a:t>
-            </a:r>
-          </a:p>
-          <a:p>
-            <a:pPr>
-              <a:spcAft>
-                <a:spcPts val="100"/>
-              </a:spcAft>
-            </a:pPr>
-            <a:r>
-              <a:rPr sz="800" b="0" i="1">
-                <a:solidFill>
-                  <a:srgbClr val="2A78D6"/>
-                </a:solidFill>
-                <a:latin typeface="Segoe UI"/>
-              </a:rPr>
-              <a:t>[6] D. Yin, Y. Chen, R. Kannan, and P. Bartlett, "Byzantine-robust distributed learning: Towards optimal statistical rates," in Proc. ICML, 2018, pp. 5650–5659.</a:t>
-            </a:r>
-          </a:p>
-        </p:txBody>
-      </p:sp>
-      <p:sp>
-        <p:nvSpPr>
-          <p:cNvPr id="7" name="TextBox 6"/>
-          <p:cNvSpPr txBox="1"/>
-          <p:nvPr/>
-        </p:nvSpPr>
-        <p:spPr>
-          <a:xfrm>
-            <a:off x="685800" y="6446520"/>
-            <a:ext cx="7680960" cy="274320"/>
-          </a:xfrm>
-          <a:prstGeom prst="rect">
-            <a:avLst/>
-          </a:prstGeom>
-          <a:noFill/>
-        </p:spPr>
-        <p:txBody>
-          <a:bodyPr wrap="square">
-            <a:spAutoFit/>
-          </a:bodyPr>
-          <a:lstStyle/>
-          <a:p>
-            <a:r>
-              <a:rPr sz="1050" b="0" i="0">
-                <a:solidFill>
-                  <a:srgbClr val="898781"/>
-                </a:solidFill>
-                <a:latin typeface="Segoe UI"/>
-              </a:rPr>
-              <a:t>CB-SAFE · Suva &amp; Chowdhury · AIUB</a:t>
-            </a:r>
-          </a:p>
-        </p:txBody>
-      </p:sp>
-      <p:sp>
-        <p:nvSpPr>
-          <p:cNvPr id="8" name="TextBox 7"/>
           <p:cNvSpPr txBox="1"/>
           <p:nvPr/>
         </p:nvSpPr>
@@ -6430,28 +5818,28 @@
         </p:nvSpPr>
         <p:spPr>
           <a:xfrm>
-            <a:off x="685800" y="384048"/>
-            <a:ext cx="10881360" cy="320040"/>
-          </a:xfrm>
-          <a:prstGeom prst="rect">
-            <a:avLst/>
-          </a:prstGeom>
-          <a:noFill/>
-        </p:spPr>
-        <p:txBody>
-          <a:bodyPr wrap="square">
-            <a:spAutoFit/>
-          </a:bodyPr>
-          <a:lstStyle/>
-          <a:p>
-            <a:r>
-              <a:rPr sz="1200" b="1" i="0">
-                <a:solidFill>
-                  <a:srgbClr val="2A78D6"/>
-                </a:solidFill>
-                <a:latin typeface="Segoe UI"/>
-              </a:rPr>
-              <a:t>MAIN RESULT (1 / 2) · ROBUSTNESS</a:t>
+            <a:off x="685800" y="438912"/>
+            <a:ext cx="10881360" cy="822960"/>
+          </a:xfrm>
+          <a:prstGeom prst="rect">
+            <a:avLst/>
+          </a:prstGeom>
+          <a:noFill/>
+        </p:spPr>
+        <p:txBody>
+          <a:bodyPr wrap="square">
+            <a:spAutoFit/>
+          </a:bodyPr>
+          <a:lstStyle/>
+          <a:p>
+            <a:r>
+              <a:rPr sz="3000" b="1" i="0">
+                <a:solidFill>
+                  <a:srgbClr val="0B0B0B"/>
+                </a:solidFill>
+                <a:latin typeface="Segoe UI"/>
+              </a:rPr>
+              <a:t>Results: Robustness</a:t>
             </a:r>
           </a:p>
         </p:txBody>
@@ -6464,28 +5852,28 @@
         </p:nvSpPr>
         <p:spPr>
           <a:xfrm>
-            <a:off x="685800" y="713232"/>
-            <a:ext cx="10881360" cy="822960"/>
-          </a:xfrm>
-          <a:prstGeom prst="rect">
-            <a:avLst/>
-          </a:prstGeom>
-          <a:noFill/>
-        </p:spPr>
-        <p:txBody>
-          <a:bodyPr wrap="square">
-            <a:spAutoFit/>
-          </a:bodyPr>
-          <a:lstStyle/>
-          <a:p>
-            <a:r>
-              <a:rPr sz="2700" b="1" i="0">
-                <a:solidFill>
-                  <a:srgbClr val="0B0B0B"/>
-                </a:solidFill>
-                <a:latin typeface="Segoe UI"/>
-              </a:rPr>
-              <a:t>Baselines collapse; CB-SAFE+ holds</a:t>
+            <a:off x="685800" y="1371600"/>
+            <a:ext cx="10881360" cy="457200"/>
+          </a:xfrm>
+          <a:prstGeom prst="rect">
+            <a:avLst/>
+          </a:prstGeom>
+          <a:noFill/>
+        </p:spPr>
+        <p:txBody>
+          <a:bodyPr wrap="square">
+            <a:spAutoFit/>
+          </a:bodyPr>
+          <a:lstStyle/>
+          <a:p>
+            <a:r>
+              <a:rPr sz="1400" b="0" i="1">
+                <a:solidFill>
+                  <a:srgbClr val="26251F"/>
+                </a:solidFill>
+                <a:latin typeface="Segoe UI"/>
+              </a:rPr>
+              <a:t>Sign-flip test accuracy across four datasets (from the paper, Table V).</a:t>
             </a:r>
           </a:p>
         </p:txBody>
@@ -6498,7 +5886,7 @@
         </p:nvSpPr>
         <p:spPr>
           <a:xfrm>
-            <a:off x="685800" y="1572768"/>
+            <a:off x="685800" y="1828800"/>
             <a:ext cx="10881360" cy="3931920"/>
           </a:xfrm>
           <a:prstGeom prst="rect">
@@ -6533,84 +5921,14 @@
                 </a:solidFill>
                 <a:latin typeface="Segoe UI"/>
               </a:rPr>
-              <a:t>Under sign-flip at f ≥ 0.2, </a:t>
-            </a:r>
-            <a:r>
-              <a:rPr sz="1500" b="1" i="0">
-                <a:solidFill>
-                  <a:srgbClr val="0B0B0B"/>
-                </a:solidFill>
-                <a:latin typeface="Segoe UI"/>
-              </a:rPr>
-              <a:t>every coordinate-wise rule collapses to chance</a:t>
-            </a:r>
-            <a:r>
-              <a:rPr sz="1500" b="0" i="0">
-                <a:solidFill>
-                  <a:srgbClr val="26251F"/>
-                </a:solidFill>
-                <a:latin typeface="Segoe UI"/>
-              </a:rPr>
-              <a:t>; laundering makes poisoned means invisible.</a:t>
-            </a:r>
-          </a:p>
-          <a:p>
-            <a:pPr>
-              <a:spcAft>
-                <a:spcPts val="800"/>
-              </a:spcAft>
-            </a:pPr>
-            <a:r>
-              <a:rPr sz="1500">
-                <a:solidFill>
-                  <a:srgbClr val="2A78D6"/>
-                </a:solidFill>
-                <a:latin typeface="Segoe UI"/>
-              </a:rPr>
-              <a:t>▪  </a:t>
-            </a:r>
-            <a:r>
-              <a:rPr sz="1500" b="1" i="0">
-                <a:solidFill>
-                  <a:srgbClr val="0B0B0B"/>
-                </a:solidFill>
-                <a:latin typeface="Segoe UI"/>
-              </a:rPr>
-              <a:t>CB-SAFE+ tracks the clean baseline</a:t>
-            </a:r>
-            <a:r>
-              <a:rPr sz="1500" b="0" i="0">
-                <a:solidFill>
-                  <a:srgbClr val="26251F"/>
-                </a:solidFill>
-                <a:latin typeface="Segoe UI"/>
-              </a:rPr>
-              <a:t> across all four datasets and </a:t>
-            </a:r>
-            <a:r>
-              <a:rPr sz="1500" b="1" i="0">
-                <a:solidFill>
-                  <a:srgbClr val="0B0B0B"/>
-                </a:solidFill>
-                <a:latin typeface="Segoe UI"/>
-              </a:rPr>
-              <a:t>ties FedGT</a:t>
-            </a:r>
-            <a:r>
-              <a:rPr sz="1500" b="0" i="0">
-                <a:solidFill>
-                  <a:srgbClr val="26251F"/>
-                </a:solidFill>
-                <a:latin typeface="Segoe UI"/>
-              </a:rPr>
-              <a:t> while beating every other defense.</a:t>
+              <a:t>Under sign-flip at f ≥ 0.2 every coordinate-wise rule collapses to chance; CB-SAFE+ holds and ties FedGT.</a:t>
             </a:r>
           </a:p>
         </p:txBody>
       </p:sp>
       <p:pic>
         <p:nvPicPr>
-          <p:cNvPr id="5" name="Picture 4" descr="fig_dynamics_signflip_slide.png"/>
+          <p:cNvPr id="5" name="Picture 4" descr="shot_signflip_table.png"/>
           <p:cNvPicPr>
             <a:picLocks noChangeAspect="1"/>
           </p:cNvPicPr>
@@ -6624,8 +5942,8 @@
         </p:blipFill>
         <p:spPr>
           <a:xfrm>
-            <a:off x="4124680" y="2761488"/>
-            <a:ext cx="3942333" cy="2999232"/>
+            <a:off x="825017" y="2331720"/>
+            <a:ext cx="10541659" cy="3246120"/>
           </a:xfrm>
           <a:prstGeom prst="rect">
             <a:avLst/>
@@ -6640,8 +5958,8 @@
         </p:nvSpPr>
         <p:spPr>
           <a:xfrm>
-            <a:off x="685800" y="5870448"/>
-            <a:ext cx="10881360" cy="530352"/>
+            <a:off x="685800" y="5943600"/>
+            <a:ext cx="10881360" cy="502920"/>
           </a:xfrm>
           <a:prstGeom prst="rect">
             <a:avLst/>
@@ -6674,40 +5992,6 @@
       <p:sp>
         <p:nvSpPr>
           <p:cNvPr id="7" name="TextBox 6"/>
-          <p:cNvSpPr txBox="1"/>
-          <p:nvPr/>
-        </p:nvSpPr>
-        <p:spPr>
-          <a:xfrm>
-            <a:off x="685800" y="6446520"/>
-            <a:ext cx="7680960" cy="274320"/>
-          </a:xfrm>
-          <a:prstGeom prst="rect">
-            <a:avLst/>
-          </a:prstGeom>
-          <a:noFill/>
-        </p:spPr>
-        <p:txBody>
-          <a:bodyPr wrap="square">
-            <a:spAutoFit/>
-          </a:bodyPr>
-          <a:lstStyle/>
-          <a:p>
-            <a:r>
-              <a:rPr sz="1050" b="0" i="0">
-                <a:solidFill>
-                  <a:srgbClr val="898781"/>
-                </a:solidFill>
-                <a:latin typeface="Segoe UI"/>
-              </a:rPr>
-              <a:t>CB-SAFE · Suva &amp; Chowdhury · AIUB</a:t>
-            </a:r>
-          </a:p>
-        </p:txBody>
-      </p:sp>
-      <p:sp>
-        <p:nvSpPr>
-          <p:cNvPr id="8" name="TextBox 7"/>
           <p:cNvSpPr txBox="1"/>
           <p:nvPr/>
         </p:nvSpPr>
@@ -6766,28 +6050,28 @@
         </p:nvSpPr>
         <p:spPr>
           <a:xfrm>
-            <a:off x="685800" y="384048"/>
-            <a:ext cx="10881360" cy="320040"/>
-          </a:xfrm>
-          <a:prstGeom prst="rect">
-            <a:avLst/>
-          </a:prstGeom>
-          <a:noFill/>
-        </p:spPr>
-        <p:txBody>
-          <a:bodyPr wrap="square">
-            <a:spAutoFit/>
-          </a:bodyPr>
-          <a:lstStyle/>
-          <a:p>
-            <a:r>
-              <a:rPr sz="1200" b="1" i="0">
-                <a:solidFill>
-                  <a:srgbClr val="2A78D6"/>
-                </a:solidFill>
-                <a:latin typeface="Segoe UI"/>
-              </a:rPr>
-              <a:t>PROBLEM STATEMENT</a:t>
+            <a:off x="685800" y="438912"/>
+            <a:ext cx="10881360" cy="822960"/>
+          </a:xfrm>
+          <a:prstGeom prst="rect">
+            <a:avLst/>
+          </a:prstGeom>
+          <a:noFill/>
+        </p:spPr>
+        <p:txBody>
+          <a:bodyPr wrap="square">
+            <a:spAutoFit/>
+          </a:bodyPr>
+          <a:lstStyle/>
+          <a:p>
+            <a:r>
+              <a:rPr sz="3000" b="1" i="0">
+                <a:solidFill>
+                  <a:srgbClr val="0B0B0B"/>
+                </a:solidFill>
+                <a:latin typeface="Segoe UI"/>
+              </a:rPr>
+              <a:t>Introduction</a:t>
             </a:r>
           </a:p>
         </p:txBody>
@@ -6800,28 +6084,189 @@
         </p:nvSpPr>
         <p:spPr>
           <a:xfrm>
-            <a:off x="685800" y="713232"/>
-            <a:ext cx="10881360" cy="822960"/>
-          </a:xfrm>
-          <a:prstGeom prst="rect">
-            <a:avLst/>
-          </a:prstGeom>
-          <a:noFill/>
-        </p:spPr>
-        <p:txBody>
-          <a:bodyPr wrap="square">
-            <a:spAutoFit/>
-          </a:bodyPr>
-          <a:lstStyle/>
-          <a:p>
-            <a:r>
-              <a:rPr sz="2700" b="1" i="0">
+            <a:off x="685800" y="1371600"/>
+            <a:ext cx="10881360" cy="3931920"/>
+          </a:xfrm>
+          <a:prstGeom prst="rect">
+            <a:avLst/>
+          </a:prstGeom>
+          <a:noFill/>
+        </p:spPr>
+        <p:txBody>
+          <a:bodyPr wrap="square">
+            <a:spAutoFit/>
+          </a:bodyPr>
+          <a:lstStyle/>
+          <a:p>
+            <a:pPr>
+              <a:spcAft>
+                <a:spcPts val="800"/>
+              </a:spcAft>
+            </a:pPr>
+            <a:r>
+              <a:rPr sz="1500">
+                <a:solidFill>
+                  <a:srgbClr val="2A78D6"/>
+                </a:solidFill>
+                <a:latin typeface="Segoe UI"/>
+              </a:rPr>
+              <a:t>▪  </a:t>
+            </a:r>
+            <a:r>
+              <a:rPr sz="1500" b="0" i="0">
+                <a:solidFill>
+                  <a:srgbClr val="26251F"/>
+                </a:solidFill>
+                <a:latin typeface="Segoe UI"/>
+              </a:rPr>
+              <a:t>Federated learning shares model updates, not raw data, yet </a:t>
+            </a:r>
+            <a:r>
+              <a:rPr sz="1500" b="1" i="0">
                 <a:solidFill>
                   <a:srgbClr val="0B0B0B"/>
                 </a:solidFill>
                 <a:latin typeface="Segoe UI"/>
               </a:rPr>
-              <a:t>Three threats collide in one protocol</a:t>
+              <a:t>those updates still leak private training data</a:t>
+            </a:r>
+            <a:r>
+              <a:rPr sz="1500" b="0" i="0">
+                <a:solidFill>
+                  <a:srgbClr val="26251F"/>
+                </a:solidFill>
+                <a:latin typeface="Segoe UI"/>
+              </a:rPr>
+              <a:t>.</a:t>
+            </a:r>
+          </a:p>
+          <a:p>
+            <a:pPr>
+              <a:spcAft>
+                <a:spcPts val="800"/>
+              </a:spcAft>
+            </a:pPr>
+            <a:r>
+              <a:rPr sz="1500">
+                <a:solidFill>
+                  <a:srgbClr val="2A78D6"/>
+                </a:solidFill>
+                <a:latin typeface="Segoe UI"/>
+              </a:rPr>
+              <a:t>▪  </a:t>
+            </a:r>
+            <a:r>
+              <a:rPr sz="1500" b="0" i="0">
+                <a:solidFill>
+                  <a:srgbClr val="26251F"/>
+                </a:solidFill>
+                <a:latin typeface="Segoe UI"/>
+              </a:rPr>
+              <a:t>Secure aggregation hides updates behind masks, but its key exchange </a:t>
+            </a:r>
+            <a:r>
+              <a:rPr sz="1500" b="1" i="0">
+                <a:solidFill>
+                  <a:srgbClr val="0B0B0B"/>
+                </a:solidFill>
+                <a:latin typeface="Segoe UI"/>
+              </a:rPr>
+              <a:t>breaks under a quantum computer</a:t>
+            </a:r>
+            <a:r>
+              <a:rPr sz="1500" b="0" i="0">
+                <a:solidFill>
+                  <a:srgbClr val="26251F"/>
+                </a:solidFill>
+                <a:latin typeface="Segoe UI"/>
+              </a:rPr>
+              <a:t> (harvest-now, decrypt-later).</a:t>
+            </a:r>
+          </a:p>
+          <a:p>
+            <a:pPr>
+              <a:spcAft>
+                <a:spcPts val="800"/>
+              </a:spcAft>
+            </a:pPr>
+            <a:r>
+              <a:rPr sz="1500">
+                <a:solidFill>
+                  <a:srgbClr val="2A78D6"/>
+                </a:solidFill>
+                <a:latin typeface="Segoe UI"/>
+              </a:rPr>
+              <a:t>▪  </a:t>
+            </a:r>
+            <a:r>
+              <a:rPr sz="1500" b="0" i="0">
+                <a:solidFill>
+                  <a:srgbClr val="26251F"/>
+                </a:solidFill>
+                <a:latin typeface="Segoe UI"/>
+              </a:rPr>
+              <a:t>Every post-quantum fix today is </a:t>
+            </a:r>
+            <a:r>
+              <a:rPr sz="1500" b="1" i="0">
+                <a:solidFill>
+                  <a:srgbClr val="0B0B0B"/>
+                </a:solidFill>
+                <a:latin typeface="Segoe UI"/>
+              </a:rPr>
+              <a:t>lattice-only, a monoculture</a:t>
+            </a:r>
+            <a:r>
+              <a:rPr sz="1500" b="0" i="0">
+                <a:solidFill>
+                  <a:srgbClr val="26251F"/>
+                </a:solidFill>
+                <a:latin typeface="Segoe UI"/>
+              </a:rPr>
+              <a:t>; and hiding updates also blinds the server to poisoned ones.</a:t>
+            </a:r>
+          </a:p>
+          <a:p>
+            <a:pPr>
+              <a:spcAft>
+                <a:spcPts val="800"/>
+              </a:spcAft>
+            </a:pPr>
+            <a:r>
+              <a:rPr sz="1500">
+                <a:solidFill>
+                  <a:srgbClr val="2A78D6"/>
+                </a:solidFill>
+                <a:latin typeface="Segoe UI"/>
+              </a:rPr>
+              <a:t>▪  </a:t>
+            </a:r>
+            <a:r>
+              <a:rPr sz="1500" b="0" i="0">
+                <a:solidFill>
+                  <a:srgbClr val="26251F"/>
+                </a:solidFill>
+                <a:latin typeface="Segoe UI"/>
+              </a:rPr>
+              <a:t>Goal: one protocol that is </a:t>
+            </a:r>
+            <a:r>
+              <a:rPr sz="1500" b="1" i="0">
+                <a:solidFill>
+                  <a:srgbClr val="0B0B0B"/>
+                </a:solidFill>
+                <a:latin typeface="Segoe UI"/>
+              </a:rPr>
+              <a:t>private, post-quantum with crypto diversity, and Byzantine-robust</a:t>
+            </a:r>
+            <a:r>
+              <a:rPr sz="1500" b="0" i="0">
+                <a:solidFill>
+                  <a:srgbClr val="26251F"/>
+                </a:solidFill>
+                <a:latin typeface="Segoe UI"/>
+              </a:rPr>
+              <a:t>.</a:t>
             </a:r>
           </a:p>
         </p:txBody>
@@ -6834,189 +6279,33 @@
         </p:nvSpPr>
         <p:spPr>
           <a:xfrm>
-            <a:off x="685800" y="1572768"/>
-            <a:ext cx="10881360" cy="3931920"/>
-          </a:xfrm>
-          <a:prstGeom prst="rect">
-            <a:avLst/>
-          </a:prstGeom>
-          <a:noFill/>
-        </p:spPr>
-        <p:txBody>
-          <a:bodyPr wrap="square">
-            <a:spAutoFit/>
-          </a:bodyPr>
-          <a:lstStyle/>
-          <a:p>
-            <a:pPr>
-              <a:spcAft>
-                <a:spcPts val="800"/>
-              </a:spcAft>
-            </a:pPr>
-            <a:r>
-              <a:rPr sz="1500">
-                <a:solidFill>
-                  <a:srgbClr val="2A78D6"/>
-                </a:solidFill>
-                <a:latin typeface="Segoe UI"/>
-              </a:rPr>
-              <a:t>▪  </a:t>
-            </a:r>
-            <a:r>
-              <a:rPr sz="1500" b="0" i="0">
-                <a:solidFill>
-                  <a:srgbClr val="26251F"/>
-                </a:solidFill>
-                <a:latin typeface="Segoe UI"/>
-              </a:rPr>
-              <a:t>Federated learning shares model updates, not raw data, yet </a:t>
-            </a:r>
-            <a:r>
-              <a:rPr sz="1500" b="1" i="0">
-                <a:solidFill>
-                  <a:srgbClr val="0B0B0B"/>
-                </a:solidFill>
-                <a:latin typeface="Segoe UI"/>
-              </a:rPr>
-              <a:t>those updates still leak private training data</a:t>
-            </a:r>
-            <a:r>
-              <a:rPr sz="1500" b="0" i="0">
-                <a:solidFill>
-                  <a:srgbClr val="26251F"/>
-                </a:solidFill>
-                <a:latin typeface="Segoe UI"/>
-              </a:rPr>
-              <a:t>.</a:t>
-            </a:r>
-          </a:p>
-          <a:p>
-            <a:pPr>
-              <a:spcAft>
-                <a:spcPts val="800"/>
-              </a:spcAft>
-            </a:pPr>
-            <a:r>
-              <a:rPr sz="1500">
-                <a:solidFill>
-                  <a:srgbClr val="2A78D6"/>
-                </a:solidFill>
-                <a:latin typeface="Segoe UI"/>
-              </a:rPr>
-              <a:t>▪  </a:t>
-            </a:r>
-            <a:r>
-              <a:rPr sz="1500" b="0" i="0">
-                <a:solidFill>
-                  <a:srgbClr val="26251F"/>
-                </a:solidFill>
-                <a:latin typeface="Segoe UI"/>
-              </a:rPr>
-              <a:t>Secure aggregation hides updates behind masks, but its key exchange </a:t>
-            </a:r>
-            <a:r>
-              <a:rPr sz="1500" b="1" i="0">
-                <a:solidFill>
-                  <a:srgbClr val="0B0B0B"/>
-                </a:solidFill>
-                <a:latin typeface="Segoe UI"/>
-              </a:rPr>
-              <a:t>breaks under a quantum computer</a:t>
-            </a:r>
-            <a:r>
-              <a:rPr sz="1500" b="0" i="0">
-                <a:solidFill>
-                  <a:srgbClr val="26251F"/>
-                </a:solidFill>
-                <a:latin typeface="Segoe UI"/>
-              </a:rPr>
-              <a:t> (harvest-now, decrypt-later).</a:t>
-            </a:r>
-          </a:p>
-          <a:p>
-            <a:pPr>
-              <a:spcAft>
-                <a:spcPts val="800"/>
-              </a:spcAft>
-            </a:pPr>
-            <a:r>
-              <a:rPr sz="1500">
-                <a:solidFill>
-                  <a:srgbClr val="2A78D6"/>
-                </a:solidFill>
-                <a:latin typeface="Segoe UI"/>
-              </a:rPr>
-              <a:t>▪  </a:t>
-            </a:r>
-            <a:r>
-              <a:rPr sz="1500" b="0" i="0">
-                <a:solidFill>
-                  <a:srgbClr val="26251F"/>
-                </a:solidFill>
-                <a:latin typeface="Segoe UI"/>
-              </a:rPr>
-              <a:t>Every post-quantum fix today is </a:t>
-            </a:r>
-            <a:r>
-              <a:rPr sz="1500" b="1" i="0">
-                <a:solidFill>
-                  <a:srgbClr val="0B0B0B"/>
-                </a:solidFill>
-                <a:latin typeface="Segoe UI"/>
-              </a:rPr>
-              <a:t>lattice-only, a monoculture</a:t>
-            </a:r>
-            <a:r>
-              <a:rPr sz="1500" b="0" i="0">
-                <a:solidFill>
-                  <a:srgbClr val="26251F"/>
-                </a:solidFill>
-                <a:latin typeface="Segoe UI"/>
-              </a:rPr>
-              <a:t>; and hiding updates also blinds the server to poisoned ones.</a:t>
-            </a:r>
-          </a:p>
-          <a:p>
-            <a:pPr>
-              <a:spcAft>
-                <a:spcPts val="800"/>
-              </a:spcAft>
-            </a:pPr>
-            <a:r>
-              <a:rPr sz="1500">
-                <a:solidFill>
-                  <a:srgbClr val="2A78D6"/>
-                </a:solidFill>
-                <a:latin typeface="Segoe UI"/>
-              </a:rPr>
-              <a:t>▪  </a:t>
-            </a:r>
-            <a:r>
-              <a:rPr sz="1500" b="0" i="0">
-                <a:solidFill>
-                  <a:srgbClr val="26251F"/>
-                </a:solidFill>
-                <a:latin typeface="Segoe UI"/>
-              </a:rPr>
-              <a:t>Goal: one protocol that is </a:t>
-            </a:r>
-            <a:r>
-              <a:rPr sz="1500" b="1" i="0">
-                <a:solidFill>
-                  <a:srgbClr val="0B0B0B"/>
-                </a:solidFill>
-                <a:latin typeface="Segoe UI"/>
-              </a:rPr>
-              <a:t>private, post-quantum with crypto diversity, and Byzantine-robust</a:t>
-            </a:r>
-            <a:r>
-              <a:rPr sz="1500" b="0" i="0">
-                <a:solidFill>
-                  <a:srgbClr val="26251F"/>
-                </a:solidFill>
-                <a:latin typeface="Segoe UI"/>
-              </a:rPr>
-              <a:t>.</a:t>
+            <a:off x="685800" y="5943600"/>
+            <a:ext cx="10881360" cy="502920"/>
+          </a:xfrm>
+          <a:prstGeom prst="rect">
+            <a:avLst/>
+          </a:prstGeom>
+          <a:noFill/>
+        </p:spPr>
+        <p:txBody>
+          <a:bodyPr wrap="square">
+            <a:spAutoFit/>
+          </a:bodyPr>
+          <a:lstStyle/>
+          <a:p>
+            <a:pPr>
+              <a:spcAft>
+                <a:spcPts val="100"/>
+              </a:spcAft>
+            </a:pPr>
+            <a:r>
+              <a:rPr sz="800" b="0" i="1">
+                <a:solidFill>
+                  <a:srgbClr val="2A78D6"/>
+                </a:solidFill>
+                <a:latin typeface="Segoe UI"/>
+              </a:rPr>
+              <a:t>[2] K. Bonawitz, V. Ivanov, B. Kreuter, A. Marcedone, H. B. McMahan, S. Patel, D. Ramage, A. Segal, and K. Seth, "Practical secure aggregation for privacy-preserving machine learning," in Proc. ACM CCS, 2017, pp. 1175–1191.</a:t>
             </a:r>
           </a:p>
         </p:txBody>
@@ -7024,79 +6313,6 @@
       <p:sp>
         <p:nvSpPr>
           <p:cNvPr id="5" name="TextBox 4"/>
-          <p:cNvSpPr txBox="1"/>
-          <p:nvPr/>
-        </p:nvSpPr>
-        <p:spPr>
-          <a:xfrm>
-            <a:off x="685800" y="5870448"/>
-            <a:ext cx="10881360" cy="530352"/>
-          </a:xfrm>
-          <a:prstGeom prst="rect">
-            <a:avLst/>
-          </a:prstGeom>
-          <a:noFill/>
-        </p:spPr>
-        <p:txBody>
-          <a:bodyPr wrap="square">
-            <a:spAutoFit/>
-          </a:bodyPr>
-          <a:lstStyle/>
-          <a:p>
-            <a:pPr>
-              <a:spcAft>
-                <a:spcPts val="100"/>
-              </a:spcAft>
-            </a:pPr>
-            <a:r>
-              <a:rPr sz="800" b="0" i="1">
-                <a:solidFill>
-                  <a:srgbClr val="2A78D6"/>
-                </a:solidFill>
-                <a:latin typeface="Segoe UI"/>
-              </a:rPr>
-              <a:t>[2] K. Bonawitz, V. Ivanov, B. Kreuter, A. Marcedone, H. B. McMahan, S. Patel, D. Ramage, A. Segal, and K. Seth, "Practical secure aggregation for privacy-preserving machine learning," in Proc. ACM CCS, 2017, pp. 1175–1191.</a:t>
-            </a:r>
-          </a:p>
-        </p:txBody>
-      </p:sp>
-      <p:sp>
-        <p:nvSpPr>
-          <p:cNvPr id="6" name="TextBox 5"/>
-          <p:cNvSpPr txBox="1"/>
-          <p:nvPr/>
-        </p:nvSpPr>
-        <p:spPr>
-          <a:xfrm>
-            <a:off x="685800" y="6446520"/>
-            <a:ext cx="7680960" cy="274320"/>
-          </a:xfrm>
-          <a:prstGeom prst="rect">
-            <a:avLst/>
-          </a:prstGeom>
-          <a:noFill/>
-        </p:spPr>
-        <p:txBody>
-          <a:bodyPr wrap="square">
-            <a:spAutoFit/>
-          </a:bodyPr>
-          <a:lstStyle/>
-          <a:p>
-            <a:r>
-              <a:rPr sz="1050" b="0" i="0">
-                <a:solidFill>
-                  <a:srgbClr val="898781"/>
-                </a:solidFill>
-                <a:latin typeface="Segoe UI"/>
-              </a:rPr>
-              <a:t>CB-SAFE · Suva &amp; Chowdhury · AIUB</a:t>
-            </a:r>
-          </a:p>
-        </p:txBody>
-      </p:sp>
-      <p:sp>
-        <p:nvSpPr>
-          <p:cNvPr id="7" name="TextBox 6"/>
           <p:cNvSpPr txBox="1"/>
           <p:nvPr/>
         </p:nvSpPr>
@@ -7155,28 +6371,28 @@
         </p:nvSpPr>
         <p:spPr>
           <a:xfrm>
-            <a:off x="685800" y="384048"/>
-            <a:ext cx="10881360" cy="320040"/>
-          </a:xfrm>
-          <a:prstGeom prst="rect">
-            <a:avLst/>
-          </a:prstGeom>
-          <a:noFill/>
-        </p:spPr>
-        <p:txBody>
-          <a:bodyPr wrap="square">
-            <a:spAutoFit/>
-          </a:bodyPr>
-          <a:lstStyle/>
-          <a:p>
-            <a:r>
-              <a:rPr sz="1200" b="1" i="0">
-                <a:solidFill>
-                  <a:srgbClr val="2A78D6"/>
-                </a:solidFill>
-                <a:latin typeface="Segoe UI"/>
-              </a:rPr>
-              <a:t>MAIN RESULT (2 / 2) · DETECTION</a:t>
+            <a:off x="685800" y="438912"/>
+            <a:ext cx="10881360" cy="822960"/>
+          </a:xfrm>
+          <a:prstGeom prst="rect">
+            <a:avLst/>
+          </a:prstGeom>
+          <a:noFill/>
+        </p:spPr>
+        <p:txBody>
+          <a:bodyPr wrap="square">
+            <a:spAutoFit/>
+          </a:bodyPr>
+          <a:lstStyle/>
+          <a:p>
+            <a:r>
+              <a:rPr sz="3000" b="1" i="0">
+                <a:solidFill>
+                  <a:srgbClr val="0B0B0B"/>
+                </a:solidFill>
+                <a:latin typeface="Segoe UI"/>
+              </a:rPr>
+              <a:t>Results: Detection</a:t>
             </a:r>
           </a:p>
         </p:txBody>
@@ -7189,28 +6405,28 @@
         </p:nvSpPr>
         <p:spPr>
           <a:xfrm>
-            <a:off x="685800" y="713232"/>
-            <a:ext cx="10881360" cy="822960"/>
-          </a:xfrm>
-          <a:prstGeom prst="rect">
-            <a:avLst/>
-          </a:prstGeom>
-          <a:noFill/>
-        </p:spPr>
-        <p:txBody>
-          <a:bodyPr wrap="square">
-            <a:spAutoFit/>
-          </a:bodyPr>
-          <a:lstStyle/>
-          <a:p>
-            <a:r>
-              <a:rPr sz="2700" b="1" i="0">
-                <a:solidFill>
-                  <a:srgbClr val="0B0B0B"/>
-                </a:solidFill>
-                <a:latin typeface="Segoe UI"/>
-              </a:rPr>
-              <a:t>It names attackers the server never sees</a:t>
+            <a:off x="685800" y="1371600"/>
+            <a:ext cx="10881360" cy="457200"/>
+          </a:xfrm>
+          <a:prstGeom prst="rect">
+            <a:avLst/>
+          </a:prstGeom>
+          <a:noFill/>
+        </p:spPr>
+        <p:txBody>
+          <a:bodyPr wrap="square">
+            <a:spAutoFit/>
+          </a:bodyPr>
+          <a:lstStyle/>
+          <a:p>
+            <a:r>
+              <a:rPr sz="1400" b="0" i="1">
+                <a:solidFill>
+                  <a:srgbClr val="26251F"/>
+                </a:solidFill>
+                <a:latin typeface="Segoe UI"/>
+              </a:rPr>
+              <a:t>Temporal suspicion separation (from the paper, Fig. 8).</a:t>
             </a:r>
           </a:p>
         </p:txBody>
@@ -7223,7 +6439,7 @@
         </p:nvSpPr>
         <p:spPr>
           <a:xfrm>
-            <a:off x="685800" y="1572768"/>
+            <a:off x="685800" y="1828800"/>
             <a:ext cx="10881360" cy="3931920"/>
           </a:xfrm>
           <a:prstGeom prst="rect">
@@ -7258,48 +6474,14 @@
                 </a:solidFill>
                 <a:latin typeface="Segoe UI"/>
               </a:rPr>
-              <a:t>Malicious suspicion separates cleanly from honest across rounds, matching the predicted honest rate p_h.</a:t>
-            </a:r>
-          </a:p>
-          <a:p>
-            <a:pPr>
-              <a:spcAft>
-                <a:spcPts val="800"/>
-              </a:spcAft>
-            </a:pPr>
-            <a:r>
-              <a:rPr sz="1500">
-                <a:solidFill>
-                  <a:srgbClr val="2A78D6"/>
-                </a:solidFill>
-                <a:latin typeface="Segoe UI"/>
-              </a:rPr>
-              <a:t>▪  </a:t>
-            </a:r>
-            <a:r>
-              <a:rPr sz="1500" b="1" i="0">
-                <a:solidFill>
-                  <a:srgbClr val="0B0B0B"/>
-                </a:solidFill>
-                <a:latin typeface="Segoe UI"/>
-              </a:rPr>
-              <a:t>Equal catch to FedGT (3/3, 6/6, 9/9) with far fewer false exclusions: 0.0 / 0.7 / 0.3 vs 1.3 / 3.3 / 1.3</a:t>
-            </a:r>
-            <a:r>
-              <a:rPr sz="1500" b="0" i="0">
-                <a:solidFill>
-                  <a:srgbClr val="26251F"/>
-                </a:solidFill>
-                <a:latin typeface="Segoe UI"/>
-              </a:rPr>
-              <a:t>.</a:t>
+              <a:t>Malicious and honest suspicion separate within a few rounds; attackers are named from group-level observations alone.</a:t>
             </a:r>
           </a:p>
         </p:txBody>
       </p:sp>
       <p:pic>
         <p:nvPicPr>
-          <p:cNvPr id="5" name="Picture 4" descr="fig_suspicion_slide.png"/>
+          <p:cNvPr id="5" name="Picture 4" descr="shot_suspicion_fig.png"/>
           <p:cNvPicPr>
             <a:picLocks noChangeAspect="1"/>
           </p:cNvPicPr>
@@ -7313,8 +6495,8 @@
         </p:blipFill>
         <p:spPr>
           <a:xfrm>
-            <a:off x="1936027" y="2926080"/>
-            <a:ext cx="8319639" cy="2743200"/>
+            <a:off x="2306507" y="2514600"/>
+            <a:ext cx="7578681" cy="3108960"/>
           </a:xfrm>
           <a:prstGeom prst="rect">
             <a:avLst/>
@@ -7329,8 +6511,8 @@
         </p:nvSpPr>
         <p:spPr>
           <a:xfrm>
-            <a:off x="685800" y="5870448"/>
-            <a:ext cx="10881360" cy="530352"/>
+            <a:off x="685800" y="5943600"/>
+            <a:ext cx="10881360" cy="502920"/>
           </a:xfrm>
           <a:prstGeom prst="rect">
             <a:avLst/>
@@ -7363,40 +6545,6 @@
       <p:sp>
         <p:nvSpPr>
           <p:cNvPr id="7" name="TextBox 6"/>
-          <p:cNvSpPr txBox="1"/>
-          <p:nvPr/>
-        </p:nvSpPr>
-        <p:spPr>
-          <a:xfrm>
-            <a:off x="685800" y="6446520"/>
-            <a:ext cx="7680960" cy="274320"/>
-          </a:xfrm>
-          <a:prstGeom prst="rect">
-            <a:avLst/>
-          </a:prstGeom>
-          <a:noFill/>
-        </p:spPr>
-        <p:txBody>
-          <a:bodyPr wrap="square">
-            <a:spAutoFit/>
-          </a:bodyPr>
-          <a:lstStyle/>
-          <a:p>
-            <a:r>
-              <a:rPr sz="1050" b="0" i="0">
-                <a:solidFill>
-                  <a:srgbClr val="898781"/>
-                </a:solidFill>
-                <a:latin typeface="Segoe UI"/>
-              </a:rPr>
-              <a:t>CB-SAFE · Suva &amp; Chowdhury · AIUB</a:t>
-            </a:r>
-          </a:p>
-        </p:txBody>
-      </p:sp>
-      <p:sp>
-        <p:nvSpPr>
-          <p:cNvPr id="8" name="TextBox 7"/>
           <p:cNvSpPr txBox="1"/>
           <p:nvPr/>
         </p:nvSpPr>
@@ -7455,28 +6603,28 @@
         </p:nvSpPr>
         <p:spPr>
           <a:xfrm>
-            <a:off x="685800" y="384048"/>
-            <a:ext cx="10881360" cy="320040"/>
-          </a:xfrm>
-          <a:prstGeom prst="rect">
-            <a:avLst/>
-          </a:prstGeom>
-          <a:noFill/>
-        </p:spPr>
-        <p:txBody>
-          <a:bodyPr wrap="square">
-            <a:spAutoFit/>
-          </a:bodyPr>
-          <a:lstStyle/>
-          <a:p>
-            <a:r>
-              <a:rPr sz="1200" b="1" i="0">
-                <a:solidFill>
-                  <a:srgbClr val="2A78D6"/>
-                </a:solidFill>
-                <a:latin typeface="Segoe UI"/>
-              </a:rPr>
-              <a:t>GENERALIZATION</a:t>
+            <a:off x="685800" y="438912"/>
+            <a:ext cx="10881360" cy="822960"/>
+          </a:xfrm>
+          <a:prstGeom prst="rect">
+            <a:avLst/>
+          </a:prstGeom>
+          <a:noFill/>
+        </p:spPr>
+        <p:txBody>
+          <a:bodyPr wrap="square">
+            <a:spAutoFit/>
+          </a:bodyPr>
+          <a:lstStyle/>
+          <a:p>
+            <a:r>
+              <a:rPr sz="3000" b="1" i="0">
+                <a:solidFill>
+                  <a:srgbClr val="0B0B0B"/>
+                </a:solidFill>
+                <a:latin typeface="Segoe UI"/>
+              </a:rPr>
+              <a:t>Results: Generalization</a:t>
             </a:r>
           </a:p>
         </p:txBody>
@@ -7489,28 +6637,28 @@
         </p:nvSpPr>
         <p:spPr>
           <a:xfrm>
-            <a:off x="685800" y="713232"/>
-            <a:ext cx="10881360" cy="822960"/>
-          </a:xfrm>
-          <a:prstGeom prst="rect">
-            <a:avLst/>
-          </a:prstGeom>
-          <a:noFill/>
-        </p:spPr>
-        <p:txBody>
-          <a:bodyPr wrap="square">
-            <a:spAutoFit/>
-          </a:bodyPr>
-          <a:lstStyle/>
-          <a:p>
-            <a:r>
-              <a:rPr sz="2700" b="1" i="0">
-                <a:solidFill>
-                  <a:srgbClr val="0B0B0B"/>
-                </a:solidFill>
-                <a:latin typeface="Segoe UI"/>
-              </a:rPr>
-              <a:t>No robust rule collapses under label-flip</a:t>
+            <a:off x="685800" y="1371600"/>
+            <a:ext cx="10881360" cy="457200"/>
+          </a:xfrm>
+          <a:prstGeom prst="rect">
+            <a:avLst/>
+          </a:prstGeom>
+          <a:noFill/>
+        </p:spPr>
+        <p:txBody>
+          <a:bodyPr wrap="square">
+            <a:spAutoFit/>
+          </a:bodyPr>
+          <a:lstStyle/>
+          <a:p>
+            <a:r>
+              <a:rPr sz="1400" b="0" i="1">
+                <a:solidFill>
+                  <a:srgbClr val="26251F"/>
+                </a:solidFill>
+                <a:latin typeface="Segoe UI"/>
+              </a:rPr>
+              <a:t>Label-flip test accuracy (from the paper, Table VI); CB-SAFE+ wins EMNIST outright.</a:t>
             </a:r>
           </a:p>
         </p:txBody>
@@ -7523,8 +6671,8 @@
         </p:nvSpPr>
         <p:spPr>
           <a:xfrm>
-            <a:off x="685800" y="1572768"/>
-            <a:ext cx="6583680" cy="3931920"/>
+            <a:off x="685800" y="1828800"/>
+            <a:ext cx="10881360" cy="3931920"/>
           </a:xfrm>
           <a:prstGeom prst="rect">
             <a:avLst/>
@@ -7558,71 +6706,45 @@
                 </a:solidFill>
                 <a:latin typeface="Segoe UI"/>
               </a:rPr>
-              <a:t>Label-flip is a milder attack, and it doubles as a control: unlike sign-flip, coordinate-wise rules do not collapse.</a:t>
-            </a:r>
-          </a:p>
-          <a:p>
-            <a:pPr>
-              <a:spcAft>
-                <a:spcPts val="800"/>
-              </a:spcAft>
-            </a:pPr>
-            <a:r>
-              <a:rPr sz="1500">
-                <a:solidFill>
-                  <a:srgbClr val="2A78D6"/>
-                </a:solidFill>
-                <a:latin typeface="Segoe UI"/>
-              </a:rPr>
-              <a:t>▪  </a:t>
-            </a:r>
-            <a:r>
-              <a:rPr sz="1500" b="0" i="0">
-                <a:solidFill>
-                  <a:srgbClr val="26251F"/>
-                </a:solidFill>
-                <a:latin typeface="Segoe UI"/>
-              </a:rPr>
-              <a:t>That contrast isolates laundering as the mechanism behind the sign-flip failures.</a:t>
-            </a:r>
-          </a:p>
-          <a:p>
-            <a:pPr>
-              <a:spcAft>
-                <a:spcPts val="800"/>
-              </a:spcAft>
-            </a:pPr>
-            <a:r>
-              <a:rPr sz="1500">
-                <a:solidFill>
-                  <a:srgbClr val="2A78D6"/>
-                </a:solidFill>
-                <a:latin typeface="Segoe UI"/>
-              </a:rPr>
-              <a:t>▪  </a:t>
-            </a:r>
-            <a:r>
-              <a:rPr sz="1500" b="0" i="0">
-                <a:solidFill>
-                  <a:srgbClr val="26251F"/>
-                </a:solidFill>
-                <a:latin typeface="Segoe UI"/>
-              </a:rPr>
-              <a:t>CB-SAFE+ stays at or above every baseline on all four datasets.</a:t>
-            </a:r>
-          </a:p>
-        </p:txBody>
-      </p:sp>
-      <p:sp>
-        <p:nvSpPr>
-          <p:cNvPr id="5" name="TextBox 4"/>
-          <p:cNvSpPr txBox="1"/>
-          <p:nvPr/>
-        </p:nvSpPr>
-        <p:spPr>
-          <a:xfrm>
-            <a:off x="685800" y="5870448"/>
-            <a:ext cx="10881360" cy="530352"/>
+              <a:t>Label-flip is milder: no coordinate-wise rule collapses, which isolates laundering as the cause of the sign-flip failures.</a:t>
+            </a:r>
+          </a:p>
+        </p:txBody>
+      </p:sp>
+      <p:pic>
+        <p:nvPicPr>
+          <p:cNvPr id="5" name="Picture 4" descr="shot_labelflip_table.png"/>
+          <p:cNvPicPr>
+            <a:picLocks noChangeAspect="1"/>
+          </p:cNvPicPr>
+          <p:nvPr/>
+        </p:nvPicPr>
+        <p:blipFill>
+          <a:blip r:embed="rId2"/>
+          <a:stretch>
+            <a:fillRect/>
+          </a:stretch>
+        </p:blipFill>
+        <p:spPr>
+          <a:xfrm>
+            <a:off x="1122770" y="2331720"/>
+            <a:ext cx="9946153" cy="3200400"/>
+          </a:xfrm>
+          <a:prstGeom prst="rect">
+            <a:avLst/>
+          </a:prstGeom>
+        </p:spPr>
+      </p:pic>
+      <p:sp>
+        <p:nvSpPr>
+          <p:cNvPr id="6" name="TextBox 5"/>
+          <p:cNvSpPr txBox="1"/>
+          <p:nvPr/>
+        </p:nvSpPr>
+        <p:spPr>
+          <a:xfrm>
+            <a:off x="685800" y="5943600"/>
+            <a:ext cx="10881360" cy="502920"/>
           </a:xfrm>
           <a:prstGeom prst="rect">
             <a:avLst/>
@@ -7648,40 +6770,6 @@
                 <a:latin typeface="Segoe UI"/>
               </a:rPr>
               <a:t>[1] M. Xhemrishi, J. Östman, A. Wachter-Zeh, and A. Graell i Amat, "FedGT: Identification of malicious clients in federated learning with secure aggregation," IEEE Trans. Inf. Forensics Security, vol. 20, pp. 2577–2592, 2025.</a:t>
-            </a:r>
-          </a:p>
-        </p:txBody>
-      </p:sp>
-      <p:sp>
-        <p:nvSpPr>
-          <p:cNvPr id="6" name="TextBox 5"/>
-          <p:cNvSpPr txBox="1"/>
-          <p:nvPr/>
-        </p:nvSpPr>
-        <p:spPr>
-          <a:xfrm>
-            <a:off x="685800" y="6446520"/>
-            <a:ext cx="7680960" cy="274320"/>
-          </a:xfrm>
-          <a:prstGeom prst="rect">
-            <a:avLst/>
-          </a:prstGeom>
-          <a:noFill/>
-        </p:spPr>
-        <p:txBody>
-          <a:bodyPr wrap="square">
-            <a:spAutoFit/>
-          </a:bodyPr>
-          <a:lstStyle/>
-          <a:p>
-            <a:r>
-              <a:rPr sz="1050" b="0" i="0">
-                <a:solidFill>
-                  <a:srgbClr val="898781"/>
-                </a:solidFill>
-                <a:latin typeface="Segoe UI"/>
-              </a:rPr>
-              <a:t>CB-SAFE · Suva &amp; Chowdhury · AIUB</a:t>
             </a:r>
           </a:p>
         </p:txBody>
@@ -7717,171 +6805,6 @@
                 <a:latin typeface="Segoe UI"/>
               </a:rPr>
               <a:t>20 / 22</a:t>
-            </a:r>
-          </a:p>
-        </p:txBody>
-      </p:sp>
-      <p:sp>
-        <p:nvSpPr>
-          <p:cNvPr id="8" name="Rectangle 7"/>
-          <p:cNvSpPr/>
-          <p:nvPr/>
-        </p:nvSpPr>
-        <p:spPr>
-          <a:xfrm>
-            <a:off x="7360920" y="1874519"/>
-            <a:ext cx="4160520" cy="2926080"/>
-          </a:xfrm>
-          <a:prstGeom prst="rect">
-            <a:avLst/>
-          </a:prstGeom>
-          <a:solidFill>
-            <a:srgbClr val="F2F5FA"/>
-          </a:solidFill>
-          <a:ln w="9525">
-            <a:solidFill>
-              <a:srgbClr val="D6E0F0"/>
-            </a:solidFill>
-          </a:ln>
-        </p:spPr>
-        <p:style>
-          <a:lnRef idx="1">
-            <a:schemeClr val="accent1"/>
-          </a:lnRef>
-          <a:fillRef idx="3">
-            <a:schemeClr val="accent1"/>
-          </a:fillRef>
-          <a:effectRef idx="2">
-            <a:schemeClr val="accent1"/>
-          </a:effectRef>
-          <a:fontRef idx="minor">
-            <a:schemeClr val="lt1"/>
-          </a:fontRef>
-        </p:style>
-        <p:txBody>
-          <a:bodyPr rtlCol="0" anchor="ctr" wrap="square" lIns="164592" rIns="128016" tIns="109728" bIns="91440"/>
-          <a:lstStyle/>
-          <a:p>
-            <a:pPr algn="ctr">
-              <a:spcAft>
-                <a:spcPts val="400"/>
-              </a:spcAft>
-            </a:pPr>
-            <a:r>
-              <a:rPr sz="1300" b="1" i="0">
-                <a:solidFill>
-                  <a:srgbClr val="0B0B0B"/>
-                </a:solidFill>
-                <a:latin typeface="Segoe UI"/>
-              </a:rPr>
-              <a:t>CB-SAFE+ label-flip accuracy (best per column):</a:t>
-            </a:r>
-          </a:p>
-          <a:p>
-            <a:pPr>
-              <a:spcAft>
-                <a:spcPts val="400"/>
-              </a:spcAft>
-            </a:pPr>
-            <a:r>
-              <a:rPr sz="1300" b="0" i="0">
-                <a:solidFill>
-                  <a:srgbClr val="26251F"/>
-                </a:solidFill>
-                <a:latin typeface="Segoe UI"/>
-              </a:rPr>
-              <a:t>EMNIST: </a:t>
-            </a:r>
-            <a:r>
-              <a:rPr sz="1300" b="1" i="0">
-                <a:solidFill>
-                  <a:srgbClr val="0B0B0B"/>
-                </a:solidFill>
-                <a:latin typeface="Segoe UI"/>
-              </a:rPr>
-              <a:t>85.8 / 85.5 / 85.4</a:t>
-            </a:r>
-            <a:r>
-              <a:rPr sz="1300" b="0" i="0">
-                <a:solidFill>
-                  <a:srgbClr val="26251F"/>
-                </a:solidFill>
-                <a:latin typeface="Segoe UI"/>
-              </a:rPr>
-              <a:t> at f = .1 / .2 / .3</a:t>
-            </a:r>
-          </a:p>
-          <a:p>
-            <a:pPr>
-              <a:spcAft>
-                <a:spcPts val="400"/>
-              </a:spcAft>
-            </a:pPr>
-            <a:r>
-              <a:rPr sz="1300" b="0" i="0">
-                <a:solidFill>
-                  <a:srgbClr val="26251F"/>
-                </a:solidFill>
-                <a:latin typeface="Segoe UI"/>
-              </a:rPr>
-              <a:t>FashionMNIST: </a:t>
-            </a:r>
-            <a:r>
-              <a:rPr sz="1300" b="1" i="0">
-                <a:solidFill>
-                  <a:srgbClr val="0B0B0B"/>
-                </a:solidFill>
-                <a:latin typeface="Segoe UI"/>
-              </a:rPr>
-              <a:t>86.4 / 86.5 / 86.2</a:t>
-            </a:r>
-          </a:p>
-          <a:p>
-            <a:pPr>
-              <a:spcAft>
-                <a:spcPts val="400"/>
-              </a:spcAft>
-            </a:pPr>
-            <a:r>
-              <a:rPr sz="1300" b="0" i="0">
-                <a:solidFill>
-                  <a:srgbClr val="26251F"/>
-                </a:solidFill>
-                <a:latin typeface="Segoe UI"/>
-              </a:rPr>
-              <a:t>CIFAR-10: 53.6 / 53.2 / 51.1</a:t>
-            </a:r>
-          </a:p>
-          <a:p>
-            <a:pPr>
-              <a:spcAft>
-                <a:spcPts val="400"/>
-              </a:spcAft>
-            </a:pPr>
-            <a:r>
-              <a:rPr sz="1300" b="0" i="0">
-                <a:solidFill>
-                  <a:srgbClr val="26251F"/>
-                </a:solidFill>
-                <a:latin typeface="Segoe UI"/>
-              </a:rPr>
-              <a:t>Edge-IIoTset: 62.4 / 62.5 / 62.4</a:t>
-            </a:r>
-          </a:p>
-          <a:p>
-            <a:pPr>
-              <a:spcAft>
-                <a:spcPts val="400"/>
-              </a:spcAft>
-            </a:pPr>
-            <a:r>
-              <a:rPr sz="1300" b="0" i="0">
-                <a:solidFill>
-                  <a:srgbClr val="26251F"/>
-                </a:solidFill>
-                <a:latin typeface="Segoe UI"/>
-              </a:rPr>
-              <a:t>Undefended mean falls to 47–63% at f = .3, versus 10% under sign-flip.</a:t>
             </a:r>
           </a:p>
         </p:txBody>
@@ -7912,28 +6835,28 @@
         </p:nvSpPr>
         <p:spPr>
           <a:xfrm>
-            <a:off x="685800" y="384048"/>
-            <a:ext cx="10881360" cy="320040"/>
-          </a:xfrm>
-          <a:prstGeom prst="rect">
-            <a:avLst/>
-          </a:prstGeom>
-          <a:noFill/>
-        </p:spPr>
-        <p:txBody>
-          <a:bodyPr wrap="square">
-            <a:spAutoFit/>
-          </a:bodyPr>
-          <a:lstStyle/>
-          <a:p>
-            <a:r>
-              <a:rPr sz="1200" b="1" i="0">
-                <a:solidFill>
-                  <a:srgbClr val="2A78D6"/>
-                </a:solidFill>
-                <a:latin typeface="Segoe UI"/>
-              </a:rPr>
-              <a:t>EFFICIENCY &amp; THEORY</a:t>
+            <a:off x="685800" y="438912"/>
+            <a:ext cx="10881360" cy="822960"/>
+          </a:xfrm>
+          <a:prstGeom prst="rect">
+            <a:avLst/>
+          </a:prstGeom>
+          <a:noFill/>
+        </p:spPr>
+        <p:txBody>
+          <a:bodyPr wrap="square">
+            <a:spAutoFit/>
+          </a:bodyPr>
+          <a:lstStyle/>
+          <a:p>
+            <a:r>
+              <a:rPr sz="3000" b="1" i="0">
+                <a:solidFill>
+                  <a:srgbClr val="0B0B0B"/>
+                </a:solidFill>
+                <a:latin typeface="Segoe UI"/>
+              </a:rPr>
+              <a:t>Results: Efficiency</a:t>
             </a:r>
           </a:p>
         </p:txBody>
@@ -7946,28 +6869,28 @@
         </p:nvSpPr>
         <p:spPr>
           <a:xfrm>
-            <a:off x="685800" y="713232"/>
-            <a:ext cx="10881360" cy="822960"/>
-          </a:xfrm>
-          <a:prstGeom prst="rect">
-            <a:avLst/>
-          </a:prstGeom>
-          <a:noFill/>
-        </p:spPr>
-        <p:txBody>
-          <a:bodyPr wrap="square">
-            <a:spAutoFit/>
-          </a:bodyPr>
-          <a:lstStyle/>
-          <a:p>
-            <a:r>
-              <a:rPr sz="2700" b="1" i="0">
-                <a:solidFill>
-                  <a:srgbClr val="0B0B0B"/>
-                </a:solidFill>
-                <a:latin typeface="Segoe UI"/>
-              </a:rPr>
-              <a:t>Post-quantum diversity at lower cost</a:t>
+            <a:off x="685800" y="1371600"/>
+            <a:ext cx="10881360" cy="457200"/>
+          </a:xfrm>
+          <a:prstGeom prst="rect">
+            <a:avLst/>
+          </a:prstGeom>
+          <a:noFill/>
+        </p:spPr>
+        <p:txBody>
+          <a:bodyPr wrap="square">
+            <a:spAutoFit/>
+          </a:bodyPr>
+          <a:lstStyle/>
+          <a:p>
+            <a:r>
+              <a:rPr sz="1400" b="0" i="1">
+                <a:solidFill>
+                  <a:srgbClr val="26251F"/>
+                </a:solidFill>
+                <a:latin typeface="Segoe UI"/>
+              </a:rPr>
+              <a:t>Measured per-client overhead (from the paper, Table II).</a:t>
             </a:r>
           </a:p>
         </p:txBody>
@@ -7980,8 +6903,8 @@
         </p:nvSpPr>
         <p:spPr>
           <a:xfrm>
-            <a:off x="685800" y="1572768"/>
-            <a:ext cx="6400800" cy="3931920"/>
+            <a:off x="685800" y="1828800"/>
+            <a:ext cx="10881360" cy="3931920"/>
           </a:xfrm>
           <a:prstGeom prst="rect">
             <a:avLst/>
@@ -8015,7 +6938,7 @@
                 </a:solidFill>
                 <a:latin typeface="Segoe UI"/>
               </a:rPr>
-              <a:t>Code-based (HQC) confidentiality gives crypto diversity beyond the lattice monoculture; ML-KEM swaps in unchanged.</a:t>
+              <a:t>Code-based (HQC) confidentiality gives crypto diversity beyond lattices; ML-KEM swaps in unchanged.</a:t>
             </a:r>
           </a:p>
           <a:p>
@@ -8040,64 +6963,14 @@
                 </a:solidFill>
                 <a:latin typeface="Segoe UI"/>
               </a:rPr>
-              <a:t>One-time setup 15.2 KiB (HQC) vs 3.8 KiB (ML-KEM), paid once, under 0.03% of total traffic; per-round updates are 8d bytes regardless of KEM.</a:t>
-            </a:r>
-          </a:p>
-          <a:p>
-            <a:pPr>
-              <a:spcAft>
-                <a:spcPts val="800"/>
-              </a:spcAft>
-            </a:pPr>
-            <a:r>
-              <a:rPr sz="1500">
-                <a:solidFill>
-                  <a:srgbClr val="2A78D6"/>
-                </a:solidFill>
-                <a:latin typeface="Segoe UI"/>
-              </a:rPr>
-              <a:t>▪  </a:t>
-            </a:r>
-            <a:r>
-              <a:rPr sz="1500" b="0" i="0">
-                <a:solidFill>
-                  <a:srgbClr val="26251F"/>
-                </a:solidFill>
-                <a:latin typeface="Segoe UI"/>
-              </a:rPr>
-              <a:t>Detection needs ~4× fewer operations than FedGT (root-loss probe over cluster sums).</a:t>
-            </a:r>
-          </a:p>
-          <a:p>
-            <a:pPr>
-              <a:spcAft>
-                <a:spcPts val="800"/>
-              </a:spcAft>
-            </a:pPr>
-            <a:r>
-              <a:rPr sz="1500">
-                <a:solidFill>
-                  <a:srgbClr val="2A78D6"/>
-                </a:solidFill>
-                <a:latin typeface="Segoe UI"/>
-              </a:rPr>
-              <a:t>▪  </a:t>
-            </a:r>
-            <a:r>
-              <a:rPr sz="1500" b="0" i="0">
-                <a:solidFill>
-                  <a:srgbClr val="26251F"/>
-                </a:solidFill>
-                <a:latin typeface="Segoe UI"/>
-              </a:rPr>
-              <a:t>Laundering theorem: at γ* = 2c/m − 1 the poisoned cluster mean is magnitude-invisible, which is why robust rules fail.</a:t>
+              <a:t>One-time setup is paid once and stays under 0.03% of total traffic; per-round bytes are KEM-independent.</a:t>
             </a:r>
           </a:p>
         </p:txBody>
       </p:sp>
       <p:pic>
         <p:nvPicPr>
-          <p:cNvPr id="5" name="Picture 4" descr="fig_launder_geo.png"/>
+          <p:cNvPr id="5" name="Picture 4" descr="shot_overhead_table.png"/>
           <p:cNvPicPr>
             <a:picLocks noChangeAspect="1"/>
           </p:cNvPicPr>
@@ -8111,8 +6984,8 @@
         </p:blipFill>
         <p:spPr>
           <a:xfrm>
-            <a:off x="7315200" y="1709928"/>
-            <a:ext cx="4480560" cy="3312414"/>
+            <a:off x="2856259" y="3063240"/>
+            <a:ext cx="6479177" cy="2926080"/>
           </a:xfrm>
           <a:prstGeom prst="rect">
             <a:avLst/>
@@ -8127,8 +7000,8 @@
         </p:nvSpPr>
         <p:spPr>
           <a:xfrm>
-            <a:off x="685800" y="5870448"/>
-            <a:ext cx="10881360" cy="530352"/>
+            <a:off x="685800" y="5943600"/>
+            <a:ext cx="10881360" cy="502920"/>
           </a:xfrm>
           <a:prstGeom prst="rect">
             <a:avLst/>
@@ -8177,40 +7050,6 @@
       <p:sp>
         <p:nvSpPr>
           <p:cNvPr id="7" name="TextBox 6"/>
-          <p:cNvSpPr txBox="1"/>
-          <p:nvPr/>
-        </p:nvSpPr>
-        <p:spPr>
-          <a:xfrm>
-            <a:off x="685800" y="6446520"/>
-            <a:ext cx="7680960" cy="274320"/>
-          </a:xfrm>
-          <a:prstGeom prst="rect">
-            <a:avLst/>
-          </a:prstGeom>
-          <a:noFill/>
-        </p:spPr>
-        <p:txBody>
-          <a:bodyPr wrap="square">
-            <a:spAutoFit/>
-          </a:bodyPr>
-          <a:lstStyle/>
-          <a:p>
-            <a:r>
-              <a:rPr sz="1050" b="0" i="0">
-                <a:solidFill>
-                  <a:srgbClr val="898781"/>
-                </a:solidFill>
-                <a:latin typeface="Segoe UI"/>
-              </a:rPr>
-              <a:t>CB-SAFE · Suva &amp; Chowdhury · AIUB</a:t>
-            </a:r>
-          </a:p>
-        </p:txBody>
-      </p:sp>
-      <p:sp>
-        <p:nvSpPr>
-          <p:cNvPr id="8" name="TextBox 7"/>
           <p:cNvSpPr txBox="1"/>
           <p:nvPr/>
         </p:nvSpPr>
@@ -8269,28 +7108,28 @@
         </p:nvSpPr>
         <p:spPr>
           <a:xfrm>
-            <a:off x="685800" y="384048"/>
-            <a:ext cx="10881360" cy="320040"/>
-          </a:xfrm>
-          <a:prstGeom prst="rect">
-            <a:avLst/>
-          </a:prstGeom>
-          <a:noFill/>
-        </p:spPr>
-        <p:txBody>
-          <a:bodyPr wrap="square">
-            <a:spAutoFit/>
-          </a:bodyPr>
-          <a:lstStyle/>
-          <a:p>
-            <a:r>
-              <a:rPr sz="1200" b="1" i="0">
-                <a:solidFill>
-                  <a:srgbClr val="2A78D6"/>
-                </a:solidFill>
-                <a:latin typeface="Segoe UI"/>
-              </a:rPr>
-              <a:t>CONCLUSION</a:t>
+            <a:off x="685800" y="438912"/>
+            <a:ext cx="10881360" cy="822960"/>
+          </a:xfrm>
+          <a:prstGeom prst="rect">
+            <a:avLst/>
+          </a:prstGeom>
+          <a:noFill/>
+        </p:spPr>
+        <p:txBody>
+          <a:bodyPr wrap="square">
+            <a:spAutoFit/>
+          </a:bodyPr>
+          <a:lstStyle/>
+          <a:p>
+            <a:r>
+              <a:rPr sz="3000" b="1" i="0">
+                <a:solidFill>
+                  <a:srgbClr val="0B0B0B"/>
+                </a:solidFill>
+                <a:latin typeface="Segoe UI"/>
+              </a:rPr>
+              <a:t>Conclusion</a:t>
             </a:r>
           </a:p>
         </p:txBody>
@@ -8303,28 +7142,117 @@
         </p:nvSpPr>
         <p:spPr>
           <a:xfrm>
-            <a:off x="685800" y="713232"/>
-            <a:ext cx="10881360" cy="822960"/>
-          </a:xfrm>
-          <a:prstGeom prst="rect">
-            <a:avLst/>
-          </a:prstGeom>
-          <a:noFill/>
-        </p:spPr>
-        <p:txBody>
-          <a:bodyPr wrap="square">
-            <a:spAutoFit/>
-          </a:bodyPr>
-          <a:lstStyle/>
-          <a:p>
-            <a:r>
-              <a:rPr sz="2700" b="1" i="0">
-                <a:solidFill>
-                  <a:srgbClr val="0B0B0B"/>
-                </a:solidFill>
-                <a:latin typeface="Segoe UI"/>
-              </a:rPr>
-              <a:t>Private, post-quantum, and Byzantine-robust</a:t>
+            <a:off x="685800" y="1371600"/>
+            <a:ext cx="10881360" cy="3931920"/>
+          </a:xfrm>
+          <a:prstGeom prst="rect">
+            <a:avLst/>
+          </a:prstGeom>
+          <a:noFill/>
+        </p:spPr>
+        <p:txBody>
+          <a:bodyPr wrap="square">
+            <a:spAutoFit/>
+          </a:bodyPr>
+          <a:lstStyle/>
+          <a:p>
+            <a:pPr>
+              <a:spcAft>
+                <a:spcPts val="800"/>
+              </a:spcAft>
+            </a:pPr>
+            <a:r>
+              <a:rPr sz="1500">
+                <a:solidFill>
+                  <a:srgbClr val="2A78D6"/>
+                </a:solidFill>
+                <a:latin typeface="Segoe UI"/>
+              </a:rPr>
+              <a:t>▪  </a:t>
+            </a:r>
+            <a:r>
+              <a:rPr sz="1500" b="0" i="0">
+                <a:solidFill>
+                  <a:srgbClr val="26251F"/>
+                </a:solidFill>
+                <a:latin typeface="Segoe UI"/>
+              </a:rPr>
+              <a:t>CB-SAFE unifies code-based PQ secure aggregation with temporal group-testing robustness in one protocol.</a:t>
+            </a:r>
+          </a:p>
+          <a:p>
+            <a:pPr>
+              <a:spcAft>
+                <a:spcPts val="800"/>
+              </a:spcAft>
+            </a:pPr>
+            <a:r>
+              <a:rPr sz="1500">
+                <a:solidFill>
+                  <a:srgbClr val="2A78D6"/>
+                </a:solidFill>
+                <a:latin typeface="Segoe UI"/>
+              </a:rPr>
+              <a:t>▪  </a:t>
+            </a:r>
+            <a:r>
+              <a:rPr sz="1500" b="0" i="0">
+                <a:solidFill>
+                  <a:srgbClr val="26251F"/>
+                </a:solidFill>
+                <a:latin typeface="Segoe UI"/>
+              </a:rPr>
+              <a:t>It ties the state of the art (FedGT) on robustness and detection, at lower cost, and adds crypto diversity plus a failure theory.</a:t>
+            </a:r>
+          </a:p>
+          <a:p>
+            <a:pPr>
+              <a:spcAft>
+                <a:spcPts val="800"/>
+              </a:spcAft>
+            </a:pPr>
+            <a:r>
+              <a:rPr sz="1500">
+                <a:solidFill>
+                  <a:srgbClr val="2A78D6"/>
+                </a:solidFill>
+                <a:latin typeface="Segoe UI"/>
+              </a:rPr>
+              <a:t>▪  </a:t>
+            </a:r>
+            <a:r>
+              <a:rPr sz="1500" b="0" i="0">
+                <a:solidFill>
+                  <a:srgbClr val="26251F"/>
+                </a:solidFill>
+                <a:latin typeface="Segoe UI"/>
+              </a:rPr>
+              <a:t>Limitations: update authentication is out of the code-based scope; EMNIST detection uses a single seed.</a:t>
+            </a:r>
+          </a:p>
+          <a:p>
+            <a:pPr>
+              <a:spcAft>
+                <a:spcPts val="800"/>
+              </a:spcAft>
+            </a:pPr>
+            <a:r>
+              <a:rPr sz="1500">
+                <a:solidFill>
+                  <a:srgbClr val="2A78D6"/>
+                </a:solidFill>
+                <a:latin typeface="Segoe UI"/>
+              </a:rPr>
+              <a:t>▪  </a:t>
+            </a:r>
+            <a:r>
+              <a:rPr sz="1500" b="0" i="0">
+                <a:solidFill>
+                  <a:srgbClr val="26251F"/>
+                </a:solidFill>
+                <a:latin typeface="Segoe UI"/>
+              </a:rPr>
+              <a:t>Future work: code-based signatures for authentication, larger client populations, and adaptive attackers.</a:t>
             </a:r>
           </a:p>
         </p:txBody>
@@ -8337,117 +7265,65 @@
         </p:nvSpPr>
         <p:spPr>
           <a:xfrm>
-            <a:off x="685800" y="1572768"/>
-            <a:ext cx="10881360" cy="3931920"/>
-          </a:xfrm>
-          <a:prstGeom prst="rect">
-            <a:avLst/>
-          </a:prstGeom>
-          <a:noFill/>
-        </p:spPr>
-        <p:txBody>
-          <a:bodyPr wrap="square">
-            <a:spAutoFit/>
-          </a:bodyPr>
-          <a:lstStyle/>
-          <a:p>
-            <a:pPr>
-              <a:spcAft>
-                <a:spcPts val="800"/>
-              </a:spcAft>
-            </a:pPr>
-            <a:r>
-              <a:rPr sz="1500">
-                <a:solidFill>
-                  <a:srgbClr val="2A78D6"/>
-                </a:solidFill>
-                <a:latin typeface="Segoe UI"/>
-              </a:rPr>
-              <a:t>▪  </a:t>
-            </a:r>
-            <a:r>
-              <a:rPr sz="1500" b="0" i="0">
-                <a:solidFill>
-                  <a:srgbClr val="26251F"/>
-                </a:solidFill>
-                <a:latin typeface="Segoe UI"/>
-              </a:rPr>
-              <a:t>CB-SAFE unifies code-based PQ secure aggregation with temporal group-testing robustness in one protocol.</a:t>
-            </a:r>
-          </a:p>
-          <a:p>
-            <a:pPr>
-              <a:spcAft>
-                <a:spcPts val="800"/>
-              </a:spcAft>
-            </a:pPr>
-            <a:r>
-              <a:rPr sz="1500">
-                <a:solidFill>
-                  <a:srgbClr val="2A78D6"/>
-                </a:solidFill>
-                <a:latin typeface="Segoe UI"/>
-              </a:rPr>
-              <a:t>▪  </a:t>
-            </a:r>
-            <a:r>
-              <a:rPr sz="1500" b="0" i="0">
-                <a:solidFill>
-                  <a:srgbClr val="26251F"/>
-                </a:solidFill>
-                <a:latin typeface="Segoe UI"/>
-              </a:rPr>
-              <a:t>It ties the state of the art (FedGT) on robustness and detection, at lower cost, and adds crypto diversity plus a failure theory.</a:t>
-            </a:r>
-          </a:p>
-          <a:p>
-            <a:pPr>
-              <a:spcAft>
-                <a:spcPts val="800"/>
-              </a:spcAft>
-            </a:pPr>
-            <a:r>
-              <a:rPr sz="1500">
-                <a:solidFill>
-                  <a:srgbClr val="2A78D6"/>
-                </a:solidFill>
-                <a:latin typeface="Segoe UI"/>
-              </a:rPr>
-              <a:t>▪  </a:t>
-            </a:r>
-            <a:r>
-              <a:rPr sz="1500" b="0" i="0">
-                <a:solidFill>
-                  <a:srgbClr val="26251F"/>
-                </a:solidFill>
-                <a:latin typeface="Segoe UI"/>
-              </a:rPr>
-              <a:t>Limitations: update authentication is out of the code-based scope; EMNIST detection uses a single seed.</a:t>
-            </a:r>
-          </a:p>
-          <a:p>
-            <a:pPr>
-              <a:spcAft>
-                <a:spcPts val="800"/>
-              </a:spcAft>
-            </a:pPr>
-            <a:r>
-              <a:rPr sz="1500">
-                <a:solidFill>
-                  <a:srgbClr val="2A78D6"/>
-                </a:solidFill>
-                <a:latin typeface="Segoe UI"/>
-              </a:rPr>
-              <a:t>▪  </a:t>
-            </a:r>
-            <a:r>
-              <a:rPr sz="1500" b="0" i="0">
-                <a:solidFill>
-                  <a:srgbClr val="26251F"/>
-                </a:solidFill>
-                <a:latin typeface="Segoe UI"/>
-              </a:rPr>
-              <a:t>Future work: code-based signatures for authentication, larger client populations, and adaptive attackers.</a:t>
+            <a:off x="685800" y="5943600"/>
+            <a:ext cx="10881360" cy="502920"/>
+          </a:xfrm>
+          <a:prstGeom prst="rect">
+            <a:avLst/>
+          </a:prstGeom>
+          <a:noFill/>
+        </p:spPr>
+        <p:txBody>
+          <a:bodyPr wrap="square">
+            <a:spAutoFit/>
+          </a:bodyPr>
+          <a:lstStyle/>
+          <a:p>
+            <a:pPr>
+              <a:spcAft>
+                <a:spcPts val="100"/>
+              </a:spcAft>
+            </a:pPr>
+            <a:r>
+              <a:rPr sz="800" b="0" i="1">
+                <a:solidFill>
+                  <a:srgbClr val="2A78D6"/>
+                </a:solidFill>
+                <a:latin typeface="Segoe UI"/>
+              </a:rPr>
+              <a:t>[1] M. Xhemrishi, J. Östman, A. Wachter-Zeh, and A. Graell i Amat, "FedGT: Identification of malicious clients in federated learning with secure aggregation," IEEE Trans. Inf. Forensics Security, vol. 20, pp. 2577–2592, 2025.</a:t>
+            </a:r>
+          </a:p>
+          <a:p>
+            <a:pPr>
+              <a:spcAft>
+                <a:spcPts val="100"/>
+              </a:spcAft>
+            </a:pPr>
+            <a:r>
+              <a:rPr sz="800" b="0" i="1">
+                <a:solidFill>
+                  <a:srgbClr val="2A78D6"/>
+                </a:solidFill>
+                <a:latin typeface="Segoe UI"/>
+              </a:rPr>
+              <a:t>[2] K. Bonawitz, V. Ivanov, B. Kreuter, A. Marcedone, H. B. McMahan, S. Patel, D. Ramage, A. Segal, and K. Seth, "Practical secure aggregation for privacy-preserving machine learning," in Proc. ACM CCS, 2017, pp. 1175–1191.</a:t>
+            </a:r>
+          </a:p>
+          <a:p>
+            <a:pPr>
+              <a:spcAft>
+                <a:spcPts val="100"/>
+              </a:spcAft>
+            </a:pPr>
+            <a:r>
+              <a:rPr sz="800" b="0" i="1">
+                <a:solidFill>
+                  <a:srgbClr val="2A78D6"/>
+                </a:solidFill>
+                <a:latin typeface="Segoe UI"/>
+              </a:rPr>
+              <a:t>[3] National Institute of Standards and Technology, "Status report on the fourth round of the NIST post-quantum cryptography standardization process," NIST IR 8545, Mar. 2025.</a:t>
             </a:r>
           </a:p>
         </p:txBody>
@@ -8455,111 +7331,6 @@
       <p:sp>
         <p:nvSpPr>
           <p:cNvPr id="5" name="TextBox 4"/>
-          <p:cNvSpPr txBox="1"/>
-          <p:nvPr/>
-        </p:nvSpPr>
-        <p:spPr>
-          <a:xfrm>
-            <a:off x="685800" y="5870448"/>
-            <a:ext cx="10881360" cy="530352"/>
-          </a:xfrm>
-          <a:prstGeom prst="rect">
-            <a:avLst/>
-          </a:prstGeom>
-          <a:noFill/>
-        </p:spPr>
-        <p:txBody>
-          <a:bodyPr wrap="square">
-            <a:spAutoFit/>
-          </a:bodyPr>
-          <a:lstStyle/>
-          <a:p>
-            <a:pPr>
-              <a:spcAft>
-                <a:spcPts val="100"/>
-              </a:spcAft>
-            </a:pPr>
-            <a:r>
-              <a:rPr sz="800" b="0" i="1">
-                <a:solidFill>
-                  <a:srgbClr val="2A78D6"/>
-                </a:solidFill>
-                <a:latin typeface="Segoe UI"/>
-              </a:rPr>
-              <a:t>[1] M. Xhemrishi, J. Östman, A. Wachter-Zeh, and A. Graell i Amat, "FedGT: Identification of malicious clients in federated learning with secure aggregation," IEEE Trans. Inf. Forensics Security, vol. 20, pp. 2577–2592, 2025.</a:t>
-            </a:r>
-          </a:p>
-          <a:p>
-            <a:pPr>
-              <a:spcAft>
-                <a:spcPts val="100"/>
-              </a:spcAft>
-            </a:pPr>
-            <a:r>
-              <a:rPr sz="800" b="0" i="1">
-                <a:solidFill>
-                  <a:srgbClr val="2A78D6"/>
-                </a:solidFill>
-                <a:latin typeface="Segoe UI"/>
-              </a:rPr>
-              <a:t>[2] K. Bonawitz, V. Ivanov, B. Kreuter, A. Marcedone, H. B. McMahan, S. Patel, D. Ramage, A. Segal, and K. Seth, "Practical secure aggregation for privacy-preserving machine learning," in Proc. ACM CCS, 2017, pp. 1175–1191.</a:t>
-            </a:r>
-          </a:p>
-          <a:p>
-            <a:pPr>
-              <a:spcAft>
-                <a:spcPts val="100"/>
-              </a:spcAft>
-            </a:pPr>
-            <a:r>
-              <a:rPr sz="800" b="0" i="1">
-                <a:solidFill>
-                  <a:srgbClr val="2A78D6"/>
-                </a:solidFill>
-                <a:latin typeface="Segoe UI"/>
-              </a:rPr>
-              <a:t>[3] National Institute of Standards and Technology, "Status report on the fourth round of the NIST post-quantum cryptography standardization process," NIST IR 8545, Mar. 2025.</a:t>
-            </a:r>
-          </a:p>
-        </p:txBody>
-      </p:sp>
-      <p:sp>
-        <p:nvSpPr>
-          <p:cNvPr id="6" name="TextBox 5"/>
-          <p:cNvSpPr txBox="1"/>
-          <p:nvPr/>
-        </p:nvSpPr>
-        <p:spPr>
-          <a:xfrm>
-            <a:off x="685800" y="6446520"/>
-            <a:ext cx="7680960" cy="274320"/>
-          </a:xfrm>
-          <a:prstGeom prst="rect">
-            <a:avLst/>
-          </a:prstGeom>
-          <a:noFill/>
-        </p:spPr>
-        <p:txBody>
-          <a:bodyPr wrap="square">
-            <a:spAutoFit/>
-          </a:bodyPr>
-          <a:lstStyle/>
-          <a:p>
-            <a:r>
-              <a:rPr sz="1050" b="0" i="0">
-                <a:solidFill>
-                  <a:srgbClr val="898781"/>
-                </a:solidFill>
-                <a:latin typeface="Segoe UI"/>
-              </a:rPr>
-              <a:t>CB-SAFE · Suva &amp; Chowdhury · AIUB</a:t>
-            </a:r>
-          </a:p>
-        </p:txBody>
-      </p:sp>
-      <p:sp>
-        <p:nvSpPr>
-          <p:cNvPr id="7" name="TextBox 6"/>
           <p:cNvSpPr txBox="1"/>
           <p:nvPr/>
         </p:nvSpPr>
@@ -8618,28 +7389,28 @@
         </p:nvSpPr>
         <p:spPr>
           <a:xfrm>
-            <a:off x="685800" y="384048"/>
-            <a:ext cx="10789920" cy="320040"/>
-          </a:xfrm>
-          <a:prstGeom prst="rect">
-            <a:avLst/>
-          </a:prstGeom>
-          <a:noFill/>
-        </p:spPr>
-        <p:txBody>
-          <a:bodyPr wrap="square">
-            <a:spAutoFit/>
-          </a:bodyPr>
-          <a:lstStyle/>
-          <a:p>
-            <a:r>
-              <a:rPr sz="1200" b="1" i="0">
-                <a:solidFill>
-                  <a:srgbClr val="2A78D6"/>
-                </a:solidFill>
-                <a:latin typeface="Segoe UI"/>
-              </a:rPr>
-              <a:t>REFERENCES</a:t>
+            <a:off x="685800" y="438912"/>
+            <a:ext cx="10881360" cy="822960"/>
+          </a:xfrm>
+          <a:prstGeom prst="rect">
+            <a:avLst/>
+          </a:prstGeom>
+          <a:noFill/>
+        </p:spPr>
+        <p:txBody>
+          <a:bodyPr wrap="square">
+            <a:spAutoFit/>
+          </a:bodyPr>
+          <a:lstStyle/>
+          <a:p>
+            <a:r>
+              <a:rPr sz="3000" b="1" i="0">
+                <a:solidFill>
+                  <a:srgbClr val="0B0B0B"/>
+                </a:solidFill>
+                <a:latin typeface="Segoe UI"/>
+              </a:rPr>
+              <a:t>References</a:t>
             </a:r>
           </a:p>
         </p:txBody>
@@ -8652,42 +7423,8 @@
         </p:nvSpPr>
         <p:spPr>
           <a:xfrm>
-            <a:off x="685800" y="713232"/>
-            <a:ext cx="10881360" cy="822960"/>
-          </a:xfrm>
-          <a:prstGeom prst="rect">
-            <a:avLst/>
-          </a:prstGeom>
-          <a:noFill/>
-        </p:spPr>
-        <p:txBody>
-          <a:bodyPr wrap="square">
-            <a:spAutoFit/>
-          </a:bodyPr>
-          <a:lstStyle/>
-          <a:p>
-            <a:r>
-              <a:rPr sz="2700" b="1" i="0">
-                <a:solidFill>
-                  <a:srgbClr val="0B0B0B"/>
-                </a:solidFill>
-                <a:latin typeface="Segoe UI"/>
-              </a:rPr>
-              <a:t>References</a:t>
-            </a:r>
-          </a:p>
-        </p:txBody>
-      </p:sp>
-      <p:sp>
-        <p:nvSpPr>
-          <p:cNvPr id="4" name="TextBox 3"/>
-          <p:cNvSpPr txBox="1"/>
-          <p:nvPr/>
-        </p:nvSpPr>
-        <p:spPr>
-          <a:xfrm>
-            <a:off x="685800" y="1600200"/>
-            <a:ext cx="10881360" cy="4663440"/>
+            <a:off x="685800" y="1463040"/>
+            <a:ext cx="10881360" cy="4754880"/>
           </a:xfrm>
           <a:prstGeom prst="rect">
             <a:avLst/>
@@ -8841,40 +7578,6 @@
                 <a:latin typeface="Segoe UI"/>
               </a:rPr>
               <a:t>[9] National Institute of Standards and Technology, "Module-lattice-based key-encapsulation mechanism standard," FIPS 203, Aug. 2024.</a:t>
-            </a:r>
-          </a:p>
-        </p:txBody>
-      </p:sp>
-      <p:sp>
-        <p:nvSpPr>
-          <p:cNvPr id="5" name="TextBox 4"/>
-          <p:cNvSpPr txBox="1"/>
-          <p:nvPr/>
-        </p:nvSpPr>
-        <p:spPr>
-          <a:xfrm>
-            <a:off x="685800" y="6446520"/>
-            <a:ext cx="7680960" cy="274320"/>
-          </a:xfrm>
-          <a:prstGeom prst="rect">
-            <a:avLst/>
-          </a:prstGeom>
-          <a:noFill/>
-        </p:spPr>
-        <p:txBody>
-          <a:bodyPr wrap="square">
-            <a:spAutoFit/>
-          </a:bodyPr>
-          <a:lstStyle/>
-          <a:p>
-            <a:r>
-              <a:rPr sz="1050" b="0" i="0">
-                <a:solidFill>
-                  <a:srgbClr val="898781"/>
-                </a:solidFill>
-                <a:latin typeface="Segoe UI"/>
-              </a:rPr>
-              <a:t>CB-SAFE · Suva &amp; Chowdhury · AIUB</a:t>
             </a:r>
           </a:p>
         </p:txBody>
@@ -8905,28 +7608,28 @@
         </p:nvSpPr>
         <p:spPr>
           <a:xfrm>
-            <a:off x="685800" y="384048"/>
-            <a:ext cx="10881360" cy="320040"/>
-          </a:xfrm>
-          <a:prstGeom prst="rect">
-            <a:avLst/>
-          </a:prstGeom>
-          <a:noFill/>
-        </p:spPr>
-        <p:txBody>
-          <a:bodyPr wrap="square">
-            <a:spAutoFit/>
-          </a:bodyPr>
-          <a:lstStyle/>
-          <a:p>
-            <a:r>
-              <a:rPr sz="1200" b="1" i="0">
-                <a:solidFill>
-                  <a:srgbClr val="2A78D6"/>
-                </a:solidFill>
-                <a:latin typeface="Segoe UI"/>
-              </a:rPr>
-              <a:t>BACKGROUND / MOTIVATION</a:t>
+            <a:off x="685800" y="438912"/>
+            <a:ext cx="10881360" cy="822960"/>
+          </a:xfrm>
+          <a:prstGeom prst="rect">
+            <a:avLst/>
+          </a:prstGeom>
+          <a:noFill/>
+        </p:spPr>
+        <p:txBody>
+          <a:bodyPr wrap="square">
+            <a:spAutoFit/>
+          </a:bodyPr>
+          <a:lstStyle/>
+          <a:p>
+            <a:r>
+              <a:rPr sz="3000" b="1" i="0">
+                <a:solidFill>
+                  <a:srgbClr val="0B0B0B"/>
+                </a:solidFill>
+                <a:latin typeface="Segoe UI"/>
+              </a:rPr>
+              <a:t>Background and Motivation</a:t>
             </a:r>
           </a:p>
         </p:txBody>
@@ -8939,28 +7642,117 @@
         </p:nvSpPr>
         <p:spPr>
           <a:xfrm>
-            <a:off x="685800" y="713232"/>
-            <a:ext cx="10881360" cy="822960"/>
-          </a:xfrm>
-          <a:prstGeom prst="rect">
-            <a:avLst/>
-          </a:prstGeom>
-          <a:noFill/>
-        </p:spPr>
-        <p:txBody>
-          <a:bodyPr wrap="square">
-            <a:spAutoFit/>
-          </a:bodyPr>
-          <a:lstStyle/>
-          <a:p>
-            <a:r>
-              <a:rPr sz="2700" b="1" i="0">
-                <a:solidFill>
-                  <a:srgbClr val="0B0B0B"/>
-                </a:solidFill>
-                <a:latin typeface="Segoe UI"/>
-              </a:rPr>
-              <a:t>Why the problem is hard and timely</a:t>
+            <a:off x="685800" y="1371600"/>
+            <a:ext cx="10881360" cy="3931920"/>
+          </a:xfrm>
+          <a:prstGeom prst="rect">
+            <a:avLst/>
+          </a:prstGeom>
+          <a:noFill/>
+        </p:spPr>
+        <p:txBody>
+          <a:bodyPr wrap="square">
+            <a:spAutoFit/>
+          </a:bodyPr>
+          <a:lstStyle/>
+          <a:p>
+            <a:pPr>
+              <a:spcAft>
+                <a:spcPts val="800"/>
+              </a:spcAft>
+            </a:pPr>
+            <a:r>
+              <a:rPr sz="1500">
+                <a:solidFill>
+                  <a:srgbClr val="2A78D6"/>
+                </a:solidFill>
+                <a:latin typeface="Segoe UI"/>
+              </a:rPr>
+              <a:t>▪  </a:t>
+            </a:r>
+            <a:r>
+              <a:rPr sz="1500" b="0" i="0">
+                <a:solidFill>
+                  <a:srgbClr val="26251F"/>
+                </a:solidFill>
+                <a:latin typeface="Segoe UI"/>
+              </a:rPr>
+              <a:t>Secure aggregation = pairwise masks that cancel in the sum; the server sees only the aggregate, never an individual.</a:t>
+            </a:r>
+          </a:p>
+          <a:p>
+            <a:pPr>
+              <a:spcAft>
+                <a:spcPts val="800"/>
+              </a:spcAft>
+            </a:pPr>
+            <a:r>
+              <a:rPr sz="1500">
+                <a:solidFill>
+                  <a:srgbClr val="2A78D6"/>
+                </a:solidFill>
+                <a:latin typeface="Segoe UI"/>
+              </a:rPr>
+              <a:t>▪  </a:t>
+            </a:r>
+            <a:r>
+              <a:rPr sz="1500" b="0" i="0">
+                <a:solidFill>
+                  <a:srgbClr val="26251F"/>
+                </a:solidFill>
+                <a:latin typeface="Segoe UI"/>
+              </a:rPr>
+              <a:t>Quantum threat: Shor's algorithm breaks classical key exchange, and traffic recorded today is decryptable later.</a:t>
+            </a:r>
+          </a:p>
+          <a:p>
+            <a:pPr>
+              <a:spcAft>
+                <a:spcPts val="800"/>
+              </a:spcAft>
+            </a:pPr>
+            <a:r>
+              <a:rPr sz="1500">
+                <a:solidFill>
+                  <a:srgbClr val="2A78D6"/>
+                </a:solidFill>
+                <a:latin typeface="Segoe UI"/>
+              </a:rPr>
+              <a:t>▪  </a:t>
+            </a:r>
+            <a:r>
+              <a:rPr sz="1500" b="0" i="0">
+                <a:solidFill>
+                  <a:srgbClr val="26251F"/>
+                </a:solidFill>
+                <a:latin typeface="Segoe UI"/>
+              </a:rPr>
+              <a:t>Crypto diversity: NIST selected the code-based KEM HQC in 2025 to hedge a lattice break; that diversity has not reached FL.</a:t>
+            </a:r>
+          </a:p>
+          <a:p>
+            <a:pPr>
+              <a:spcAft>
+                <a:spcPts val="800"/>
+              </a:spcAft>
+            </a:pPr>
+            <a:r>
+              <a:rPr sz="1500">
+                <a:solidFill>
+                  <a:srgbClr val="2A78D6"/>
+                </a:solidFill>
+                <a:latin typeface="Segoe UI"/>
+              </a:rPr>
+              <a:t>▪  </a:t>
+            </a:r>
+            <a:r>
+              <a:rPr sz="1500" b="0" i="0">
+                <a:solidFill>
+                  <a:srgbClr val="26251F"/>
+                </a:solidFill>
+                <a:latin typeface="Segoe UI"/>
+              </a:rPr>
+              <a:t>Robustness tension: privacy hides exactly the per-client signal that poisoning defenses need.</a:t>
             </a:r>
           </a:p>
         </p:txBody>
@@ -8973,117 +7765,49 @@
         </p:nvSpPr>
         <p:spPr>
           <a:xfrm>
-            <a:off x="685800" y="1572768"/>
-            <a:ext cx="10881360" cy="3931920"/>
-          </a:xfrm>
-          <a:prstGeom prst="rect">
-            <a:avLst/>
-          </a:prstGeom>
-          <a:noFill/>
-        </p:spPr>
-        <p:txBody>
-          <a:bodyPr wrap="square">
-            <a:spAutoFit/>
-          </a:bodyPr>
-          <a:lstStyle/>
-          <a:p>
-            <a:pPr>
-              <a:spcAft>
-                <a:spcPts val="800"/>
-              </a:spcAft>
-            </a:pPr>
-            <a:r>
-              <a:rPr sz="1500">
-                <a:solidFill>
-                  <a:srgbClr val="2A78D6"/>
-                </a:solidFill>
-                <a:latin typeface="Segoe UI"/>
-              </a:rPr>
-              <a:t>▪  </a:t>
-            </a:r>
-            <a:r>
-              <a:rPr sz="1500" b="0" i="0">
-                <a:solidFill>
-                  <a:srgbClr val="26251F"/>
-                </a:solidFill>
-                <a:latin typeface="Segoe UI"/>
-              </a:rPr>
-              <a:t>Secure aggregation = pairwise masks that cancel in the sum; the server sees only the aggregate, never an individual.</a:t>
-            </a:r>
-          </a:p>
-          <a:p>
-            <a:pPr>
-              <a:spcAft>
-                <a:spcPts val="800"/>
-              </a:spcAft>
-            </a:pPr>
-            <a:r>
-              <a:rPr sz="1500">
-                <a:solidFill>
-                  <a:srgbClr val="2A78D6"/>
-                </a:solidFill>
-                <a:latin typeface="Segoe UI"/>
-              </a:rPr>
-              <a:t>▪  </a:t>
-            </a:r>
-            <a:r>
-              <a:rPr sz="1500" b="0" i="0">
-                <a:solidFill>
-                  <a:srgbClr val="26251F"/>
-                </a:solidFill>
-                <a:latin typeface="Segoe UI"/>
-              </a:rPr>
-              <a:t>Quantum threat: Shor's algorithm breaks classical key exchange, and traffic recorded today is decryptable later.</a:t>
-            </a:r>
-          </a:p>
-          <a:p>
-            <a:pPr>
-              <a:spcAft>
-                <a:spcPts val="800"/>
-              </a:spcAft>
-            </a:pPr>
-            <a:r>
-              <a:rPr sz="1500">
-                <a:solidFill>
-                  <a:srgbClr val="2A78D6"/>
-                </a:solidFill>
-                <a:latin typeface="Segoe UI"/>
-              </a:rPr>
-              <a:t>▪  </a:t>
-            </a:r>
-            <a:r>
-              <a:rPr sz="1500" b="0" i="0">
-                <a:solidFill>
-                  <a:srgbClr val="26251F"/>
-                </a:solidFill>
-                <a:latin typeface="Segoe UI"/>
-              </a:rPr>
-              <a:t>Crypto diversity: NIST selected the code-based KEM HQC in 2025 to hedge a lattice break; that diversity has not reached FL.</a:t>
-            </a:r>
-          </a:p>
-          <a:p>
-            <a:pPr>
-              <a:spcAft>
-                <a:spcPts val="800"/>
-              </a:spcAft>
-            </a:pPr>
-            <a:r>
-              <a:rPr sz="1500">
-                <a:solidFill>
-                  <a:srgbClr val="2A78D6"/>
-                </a:solidFill>
-                <a:latin typeface="Segoe UI"/>
-              </a:rPr>
-              <a:t>▪  </a:t>
-            </a:r>
-            <a:r>
-              <a:rPr sz="1500" b="0" i="0">
-                <a:solidFill>
-                  <a:srgbClr val="26251F"/>
-                </a:solidFill>
-                <a:latin typeface="Segoe UI"/>
-              </a:rPr>
-              <a:t>Robustness tension: privacy hides exactly the per-client signal that poisoning defenses need.</a:t>
+            <a:off x="685800" y="5943600"/>
+            <a:ext cx="10881360" cy="502920"/>
+          </a:xfrm>
+          <a:prstGeom prst="rect">
+            <a:avLst/>
+          </a:prstGeom>
+          <a:noFill/>
+        </p:spPr>
+        <p:txBody>
+          <a:bodyPr wrap="square">
+            <a:spAutoFit/>
+          </a:bodyPr>
+          <a:lstStyle/>
+          <a:p>
+            <a:pPr>
+              <a:spcAft>
+                <a:spcPts val="100"/>
+              </a:spcAft>
+            </a:pPr>
+            <a:r>
+              <a:rPr sz="800" b="0" i="1">
+                <a:solidFill>
+                  <a:srgbClr val="2A78D6"/>
+                </a:solidFill>
+                <a:latin typeface="Segoe UI"/>
+              </a:rPr>
+              <a:t>[3] National Institute of Standards and Technology, "Status report on the fourth round of the NIST post-quantum cryptography standardization process," NIST IR 8545, Mar. 2025.</a:t>
+            </a:r>
+          </a:p>
+          <a:p>
+            <a:pPr>
+              <a:spcAft>
+                <a:spcPts val="100"/>
+              </a:spcAft>
+            </a:pPr>
+            <a:r>
+              <a:rPr sz="800" b="0" i="1">
+                <a:solidFill>
+                  <a:srgbClr val="2A78D6"/>
+                </a:solidFill>
+                <a:latin typeface="Segoe UI"/>
+              </a:rPr>
+              <a:t>[4] P. W. Shor, "Polynomial-time algorithms for prime factorization and discrete logarithms on a quantum computer," SIAM J. Comput., vol. 26, no. 5, pp. 1484–1509, 1997.</a:t>
             </a:r>
           </a:p>
         </p:txBody>
@@ -9091,95 +7815,6 @@
       <p:sp>
         <p:nvSpPr>
           <p:cNvPr id="5" name="TextBox 4"/>
-          <p:cNvSpPr txBox="1"/>
-          <p:nvPr/>
-        </p:nvSpPr>
-        <p:spPr>
-          <a:xfrm>
-            <a:off x="685800" y="5870448"/>
-            <a:ext cx="10881360" cy="530352"/>
-          </a:xfrm>
-          <a:prstGeom prst="rect">
-            <a:avLst/>
-          </a:prstGeom>
-          <a:noFill/>
-        </p:spPr>
-        <p:txBody>
-          <a:bodyPr wrap="square">
-            <a:spAutoFit/>
-          </a:bodyPr>
-          <a:lstStyle/>
-          <a:p>
-            <a:pPr>
-              <a:spcAft>
-                <a:spcPts val="100"/>
-              </a:spcAft>
-            </a:pPr>
-            <a:r>
-              <a:rPr sz="800" b="0" i="1">
-                <a:solidFill>
-                  <a:srgbClr val="2A78D6"/>
-                </a:solidFill>
-                <a:latin typeface="Segoe UI"/>
-              </a:rPr>
-              <a:t>[3] National Institute of Standards and Technology, "Status report on the fourth round of the NIST post-quantum cryptography standardization process," NIST IR 8545, Mar. 2025.</a:t>
-            </a:r>
-          </a:p>
-          <a:p>
-            <a:pPr>
-              <a:spcAft>
-                <a:spcPts val="100"/>
-              </a:spcAft>
-            </a:pPr>
-            <a:r>
-              <a:rPr sz="800" b="0" i="1">
-                <a:solidFill>
-                  <a:srgbClr val="2A78D6"/>
-                </a:solidFill>
-                <a:latin typeface="Segoe UI"/>
-              </a:rPr>
-              <a:t>[4] P. W. Shor, "Polynomial-time algorithms for prime factorization and discrete logarithms on a quantum computer," SIAM J. Comput., vol. 26, no. 5, pp. 1484–1509, 1997.</a:t>
-            </a:r>
-          </a:p>
-        </p:txBody>
-      </p:sp>
-      <p:sp>
-        <p:nvSpPr>
-          <p:cNvPr id="6" name="TextBox 5"/>
-          <p:cNvSpPr txBox="1"/>
-          <p:nvPr/>
-        </p:nvSpPr>
-        <p:spPr>
-          <a:xfrm>
-            <a:off x="685800" y="6446520"/>
-            <a:ext cx="7680960" cy="274320"/>
-          </a:xfrm>
-          <a:prstGeom prst="rect">
-            <a:avLst/>
-          </a:prstGeom>
-          <a:noFill/>
-        </p:spPr>
-        <p:txBody>
-          <a:bodyPr wrap="square">
-            <a:spAutoFit/>
-          </a:bodyPr>
-          <a:lstStyle/>
-          <a:p>
-            <a:r>
-              <a:rPr sz="1050" b="0" i="0">
-                <a:solidFill>
-                  <a:srgbClr val="898781"/>
-                </a:solidFill>
-                <a:latin typeface="Segoe UI"/>
-              </a:rPr>
-              <a:t>CB-SAFE · Suva &amp; Chowdhury · AIUB</a:t>
-            </a:r>
-          </a:p>
-        </p:txBody>
-      </p:sp>
-      <p:sp>
-        <p:nvSpPr>
-          <p:cNvPr id="7" name="TextBox 6"/>
           <p:cNvSpPr txBox="1"/>
           <p:nvPr/>
         </p:nvSpPr>
@@ -9238,28 +7873,28 @@
         </p:nvSpPr>
         <p:spPr>
           <a:xfrm>
-            <a:off x="685800" y="384048"/>
-            <a:ext cx="10881360" cy="320040"/>
-          </a:xfrm>
-          <a:prstGeom prst="rect">
-            <a:avLst/>
-          </a:prstGeom>
-          <a:noFill/>
-        </p:spPr>
-        <p:txBody>
-          <a:bodyPr wrap="square">
-            <a:spAutoFit/>
-          </a:bodyPr>
-          <a:lstStyle/>
-          <a:p>
-            <a:r>
-              <a:rPr sz="1200" b="1" i="0">
-                <a:solidFill>
-                  <a:srgbClr val="2A78D6"/>
-                </a:solidFill>
-                <a:latin typeface="Segoe UI"/>
-              </a:rPr>
-              <a:t>RELATED WORK</a:t>
+            <a:off x="685800" y="438912"/>
+            <a:ext cx="10881360" cy="822960"/>
+          </a:xfrm>
+          <a:prstGeom prst="rect">
+            <a:avLst/>
+          </a:prstGeom>
+          <a:noFill/>
+        </p:spPr>
+        <p:txBody>
+          <a:bodyPr wrap="square">
+            <a:spAutoFit/>
+          </a:bodyPr>
+          <a:lstStyle/>
+          <a:p>
+            <a:r>
+              <a:rPr sz="3000" b="1" i="0">
+                <a:solidFill>
+                  <a:srgbClr val="0B0B0B"/>
+                </a:solidFill>
+                <a:latin typeface="Segoe UI"/>
+              </a:rPr>
+              <a:t>Related Work</a:t>
             </a:r>
           </a:p>
         </p:txBody>
@@ -9272,28 +7907,117 @@
         </p:nvSpPr>
         <p:spPr>
           <a:xfrm>
-            <a:off x="685800" y="713232"/>
-            <a:ext cx="10881360" cy="822960"/>
-          </a:xfrm>
-          <a:prstGeom prst="rect">
-            <a:avLst/>
-          </a:prstGeom>
-          <a:noFill/>
-        </p:spPr>
-        <p:txBody>
-          <a:bodyPr wrap="square">
-            <a:spAutoFit/>
-          </a:bodyPr>
-          <a:lstStyle/>
-          <a:p>
-            <a:r>
-              <a:rPr sz="2700" b="1" i="0">
-                <a:solidFill>
-                  <a:srgbClr val="0B0B0B"/>
-                </a:solidFill>
-                <a:latin typeface="Segoe UI"/>
-              </a:rPr>
-              <a:t>FedGT: malicious-client ID under secure aggregation</a:t>
+            <a:off x="685800" y="1371600"/>
+            <a:ext cx="10881360" cy="3931920"/>
+          </a:xfrm>
+          <a:prstGeom prst="rect">
+            <a:avLst/>
+          </a:prstGeom>
+          <a:noFill/>
+        </p:spPr>
+        <p:txBody>
+          <a:bodyPr wrap="square">
+            <a:spAutoFit/>
+          </a:bodyPr>
+          <a:lstStyle/>
+          <a:p>
+            <a:pPr>
+              <a:spcAft>
+                <a:spcPts val="800"/>
+              </a:spcAft>
+            </a:pPr>
+            <a:r>
+              <a:rPr sz="1500">
+                <a:solidFill>
+                  <a:srgbClr val="2A78D6"/>
+                </a:solidFill>
+                <a:latin typeface="Segoe UI"/>
+              </a:rPr>
+              <a:t>▪  </a:t>
+            </a:r>
+            <a:r>
+              <a:rPr sz="1500" b="0" i="0">
+                <a:solidFill>
+                  <a:srgbClr val="26251F"/>
+                </a:solidFill>
+                <a:latin typeface="Segoe UI"/>
+              </a:rPr>
+              <a:t>FedGT (IEEE TIFS, 2025) is the closest peer to our robustness mechanism.</a:t>
+            </a:r>
+          </a:p>
+          <a:p>
+            <a:pPr>
+              <a:spcAft>
+                <a:spcPts val="800"/>
+              </a:spcAft>
+            </a:pPr>
+            <a:r>
+              <a:rPr sz="1500">
+                <a:solidFill>
+                  <a:srgbClr val="2A78D6"/>
+                </a:solidFill>
+                <a:latin typeface="Segoe UI"/>
+              </a:rPr>
+              <a:t>▪  </a:t>
+            </a:r>
+            <a:r>
+              <a:rPr sz="1500" b="0" i="0">
+                <a:solidFill>
+                  <a:srgbClr val="26251F"/>
+                </a:solidFill>
+                <a:latin typeface="Segoe UI"/>
+              </a:rPr>
+              <a:t>Idea: group clients into overlapping test groups; the server sees only group aggregates, so privacy is preserved.</a:t>
+            </a:r>
+          </a:p>
+          <a:p>
+            <a:pPr>
+              <a:spcAft>
+                <a:spcPts val="800"/>
+              </a:spcAft>
+            </a:pPr>
+            <a:r>
+              <a:rPr sz="1500">
+                <a:solidFill>
+                  <a:srgbClr val="2A78D6"/>
+                </a:solidFill>
+                <a:latin typeface="Segoe UI"/>
+              </a:rPr>
+              <a:t>▪  </a:t>
+            </a:r>
+            <a:r>
+              <a:rPr sz="1500" b="0" i="0">
+                <a:solidFill>
+                  <a:srgbClr val="26251F"/>
+                </a:solidFill>
+                <a:latin typeface="Segoe UI"/>
+              </a:rPr>
+              <a:t>A statistical test flags groups that contain malicious clients; a decoder then identifies and removes the culprits.</a:t>
+            </a:r>
+          </a:p>
+          <a:p>
+            <a:pPr>
+              <a:spcAft>
+                <a:spcPts val="800"/>
+              </a:spcAft>
+            </a:pPr>
+            <a:r>
+              <a:rPr sz="1500">
+                <a:solidFill>
+                  <a:srgbClr val="2A78D6"/>
+                </a:solidFill>
+                <a:latin typeface="Segoe UI"/>
+              </a:rPr>
+              <a:t>▪  </a:t>
+            </a:r>
+            <a:r>
+              <a:rPr sz="1500" b="0" i="0">
+                <a:solidFill>
+                  <a:srgbClr val="26251F"/>
+                </a:solidFill>
+                <a:latin typeface="Segoe UI"/>
+              </a:rPr>
+              <a:t>Borrowed from group testing: find a few defectives with far fewer pooled tests than testing everyone.</a:t>
             </a:r>
           </a:p>
         </p:txBody>
@@ -9306,117 +8030,33 @@
         </p:nvSpPr>
         <p:spPr>
           <a:xfrm>
-            <a:off x="685800" y="1572768"/>
-            <a:ext cx="10881360" cy="3931920"/>
-          </a:xfrm>
-          <a:prstGeom prst="rect">
-            <a:avLst/>
-          </a:prstGeom>
-          <a:noFill/>
-        </p:spPr>
-        <p:txBody>
-          <a:bodyPr wrap="square">
-            <a:spAutoFit/>
-          </a:bodyPr>
-          <a:lstStyle/>
-          <a:p>
-            <a:pPr>
-              <a:spcAft>
-                <a:spcPts val="800"/>
-              </a:spcAft>
-            </a:pPr>
-            <a:r>
-              <a:rPr sz="1500">
-                <a:solidFill>
-                  <a:srgbClr val="2A78D6"/>
-                </a:solidFill>
-                <a:latin typeface="Segoe UI"/>
-              </a:rPr>
-              <a:t>▪  </a:t>
-            </a:r>
-            <a:r>
-              <a:rPr sz="1500" b="0" i="0">
-                <a:solidFill>
-                  <a:srgbClr val="26251F"/>
-                </a:solidFill>
-                <a:latin typeface="Segoe UI"/>
-              </a:rPr>
-              <a:t>FedGT (IEEE TIFS, 2025) is the closest peer to our robustness mechanism.</a:t>
-            </a:r>
-          </a:p>
-          <a:p>
-            <a:pPr>
-              <a:spcAft>
-                <a:spcPts val="800"/>
-              </a:spcAft>
-            </a:pPr>
-            <a:r>
-              <a:rPr sz="1500">
-                <a:solidFill>
-                  <a:srgbClr val="2A78D6"/>
-                </a:solidFill>
-                <a:latin typeface="Segoe UI"/>
-              </a:rPr>
-              <a:t>▪  </a:t>
-            </a:r>
-            <a:r>
-              <a:rPr sz="1500" b="0" i="0">
-                <a:solidFill>
-                  <a:srgbClr val="26251F"/>
-                </a:solidFill>
-                <a:latin typeface="Segoe UI"/>
-              </a:rPr>
-              <a:t>Idea: group clients into overlapping test groups; the server sees only group aggregates, so privacy is preserved.</a:t>
-            </a:r>
-          </a:p>
-          <a:p>
-            <a:pPr>
-              <a:spcAft>
-                <a:spcPts val="800"/>
-              </a:spcAft>
-            </a:pPr>
-            <a:r>
-              <a:rPr sz="1500">
-                <a:solidFill>
-                  <a:srgbClr val="2A78D6"/>
-                </a:solidFill>
-                <a:latin typeface="Segoe UI"/>
-              </a:rPr>
-              <a:t>▪  </a:t>
-            </a:r>
-            <a:r>
-              <a:rPr sz="1500" b="0" i="0">
-                <a:solidFill>
-                  <a:srgbClr val="26251F"/>
-                </a:solidFill>
-                <a:latin typeface="Segoe UI"/>
-              </a:rPr>
-              <a:t>A statistical test flags groups that contain malicious clients; a decoder then identifies and removes the culprits.</a:t>
-            </a:r>
-          </a:p>
-          <a:p>
-            <a:pPr>
-              <a:spcAft>
-                <a:spcPts val="800"/>
-              </a:spcAft>
-            </a:pPr>
-            <a:r>
-              <a:rPr sz="1500">
-                <a:solidFill>
-                  <a:srgbClr val="2A78D6"/>
-                </a:solidFill>
-                <a:latin typeface="Segoe UI"/>
-              </a:rPr>
-              <a:t>▪  </a:t>
-            </a:r>
-            <a:r>
-              <a:rPr sz="1500" b="0" i="0">
-                <a:solidFill>
-                  <a:srgbClr val="26251F"/>
-                </a:solidFill>
-                <a:latin typeface="Segoe UI"/>
-              </a:rPr>
-              <a:t>Borrowed from group testing: find a few defectives with far fewer pooled tests than testing everyone.</a:t>
+            <a:off x="685800" y="5943600"/>
+            <a:ext cx="10881360" cy="502920"/>
+          </a:xfrm>
+          <a:prstGeom prst="rect">
+            <a:avLst/>
+          </a:prstGeom>
+          <a:noFill/>
+        </p:spPr>
+        <p:txBody>
+          <a:bodyPr wrap="square">
+            <a:spAutoFit/>
+          </a:bodyPr>
+          <a:lstStyle/>
+          <a:p>
+            <a:pPr>
+              <a:spcAft>
+                <a:spcPts val="100"/>
+              </a:spcAft>
+            </a:pPr>
+            <a:r>
+              <a:rPr sz="800" b="0" i="1">
+                <a:solidFill>
+                  <a:srgbClr val="2A78D6"/>
+                </a:solidFill>
+                <a:latin typeface="Segoe UI"/>
+              </a:rPr>
+              <a:t>[1] M. Xhemrishi, J. Östman, A. Wachter-Zeh, and A. Graell i Amat, "FedGT: Identification of malicious clients in federated learning with secure aggregation," IEEE Trans. Inf. Forensics Security, vol. 20, pp. 2577–2592, 2025.</a:t>
             </a:r>
           </a:p>
         </p:txBody>
@@ -9424,79 +8064,6 @@
       <p:sp>
         <p:nvSpPr>
           <p:cNvPr id="5" name="TextBox 4"/>
-          <p:cNvSpPr txBox="1"/>
-          <p:nvPr/>
-        </p:nvSpPr>
-        <p:spPr>
-          <a:xfrm>
-            <a:off x="685800" y="5870448"/>
-            <a:ext cx="10881360" cy="530352"/>
-          </a:xfrm>
-          <a:prstGeom prst="rect">
-            <a:avLst/>
-          </a:prstGeom>
-          <a:noFill/>
-        </p:spPr>
-        <p:txBody>
-          <a:bodyPr wrap="square">
-            <a:spAutoFit/>
-          </a:bodyPr>
-          <a:lstStyle/>
-          <a:p>
-            <a:pPr>
-              <a:spcAft>
-                <a:spcPts val="100"/>
-              </a:spcAft>
-            </a:pPr>
-            <a:r>
-              <a:rPr sz="800" b="0" i="1">
-                <a:solidFill>
-                  <a:srgbClr val="2A78D6"/>
-                </a:solidFill>
-                <a:latin typeface="Segoe UI"/>
-              </a:rPr>
-              <a:t>[1] M. Xhemrishi, J. Östman, A. Wachter-Zeh, and A. Graell i Amat, "FedGT: Identification of malicious clients in federated learning with secure aggregation," IEEE Trans. Inf. Forensics Security, vol. 20, pp. 2577–2592, 2025.</a:t>
-            </a:r>
-          </a:p>
-        </p:txBody>
-      </p:sp>
-      <p:sp>
-        <p:nvSpPr>
-          <p:cNvPr id="6" name="TextBox 5"/>
-          <p:cNvSpPr txBox="1"/>
-          <p:nvPr/>
-        </p:nvSpPr>
-        <p:spPr>
-          <a:xfrm>
-            <a:off x="685800" y="6446520"/>
-            <a:ext cx="7680960" cy="274320"/>
-          </a:xfrm>
-          <a:prstGeom prst="rect">
-            <a:avLst/>
-          </a:prstGeom>
-          <a:noFill/>
-        </p:spPr>
-        <p:txBody>
-          <a:bodyPr wrap="square">
-            <a:spAutoFit/>
-          </a:bodyPr>
-          <a:lstStyle/>
-          <a:p>
-            <a:r>
-              <a:rPr sz="1050" b="0" i="0">
-                <a:solidFill>
-                  <a:srgbClr val="898781"/>
-                </a:solidFill>
-                <a:latin typeface="Segoe UI"/>
-              </a:rPr>
-              <a:t>CB-SAFE · Suva &amp; Chowdhury · AIUB</a:t>
-            </a:r>
-          </a:p>
-        </p:txBody>
-      </p:sp>
-      <p:sp>
-        <p:nvSpPr>
-          <p:cNvPr id="7" name="TextBox 6"/>
           <p:cNvSpPr txBox="1"/>
           <p:nvPr/>
         </p:nvSpPr>
@@ -9555,28 +8122,28 @@
         </p:nvSpPr>
         <p:spPr>
           <a:xfrm>
-            <a:off x="685800" y="384048"/>
-            <a:ext cx="10881360" cy="320040"/>
-          </a:xfrm>
-          <a:prstGeom prst="rect">
-            <a:avLst/>
-          </a:prstGeom>
-          <a:noFill/>
-        </p:spPr>
-        <p:txBody>
-          <a:bodyPr wrap="square">
-            <a:spAutoFit/>
-          </a:bodyPr>
-          <a:lstStyle/>
-          <a:p>
-            <a:r>
-              <a:rPr sz="1200" b="1" i="0">
-                <a:solidFill>
-                  <a:srgbClr val="2A78D6"/>
-                </a:solidFill>
-                <a:latin typeface="Segoe UI"/>
-              </a:rPr>
-              <a:t>EXISTING METHOD</a:t>
+            <a:off x="685800" y="438912"/>
+            <a:ext cx="10881360" cy="822960"/>
+          </a:xfrm>
+          <a:prstGeom prst="rect">
+            <a:avLst/>
+          </a:prstGeom>
+          <a:noFill/>
+        </p:spPr>
+        <p:txBody>
+          <a:bodyPr wrap="square">
+            <a:spAutoFit/>
+          </a:bodyPr>
+          <a:lstStyle/>
+          <a:p>
+            <a:r>
+              <a:rPr sz="3000" b="1" i="0">
+                <a:solidFill>
+                  <a:srgbClr val="0B0B0B"/>
+                </a:solidFill>
+                <a:latin typeface="Segoe UI"/>
+              </a:rPr>
+              <a:t>Methodology (Base Paper)</a:t>
             </a:r>
           </a:p>
         </p:txBody>
@@ -9589,28 +8156,117 @@
         </p:nvSpPr>
         <p:spPr>
           <a:xfrm>
-            <a:off x="685800" y="713232"/>
-            <a:ext cx="10881360" cy="822960"/>
-          </a:xfrm>
-          <a:prstGeom prst="rect">
-            <a:avLst/>
-          </a:prstGeom>
-          <a:noFill/>
-        </p:spPr>
-        <p:txBody>
-          <a:bodyPr wrap="square">
-            <a:spAutoFit/>
-          </a:bodyPr>
-          <a:lstStyle/>
-          <a:p>
-            <a:r>
-              <a:rPr sz="2700" b="1" i="0">
-                <a:solidFill>
-                  <a:srgbClr val="0B0B0B"/>
-                </a:solidFill>
-                <a:latin typeface="Segoe UI"/>
-              </a:rPr>
-              <a:t>How FedGT identifies attackers</a:t>
+            <a:off x="685800" y="1371600"/>
+            <a:ext cx="10881360" cy="3931920"/>
+          </a:xfrm>
+          <a:prstGeom prst="rect">
+            <a:avLst/>
+          </a:prstGeom>
+          <a:noFill/>
+        </p:spPr>
+        <p:txBody>
+          <a:bodyPr wrap="square">
+            <a:spAutoFit/>
+          </a:bodyPr>
+          <a:lstStyle/>
+          <a:p>
+            <a:pPr>
+              <a:spcAft>
+                <a:spcPts val="800"/>
+              </a:spcAft>
+            </a:pPr>
+            <a:r>
+              <a:rPr sz="1500">
+                <a:solidFill>
+                  <a:srgbClr val="2A78D6"/>
+                </a:solidFill>
+                <a:latin typeface="Segoe UI"/>
+              </a:rPr>
+              <a:t>▪  </a:t>
+            </a:r>
+            <a:r>
+              <a:rPr sz="1500" b="0" i="0">
+                <a:solidFill>
+                  <a:srgbClr val="26251F"/>
+                </a:solidFill>
+                <a:latin typeface="Segoe UI"/>
+              </a:rPr>
+              <a:t>An assignment matrix groups n clients into m overlapping groups (the parity-check structure of a code).</a:t>
+            </a:r>
+          </a:p>
+          <a:p>
+            <a:pPr>
+              <a:spcAft>
+                <a:spcPts val="800"/>
+              </a:spcAft>
+            </a:pPr>
+            <a:r>
+              <a:rPr sz="1500">
+                <a:solidFill>
+                  <a:srgbClr val="2A78D6"/>
+                </a:solidFill>
+                <a:latin typeface="Segoe UI"/>
+              </a:rPr>
+              <a:t>▪  </a:t>
+            </a:r>
+            <a:r>
+              <a:rPr sz="1500" b="0" i="0">
+                <a:solidFill>
+                  <a:srgbClr val="26251F"/>
+                </a:solidFill>
+                <a:latin typeface="Segoe UI"/>
+              </a:rPr>
+              <a:t>Each group is securely aggregated; a test on the group aggregate is positive if any member is malicious.</a:t>
+            </a:r>
+          </a:p>
+          <a:p>
+            <a:pPr>
+              <a:spcAft>
+                <a:spcPts val="800"/>
+              </a:spcAft>
+            </a:pPr>
+            <a:r>
+              <a:rPr sz="1500">
+                <a:solidFill>
+                  <a:srgbClr val="2A78D6"/>
+                </a:solidFill>
+                <a:latin typeface="Segoe UI"/>
+              </a:rPr>
+              <a:t>▪  </a:t>
+            </a:r>
+            <a:r>
+              <a:rPr sz="1500" b="0" i="0">
+                <a:solidFill>
+                  <a:srgbClr val="26251F"/>
+                </a:solidFill>
+                <a:latin typeface="Segoe UI"/>
+              </a:rPr>
+              <a:t>A COMP / Neyman-Pearson decoder infers which clients are malicious from the group test results.</a:t>
+            </a:r>
+          </a:p>
+          <a:p>
+            <a:pPr>
+              <a:spcAft>
+                <a:spcPts val="800"/>
+              </a:spcAft>
+            </a:pPr>
+            <a:r>
+              <a:rPr sz="1500">
+                <a:solidFill>
+                  <a:srgbClr val="2A78D6"/>
+                </a:solidFill>
+                <a:latin typeface="Segoe UI"/>
+              </a:rPr>
+              <a:t>▪  </a:t>
+            </a:r>
+            <a:r>
+              <a:rPr sz="1500" b="0" i="0">
+                <a:solidFill>
+                  <a:srgbClr val="26251F"/>
+                </a:solidFill>
+                <a:latin typeface="Segoe UI"/>
+              </a:rPr>
+              <a:t>Flagged clients are excluded; the remaining clean clients are aggregated into the global model.</a:t>
             </a:r>
           </a:p>
         </p:txBody>
@@ -9623,117 +8279,33 @@
         </p:nvSpPr>
         <p:spPr>
           <a:xfrm>
-            <a:off x="685800" y="1572768"/>
-            <a:ext cx="10881360" cy="3931920"/>
-          </a:xfrm>
-          <a:prstGeom prst="rect">
-            <a:avLst/>
-          </a:prstGeom>
-          <a:noFill/>
-        </p:spPr>
-        <p:txBody>
-          <a:bodyPr wrap="square">
-            <a:spAutoFit/>
-          </a:bodyPr>
-          <a:lstStyle/>
-          <a:p>
-            <a:pPr>
-              <a:spcAft>
-                <a:spcPts val="800"/>
-              </a:spcAft>
-            </a:pPr>
-            <a:r>
-              <a:rPr sz="1500">
-                <a:solidFill>
-                  <a:srgbClr val="2A78D6"/>
-                </a:solidFill>
-                <a:latin typeface="Segoe UI"/>
-              </a:rPr>
-              <a:t>▪  </a:t>
-            </a:r>
-            <a:r>
-              <a:rPr sz="1500" b="0" i="0">
-                <a:solidFill>
-                  <a:srgbClr val="26251F"/>
-                </a:solidFill>
-                <a:latin typeface="Segoe UI"/>
-              </a:rPr>
-              <a:t>An assignment matrix groups n clients into m overlapping groups (the parity-check structure of a code).</a:t>
-            </a:r>
-          </a:p>
-          <a:p>
-            <a:pPr>
-              <a:spcAft>
-                <a:spcPts val="800"/>
-              </a:spcAft>
-            </a:pPr>
-            <a:r>
-              <a:rPr sz="1500">
-                <a:solidFill>
-                  <a:srgbClr val="2A78D6"/>
-                </a:solidFill>
-                <a:latin typeface="Segoe UI"/>
-              </a:rPr>
-              <a:t>▪  </a:t>
-            </a:r>
-            <a:r>
-              <a:rPr sz="1500" b="0" i="0">
-                <a:solidFill>
-                  <a:srgbClr val="26251F"/>
-                </a:solidFill>
-                <a:latin typeface="Segoe UI"/>
-              </a:rPr>
-              <a:t>Each group is securely aggregated; a test on the group aggregate is positive if any member is malicious.</a:t>
-            </a:r>
-          </a:p>
-          <a:p>
-            <a:pPr>
-              <a:spcAft>
-                <a:spcPts val="800"/>
-              </a:spcAft>
-            </a:pPr>
-            <a:r>
-              <a:rPr sz="1500">
-                <a:solidFill>
-                  <a:srgbClr val="2A78D6"/>
-                </a:solidFill>
-                <a:latin typeface="Segoe UI"/>
-              </a:rPr>
-              <a:t>▪  </a:t>
-            </a:r>
-            <a:r>
-              <a:rPr sz="1500" b="0" i="0">
-                <a:solidFill>
-                  <a:srgbClr val="26251F"/>
-                </a:solidFill>
-                <a:latin typeface="Segoe UI"/>
-              </a:rPr>
-              <a:t>A COMP / Neyman-Pearson decoder infers which clients are malicious from the group test results.</a:t>
-            </a:r>
-          </a:p>
-          <a:p>
-            <a:pPr>
-              <a:spcAft>
-                <a:spcPts val="800"/>
-              </a:spcAft>
-            </a:pPr>
-            <a:r>
-              <a:rPr sz="1500">
-                <a:solidFill>
-                  <a:srgbClr val="2A78D6"/>
-                </a:solidFill>
-                <a:latin typeface="Segoe UI"/>
-              </a:rPr>
-              <a:t>▪  </a:t>
-            </a:r>
-            <a:r>
-              <a:rPr sz="1500" b="0" i="0">
-                <a:solidFill>
-                  <a:srgbClr val="26251F"/>
-                </a:solidFill>
-                <a:latin typeface="Segoe UI"/>
-              </a:rPr>
-              <a:t>Flagged clients are excluded; the remaining clean clients are aggregated into the global model.</a:t>
+            <a:off x="685800" y="5943600"/>
+            <a:ext cx="10881360" cy="502920"/>
+          </a:xfrm>
+          <a:prstGeom prst="rect">
+            <a:avLst/>
+          </a:prstGeom>
+          <a:noFill/>
+        </p:spPr>
+        <p:txBody>
+          <a:bodyPr wrap="square">
+            <a:spAutoFit/>
+          </a:bodyPr>
+          <a:lstStyle/>
+          <a:p>
+            <a:pPr>
+              <a:spcAft>
+                <a:spcPts val="100"/>
+              </a:spcAft>
+            </a:pPr>
+            <a:r>
+              <a:rPr sz="800" b="0" i="1">
+                <a:solidFill>
+                  <a:srgbClr val="2A78D6"/>
+                </a:solidFill>
+                <a:latin typeface="Segoe UI"/>
+              </a:rPr>
+              <a:t>[1] M. Xhemrishi, J. Östman, A. Wachter-Zeh, and A. Graell i Amat, "FedGT: Identification of malicious clients in federated learning with secure aggregation," IEEE Trans. Inf. Forensics Security, vol. 20, pp. 2577–2592, 2025.</a:t>
             </a:r>
           </a:p>
         </p:txBody>
@@ -9741,79 +8313,6 @@
       <p:sp>
         <p:nvSpPr>
           <p:cNvPr id="5" name="TextBox 4"/>
-          <p:cNvSpPr txBox="1"/>
-          <p:nvPr/>
-        </p:nvSpPr>
-        <p:spPr>
-          <a:xfrm>
-            <a:off x="685800" y="5870448"/>
-            <a:ext cx="10881360" cy="530352"/>
-          </a:xfrm>
-          <a:prstGeom prst="rect">
-            <a:avLst/>
-          </a:prstGeom>
-          <a:noFill/>
-        </p:spPr>
-        <p:txBody>
-          <a:bodyPr wrap="square">
-            <a:spAutoFit/>
-          </a:bodyPr>
-          <a:lstStyle/>
-          <a:p>
-            <a:pPr>
-              <a:spcAft>
-                <a:spcPts val="100"/>
-              </a:spcAft>
-            </a:pPr>
-            <a:r>
-              <a:rPr sz="800" b="0" i="1">
-                <a:solidFill>
-                  <a:srgbClr val="2A78D6"/>
-                </a:solidFill>
-                <a:latin typeface="Segoe UI"/>
-              </a:rPr>
-              <a:t>[1] M. Xhemrishi, J. Östman, A. Wachter-Zeh, and A. Graell i Amat, "FedGT: Identification of malicious clients in federated learning with secure aggregation," IEEE Trans. Inf. Forensics Security, vol. 20, pp. 2577–2592, 2025.</a:t>
-            </a:r>
-          </a:p>
-        </p:txBody>
-      </p:sp>
-      <p:sp>
-        <p:nvSpPr>
-          <p:cNvPr id="6" name="TextBox 5"/>
-          <p:cNvSpPr txBox="1"/>
-          <p:nvPr/>
-        </p:nvSpPr>
-        <p:spPr>
-          <a:xfrm>
-            <a:off x="685800" y="6446520"/>
-            <a:ext cx="7680960" cy="274320"/>
-          </a:xfrm>
-          <a:prstGeom prst="rect">
-            <a:avLst/>
-          </a:prstGeom>
-          <a:noFill/>
-        </p:spPr>
-        <p:txBody>
-          <a:bodyPr wrap="square">
-            <a:spAutoFit/>
-          </a:bodyPr>
-          <a:lstStyle/>
-          <a:p>
-            <a:r>
-              <a:rPr sz="1050" b="0" i="0">
-                <a:solidFill>
-                  <a:srgbClr val="898781"/>
-                </a:solidFill>
-                <a:latin typeface="Segoe UI"/>
-              </a:rPr>
-              <a:t>CB-SAFE · Suva &amp; Chowdhury · AIUB</a:t>
-            </a:r>
-          </a:p>
-        </p:txBody>
-      </p:sp>
-      <p:sp>
-        <p:nvSpPr>
-          <p:cNvPr id="7" name="TextBox 6"/>
           <p:cNvSpPr txBox="1"/>
           <p:nvPr/>
         </p:nvSpPr>
@@ -9872,28 +8371,28 @@
         </p:nvSpPr>
         <p:spPr>
           <a:xfrm>
-            <a:off x="685800" y="384048"/>
-            <a:ext cx="10881360" cy="320040"/>
-          </a:xfrm>
-          <a:prstGeom prst="rect">
-            <a:avLst/>
-          </a:prstGeom>
-          <a:noFill/>
-        </p:spPr>
-        <p:txBody>
-          <a:bodyPr wrap="square">
-            <a:spAutoFit/>
-          </a:bodyPr>
-          <a:lstStyle/>
-          <a:p>
-            <a:r>
-              <a:rPr sz="1200" b="1" i="0">
-                <a:solidFill>
-                  <a:srgbClr val="2A78D6"/>
-                </a:solidFill>
-                <a:latin typeface="Segoe UI"/>
-              </a:rPr>
-              <a:t>LIMITATIONS</a:t>
+            <a:off x="685800" y="438912"/>
+            <a:ext cx="10881360" cy="822960"/>
+          </a:xfrm>
+          <a:prstGeom prst="rect">
+            <a:avLst/>
+          </a:prstGeom>
+          <a:noFill/>
+        </p:spPr>
+        <p:txBody>
+          <a:bodyPr wrap="square">
+            <a:spAutoFit/>
+          </a:bodyPr>
+          <a:lstStyle/>
+          <a:p>
+            <a:r>
+              <a:rPr sz="3000" b="1" i="0">
+                <a:solidFill>
+                  <a:srgbClr val="0B0B0B"/>
+                </a:solidFill>
+                <a:latin typeface="Segoe UI"/>
+              </a:rPr>
+              <a:t>Limitations</a:t>
             </a:r>
           </a:p>
         </p:txBody>
@@ -9906,28 +8405,189 @@
         </p:nvSpPr>
         <p:spPr>
           <a:xfrm>
-            <a:off x="685800" y="713232"/>
-            <a:ext cx="10881360" cy="822960"/>
-          </a:xfrm>
-          <a:prstGeom prst="rect">
-            <a:avLst/>
-          </a:prstGeom>
-          <a:noFill/>
-        </p:spPr>
-        <p:txBody>
-          <a:bodyPr wrap="square">
-            <a:spAutoFit/>
-          </a:bodyPr>
-          <a:lstStyle/>
-          <a:p>
-            <a:r>
-              <a:rPr sz="2700" b="1" i="0">
+            <a:off x="685800" y="1371600"/>
+            <a:ext cx="10881360" cy="3931920"/>
+          </a:xfrm>
+          <a:prstGeom prst="rect">
+            <a:avLst/>
+          </a:prstGeom>
+          <a:noFill/>
+        </p:spPr>
+        <p:txBody>
+          <a:bodyPr wrap="square">
+            <a:spAutoFit/>
+          </a:bodyPr>
+          <a:lstStyle/>
+          <a:p>
+            <a:pPr>
+              <a:spcAft>
+                <a:spcPts val="800"/>
+              </a:spcAft>
+            </a:pPr>
+            <a:r>
+              <a:rPr sz="1500">
+                <a:solidFill>
+                  <a:srgbClr val="2A78D6"/>
+                </a:solidFill>
+                <a:latin typeface="Segoe UI"/>
+              </a:rPr>
+              <a:t>▪  </a:t>
+            </a:r>
+            <a:r>
+              <a:rPr sz="1500" b="0" i="0">
+                <a:solidFill>
+                  <a:srgbClr val="26251F"/>
+                </a:solidFill>
+                <a:latin typeface="Segoe UI"/>
+              </a:rPr>
+              <a:t>Crypto: it treats secure aggregation as a black box, with </a:t>
+            </a:r>
+            <a:r>
+              <a:rPr sz="1500" b="1" i="0">
                 <a:solidFill>
                   <a:srgbClr val="0B0B0B"/>
                 </a:solidFill>
                 <a:latin typeface="Segoe UI"/>
               </a:rPr>
-              <a:t>Where FedGT leaves gaps (our angle)</a:t>
+              <a:t>no post-quantum layer</a:t>
+            </a:r>
+            <a:r>
+              <a:rPr sz="1500" b="0" i="0">
+                <a:solidFill>
+                  <a:srgbClr val="26251F"/>
+                </a:solidFill>
+                <a:latin typeface="Segoe UI"/>
+              </a:rPr>
+              <a:t>, in a lattice-only field.</a:t>
+            </a:r>
+          </a:p>
+          <a:p>
+            <a:pPr>
+              <a:spcAft>
+                <a:spcPts val="800"/>
+              </a:spcAft>
+            </a:pPr>
+            <a:r>
+              <a:rPr sz="1500">
+                <a:solidFill>
+                  <a:srgbClr val="2A78D6"/>
+                </a:solidFill>
+                <a:latin typeface="Segoe UI"/>
+              </a:rPr>
+              <a:t>▪  </a:t>
+            </a:r>
+            <a:r>
+              <a:rPr sz="1500" b="0" i="0">
+                <a:solidFill>
+                  <a:srgbClr val="26251F"/>
+                </a:solidFill>
+                <a:latin typeface="Segoe UI"/>
+              </a:rPr>
+              <a:t>Cost: it needs a </a:t>
+            </a:r>
+            <a:r>
+              <a:rPr sz="1500" b="1" i="0">
+                <a:solidFill>
+                  <a:srgbClr val="0B0B0B"/>
+                </a:solidFill>
+                <a:latin typeface="Segoe UI"/>
+              </a:rPr>
+              <a:t>server validation set</a:t>
+            </a:r>
+            <a:r>
+              <a:rPr sz="1500" b="0" i="0">
+                <a:solidFill>
+                  <a:srgbClr val="26251F"/>
+                </a:solidFill>
+                <a:latin typeface="Segoe UI"/>
+              </a:rPr>
+              <a:t> and per-round group testing over fixed overlapping groups.</a:t>
+            </a:r>
+          </a:p>
+          <a:p>
+            <a:pPr>
+              <a:spcAft>
+                <a:spcPts val="800"/>
+              </a:spcAft>
+            </a:pPr>
+            <a:r>
+              <a:rPr sz="1500">
+                <a:solidFill>
+                  <a:srgbClr val="2A78D6"/>
+                </a:solidFill>
+                <a:latin typeface="Segoe UI"/>
+              </a:rPr>
+              <a:t>▪  </a:t>
+            </a:r>
+            <a:r>
+              <a:rPr sz="1500" b="0" i="0">
+                <a:solidFill>
+                  <a:srgbClr val="26251F"/>
+                </a:solidFill>
+                <a:latin typeface="Segoe UI"/>
+              </a:rPr>
+              <a:t>Single-round decode: it identifies attackers from </a:t>
+            </a:r>
+            <a:r>
+              <a:rPr sz="1500" b="1" i="0">
+                <a:solidFill>
+                  <a:srgbClr val="0B0B0B"/>
+                </a:solidFill>
+                <a:latin typeface="Segoe UI"/>
+              </a:rPr>
+              <a:t>one round's tests</a:t>
+            </a:r>
+            <a:r>
+              <a:rPr sz="1500" b="0" i="0">
+                <a:solidFill>
+                  <a:srgbClr val="26251F"/>
+                </a:solidFill>
+                <a:latin typeface="Segoe UI"/>
+              </a:rPr>
+              <a:t>, using no information across rounds.</a:t>
+            </a:r>
+          </a:p>
+          <a:p>
+            <a:pPr>
+              <a:spcAft>
+                <a:spcPts val="800"/>
+              </a:spcAft>
+            </a:pPr>
+            <a:r>
+              <a:rPr sz="1500">
+                <a:solidFill>
+                  <a:srgbClr val="2A78D6"/>
+                </a:solidFill>
+                <a:latin typeface="Segoe UI"/>
+              </a:rPr>
+              <a:t>▪  </a:t>
+            </a:r>
+            <a:r>
+              <a:rPr sz="1500" b="0" i="0">
+                <a:solidFill>
+                  <a:srgbClr val="26251F"/>
+                </a:solidFill>
+                <a:latin typeface="Segoe UI"/>
+              </a:rPr>
+              <a:t>Unexplained failure: it does not characterize </a:t>
+            </a:r>
+            <a:r>
+              <a:rPr sz="1500" b="1" i="0">
+                <a:solidFill>
+                  <a:srgbClr val="0B0B0B"/>
+                </a:solidFill>
+                <a:latin typeface="Segoe UI"/>
+              </a:rPr>
+              <a:t>why ordinary robust aggregation breaks</a:t>
+            </a:r>
+            <a:r>
+              <a:rPr sz="1500" b="0" i="0">
+                <a:solidFill>
+                  <a:srgbClr val="26251F"/>
+                </a:solidFill>
+                <a:latin typeface="Segoe UI"/>
+              </a:rPr>
+              <a:t> once updates are hidden.</a:t>
             </a:r>
           </a:p>
         </p:txBody>
@@ -9940,189 +8600,33 @@
         </p:nvSpPr>
         <p:spPr>
           <a:xfrm>
-            <a:off x="685800" y="1572768"/>
-            <a:ext cx="10881360" cy="3931920"/>
-          </a:xfrm>
-          <a:prstGeom prst="rect">
-            <a:avLst/>
-          </a:prstGeom>
-          <a:noFill/>
-        </p:spPr>
-        <p:txBody>
-          <a:bodyPr wrap="square">
-            <a:spAutoFit/>
-          </a:bodyPr>
-          <a:lstStyle/>
-          <a:p>
-            <a:pPr>
-              <a:spcAft>
-                <a:spcPts val="800"/>
-              </a:spcAft>
-            </a:pPr>
-            <a:r>
-              <a:rPr sz="1500">
-                <a:solidFill>
-                  <a:srgbClr val="2A78D6"/>
-                </a:solidFill>
-                <a:latin typeface="Segoe UI"/>
-              </a:rPr>
-              <a:t>▪  </a:t>
-            </a:r>
-            <a:r>
-              <a:rPr sz="1500" b="0" i="0">
-                <a:solidFill>
-                  <a:srgbClr val="26251F"/>
-                </a:solidFill>
-                <a:latin typeface="Segoe UI"/>
-              </a:rPr>
-              <a:t>Crypto: it treats secure aggregation as a black box, with </a:t>
-            </a:r>
-            <a:r>
-              <a:rPr sz="1500" b="1" i="0">
-                <a:solidFill>
-                  <a:srgbClr val="0B0B0B"/>
-                </a:solidFill>
-                <a:latin typeface="Segoe UI"/>
-              </a:rPr>
-              <a:t>no post-quantum layer</a:t>
-            </a:r>
-            <a:r>
-              <a:rPr sz="1500" b="0" i="0">
-                <a:solidFill>
-                  <a:srgbClr val="26251F"/>
-                </a:solidFill>
-                <a:latin typeface="Segoe UI"/>
-              </a:rPr>
-              <a:t>, in a lattice-only field.</a:t>
-            </a:r>
-          </a:p>
-          <a:p>
-            <a:pPr>
-              <a:spcAft>
-                <a:spcPts val="800"/>
-              </a:spcAft>
-            </a:pPr>
-            <a:r>
-              <a:rPr sz="1500">
-                <a:solidFill>
-                  <a:srgbClr val="2A78D6"/>
-                </a:solidFill>
-                <a:latin typeface="Segoe UI"/>
-              </a:rPr>
-              <a:t>▪  </a:t>
-            </a:r>
-            <a:r>
-              <a:rPr sz="1500" b="0" i="0">
-                <a:solidFill>
-                  <a:srgbClr val="26251F"/>
-                </a:solidFill>
-                <a:latin typeface="Segoe UI"/>
-              </a:rPr>
-              <a:t>Cost: it needs a </a:t>
-            </a:r>
-            <a:r>
-              <a:rPr sz="1500" b="1" i="0">
-                <a:solidFill>
-                  <a:srgbClr val="0B0B0B"/>
-                </a:solidFill>
-                <a:latin typeface="Segoe UI"/>
-              </a:rPr>
-              <a:t>server validation set</a:t>
-            </a:r>
-            <a:r>
-              <a:rPr sz="1500" b="0" i="0">
-                <a:solidFill>
-                  <a:srgbClr val="26251F"/>
-                </a:solidFill>
-                <a:latin typeface="Segoe UI"/>
-              </a:rPr>
-              <a:t> and per-round group testing over fixed overlapping groups.</a:t>
-            </a:r>
-          </a:p>
-          <a:p>
-            <a:pPr>
-              <a:spcAft>
-                <a:spcPts val="800"/>
-              </a:spcAft>
-            </a:pPr>
-            <a:r>
-              <a:rPr sz="1500">
-                <a:solidFill>
-                  <a:srgbClr val="2A78D6"/>
-                </a:solidFill>
-                <a:latin typeface="Segoe UI"/>
-              </a:rPr>
-              <a:t>▪  </a:t>
-            </a:r>
-            <a:r>
-              <a:rPr sz="1500" b="0" i="0">
-                <a:solidFill>
-                  <a:srgbClr val="26251F"/>
-                </a:solidFill>
-                <a:latin typeface="Segoe UI"/>
-              </a:rPr>
-              <a:t>Single-round decode: it identifies attackers from </a:t>
-            </a:r>
-            <a:r>
-              <a:rPr sz="1500" b="1" i="0">
-                <a:solidFill>
-                  <a:srgbClr val="0B0B0B"/>
-                </a:solidFill>
-                <a:latin typeface="Segoe UI"/>
-              </a:rPr>
-              <a:t>one round's tests</a:t>
-            </a:r>
-            <a:r>
-              <a:rPr sz="1500" b="0" i="0">
-                <a:solidFill>
-                  <a:srgbClr val="26251F"/>
-                </a:solidFill>
-                <a:latin typeface="Segoe UI"/>
-              </a:rPr>
-              <a:t>, using no information across rounds.</a:t>
-            </a:r>
-          </a:p>
-          <a:p>
-            <a:pPr>
-              <a:spcAft>
-                <a:spcPts val="800"/>
-              </a:spcAft>
-            </a:pPr>
-            <a:r>
-              <a:rPr sz="1500">
-                <a:solidFill>
-                  <a:srgbClr val="2A78D6"/>
-                </a:solidFill>
-                <a:latin typeface="Segoe UI"/>
-              </a:rPr>
-              <a:t>▪  </a:t>
-            </a:r>
-            <a:r>
-              <a:rPr sz="1500" b="0" i="0">
-                <a:solidFill>
-                  <a:srgbClr val="26251F"/>
-                </a:solidFill>
-                <a:latin typeface="Segoe UI"/>
-              </a:rPr>
-              <a:t>Unexplained failure: it does not characterize </a:t>
-            </a:r>
-            <a:r>
-              <a:rPr sz="1500" b="1" i="0">
-                <a:solidFill>
-                  <a:srgbClr val="0B0B0B"/>
-                </a:solidFill>
-                <a:latin typeface="Segoe UI"/>
-              </a:rPr>
-              <a:t>why ordinary robust aggregation breaks</a:t>
-            </a:r>
-            <a:r>
-              <a:rPr sz="1500" b="0" i="0">
-                <a:solidFill>
-                  <a:srgbClr val="26251F"/>
-                </a:solidFill>
-                <a:latin typeface="Segoe UI"/>
-              </a:rPr>
-              <a:t> once updates are hidden.</a:t>
+            <a:off x="685800" y="5943600"/>
+            <a:ext cx="10881360" cy="502920"/>
+          </a:xfrm>
+          <a:prstGeom prst="rect">
+            <a:avLst/>
+          </a:prstGeom>
+          <a:noFill/>
+        </p:spPr>
+        <p:txBody>
+          <a:bodyPr wrap="square">
+            <a:spAutoFit/>
+          </a:bodyPr>
+          <a:lstStyle/>
+          <a:p>
+            <a:pPr>
+              <a:spcAft>
+                <a:spcPts val="100"/>
+              </a:spcAft>
+            </a:pPr>
+            <a:r>
+              <a:rPr sz="800" b="0" i="1">
+                <a:solidFill>
+                  <a:srgbClr val="2A78D6"/>
+                </a:solidFill>
+                <a:latin typeface="Segoe UI"/>
+              </a:rPr>
+              <a:t>[1] M. Xhemrishi, J. Östman, A. Wachter-Zeh, and A. Graell i Amat, "FedGT: Identification of malicious clients in federated learning with secure aggregation," IEEE Trans. Inf. Forensics Security, vol. 20, pp. 2577–2592, 2025.</a:t>
             </a:r>
           </a:p>
         </p:txBody>
@@ -10130,79 +8634,6 @@
       <p:sp>
         <p:nvSpPr>
           <p:cNvPr id="5" name="TextBox 4"/>
-          <p:cNvSpPr txBox="1"/>
-          <p:nvPr/>
-        </p:nvSpPr>
-        <p:spPr>
-          <a:xfrm>
-            <a:off x="685800" y="5870448"/>
-            <a:ext cx="10881360" cy="530352"/>
-          </a:xfrm>
-          <a:prstGeom prst="rect">
-            <a:avLst/>
-          </a:prstGeom>
-          <a:noFill/>
-        </p:spPr>
-        <p:txBody>
-          <a:bodyPr wrap="square">
-            <a:spAutoFit/>
-          </a:bodyPr>
-          <a:lstStyle/>
-          <a:p>
-            <a:pPr>
-              <a:spcAft>
-                <a:spcPts val="100"/>
-              </a:spcAft>
-            </a:pPr>
-            <a:r>
-              <a:rPr sz="800" b="0" i="1">
-                <a:solidFill>
-                  <a:srgbClr val="2A78D6"/>
-                </a:solidFill>
-                <a:latin typeface="Segoe UI"/>
-              </a:rPr>
-              <a:t>[1] M. Xhemrishi, J. Östman, A. Wachter-Zeh, and A. Graell i Amat, "FedGT: Identification of malicious clients in federated learning with secure aggregation," IEEE Trans. Inf. Forensics Security, vol. 20, pp. 2577–2592, 2025.</a:t>
-            </a:r>
-          </a:p>
-        </p:txBody>
-      </p:sp>
-      <p:sp>
-        <p:nvSpPr>
-          <p:cNvPr id="6" name="TextBox 5"/>
-          <p:cNvSpPr txBox="1"/>
-          <p:nvPr/>
-        </p:nvSpPr>
-        <p:spPr>
-          <a:xfrm>
-            <a:off x="685800" y="6446520"/>
-            <a:ext cx="7680960" cy="274320"/>
-          </a:xfrm>
-          <a:prstGeom prst="rect">
-            <a:avLst/>
-          </a:prstGeom>
-          <a:noFill/>
-        </p:spPr>
-        <p:txBody>
-          <a:bodyPr wrap="square">
-            <a:spAutoFit/>
-          </a:bodyPr>
-          <a:lstStyle/>
-          <a:p>
-            <a:r>
-              <a:rPr sz="1050" b="0" i="0">
-                <a:solidFill>
-                  <a:srgbClr val="898781"/>
-                </a:solidFill>
-                <a:latin typeface="Segoe UI"/>
-              </a:rPr>
-              <a:t>CB-SAFE · Suva &amp; Chowdhury · AIUB</a:t>
-            </a:r>
-          </a:p>
-        </p:txBody>
-      </p:sp>
-      <p:sp>
-        <p:nvSpPr>
-          <p:cNvPr id="7" name="TextBox 6"/>
           <p:cNvSpPr txBox="1"/>
           <p:nvPr/>
         </p:nvSpPr>
@@ -10261,28 +8692,28 @@
         </p:nvSpPr>
         <p:spPr>
           <a:xfrm>
-            <a:off x="685800" y="384048"/>
-            <a:ext cx="10881360" cy="320040"/>
-          </a:xfrm>
-          <a:prstGeom prst="rect">
-            <a:avLst/>
-          </a:prstGeom>
-          <a:noFill/>
-        </p:spPr>
-        <p:txBody>
-          <a:bodyPr wrap="square">
-            <a:spAutoFit/>
-          </a:bodyPr>
-          <a:lstStyle/>
-          <a:p>
-            <a:r>
-              <a:rPr sz="1200" b="1" i="0">
-                <a:solidFill>
-                  <a:srgbClr val="2A78D6"/>
-                </a:solidFill>
-                <a:latin typeface="Segoe UI"/>
-              </a:rPr>
-              <a:t>WHY THIS PAPER</a:t>
+            <a:off x="685800" y="438912"/>
+            <a:ext cx="10881360" cy="822960"/>
+          </a:xfrm>
+          <a:prstGeom prst="rect">
+            <a:avLst/>
+          </a:prstGeom>
+          <a:noFill/>
+        </p:spPr>
+        <p:txBody>
+          <a:bodyPr wrap="square">
+            <a:spAutoFit/>
+          </a:bodyPr>
+          <a:lstStyle/>
+          <a:p>
+            <a:r>
+              <a:rPr sz="3000" b="1" i="0">
+                <a:solidFill>
+                  <a:srgbClr val="0B0B0B"/>
+                </a:solidFill>
+                <a:latin typeface="Segoe UI"/>
+              </a:rPr>
+              <a:t>Paper Selection</a:t>
             </a:r>
           </a:p>
         </p:txBody>
@@ -10295,28 +8726,117 @@
         </p:nvSpPr>
         <p:spPr>
           <a:xfrm>
-            <a:off x="685800" y="713232"/>
-            <a:ext cx="10881360" cy="822960"/>
-          </a:xfrm>
-          <a:prstGeom prst="rect">
-            <a:avLst/>
-          </a:prstGeom>
-          <a:noFill/>
-        </p:spPr>
-        <p:txBody>
-          <a:bodyPr wrap="square">
-            <a:spAutoFit/>
-          </a:bodyPr>
-          <a:lstStyle/>
-          <a:p>
-            <a:r>
-              <a:rPr sz="2700" b="1" i="0">
-                <a:solidFill>
-                  <a:srgbClr val="0B0B0B"/>
-                </a:solidFill>
-                <a:latin typeface="Segoe UI"/>
-              </a:rPr>
-              <a:t>Why FedGT is our basis (selection criteria)</a:t>
+            <a:off x="685800" y="1371600"/>
+            <a:ext cx="10881360" cy="3931920"/>
+          </a:xfrm>
+          <a:prstGeom prst="rect">
+            <a:avLst/>
+          </a:prstGeom>
+          <a:noFill/>
+        </p:spPr>
+        <p:txBody>
+          <a:bodyPr wrap="square">
+            <a:spAutoFit/>
+          </a:bodyPr>
+          <a:lstStyle/>
+          <a:p>
+            <a:pPr>
+              <a:spcAft>
+                <a:spcPts val="800"/>
+              </a:spcAft>
+            </a:pPr>
+            <a:r>
+              <a:rPr sz="1500">
+                <a:solidFill>
+                  <a:srgbClr val="2A78D6"/>
+                </a:solidFill>
+                <a:latin typeface="Segoe UI"/>
+              </a:rPr>
+              <a:t>▪  </a:t>
+            </a:r>
+            <a:r>
+              <a:rPr sz="1500" b="0" i="0">
+                <a:solidFill>
+                  <a:srgbClr val="26251F"/>
+                </a:solidFill>
+                <a:latin typeface="Segoe UI"/>
+              </a:rPr>
+              <a:t>Venue quality: IEEE TIFS, a Q1 security journal. Recency: published 2025.</a:t>
+            </a:r>
+          </a:p>
+          <a:p>
+            <a:pPr>
+              <a:spcAft>
+                <a:spcPts val="800"/>
+              </a:spcAft>
+            </a:pPr>
+            <a:r>
+              <a:rPr sz="1500">
+                <a:solidFill>
+                  <a:srgbClr val="2A78D6"/>
+                </a:solidFill>
+                <a:latin typeface="Segoe UI"/>
+              </a:rPr>
+              <a:t>▪  </a:t>
+            </a:r>
+            <a:r>
+              <a:rPr sz="1500" b="0" i="0">
+                <a:solidFill>
+                  <a:srgbClr val="26251F"/>
+                </a:solidFill>
+                <a:latin typeface="Segoe UI"/>
+              </a:rPr>
+              <a:t>Relevance: it solves our exact sub-problem, malicious-client identification under secure aggregation.</a:t>
+            </a:r>
+          </a:p>
+          <a:p>
+            <a:pPr>
+              <a:spcAft>
+                <a:spcPts val="800"/>
+              </a:spcAft>
+            </a:pPr>
+            <a:r>
+              <a:rPr sz="1500">
+                <a:solidFill>
+                  <a:srgbClr val="2A78D6"/>
+                </a:solidFill>
+                <a:latin typeface="Segoe UI"/>
+              </a:rPr>
+              <a:t>▪  </a:t>
+            </a:r>
+            <a:r>
+              <a:rPr sz="1500" b="0" i="0">
+                <a:solidFill>
+                  <a:srgbClr val="26251F"/>
+                </a:solidFill>
+                <a:latin typeface="Segoe UI"/>
+              </a:rPr>
+              <a:t>Method strength: its group testing outperforms the geometric median (RFA) and Multi-Krum in its own study.</a:t>
+            </a:r>
+          </a:p>
+          <a:p>
+            <a:pPr>
+              <a:spcAft>
+                <a:spcPts val="800"/>
+              </a:spcAft>
+            </a:pPr>
+            <a:r>
+              <a:rPr sz="1500">
+                <a:solidFill>
+                  <a:srgbClr val="2A78D6"/>
+                </a:solidFill>
+                <a:latin typeface="Segoe UI"/>
+              </a:rPr>
+              <a:t>▪  </a:t>
+            </a:r>
+            <a:r>
+              <a:rPr sz="1500" b="0" i="0">
+                <a:solidFill>
+                  <a:srgbClr val="26251F"/>
+                </a:solidFill>
+                <a:latin typeface="Segoe UI"/>
+              </a:rPr>
+              <a:t>Reproducible: public code and a clearly specified protocol, a solid foundation to build on.</a:t>
             </a:r>
           </a:p>
         </p:txBody>
@@ -10329,117 +8849,49 @@
         </p:nvSpPr>
         <p:spPr>
           <a:xfrm>
-            <a:off x="685800" y="1572768"/>
-            <a:ext cx="10881360" cy="3931920"/>
-          </a:xfrm>
-          <a:prstGeom prst="rect">
-            <a:avLst/>
-          </a:prstGeom>
-          <a:noFill/>
-        </p:spPr>
-        <p:txBody>
-          <a:bodyPr wrap="square">
-            <a:spAutoFit/>
-          </a:bodyPr>
-          <a:lstStyle/>
-          <a:p>
-            <a:pPr>
-              <a:spcAft>
-                <a:spcPts val="800"/>
-              </a:spcAft>
-            </a:pPr>
-            <a:r>
-              <a:rPr sz="1500">
-                <a:solidFill>
-                  <a:srgbClr val="2A78D6"/>
-                </a:solidFill>
-                <a:latin typeface="Segoe UI"/>
-              </a:rPr>
-              <a:t>▪  </a:t>
-            </a:r>
-            <a:r>
-              <a:rPr sz="1500" b="0" i="0">
-                <a:solidFill>
-                  <a:srgbClr val="26251F"/>
-                </a:solidFill>
-                <a:latin typeface="Segoe UI"/>
-              </a:rPr>
-              <a:t>Venue quality: IEEE TIFS, a Q1 security journal. Recency: published 2025.</a:t>
-            </a:r>
-          </a:p>
-          <a:p>
-            <a:pPr>
-              <a:spcAft>
-                <a:spcPts val="800"/>
-              </a:spcAft>
-            </a:pPr>
-            <a:r>
-              <a:rPr sz="1500">
-                <a:solidFill>
-                  <a:srgbClr val="2A78D6"/>
-                </a:solidFill>
-                <a:latin typeface="Segoe UI"/>
-              </a:rPr>
-              <a:t>▪  </a:t>
-            </a:r>
-            <a:r>
-              <a:rPr sz="1500" b="0" i="0">
-                <a:solidFill>
-                  <a:srgbClr val="26251F"/>
-                </a:solidFill>
-                <a:latin typeface="Segoe UI"/>
-              </a:rPr>
-              <a:t>Relevance: it solves our exact sub-problem, malicious-client identification under secure aggregation.</a:t>
-            </a:r>
-          </a:p>
-          <a:p>
-            <a:pPr>
-              <a:spcAft>
-                <a:spcPts val="800"/>
-              </a:spcAft>
-            </a:pPr>
-            <a:r>
-              <a:rPr sz="1500">
-                <a:solidFill>
-                  <a:srgbClr val="2A78D6"/>
-                </a:solidFill>
-                <a:latin typeface="Segoe UI"/>
-              </a:rPr>
-              <a:t>▪  </a:t>
-            </a:r>
-            <a:r>
-              <a:rPr sz="1500" b="0" i="0">
-                <a:solidFill>
-                  <a:srgbClr val="26251F"/>
-                </a:solidFill>
-                <a:latin typeface="Segoe UI"/>
-              </a:rPr>
-              <a:t>Method strength: its group testing outperforms the geometric median (RFA) and Multi-Krum in its own study.</a:t>
-            </a:r>
-          </a:p>
-          <a:p>
-            <a:pPr>
-              <a:spcAft>
-                <a:spcPts val="800"/>
-              </a:spcAft>
-            </a:pPr>
-            <a:r>
-              <a:rPr sz="1500">
-                <a:solidFill>
-                  <a:srgbClr val="2A78D6"/>
-                </a:solidFill>
-                <a:latin typeface="Segoe UI"/>
-              </a:rPr>
-              <a:t>▪  </a:t>
-            </a:r>
-            <a:r>
-              <a:rPr sz="1500" b="0" i="0">
-                <a:solidFill>
-                  <a:srgbClr val="26251F"/>
-                </a:solidFill>
-                <a:latin typeface="Segoe UI"/>
-              </a:rPr>
-              <a:t>Reproducible: public code and a clearly specified protocol, a solid foundation to build on.</a:t>
+            <a:off x="685800" y="5943600"/>
+            <a:ext cx="10881360" cy="502920"/>
+          </a:xfrm>
+          <a:prstGeom prst="rect">
+            <a:avLst/>
+          </a:prstGeom>
+          <a:noFill/>
+        </p:spPr>
+        <p:txBody>
+          <a:bodyPr wrap="square">
+            <a:spAutoFit/>
+          </a:bodyPr>
+          <a:lstStyle/>
+          <a:p>
+            <a:pPr>
+              <a:spcAft>
+                <a:spcPts val="100"/>
+              </a:spcAft>
+            </a:pPr>
+            <a:r>
+              <a:rPr sz="800" b="0" i="1">
+                <a:solidFill>
+                  <a:srgbClr val="2A78D6"/>
+                </a:solidFill>
+                <a:latin typeface="Segoe UI"/>
+              </a:rPr>
+              <a:t>[1] M. Xhemrishi, J. Östman, A. Wachter-Zeh, and A. Graell i Amat, "FedGT: Identification of malicious clients in federated learning with secure aggregation," IEEE Trans. Inf. Forensics Security, vol. 20, pp. 2577–2592, 2025.</a:t>
+            </a:r>
+          </a:p>
+          <a:p>
+            <a:pPr>
+              <a:spcAft>
+                <a:spcPts val="100"/>
+              </a:spcAft>
+            </a:pPr>
+            <a:r>
+              <a:rPr sz="800" b="0" i="1">
+                <a:solidFill>
+                  <a:srgbClr val="2A78D6"/>
+                </a:solidFill>
+                <a:latin typeface="Segoe UI"/>
+              </a:rPr>
+              <a:t>[8] K. Pillutla, S. M. Kakade, and Z. Harchaoui, "Robust aggregation for federated learning," IEEE Trans. Signal Process., vol. 70, pp. 1142–1154, 2022.</a:t>
             </a:r>
           </a:p>
         </p:txBody>
@@ -10447,95 +8899,6 @@
       <p:sp>
         <p:nvSpPr>
           <p:cNvPr id="5" name="TextBox 4"/>
-          <p:cNvSpPr txBox="1"/>
-          <p:nvPr/>
-        </p:nvSpPr>
-        <p:spPr>
-          <a:xfrm>
-            <a:off x="685800" y="5870448"/>
-            <a:ext cx="10881360" cy="530352"/>
-          </a:xfrm>
-          <a:prstGeom prst="rect">
-            <a:avLst/>
-          </a:prstGeom>
-          <a:noFill/>
-        </p:spPr>
-        <p:txBody>
-          <a:bodyPr wrap="square">
-            <a:spAutoFit/>
-          </a:bodyPr>
-          <a:lstStyle/>
-          <a:p>
-            <a:pPr>
-              <a:spcAft>
-                <a:spcPts val="100"/>
-              </a:spcAft>
-            </a:pPr>
-            <a:r>
-              <a:rPr sz="800" b="0" i="1">
-                <a:solidFill>
-                  <a:srgbClr val="2A78D6"/>
-                </a:solidFill>
-                <a:latin typeface="Segoe UI"/>
-              </a:rPr>
-              <a:t>[1] M. Xhemrishi, J. Östman, A. Wachter-Zeh, and A. Graell i Amat, "FedGT: Identification of malicious clients in federated learning with secure aggregation," IEEE Trans. Inf. Forensics Security, vol. 20, pp. 2577–2592, 2025.</a:t>
-            </a:r>
-          </a:p>
-          <a:p>
-            <a:pPr>
-              <a:spcAft>
-                <a:spcPts val="100"/>
-              </a:spcAft>
-            </a:pPr>
-            <a:r>
-              <a:rPr sz="800" b="0" i="1">
-                <a:solidFill>
-                  <a:srgbClr val="2A78D6"/>
-                </a:solidFill>
-                <a:latin typeface="Segoe UI"/>
-              </a:rPr>
-              <a:t>[8] K. Pillutla, S. M. Kakade, and Z. Harchaoui, "Robust aggregation for federated learning," IEEE Trans. Signal Process., vol. 70, pp. 1142–1154, 2022.</a:t>
-            </a:r>
-          </a:p>
-        </p:txBody>
-      </p:sp>
-      <p:sp>
-        <p:nvSpPr>
-          <p:cNvPr id="6" name="TextBox 5"/>
-          <p:cNvSpPr txBox="1"/>
-          <p:nvPr/>
-        </p:nvSpPr>
-        <p:spPr>
-          <a:xfrm>
-            <a:off x="685800" y="6446520"/>
-            <a:ext cx="7680960" cy="274320"/>
-          </a:xfrm>
-          <a:prstGeom prst="rect">
-            <a:avLst/>
-          </a:prstGeom>
-          <a:noFill/>
-        </p:spPr>
-        <p:txBody>
-          <a:bodyPr wrap="square">
-            <a:spAutoFit/>
-          </a:bodyPr>
-          <a:lstStyle/>
-          <a:p>
-            <a:r>
-              <a:rPr sz="1050" b="0" i="0">
-                <a:solidFill>
-                  <a:srgbClr val="898781"/>
-                </a:solidFill>
-                <a:latin typeface="Segoe UI"/>
-              </a:rPr>
-              <a:t>CB-SAFE · Suva &amp; Chowdhury · AIUB</a:t>
-            </a:r>
-          </a:p>
-        </p:txBody>
-      </p:sp>
-      <p:sp>
-        <p:nvSpPr>
-          <p:cNvPr id="7" name="TextBox 6"/>
           <p:cNvSpPr txBox="1"/>
           <p:nvPr/>
         </p:nvSpPr>
@@ -10594,28 +8957,28 @@
         </p:nvSpPr>
         <p:spPr>
           <a:xfrm>
-            <a:off x="685800" y="384048"/>
-            <a:ext cx="10881360" cy="320040"/>
-          </a:xfrm>
-          <a:prstGeom prst="rect">
-            <a:avLst/>
-          </a:prstGeom>
-          <a:noFill/>
-        </p:spPr>
-        <p:txBody>
-          <a:bodyPr wrap="square">
-            <a:spAutoFit/>
-          </a:bodyPr>
-          <a:lstStyle/>
-          <a:p>
-            <a:r>
-              <a:rPr sz="1200" b="1" i="0">
-                <a:solidFill>
-                  <a:srgbClr val="2A78D6"/>
-                </a:solidFill>
-                <a:latin typeface="Segoe UI"/>
-              </a:rPr>
-              <a:t>OUR PROPOSAL</a:t>
+            <a:off x="685800" y="438912"/>
+            <a:ext cx="10881360" cy="822960"/>
+          </a:xfrm>
+          <a:prstGeom prst="rect">
+            <a:avLst/>
+          </a:prstGeom>
+          <a:noFill/>
+        </p:spPr>
+        <p:txBody>
+          <a:bodyPr wrap="square">
+            <a:spAutoFit/>
+          </a:bodyPr>
+          <a:lstStyle/>
+          <a:p>
+            <a:r>
+              <a:rPr sz="3000" b="1" i="0">
+                <a:solidFill>
+                  <a:srgbClr val="0B0B0B"/>
+                </a:solidFill>
+                <a:latin typeface="Segoe UI"/>
+              </a:rPr>
+              <a:t>Proposed Method</a:t>
             </a:r>
           </a:p>
         </p:txBody>
@@ -10628,28 +8991,28 @@
         </p:nvSpPr>
         <p:spPr>
           <a:xfrm>
-            <a:off x="685800" y="713232"/>
-            <a:ext cx="10881360" cy="822960"/>
-          </a:xfrm>
-          <a:prstGeom prst="rect">
-            <a:avLst/>
-          </a:prstGeom>
-          <a:noFill/>
-        </p:spPr>
-        <p:txBody>
-          <a:bodyPr wrap="square">
-            <a:spAutoFit/>
-          </a:bodyPr>
-          <a:lstStyle/>
-          <a:p>
-            <a:r>
-              <a:rPr sz="2700" b="1" i="0">
-                <a:solidFill>
-                  <a:srgbClr val="0B0B0B"/>
-                </a:solidFill>
-                <a:latin typeface="Segoe UI"/>
-              </a:rPr>
-              <a:t>CB-SAFE: code-based, private, and robust</a:t>
+            <a:off x="685800" y="1371600"/>
+            <a:ext cx="10881360" cy="457200"/>
+          </a:xfrm>
+          <a:prstGeom prst="rect">
+            <a:avLst/>
+          </a:prstGeom>
+          <a:noFill/>
+        </p:spPr>
+        <p:txBody>
+          <a:bodyPr wrap="square">
+            <a:spAutoFit/>
+          </a:bodyPr>
+          <a:lstStyle/>
+          <a:p>
+            <a:r>
+              <a:rPr sz="1400" b="0" i="1">
+                <a:solidFill>
+                  <a:srgbClr val="26251F"/>
+                </a:solidFill>
+                <a:latin typeface="Segoe UI"/>
+              </a:rPr>
+              <a:t>One framework that is private, post-quantum, and Byzantine-robust at the same time.</a:t>
             </a:r>
           </a:p>
         </p:txBody>
@@ -10662,28 +9025,92 @@
         </p:nvSpPr>
         <p:spPr>
           <a:xfrm>
-            <a:off x="685800" y="1572768"/>
-            <a:ext cx="10881360" cy="457200"/>
-          </a:xfrm>
-          <a:prstGeom prst="rect">
-            <a:avLst/>
-          </a:prstGeom>
-          <a:noFill/>
-        </p:spPr>
-        <p:txBody>
-          <a:bodyPr wrap="square">
-            <a:spAutoFit/>
-          </a:bodyPr>
-          <a:lstStyle/>
-          <a:p>
-            <a:r>
-              <a:rPr sz="1400" b="0" i="1">
-                <a:solidFill>
-                  <a:srgbClr val="26251F"/>
-                </a:solidFill>
-                <a:latin typeface="Segoe UI"/>
-              </a:rPr>
-              <a:t>One framework that is private, post-quantum, and Byzantine-robust at the same time.</a:t>
+            <a:off x="685800" y="1828800"/>
+            <a:ext cx="10881360" cy="3931920"/>
+          </a:xfrm>
+          <a:prstGeom prst="rect">
+            <a:avLst/>
+          </a:prstGeom>
+          <a:noFill/>
+        </p:spPr>
+        <p:txBody>
+          <a:bodyPr wrap="square">
+            <a:spAutoFit/>
+          </a:bodyPr>
+          <a:lstStyle/>
+          <a:p>
+            <a:pPr>
+              <a:spcAft>
+                <a:spcPts val="800"/>
+              </a:spcAft>
+            </a:pPr>
+            <a:r>
+              <a:rPr sz="1500">
+                <a:solidFill>
+                  <a:srgbClr val="2A78D6"/>
+                </a:solidFill>
+                <a:latin typeface="Segoe UI"/>
+              </a:rPr>
+              <a:t>▪  </a:t>
+            </a:r>
+            <a:r>
+              <a:rPr sz="1500" b="0" i="0">
+                <a:solidFill>
+                  <a:srgbClr val="26251F"/>
+                </a:solidFill>
+                <a:latin typeface="Segoe UI"/>
+              </a:rPr>
+              <a:t>Hide updates within clusters using a code-based (HQC) masking protocol: the server sees only cluster sums.</a:t>
+            </a:r>
+          </a:p>
+          <a:p>
+            <a:pPr>
+              <a:spcAft>
+                <a:spcPts val="800"/>
+              </a:spcAft>
+            </a:pPr>
+            <a:r>
+              <a:rPr sz="1500">
+                <a:solidFill>
+                  <a:srgbClr val="2A78D6"/>
+                </a:solidFill>
+                <a:latin typeface="Segoe UI"/>
+              </a:rPr>
+              <a:t>▪  </a:t>
+            </a:r>
+            <a:r>
+              <a:rPr sz="1500" b="0" i="0">
+                <a:solidFill>
+                  <a:srgbClr val="26251F"/>
+                </a:solidFill>
+                <a:latin typeface="Segoe UI"/>
+              </a:rPr>
+              <a:t>Run group testing across re-randomized clusters over rounds to identify attackers (CB-SAFE+).</a:t>
+            </a:r>
+          </a:p>
+          <a:p>
+            <a:pPr>
+              <a:spcAft>
+                <a:spcPts val="800"/>
+              </a:spcAft>
+            </a:pPr>
+            <a:r>
+              <a:rPr sz="1500">
+                <a:solidFill>
+                  <a:srgbClr val="2A78D6"/>
+                </a:solidFill>
+                <a:latin typeface="Segoe UI"/>
+              </a:rPr>
+              <a:t>▪  </a:t>
+            </a:r>
+            <a:r>
+              <a:rPr sz="1500" b="0" i="0">
+                <a:solidFill>
+                  <a:srgbClr val="26251F"/>
+                </a:solidFill>
+                <a:latin typeface="Segoe UI"/>
+              </a:rPr>
+              <a:t>Confidentiality lives below the cluster boundary; robustness operates above it; post-quantum by construction.</a:t>
             </a:r>
           </a:p>
         </p:txBody>
@@ -10696,92 +9123,49 @@
         </p:nvSpPr>
         <p:spPr>
           <a:xfrm>
-            <a:off x="685800" y="2048256"/>
-            <a:ext cx="10881360" cy="3931920"/>
-          </a:xfrm>
-          <a:prstGeom prst="rect">
-            <a:avLst/>
-          </a:prstGeom>
-          <a:noFill/>
-        </p:spPr>
-        <p:txBody>
-          <a:bodyPr wrap="square">
-            <a:spAutoFit/>
-          </a:bodyPr>
-          <a:lstStyle/>
-          <a:p>
-            <a:pPr>
-              <a:spcAft>
-                <a:spcPts val="800"/>
-              </a:spcAft>
-            </a:pPr>
-            <a:r>
-              <a:rPr sz="1500">
-                <a:solidFill>
-                  <a:srgbClr val="2A78D6"/>
-                </a:solidFill>
-                <a:latin typeface="Segoe UI"/>
-              </a:rPr>
-              <a:t>▪  </a:t>
-            </a:r>
-            <a:r>
-              <a:rPr sz="1500" b="0" i="0">
-                <a:solidFill>
-                  <a:srgbClr val="26251F"/>
-                </a:solidFill>
-                <a:latin typeface="Segoe UI"/>
-              </a:rPr>
-              <a:t>Hide updates within clusters using a code-based (HQC) masking protocol: the server sees only cluster sums.</a:t>
-            </a:r>
-          </a:p>
-          <a:p>
-            <a:pPr>
-              <a:spcAft>
-                <a:spcPts val="800"/>
-              </a:spcAft>
-            </a:pPr>
-            <a:r>
-              <a:rPr sz="1500">
-                <a:solidFill>
-                  <a:srgbClr val="2A78D6"/>
-                </a:solidFill>
-                <a:latin typeface="Segoe UI"/>
-              </a:rPr>
-              <a:t>▪  </a:t>
-            </a:r>
-            <a:r>
-              <a:rPr sz="1500" b="0" i="0">
-                <a:solidFill>
-                  <a:srgbClr val="26251F"/>
-                </a:solidFill>
-                <a:latin typeface="Segoe UI"/>
-              </a:rPr>
-              <a:t>Run group testing across re-randomized clusters over rounds to identify attackers (CB-SAFE+).</a:t>
-            </a:r>
-          </a:p>
-          <a:p>
-            <a:pPr>
-              <a:spcAft>
-                <a:spcPts val="800"/>
-              </a:spcAft>
-            </a:pPr>
-            <a:r>
-              <a:rPr sz="1500">
-                <a:solidFill>
-                  <a:srgbClr val="2A78D6"/>
-                </a:solidFill>
-                <a:latin typeface="Segoe UI"/>
-              </a:rPr>
-              <a:t>▪  </a:t>
-            </a:r>
-            <a:r>
-              <a:rPr sz="1500" b="0" i="0">
-                <a:solidFill>
-                  <a:srgbClr val="26251F"/>
-                </a:solidFill>
-                <a:latin typeface="Segoe UI"/>
-              </a:rPr>
-              <a:t>Confidentiality lives below the cluster boundary; robustness operates above it; post-quantum by construction.</a:t>
+            <a:off x="685800" y="5943600"/>
+            <a:ext cx="10881360" cy="502920"/>
+          </a:xfrm>
+          <a:prstGeom prst="rect">
+            <a:avLst/>
+          </a:prstGeom>
+          <a:noFill/>
+        </p:spPr>
+        <p:txBody>
+          <a:bodyPr wrap="square">
+            <a:spAutoFit/>
+          </a:bodyPr>
+          <a:lstStyle/>
+          <a:p>
+            <a:pPr>
+              <a:spcAft>
+                <a:spcPts val="100"/>
+              </a:spcAft>
+            </a:pPr>
+            <a:r>
+              <a:rPr sz="800" b="0" i="1">
+                <a:solidFill>
+                  <a:srgbClr val="2A78D6"/>
+                </a:solidFill>
+                <a:latin typeface="Segoe UI"/>
+              </a:rPr>
+              <a:t>[1] M. Xhemrishi, J. Östman, A. Wachter-Zeh, and A. Graell i Amat, "FedGT: Identification of malicious clients in federated learning with secure aggregation," IEEE Trans. Inf. Forensics Security, vol. 20, pp. 2577–2592, 2025.</a:t>
+            </a:r>
+          </a:p>
+          <a:p>
+            <a:pPr>
+              <a:spcAft>
+                <a:spcPts val="100"/>
+              </a:spcAft>
+            </a:pPr>
+            <a:r>
+              <a:rPr sz="800" b="0" i="1">
+                <a:solidFill>
+                  <a:srgbClr val="2A78D6"/>
+                </a:solidFill>
+                <a:latin typeface="Segoe UI"/>
+              </a:rPr>
+              <a:t>[2] K. Bonawitz, V. Ivanov, B. Kreuter, A. Marcedone, H. B. McMahan, S. Patel, D. Ramage, A. Segal, and K. Seth, "Practical secure aggregation for privacy-preserving machine learning," in Proc. ACM CCS, 2017, pp. 1175–1191.</a:t>
             </a:r>
           </a:p>
         </p:txBody>
@@ -10789,95 +9173,6 @@
       <p:sp>
         <p:nvSpPr>
           <p:cNvPr id="6" name="TextBox 5"/>
-          <p:cNvSpPr txBox="1"/>
-          <p:nvPr/>
-        </p:nvSpPr>
-        <p:spPr>
-          <a:xfrm>
-            <a:off x="685800" y="5870448"/>
-            <a:ext cx="10881360" cy="530352"/>
-          </a:xfrm>
-          <a:prstGeom prst="rect">
-            <a:avLst/>
-          </a:prstGeom>
-          <a:noFill/>
-        </p:spPr>
-        <p:txBody>
-          <a:bodyPr wrap="square">
-            <a:spAutoFit/>
-          </a:bodyPr>
-          <a:lstStyle/>
-          <a:p>
-            <a:pPr>
-              <a:spcAft>
-                <a:spcPts val="100"/>
-              </a:spcAft>
-            </a:pPr>
-            <a:r>
-              <a:rPr sz="800" b="0" i="1">
-                <a:solidFill>
-                  <a:srgbClr val="2A78D6"/>
-                </a:solidFill>
-                <a:latin typeface="Segoe UI"/>
-              </a:rPr>
-              <a:t>[1] M. Xhemrishi, J. Östman, A. Wachter-Zeh, and A. Graell i Amat, "FedGT: Identification of malicious clients in federated learning with secure aggregation," IEEE Trans. Inf. Forensics Security, vol. 20, pp. 2577–2592, 2025.</a:t>
-            </a:r>
-          </a:p>
-          <a:p>
-            <a:pPr>
-              <a:spcAft>
-                <a:spcPts val="100"/>
-              </a:spcAft>
-            </a:pPr>
-            <a:r>
-              <a:rPr sz="800" b="0" i="1">
-                <a:solidFill>
-                  <a:srgbClr val="2A78D6"/>
-                </a:solidFill>
-                <a:latin typeface="Segoe UI"/>
-              </a:rPr>
-              <a:t>[2] K. Bonawitz, V. Ivanov, B. Kreuter, A. Marcedone, H. B. McMahan, S. Patel, D. Ramage, A. Segal, and K. Seth, "Practical secure aggregation for privacy-preserving machine learning," in Proc. ACM CCS, 2017, pp. 1175–1191.</a:t>
-            </a:r>
-          </a:p>
-        </p:txBody>
-      </p:sp>
-      <p:sp>
-        <p:nvSpPr>
-          <p:cNvPr id="7" name="TextBox 6"/>
-          <p:cNvSpPr txBox="1"/>
-          <p:nvPr/>
-        </p:nvSpPr>
-        <p:spPr>
-          <a:xfrm>
-            <a:off x="685800" y="6446520"/>
-            <a:ext cx="7680960" cy="274320"/>
-          </a:xfrm>
-          <a:prstGeom prst="rect">
-            <a:avLst/>
-          </a:prstGeom>
-          <a:noFill/>
-        </p:spPr>
-        <p:txBody>
-          <a:bodyPr wrap="square">
-            <a:spAutoFit/>
-          </a:bodyPr>
-          <a:lstStyle/>
-          <a:p>
-            <a:r>
-              <a:rPr sz="1050" b="0" i="0">
-                <a:solidFill>
-                  <a:srgbClr val="898781"/>
-                </a:solidFill>
-                <a:latin typeface="Segoe UI"/>
-              </a:rPr>
-              <a:t>CB-SAFE · Suva &amp; Chowdhury · AIUB</a:t>
-            </a:r>
-          </a:p>
-        </p:txBody>
-      </p:sp>
-      <p:sp>
-        <p:nvSpPr>
-          <p:cNvPr id="8" name="TextBox 7"/>
           <p:cNvSpPr txBox="1"/>
           <p:nvPr/>
         </p:nvSpPr>
@@ -10936,28 +9231,28 @@
         </p:nvSpPr>
         <p:spPr>
           <a:xfrm>
-            <a:off x="685800" y="384048"/>
-            <a:ext cx="10881360" cy="320040"/>
-          </a:xfrm>
-          <a:prstGeom prst="rect">
-            <a:avLst/>
-          </a:prstGeom>
-          <a:noFill/>
-        </p:spPr>
-        <p:txBody>
-          <a:bodyPr wrap="square">
-            <a:spAutoFit/>
-          </a:bodyPr>
-          <a:lstStyle/>
-          <a:p>
-            <a:r>
-              <a:rPr sz="1200" b="1" i="0">
-                <a:solidFill>
-                  <a:srgbClr val="2A78D6"/>
-                </a:solidFill>
-                <a:latin typeface="Segoe UI"/>
-              </a:rPr>
-              <a:t>COMPONENT 1 / 3</a:t>
+            <a:off x="685800" y="438912"/>
+            <a:ext cx="10881360" cy="822960"/>
+          </a:xfrm>
+          <a:prstGeom prst="rect">
+            <a:avLst/>
+          </a:prstGeom>
+          <a:noFill/>
+        </p:spPr>
+        <p:txBody>
+          <a:bodyPr wrap="square">
+            <a:spAutoFit/>
+          </a:bodyPr>
+          <a:lstStyle/>
+          <a:p>
+            <a:r>
+              <a:rPr sz="3000" b="1" i="0">
+                <a:solidFill>
+                  <a:srgbClr val="0B0B0B"/>
+                </a:solidFill>
+                <a:latin typeface="Segoe UI"/>
+              </a:rPr>
+              <a:t>Methodology (Ours): Masking</a:t>
             </a:r>
           </a:p>
         </p:txBody>
@@ -10970,41 +9265,7 @@
         </p:nvSpPr>
         <p:spPr>
           <a:xfrm>
-            <a:off x="685800" y="713232"/>
-            <a:ext cx="10881360" cy="822960"/>
-          </a:xfrm>
-          <a:prstGeom prst="rect">
-            <a:avLst/>
-          </a:prstGeom>
-          <a:noFill/>
-        </p:spPr>
-        <p:txBody>
-          <a:bodyPr wrap="square">
-            <a:spAutoFit/>
-          </a:bodyPr>
-          <a:lstStyle/>
-          <a:p>
-            <a:r>
-              <a:rPr sz="2700" b="1" i="0">
-                <a:solidFill>
-                  <a:srgbClr val="0B0B0B"/>
-                </a:solidFill>
-                <a:latin typeface="Segoe UI"/>
-              </a:rPr>
-              <a:t>Taken from secure aggregation: masking</a:t>
-            </a:r>
-          </a:p>
-        </p:txBody>
-      </p:sp>
-      <p:sp>
-        <p:nvSpPr>
-          <p:cNvPr id="4" name="TextBox 3"/>
-          <p:cNvSpPr txBox="1"/>
-          <p:nvPr/>
-        </p:nvSpPr>
-        <p:spPr>
-          <a:xfrm>
-            <a:off x="685800" y="1572768"/>
+            <a:off x="685800" y="1371600"/>
             <a:ext cx="6400800" cy="3931920"/>
           </a:xfrm>
           <a:prstGeom prst="rect">
@@ -11096,7 +9357,7 @@
       </p:sp>
       <p:pic>
         <p:nvPicPr>
-          <p:cNvPr id="5" name="Picture 4" descr="fig_masking.png"/>
+          <p:cNvPr id="4" name="Picture 3" descr="fig_masking.png"/>
           <p:cNvPicPr>
             <a:picLocks noChangeAspect="1"/>
           </p:cNvPicPr>
@@ -11110,7 +9371,7 @@
         </p:blipFill>
         <p:spPr>
           <a:xfrm>
-            <a:off x="7315200" y="1709928"/>
+            <a:off x="7315200" y="1463040"/>
             <a:ext cx="4480560" cy="3274073"/>
           </a:xfrm>
           <a:prstGeom prst="rect">
@@ -11120,80 +9381,46 @@
       </p:pic>
       <p:sp>
         <p:nvSpPr>
+          <p:cNvPr id="5" name="TextBox 4"/>
+          <p:cNvSpPr txBox="1"/>
+          <p:nvPr/>
+        </p:nvSpPr>
+        <p:spPr>
+          <a:xfrm>
+            <a:off x="685800" y="5943600"/>
+            <a:ext cx="10881360" cy="502920"/>
+          </a:xfrm>
+          <a:prstGeom prst="rect">
+            <a:avLst/>
+          </a:prstGeom>
+          <a:noFill/>
+        </p:spPr>
+        <p:txBody>
+          <a:bodyPr wrap="square">
+            <a:spAutoFit/>
+          </a:bodyPr>
+          <a:lstStyle/>
+          <a:p>
+            <a:pPr>
+              <a:spcAft>
+                <a:spcPts val="100"/>
+              </a:spcAft>
+            </a:pPr>
+            <a:r>
+              <a:rPr sz="800" b="0" i="1">
+                <a:solidFill>
+                  <a:srgbClr val="2A78D6"/>
+                </a:solidFill>
+                <a:latin typeface="Segoe UI"/>
+              </a:rPr>
+              <a:t>[2] K. Bonawitz, V. Ivanov, B. Kreuter, A. Marcedone, H. B. McMahan, S. Patel, D. Ramage, A. Segal, and K. Seth, "Practical secure aggregation for privacy-preserving machine learning," in Proc. ACM CCS, 2017, pp. 1175–1191.</a:t>
+            </a:r>
+          </a:p>
+        </p:txBody>
+      </p:sp>
+      <p:sp>
+        <p:nvSpPr>
           <p:cNvPr id="6" name="TextBox 5"/>
-          <p:cNvSpPr txBox="1"/>
-          <p:nvPr/>
-        </p:nvSpPr>
-        <p:spPr>
-          <a:xfrm>
-            <a:off x="685800" y="5870448"/>
-            <a:ext cx="10881360" cy="530352"/>
-          </a:xfrm>
-          <a:prstGeom prst="rect">
-            <a:avLst/>
-          </a:prstGeom>
-          <a:noFill/>
-        </p:spPr>
-        <p:txBody>
-          <a:bodyPr wrap="square">
-            <a:spAutoFit/>
-          </a:bodyPr>
-          <a:lstStyle/>
-          <a:p>
-            <a:pPr>
-              <a:spcAft>
-                <a:spcPts val="100"/>
-              </a:spcAft>
-            </a:pPr>
-            <a:r>
-              <a:rPr sz="800" b="0" i="1">
-                <a:solidFill>
-                  <a:srgbClr val="2A78D6"/>
-                </a:solidFill>
-                <a:latin typeface="Segoe UI"/>
-              </a:rPr>
-              <a:t>[2] K. Bonawitz, V. Ivanov, B. Kreuter, A. Marcedone, H. B. McMahan, S. Patel, D. Ramage, A. Segal, and K. Seth, "Practical secure aggregation for privacy-preserving machine learning," in Proc. ACM CCS, 2017, pp. 1175–1191.</a:t>
-            </a:r>
-          </a:p>
-        </p:txBody>
-      </p:sp>
-      <p:sp>
-        <p:nvSpPr>
-          <p:cNvPr id="7" name="TextBox 6"/>
-          <p:cNvSpPr txBox="1"/>
-          <p:nvPr/>
-        </p:nvSpPr>
-        <p:spPr>
-          <a:xfrm>
-            <a:off x="685800" y="6446520"/>
-            <a:ext cx="7680960" cy="274320"/>
-          </a:xfrm>
-          <a:prstGeom prst="rect">
-            <a:avLst/>
-          </a:prstGeom>
-          <a:noFill/>
-        </p:spPr>
-        <p:txBody>
-          <a:bodyPr wrap="square">
-            <a:spAutoFit/>
-          </a:bodyPr>
-          <a:lstStyle/>
-          <a:p>
-            <a:r>
-              <a:rPr sz="1050" b="0" i="0">
-                <a:solidFill>
-                  <a:srgbClr val="898781"/>
-                </a:solidFill>
-                <a:latin typeface="Segoe UI"/>
-              </a:rPr>
-              <a:t>CB-SAFE · Suva &amp; Chowdhury · AIUB</a:t>
-            </a:r>
-          </a:p>
-        </p:txBody>
-      </p:sp>
-      <p:sp>
-        <p:nvSpPr>
-          <p:cNvPr id="8" name="TextBox 7"/>
           <p:cNvSpPr txBox="1"/>
           <p:nvPr/>
         </p:nvSpPr>

--- a/paper/cbsafe_deck.pptx
+++ b/paper/cbsafe_deck.pptx
@@ -5695,7 +5695,7 @@
         <p:spPr>
           <a:xfrm>
             <a:off x="7315200" y="1463040"/>
-            <a:ext cx="4480560" cy="4774367"/>
+            <a:ext cx="4480560" cy="4785619"/>
           </a:xfrm>
           <a:prstGeom prst="rect">
             <a:avLst/>
@@ -5942,8 +5942,8 @@
         </p:blipFill>
         <p:spPr>
           <a:xfrm>
-            <a:off x="825017" y="2331720"/>
-            <a:ext cx="10541659" cy="3246120"/>
+            <a:off x="831602" y="2331720"/>
+            <a:ext cx="10528491" cy="3246120"/>
           </a:xfrm>
           <a:prstGeom prst="rect">
             <a:avLst/>
@@ -6658,7 +6658,7 @@
                 </a:solidFill>
                 <a:latin typeface="Segoe UI"/>
               </a:rPr>
-              <a:t>Label-flip test accuracy (from the paper, Table VI); CB-SAFE+ wins EMNIST outright.</a:t>
+              <a:t>Label-flip test accuracy (from the paper, Table VI); CB-SAFE+ matches FedGT and leads at the hardest setting (f=0.3).</a:t>
             </a:r>
           </a:p>
         </p:txBody>
@@ -6727,8 +6727,8 @@
         </p:blipFill>
         <p:spPr>
           <a:xfrm>
-            <a:off x="1122770" y="2331720"/>
-            <a:ext cx="9946153" cy="3200400"/>
+            <a:off x="1082746" y="2331720"/>
+            <a:ext cx="10026203" cy="3200400"/>
           </a:xfrm>
           <a:prstGeom prst="rect">
             <a:avLst/>

--- a/paper/cbsafe_deck.pptx
+++ b/paper/cbsafe_deck.pptx
@@ -29,6 +29,7 @@
     <p:sldId id="277" r:id="rId28"/>
     <p:sldId id="278" r:id="rId29"/>
     <p:sldId id="279" r:id="rId30"/>
+    <p:sldId id="280" r:id="rId31"/>
   </p:sldIdLst>
   <p:sldSz cx="12191695" cy="6858000" type="screen4x3"/>
   <p:notesSz cx="6858000" cy="9144000"/>
@@ -3138,7 +3139,7 @@
                 <a:solidFill>
                   <a:srgbClr val="2A78D6"/>
                 </a:solidFill>
-                <a:latin typeface="Segoe UI"/>
+                <a:latin typeface="Calibri"/>
               </a:rPr>
               <a:t>POST-QUANTUM CRYPTOGRAPHY × FEDERATED LEARNING</a:t>
             </a:r>
@@ -3172,7 +3173,7 @@
                 <a:solidFill>
                   <a:srgbClr val="0B0B0B"/>
                 </a:solidFill>
-                <a:latin typeface="Segoe UI"/>
+                <a:latin typeface="Calibri"/>
               </a:rPr>
               <a:t>CB-SAFE: Code-Based Post-Quantum Secure Aggregation for Byzantine-Robust Federated Learning</a:t>
             </a:r>
@@ -3206,7 +3207,7 @@
                 <a:solidFill>
                   <a:srgbClr val="26251F"/>
                 </a:solidFill>
-                <a:latin typeface="Segoe UI"/>
+                <a:latin typeface="Calibri"/>
               </a:rPr>
               <a:t>Md Wahiduzzaman Suva (26-94088-2)   ·   Esm-e Moula Chowdhury Abha (26-94089-2)</a:t>
             </a:r>
@@ -3240,7 +3241,7 @@
                 <a:solidFill>
                   <a:srgbClr val="898781"/>
                 </a:solidFill>
-                <a:latin typeface="Segoe UI"/>
+                <a:latin typeface="Calibri"/>
               </a:rPr>
               <a:t>Department of Computer Science, American International University–Bangladesh</a:t>
             </a:r>
@@ -3274,9 +3275,9 @@
                 <a:solidFill>
                   <a:srgbClr val="898781"/>
                 </a:solidFill>
-                <a:latin typeface="Segoe UI"/>
-              </a:rPr>
-              <a:t>Slides 1–15: required method presentation.   Slides 16–22: full-paper research walkthrough.</a:t>
+                <a:latin typeface="Calibri"/>
+              </a:rPr>
+              <a:t>Slides 1–15: required method presentation.   Slides 16–23: full-paper research walkthrough.</a:t>
             </a:r>
           </a:p>
         </p:txBody>
@@ -3326,7 +3327,7 @@
                 <a:solidFill>
                   <a:srgbClr val="0B0B0B"/>
                 </a:solidFill>
-                <a:latin typeface="Segoe UI"/>
+                <a:latin typeface="Calibri"/>
               </a:rPr>
               <a:t>Methodology (Ours): Detection</a:t>
             </a:r>
@@ -3365,7 +3366,7 @@
                 <a:solidFill>
                   <a:srgbClr val="2A78D6"/>
                 </a:solidFill>
-                <a:latin typeface="Segoe UI"/>
+                <a:latin typeface="Calibri"/>
               </a:rPr>
               <a:t>▪  </a:t>
             </a:r>
@@ -3374,7 +3375,7 @@
                 <a:solidFill>
                   <a:srgbClr val="26251F"/>
                 </a:solidFill>
-                <a:latin typeface="Segoe UI"/>
+                <a:latin typeface="Calibri"/>
               </a:rPr>
               <a:t>We adopt the core idea: identify malicious clients from group-level observations, never from individual updates.</a:t>
             </a:r>
@@ -3390,7 +3391,7 @@
                 <a:solidFill>
                   <a:srgbClr val="2A78D6"/>
                 </a:solidFill>
-                <a:latin typeface="Segoe UI"/>
+                <a:latin typeface="Calibri"/>
               </a:rPr>
               <a:t>▪  </a:t>
             </a:r>
@@ -3399,7 +3400,7 @@
                 <a:solidFill>
                   <a:srgbClr val="26251F"/>
                 </a:solidFill>
-                <a:latin typeface="Segoe UI"/>
+                <a:latin typeface="Calibri"/>
               </a:rPr>
               <a:t>The groups are the privacy-preserving cluster sums (the pools); a probe flags contaminated pools.</a:t>
             </a:r>
@@ -3415,7 +3416,7 @@
                 <a:solidFill>
                   <a:srgbClr val="2A78D6"/>
                 </a:solidFill>
-                <a:latin typeface="Segoe UI"/>
+                <a:latin typeface="Calibri"/>
               </a:rPr>
               <a:t>▪  </a:t>
             </a:r>
@@ -3424,7 +3425,7 @@
                 <a:solidFill>
                   <a:srgbClr val="26251F"/>
                 </a:solidFill>
-                <a:latin typeface="Segoe UI"/>
+                <a:latin typeface="Calibri"/>
               </a:rPr>
               <a:t>Our change: tests repeat over re-randomized clusters and accumulate across rounds (temporal group testing).</a:t>
             </a:r>
@@ -3461,9 +3462,9 @@
             <a:r>
               <a:rPr sz="800" b="0" i="1">
                 <a:solidFill>
-                  <a:srgbClr val="2A78D6"/>
-                </a:solidFill>
-                <a:latin typeface="Segoe UI"/>
+                  <a:srgbClr val="26251F"/>
+                </a:solidFill>
+                <a:latin typeface="Calibri"/>
               </a:rPr>
               <a:t>[1] M. Xhemrishi, J. Östman, A. Wachter-Zeh, and A. Graell i Amat, "FedGT: Identification of malicious clients in federated learning with secure aggregation," IEEE Trans. Inf. Forensics Security, vol. 20, pp. 2577–2592, 2025.</a:t>
             </a:r>
@@ -3498,9 +3499,9 @@
                 <a:solidFill>
                   <a:srgbClr val="898781"/>
                 </a:solidFill>
-                <a:latin typeface="Segoe UI"/>
-              </a:rPr>
-              <a:t>9 / 22</a:t>
+                <a:latin typeface="Calibri"/>
+              </a:rPr>
+              <a:t>9 / 23</a:t>
             </a:r>
           </a:p>
         </p:txBody>
@@ -3550,7 +3551,7 @@
                 <a:solidFill>
                   <a:srgbClr val="0B0B0B"/>
                 </a:solidFill>
-                <a:latin typeface="Segoe UI"/>
+                <a:latin typeface="Calibri"/>
               </a:rPr>
               <a:t>Methodology (Ours): Cryptography</a:t>
             </a:r>
@@ -3589,7 +3590,7 @@
                 <a:solidFill>
                   <a:srgbClr val="2A78D6"/>
                 </a:solidFill>
-                <a:latin typeface="Segoe UI"/>
+                <a:latin typeface="Calibri"/>
               </a:rPr>
               <a:t>▪  </a:t>
             </a:r>
@@ -3598,7 +3599,7 @@
                 <a:solidFill>
                   <a:srgbClr val="26251F"/>
                 </a:solidFill>
-                <a:latin typeface="Segoe UI"/>
+                <a:latin typeface="Calibri"/>
               </a:rPr>
               <a:t>We adopt HQC, the code-based KEM NIST selected in 2025, for post-quantum confidentiality.</a:t>
             </a:r>
@@ -3614,7 +3615,7 @@
                 <a:solidFill>
                   <a:srgbClr val="2A78D6"/>
                 </a:solidFill>
-                <a:latin typeface="Segoe UI"/>
+                <a:latin typeface="Calibri"/>
               </a:rPr>
               <a:t>▪  </a:t>
             </a:r>
@@ -3623,7 +3624,7 @@
                 <a:solidFill>
                   <a:srgbClr val="26251F"/>
                 </a:solidFill>
-                <a:latin typeface="Segoe UI"/>
+                <a:latin typeface="Calibri"/>
               </a:rPr>
               <a:t>Its security rests on syndrome decoding of quasi-cyclic codes, not lattices: genuine cryptographic diversity.</a:t>
             </a:r>
@@ -3639,7 +3640,7 @@
                 <a:solidFill>
                   <a:srgbClr val="2A78D6"/>
                 </a:solidFill>
-                <a:latin typeface="Segoe UI"/>
+                <a:latin typeface="Calibri"/>
               </a:rPr>
               <a:t>▪  </a:t>
             </a:r>
@@ -3648,7 +3649,7 @@
                 <a:solidFill>
                   <a:srgbClr val="26251F"/>
                 </a:solidFill>
-                <a:latin typeface="Segoe UI"/>
+                <a:latin typeface="Calibri"/>
               </a:rPr>
               <a:t>Our change: HQC sits behind a KEM-agnostic interface, so ML-KEM swaps in with one configuration line.</a:t>
             </a:r>
@@ -3685,9 +3686,9 @@
             <a:r>
               <a:rPr sz="800" b="0" i="1">
                 <a:solidFill>
-                  <a:srgbClr val="2A78D6"/>
-                </a:solidFill>
-                <a:latin typeface="Segoe UI"/>
+                  <a:srgbClr val="26251F"/>
+                </a:solidFill>
+                <a:latin typeface="Calibri"/>
               </a:rPr>
               <a:t>[3] National Institute of Standards and Technology, "Status report on the fourth round of the NIST post-quantum cryptography standardization process," NIST IR 8545, Mar. 2025.</a:t>
             </a:r>
@@ -3701,9 +3702,9 @@
             <a:r>
               <a:rPr sz="800" b="0" i="1">
                 <a:solidFill>
-                  <a:srgbClr val="2A78D6"/>
-                </a:solidFill>
-                <a:latin typeface="Segoe UI"/>
+                  <a:srgbClr val="26251F"/>
+                </a:solidFill>
+                <a:latin typeface="Calibri"/>
               </a:rPr>
               <a:t>[9] National Institute of Standards and Technology, "Module-lattice-based key-encapsulation mechanism standard," FIPS 203, Aug. 2024.</a:t>
             </a:r>
@@ -3738,9 +3739,9 @@
                 <a:solidFill>
                   <a:srgbClr val="898781"/>
                 </a:solidFill>
-                <a:latin typeface="Segoe UI"/>
-              </a:rPr>
-              <a:t>10 / 22</a:t>
+                <a:latin typeface="Calibri"/>
+              </a:rPr>
+              <a:t>10 / 23</a:t>
             </a:r>
           </a:p>
         </p:txBody>
@@ -3790,7 +3791,7 @@
                 <a:solidFill>
                   <a:srgbClr val="0B0B0B"/>
                 </a:solidFill>
-                <a:latin typeface="Segoe UI"/>
+                <a:latin typeface="Calibri"/>
               </a:rPr>
               <a:t>Methodology (Ours): Integration</a:t>
             </a:r>
@@ -3824,7 +3825,7 @@
                 <a:solidFill>
                   <a:srgbClr val="26251F"/>
                 </a:solidFill>
-                <a:latin typeface="Segoe UI"/>
+                <a:latin typeface="Calibri"/>
               </a:rPr>
               <a:t>Masking + group testing + a code-based KEM become one coherent framework.</a:t>
             </a:r>
@@ -3863,7 +3864,7 @@
                 <a:solidFill>
                   <a:srgbClr val="2A78D6"/>
                 </a:solidFill>
-                <a:latin typeface="Segoe UI"/>
+                <a:latin typeface="Calibri"/>
               </a:rPr>
               <a:t>▪  </a:t>
             </a:r>
@@ -3872,7 +3873,7 @@
                 <a:solidFill>
                   <a:srgbClr val="26251F"/>
                 </a:solidFill>
-                <a:latin typeface="Segoe UI"/>
+                <a:latin typeface="Calibri"/>
               </a:rPr>
               <a:t>HQC-seeded masking [2], [3] hides updates inside clusters, so the server sees only cluster sums.</a:t>
             </a:r>
@@ -3888,7 +3889,7 @@
                 <a:solidFill>
                   <a:srgbClr val="2A78D6"/>
                 </a:solidFill>
-                <a:latin typeface="Segoe UI"/>
+                <a:latin typeface="Calibri"/>
               </a:rPr>
               <a:t>▪  </a:t>
             </a:r>
@@ -3897,7 +3898,7 @@
                 <a:solidFill>
                   <a:srgbClr val="26251F"/>
                 </a:solidFill>
-                <a:latin typeface="Segoe UI"/>
+                <a:latin typeface="Calibri"/>
               </a:rPr>
               <a:t>Group testing [1] then runs across those cluster sums, over re-randomized rounds, to name the attackers.</a:t>
             </a:r>
@@ -3913,7 +3914,7 @@
                 <a:solidFill>
                   <a:srgbClr val="2A78D6"/>
                 </a:solidFill>
-                <a:latin typeface="Segoe UI"/>
+                <a:latin typeface="Calibri"/>
               </a:rPr>
               <a:t>▪  </a:t>
             </a:r>
@@ -3922,7 +3923,7 @@
                 <a:solidFill>
                   <a:srgbClr val="26251F"/>
                 </a:solidFill>
-                <a:latin typeface="Segoe UI"/>
+                <a:latin typeface="Calibri"/>
               </a:rPr>
               <a:t>Net design: privacy below the cluster boundary, robustness above it, code-based crypto throughout.</a:t>
             </a:r>
@@ -3938,7 +3939,7 @@
                 <a:solidFill>
                   <a:srgbClr val="2A78D6"/>
                 </a:solidFill>
-                <a:latin typeface="Segoe UI"/>
+                <a:latin typeface="Calibri"/>
               </a:rPr>
               <a:t>▪  </a:t>
             </a:r>
@@ -3947,7 +3948,7 @@
                 <a:solidFill>
                   <a:srgbClr val="26251F"/>
                 </a:solidFill>
-                <a:latin typeface="Segoe UI"/>
+                <a:latin typeface="Calibri"/>
               </a:rPr>
               <a:t>On top we add our own pieces: the laundering theorem and a server root-loss probe.</a:t>
             </a:r>
@@ -3984,9 +3985,9 @@
             <a:r>
               <a:rPr sz="800" b="0" i="1">
                 <a:solidFill>
-                  <a:srgbClr val="2A78D6"/>
-                </a:solidFill>
-                <a:latin typeface="Segoe UI"/>
+                  <a:srgbClr val="26251F"/>
+                </a:solidFill>
+                <a:latin typeface="Calibri"/>
               </a:rPr>
               <a:t>[1] M. Xhemrishi, J. Östman, A. Wachter-Zeh, and A. Graell i Amat, "FedGT: Identification of malicious clients in federated learning with secure aggregation," IEEE Trans. Inf. Forensics Security, vol. 20, pp. 2577–2592, 2025.</a:t>
             </a:r>
@@ -4000,9 +4001,9 @@
             <a:r>
               <a:rPr sz="800" b="0" i="1">
                 <a:solidFill>
-                  <a:srgbClr val="2A78D6"/>
-                </a:solidFill>
-                <a:latin typeface="Segoe UI"/>
+                  <a:srgbClr val="26251F"/>
+                </a:solidFill>
+                <a:latin typeface="Calibri"/>
               </a:rPr>
               <a:t>[2] K. Bonawitz, V. Ivanov, B. Kreuter, A. Marcedone, H. B. McMahan, S. Patel, D. Ramage, A. Segal, and K. Seth, "Practical secure aggregation for privacy-preserving machine learning," in Proc. ACM CCS, 2017, pp. 1175–1191.</a:t>
             </a:r>
@@ -4037,9 +4038,9 @@
                 <a:solidFill>
                   <a:srgbClr val="898781"/>
                 </a:solidFill>
-                <a:latin typeface="Segoe UI"/>
-              </a:rPr>
-              <a:t>11 / 22</a:t>
+                <a:latin typeface="Calibri"/>
+              </a:rPr>
+              <a:t>11 / 23</a:t>
             </a:r>
           </a:p>
         </p:txBody>
@@ -4089,7 +4090,7 @@
                 <a:solidFill>
                   <a:srgbClr val="0B0B0B"/>
                 </a:solidFill>
-                <a:latin typeface="Segoe UI"/>
+                <a:latin typeface="Calibri"/>
               </a:rPr>
               <a:t>Comparison</a:t>
             </a:r>
@@ -4128,7 +4129,7 @@
                 <a:solidFill>
                   <a:srgbClr val="2A78D6"/>
                 </a:solidFill>
-                <a:latin typeface="Segoe UI"/>
+                <a:latin typeface="Calibri"/>
               </a:rPr>
               <a:t>▪  </a:t>
             </a:r>
@@ -4137,7 +4138,7 @@
                 <a:solidFill>
                   <a:srgbClr val="26251F"/>
                 </a:solidFill>
-                <a:latin typeface="Segoe UI"/>
+                <a:latin typeface="Calibri"/>
               </a:rPr>
               <a:t>Crypto: FedGT is crypto-agnostic → </a:t>
             </a:r>
@@ -4146,7 +4147,7 @@
                 <a:solidFill>
                   <a:srgbClr val="0B0B0B"/>
                 </a:solidFill>
-                <a:latin typeface="Segoe UI"/>
+                <a:latin typeface="Calibri"/>
               </a:rPr>
               <a:t>CB-SAFE is code-based post-quantum</a:t>
             </a:r>
@@ -4155,7 +4156,7 @@
                 <a:solidFill>
                   <a:srgbClr val="26251F"/>
                 </a:solidFill>
-                <a:latin typeface="Segoe UI"/>
+                <a:latin typeface="Calibri"/>
               </a:rPr>
               <a:t>.</a:t>
             </a:r>
@@ -4171,7 +4172,7 @@
                 <a:solidFill>
                   <a:srgbClr val="2A78D6"/>
                 </a:solidFill>
-                <a:latin typeface="Segoe UI"/>
+                <a:latin typeface="Calibri"/>
               </a:rPr>
               <a:t>▪  </a:t>
             </a:r>
@@ -4180,7 +4181,7 @@
                 <a:solidFill>
                   <a:srgbClr val="26251F"/>
                 </a:solidFill>
-                <a:latin typeface="Segoe UI"/>
+                <a:latin typeface="Calibri"/>
               </a:rPr>
               <a:t>Detection: FedGT uses single-round COMP + a validation set → </a:t>
             </a:r>
@@ -4189,7 +4190,7 @@
                 <a:solidFill>
                   <a:srgbClr val="0B0B0B"/>
                 </a:solidFill>
-                <a:latin typeface="Segoe UI"/>
+                <a:latin typeface="Calibri"/>
               </a:rPr>
               <a:t>CB-SAFE uses temporal accumulation + a root-loss probe</a:t>
             </a:r>
@@ -4198,7 +4199,7 @@
                 <a:solidFill>
                   <a:srgbClr val="26251F"/>
                 </a:solidFill>
-                <a:latin typeface="Segoe UI"/>
+                <a:latin typeface="Calibri"/>
               </a:rPr>
               <a:t>.</a:t>
             </a:r>
@@ -4214,7 +4215,7 @@
                 <a:solidFill>
                   <a:srgbClr val="2A78D6"/>
                 </a:solidFill>
-                <a:latin typeface="Segoe UI"/>
+                <a:latin typeface="Calibri"/>
               </a:rPr>
               <a:t>▪  </a:t>
             </a:r>
@@ -4223,7 +4224,7 @@
                 <a:solidFill>
                   <a:srgbClr val="26251F"/>
                 </a:solidFill>
-                <a:latin typeface="Segoe UI"/>
+                <a:latin typeface="Calibri"/>
               </a:rPr>
               <a:t>Theory: FedGT gives no failure model → </a:t>
             </a:r>
@@ -4232,7 +4233,7 @@
                 <a:solidFill>
                   <a:srgbClr val="0B0B0B"/>
                 </a:solidFill>
-                <a:latin typeface="Segoe UI"/>
+                <a:latin typeface="Calibri"/>
               </a:rPr>
               <a:t>CB-SAFE proves the laundering boundary</a:t>
             </a:r>
@@ -4241,7 +4242,7 @@
                 <a:solidFill>
                   <a:srgbClr val="26251F"/>
                 </a:solidFill>
-                <a:latin typeface="Segoe UI"/>
+                <a:latin typeface="Calibri"/>
               </a:rPr>
               <a:t>.</a:t>
             </a:r>
@@ -4257,7 +4258,7 @@
                 <a:solidFill>
                   <a:srgbClr val="2A78D6"/>
                 </a:solidFill>
-                <a:latin typeface="Segoe UI"/>
+                <a:latin typeface="Calibri"/>
               </a:rPr>
               <a:t>▪  </a:t>
             </a:r>
@@ -4266,7 +4267,7 @@
                 <a:solidFill>
                   <a:srgbClr val="26251F"/>
                 </a:solidFill>
-                <a:latin typeface="Segoe UI"/>
+                <a:latin typeface="Calibri"/>
               </a:rPr>
               <a:t>Results: accuracy ties FedGT with </a:t>
             </a:r>
@@ -4275,7 +4276,7 @@
                 <a:solidFill>
                   <a:srgbClr val="0B0B0B"/>
                 </a:solidFill>
-                <a:latin typeface="Segoe UI"/>
+                <a:latin typeface="Calibri"/>
               </a:rPr>
               <a:t>fewer false exclusions and ~4× lower cost</a:t>
             </a:r>
@@ -4284,7 +4285,7 @@
                 <a:solidFill>
                   <a:srgbClr val="26251F"/>
                 </a:solidFill>
-                <a:latin typeface="Segoe UI"/>
+                <a:latin typeface="Calibri"/>
               </a:rPr>
               <a:t>.</a:t>
             </a:r>
@@ -4345,9 +4346,9 @@
             <a:r>
               <a:rPr sz="800" b="0" i="1">
                 <a:solidFill>
-                  <a:srgbClr val="2A78D6"/>
-                </a:solidFill>
-                <a:latin typeface="Segoe UI"/>
+                  <a:srgbClr val="26251F"/>
+                </a:solidFill>
+                <a:latin typeface="Calibri"/>
               </a:rPr>
               <a:t>[1] M. Xhemrishi, J. Östman, A. Wachter-Zeh, and A. Graell i Amat, "FedGT: Identification of malicious clients in federated learning with secure aggregation," IEEE Trans. Inf. Forensics Security, vol. 20, pp. 2577–2592, 2025.</a:t>
             </a:r>
@@ -4382,9 +4383,9 @@
                 <a:solidFill>
                   <a:srgbClr val="898781"/>
                 </a:solidFill>
-                <a:latin typeface="Segoe UI"/>
-              </a:rPr>
-              <a:t>12 / 22</a:t>
+                <a:latin typeface="Calibri"/>
+              </a:rPr>
+              <a:t>12 / 23</a:t>
             </a:r>
           </a:p>
         </p:txBody>
@@ -4434,7 +4435,7 @@
                 <a:solidFill>
                   <a:srgbClr val="0B0B0B"/>
                 </a:solidFill>
-                <a:latin typeface="Segoe UI"/>
+                <a:latin typeface="Calibri"/>
               </a:rPr>
               <a:t>Contributions</a:t>
             </a:r>
@@ -4473,7 +4474,7 @@
                 <a:solidFill>
                   <a:srgbClr val="2A78D6"/>
                 </a:solidFill>
-                <a:latin typeface="Segoe UI"/>
+                <a:latin typeface="Calibri"/>
               </a:rPr>
               <a:t>▪  </a:t>
             </a:r>
@@ -4482,7 +4483,7 @@
                 <a:solidFill>
                   <a:srgbClr val="0B0B0B"/>
                 </a:solidFill>
-                <a:latin typeface="Segoe UI"/>
+                <a:latin typeface="Calibri"/>
               </a:rPr>
               <a:t>First code-based post-quantum secure aggregation</a:t>
             </a:r>
@@ -4491,7 +4492,7 @@
                 <a:solidFill>
                   <a:srgbClr val="26251F"/>
                 </a:solidFill>
-                <a:latin typeface="Segoe UI"/>
+                <a:latin typeface="Calibri"/>
               </a:rPr>
               <a:t> for FL: cryptographic diversity beyond lattices.</a:t>
             </a:r>
@@ -4507,7 +4508,7 @@
                 <a:solidFill>
                   <a:srgbClr val="2A78D6"/>
                 </a:solidFill>
-                <a:latin typeface="Segoe UI"/>
+                <a:latin typeface="Calibri"/>
               </a:rPr>
               <a:t>▪  </a:t>
             </a:r>
@@ -4516,7 +4517,7 @@
                 <a:solidFill>
                   <a:srgbClr val="26251F"/>
                 </a:solidFill>
-                <a:latin typeface="Segoe UI"/>
+                <a:latin typeface="Calibri"/>
               </a:rPr>
               <a:t>The </a:t>
             </a:r>
@@ -4525,7 +4526,7 @@
                 <a:solidFill>
                   <a:srgbClr val="0B0B0B"/>
                 </a:solidFill>
-                <a:latin typeface="Segoe UI"/>
+                <a:latin typeface="Calibri"/>
               </a:rPr>
               <a:t>laundering theorem</a:t>
             </a:r>
@@ -4534,7 +4535,7 @@
                 <a:solidFill>
                   <a:srgbClr val="26251F"/>
                 </a:solidFill>
-                <a:latin typeface="Segoe UI"/>
+                <a:latin typeface="Calibri"/>
               </a:rPr>
               <a:t>: at γ*=2c/m−1 a poisoned cluster mean is magnitude-invisible, explaining why robust rules fail.</a:t>
             </a:r>
@@ -4550,7 +4551,7 @@
                 <a:solidFill>
                   <a:srgbClr val="2A78D6"/>
                 </a:solidFill>
-                <a:latin typeface="Segoe UI"/>
+                <a:latin typeface="Calibri"/>
               </a:rPr>
               <a:t>▪  </a:t>
             </a:r>
@@ -4559,7 +4560,7 @@
                 <a:solidFill>
                   <a:srgbClr val="0B0B0B"/>
                 </a:solidFill>
-                <a:latin typeface="Segoe UI"/>
+                <a:latin typeface="Calibri"/>
               </a:rPr>
               <a:t>Temporal group testing</a:t>
             </a:r>
@@ -4568,7 +4569,7 @@
                 <a:solidFill>
                   <a:srgbClr val="26251F"/>
                 </a:solidFill>
-                <a:latin typeface="Segoe UI"/>
+                <a:latin typeface="Calibri"/>
               </a:rPr>
               <a:t> over re-randomized clusters with a root-loss probe: identifies attackers the server never sees.</a:t>
             </a:r>
@@ -4584,7 +4585,7 @@
                 <a:solidFill>
                   <a:srgbClr val="2A78D6"/>
                 </a:solidFill>
-                <a:latin typeface="Segoe UI"/>
+                <a:latin typeface="Calibri"/>
               </a:rPr>
               <a:t>▪  </a:t>
             </a:r>
@@ -4593,7 +4594,7 @@
                 <a:solidFill>
                   <a:srgbClr val="26251F"/>
                 </a:solidFill>
-                <a:latin typeface="Segoe UI"/>
+                <a:latin typeface="Calibri"/>
               </a:rPr>
               <a:t>A </a:t>
             </a:r>
@@ -4602,7 +4603,7 @@
                 <a:solidFill>
                   <a:srgbClr val="0B0B0B"/>
                 </a:solidFill>
-                <a:latin typeface="Segoe UI"/>
+                <a:latin typeface="Calibri"/>
               </a:rPr>
               <a:t>trust-free variant</a:t>
             </a:r>
@@ -4611,7 +4612,7 @@
                 <a:solidFill>
                   <a:srgbClr val="26251F"/>
                 </a:solidFill>
-                <a:latin typeface="Segoe UI"/>
+                <a:latin typeface="Calibri"/>
               </a:rPr>
               <a:t> that needs no root dataset, a capability FedGT does not offer.</a:t>
             </a:r>
@@ -4672,9 +4673,9 @@
             <a:r>
               <a:rPr sz="800" b="0" i="1">
                 <a:solidFill>
-                  <a:srgbClr val="2A78D6"/>
-                </a:solidFill>
-                <a:latin typeface="Segoe UI"/>
+                  <a:srgbClr val="26251F"/>
+                </a:solidFill>
+                <a:latin typeface="Calibri"/>
               </a:rPr>
               <a:t>[1] M. Xhemrishi, J. Östman, A. Wachter-Zeh, and A. Graell i Amat, "FedGT: Identification of malicious clients in federated learning with secure aggregation," IEEE Trans. Inf. Forensics Security, vol. 20, pp. 2577–2592, 2025.</a:t>
             </a:r>
@@ -4688,9 +4689,9 @@
             <a:r>
               <a:rPr sz="800" b="0" i="1">
                 <a:solidFill>
-                  <a:srgbClr val="2A78D6"/>
-                </a:solidFill>
-                <a:latin typeface="Segoe UI"/>
+                  <a:srgbClr val="26251F"/>
+                </a:solidFill>
+                <a:latin typeface="Calibri"/>
               </a:rPr>
               <a:t>[5] X. Cao, M. Fang, J. Liu, and N. Z. Gong, "FLTrust: Byzantine-robust federated learning via trust bootstrapping," in Proc. NDSS, 2021.</a:t>
             </a:r>
@@ -4725,9 +4726,9 @@
                 <a:solidFill>
                   <a:srgbClr val="898781"/>
                 </a:solidFill>
-                <a:latin typeface="Segoe UI"/>
-              </a:rPr>
-              <a:t>13 / 22</a:t>
+                <a:latin typeface="Calibri"/>
+              </a:rPr>
+              <a:t>13 / 23</a:t>
             </a:r>
           </a:p>
         </p:txBody>
@@ -4777,7 +4778,7 @@
                 <a:solidFill>
                   <a:srgbClr val="0B0B0B"/>
                 </a:solidFill>
-                <a:latin typeface="Segoe UI"/>
+                <a:latin typeface="Calibri"/>
               </a:rPr>
               <a:t>Selection Criteria</a:t>
             </a:r>
@@ -4816,7 +4817,7 @@
                 <a:solidFill>
                   <a:srgbClr val="2A78D6"/>
                 </a:solidFill>
-                <a:latin typeface="Segoe UI"/>
+                <a:latin typeface="Calibri"/>
               </a:rPr>
               <a:t>▪  </a:t>
             </a:r>
@@ -4825,7 +4826,7 @@
                 <a:solidFill>
                   <a:srgbClr val="26251F"/>
                 </a:solidFill>
-                <a:latin typeface="Segoe UI"/>
+                <a:latin typeface="Calibri"/>
               </a:rPr>
               <a:t>Venue and recency: the basis paper is Q1 (IEEE TIFS), 2025; supporting sources are top-tier (ACM CCS, NIST).</a:t>
             </a:r>
@@ -4841,7 +4842,7 @@
                 <a:solidFill>
                   <a:srgbClr val="2A78D6"/>
                 </a:solidFill>
-                <a:latin typeface="Segoe UI"/>
+                <a:latin typeface="Calibri"/>
               </a:rPr>
               <a:t>▪  </a:t>
             </a:r>
@@ -4850,7 +4851,7 @@
                 <a:solidFill>
                   <a:srgbClr val="26251F"/>
                 </a:solidFill>
-                <a:latin typeface="Segoe UI"/>
+                <a:latin typeface="Calibri"/>
               </a:rPr>
               <a:t>Relevance: every borrowed idea maps directly onto a component of our exact problem.</a:t>
             </a:r>
@@ -4866,7 +4867,7 @@
                 <a:solidFill>
                   <a:srgbClr val="2A78D6"/>
                 </a:solidFill>
-                <a:latin typeface="Segoe UI"/>
+                <a:latin typeface="Calibri"/>
               </a:rPr>
               <a:t>▪  </a:t>
             </a:r>
@@ -4875,7 +4876,7 @@
                 <a:solidFill>
                   <a:srgbClr val="26251F"/>
                 </a:solidFill>
-                <a:latin typeface="Segoe UI"/>
+                <a:latin typeface="Calibri"/>
               </a:rPr>
               <a:t>Method strength: we match SOTA (FedGT) on robustness at ~4× lower cost, add PQC, and prove the failure mechanism.</a:t>
             </a:r>
@@ -4891,7 +4892,7 @@
                 <a:solidFill>
                   <a:srgbClr val="2A78D6"/>
                 </a:solidFill>
-                <a:latin typeface="Segoe UI"/>
+                <a:latin typeface="Calibri"/>
               </a:rPr>
               <a:t>▪  </a:t>
             </a:r>
@@ -4900,7 +4901,7 @@
                 <a:solidFill>
                   <a:srgbClr val="26251F"/>
                 </a:solidFill>
-                <a:latin typeface="Segoe UI"/>
+                <a:latin typeface="Calibri"/>
               </a:rPr>
               <a:t>Breadth and rigor: validated on four datasets and two modalities, multiple seeds, with significance testing.</a:t>
             </a:r>
@@ -4937,9 +4938,9 @@
             <a:r>
               <a:rPr sz="800" b="0" i="1">
                 <a:solidFill>
-                  <a:srgbClr val="2A78D6"/>
-                </a:solidFill>
-                <a:latin typeface="Segoe UI"/>
+                  <a:srgbClr val="26251F"/>
+                </a:solidFill>
+                <a:latin typeface="Calibri"/>
               </a:rPr>
               <a:t>[1] M. Xhemrishi, J. Östman, A. Wachter-Zeh, and A. Graell i Amat, "FedGT: Identification of malicious clients in federated learning with secure aggregation," IEEE Trans. Inf. Forensics Security, vol. 20, pp. 2577–2592, 2025.</a:t>
             </a:r>
@@ -4953,9 +4954,9 @@
             <a:r>
               <a:rPr sz="800" b="0" i="1">
                 <a:solidFill>
-                  <a:srgbClr val="2A78D6"/>
-                </a:solidFill>
-                <a:latin typeface="Segoe UI"/>
+                  <a:srgbClr val="26251F"/>
+                </a:solidFill>
+                <a:latin typeface="Calibri"/>
               </a:rPr>
               <a:t>[2] K. Bonawitz, V. Ivanov, B. Kreuter, A. Marcedone, H. B. McMahan, S. Patel, D. Ramage, A. Segal, and K. Seth, "Practical secure aggregation for privacy-preserving machine learning," in Proc. ACM CCS, 2017, pp. 1175–1191.</a:t>
             </a:r>
@@ -4969,9 +4970,9 @@
             <a:r>
               <a:rPr sz="800" b="0" i="1">
                 <a:solidFill>
-                  <a:srgbClr val="2A78D6"/>
-                </a:solidFill>
-                <a:latin typeface="Segoe UI"/>
+                  <a:srgbClr val="26251F"/>
+                </a:solidFill>
+                <a:latin typeface="Calibri"/>
               </a:rPr>
               <a:t>[3] National Institute of Standards and Technology, "Status report on the fourth round of the NIST post-quantum cryptography standardization process," NIST IR 8545, Mar. 2025.</a:t>
             </a:r>
@@ -5006,9 +5007,9 @@
                 <a:solidFill>
                   <a:srgbClr val="898781"/>
                 </a:solidFill>
-                <a:latin typeface="Segoe UI"/>
-              </a:rPr>
-              <a:t>14 / 22</a:t>
+                <a:latin typeface="Calibri"/>
+              </a:rPr>
+              <a:t>14 / 23</a:t>
             </a:r>
           </a:p>
         </p:txBody>
@@ -5058,7 +5059,7 @@
                 <a:solidFill>
                   <a:srgbClr val="0B0B0B"/>
                 </a:solidFill>
-                <a:latin typeface="Segoe UI"/>
+                <a:latin typeface="Calibri"/>
               </a:rPr>
               <a:t>Summary</a:t>
             </a:r>
@@ -5092,7 +5093,7 @@
                 <a:solidFill>
                   <a:srgbClr val="26251F"/>
                 </a:solidFill>
-                <a:latin typeface="Segoe UI"/>
+                <a:latin typeface="Calibri"/>
               </a:rPr>
               <a:t>End of the required method presentation. Slides 16–22 present the full paper and results.</a:t>
             </a:r>
@@ -5131,7 +5132,7 @@
                 <a:solidFill>
                   <a:srgbClr val="2A78D6"/>
                 </a:solidFill>
-                <a:latin typeface="Segoe UI"/>
+                <a:latin typeface="Calibri"/>
               </a:rPr>
               <a:t>▪  </a:t>
             </a:r>
@@ -5140,7 +5141,7 @@
                 <a:solidFill>
                   <a:srgbClr val="26251F"/>
                 </a:solidFill>
-                <a:latin typeface="Segoe UI"/>
+                <a:latin typeface="Calibri"/>
               </a:rPr>
               <a:t>Took: masking [2], group testing [1], and a code-based KEM [3].</a:t>
             </a:r>
@@ -5156,7 +5157,7 @@
                 <a:solidFill>
                   <a:srgbClr val="2A78D6"/>
                 </a:solidFill>
-                <a:latin typeface="Segoe UI"/>
+                <a:latin typeface="Calibri"/>
               </a:rPr>
               <a:t>▪  </a:t>
             </a:r>
@@ -5165,7 +5166,7 @@
                 <a:solidFill>
                   <a:srgbClr val="26251F"/>
                 </a:solidFill>
-                <a:latin typeface="Segoe UI"/>
+                <a:latin typeface="Calibri"/>
               </a:rPr>
               <a:t>Changed: temporal group testing over re-randomized clusters; HQC-seeded, KEM-agnostic masking.</a:t>
             </a:r>
@@ -5181,7 +5182,7 @@
                 <a:solidFill>
                   <a:srgbClr val="2A78D6"/>
                 </a:solidFill>
-                <a:latin typeface="Segoe UI"/>
+                <a:latin typeface="Calibri"/>
               </a:rPr>
               <a:t>▪  </a:t>
             </a:r>
@@ -5190,7 +5191,7 @@
                 <a:solidFill>
                   <a:srgbClr val="26251F"/>
                 </a:solidFill>
-                <a:latin typeface="Segoe UI"/>
+                <a:latin typeface="Calibri"/>
               </a:rPr>
               <a:t>New: the laundering theorem, the first code-based PQ secure aggregation, and trust-free detection.</a:t>
             </a:r>
@@ -5206,7 +5207,7 @@
                 <a:solidFill>
                   <a:srgbClr val="2A78D6"/>
                 </a:solidFill>
-                <a:latin typeface="Segoe UI"/>
+                <a:latin typeface="Calibri"/>
               </a:rPr>
               <a:t>▪  </a:t>
             </a:r>
@@ -5215,7 +5216,7 @@
                 <a:solidFill>
                   <a:srgbClr val="26251F"/>
                 </a:solidFill>
-                <a:latin typeface="Segoe UI"/>
+                <a:latin typeface="Calibri"/>
               </a:rPr>
               <a:t>Payoff: private, post-quantum, and Byzantine-robust FL that ties the state of the art at lower cost.</a:t>
             </a:r>
@@ -5252,9 +5253,9 @@
             <a:r>
               <a:rPr sz="800" b="0" i="1">
                 <a:solidFill>
-                  <a:srgbClr val="2A78D6"/>
-                </a:solidFill>
-                <a:latin typeface="Segoe UI"/>
+                  <a:srgbClr val="26251F"/>
+                </a:solidFill>
+                <a:latin typeface="Calibri"/>
               </a:rPr>
               <a:t>[1] M. Xhemrishi, J. Östman, A. Wachter-Zeh, and A. Graell i Amat, "FedGT: Identification of malicious clients in federated learning with secure aggregation," IEEE Trans. Inf. Forensics Security, vol. 20, pp. 2577–2592, 2025.</a:t>
             </a:r>
@@ -5268,9 +5269,9 @@
             <a:r>
               <a:rPr sz="800" b="0" i="1">
                 <a:solidFill>
-                  <a:srgbClr val="2A78D6"/>
-                </a:solidFill>
-                <a:latin typeface="Segoe UI"/>
+                  <a:srgbClr val="26251F"/>
+                </a:solidFill>
+                <a:latin typeface="Calibri"/>
               </a:rPr>
               <a:t>[2] K. Bonawitz, V. Ivanov, B. Kreuter, A. Marcedone, H. B. McMahan, S. Patel, D. Ramage, A. Segal, and K. Seth, "Practical secure aggregation for privacy-preserving machine learning," in Proc. ACM CCS, 2017, pp. 1175–1191.</a:t>
             </a:r>
@@ -5284,9 +5285,9 @@
             <a:r>
               <a:rPr sz="800" b="0" i="1">
                 <a:solidFill>
-                  <a:srgbClr val="2A78D6"/>
-                </a:solidFill>
-                <a:latin typeface="Segoe UI"/>
+                  <a:srgbClr val="26251F"/>
+                </a:solidFill>
+                <a:latin typeface="Calibri"/>
               </a:rPr>
               <a:t>[3] National Institute of Standards and Technology, "Status report on the fourth round of the NIST post-quantum cryptography standardization process," NIST IR 8545, Mar. 2025.</a:t>
             </a:r>
@@ -5321,9 +5322,9 @@
                 <a:solidFill>
                   <a:srgbClr val="898781"/>
                 </a:solidFill>
-                <a:latin typeface="Segoe UI"/>
-              </a:rPr>
-              <a:t>15 / 22</a:t>
+                <a:latin typeface="Calibri"/>
+              </a:rPr>
+              <a:t>15 / 23</a:t>
             </a:r>
           </a:p>
         </p:txBody>
@@ -5373,7 +5374,7 @@
                 <a:solidFill>
                   <a:srgbClr val="0B0B0B"/>
                 </a:solidFill>
-                <a:latin typeface="Segoe UI"/>
+                <a:latin typeface="Calibri"/>
               </a:rPr>
               <a:t>System Architecture</a:t>
             </a:r>
@@ -5407,7 +5408,7 @@
                 <a:solidFill>
                   <a:srgbClr val="26251F"/>
                 </a:solidFill>
-                <a:latin typeface="Segoe UI"/>
+                <a:latin typeface="Calibri"/>
               </a:rPr>
               <a:t>One training round: confidentiality within clusters, temporal group testing over re-randomized clusters, robust aggregation.</a:t>
             </a:r>
@@ -5468,9 +5469,9 @@
             <a:r>
               <a:rPr sz="800" b="0" i="1">
                 <a:solidFill>
-                  <a:srgbClr val="2A78D6"/>
-                </a:solidFill>
-                <a:latin typeface="Segoe UI"/>
+                  <a:srgbClr val="26251F"/>
+                </a:solidFill>
+                <a:latin typeface="Calibri"/>
               </a:rPr>
               <a:t>[1] M. Xhemrishi, J. Östman, A. Wachter-Zeh, and A. Graell i Amat, "FedGT: Identification of malicious clients in federated learning with secure aggregation," IEEE Trans. Inf. Forensics Security, vol. 20, pp. 2577–2592, 2025.</a:t>
             </a:r>
@@ -5484,9 +5485,9 @@
             <a:r>
               <a:rPr sz="800" b="0" i="1">
                 <a:solidFill>
-                  <a:srgbClr val="2A78D6"/>
-                </a:solidFill>
-                <a:latin typeface="Segoe UI"/>
+                  <a:srgbClr val="26251F"/>
+                </a:solidFill>
+                <a:latin typeface="Calibri"/>
               </a:rPr>
               <a:t>[2] K. Bonawitz, V. Ivanov, B. Kreuter, A. Marcedone, H. B. McMahan, S. Patel, D. Ramage, A. Segal, and K. Seth, "Practical secure aggregation for privacy-preserving machine learning," in Proc. ACM CCS, 2017, pp. 1175–1191.</a:t>
             </a:r>
@@ -5521,9 +5522,9 @@
                 <a:solidFill>
                   <a:srgbClr val="898781"/>
                 </a:solidFill>
-                <a:latin typeface="Segoe UI"/>
-              </a:rPr>
-              <a:t>16 / 22</a:t>
+                <a:latin typeface="Calibri"/>
+              </a:rPr>
+              <a:t>16 / 23</a:t>
             </a:r>
           </a:p>
         </p:txBody>
@@ -5573,7 +5574,7 @@
                 <a:solidFill>
                   <a:srgbClr val="0B0B0B"/>
                 </a:solidFill>
-                <a:latin typeface="Segoe UI"/>
+                <a:latin typeface="Calibri"/>
               </a:rPr>
               <a:t>Experimental Setup</a:t>
             </a:r>
@@ -5612,7 +5613,7 @@
                 <a:solidFill>
                   <a:srgbClr val="2A78D6"/>
                 </a:solidFill>
-                <a:latin typeface="Segoe UI"/>
+                <a:latin typeface="Calibri"/>
               </a:rPr>
               <a:t>▪  </a:t>
             </a:r>
@@ -5621,7 +5622,7 @@
                 <a:solidFill>
                   <a:srgbClr val="26251F"/>
                 </a:solidFill>
-                <a:latin typeface="Segoe UI"/>
+                <a:latin typeface="Calibri"/>
               </a:rPr>
               <a:t>Images: CIFAR-10, FashionMNIST, EMNIST-balanced (47 classes). Tabular: Edge-IIoTset (IoT intrusion).</a:t>
             </a:r>
@@ -5637,7 +5638,7 @@
                 <a:solidFill>
                   <a:srgbClr val="2A78D6"/>
                 </a:solidFill>
-                <a:latin typeface="Segoe UI"/>
+                <a:latin typeface="Calibri"/>
               </a:rPr>
               <a:t>▪  </a:t>
             </a:r>
@@ -5646,7 +5647,7 @@
                 <a:solidFill>
                   <a:srgbClr val="26251F"/>
                 </a:solidFill>
-                <a:latin typeface="Segoe UI"/>
+                <a:latin typeface="Calibri"/>
               </a:rPr>
               <a:t>Non-IID split via a Dirichlet(0.5) partition; 30 communication rounds; clusters of size c = 3.</a:t>
             </a:r>
@@ -5662,7 +5663,7 @@
                 <a:solidFill>
                   <a:srgbClr val="2A78D6"/>
                 </a:solidFill>
-                <a:latin typeface="Segoe UI"/>
+                <a:latin typeface="Calibri"/>
               </a:rPr>
               <a:t>▪  </a:t>
             </a:r>
@@ -5671,7 +5672,7 @@
                 <a:solidFill>
                   <a:srgbClr val="26251F"/>
                 </a:solidFill>
-                <a:latin typeface="Segoe UI"/>
+                <a:latin typeface="Calibri"/>
               </a:rPr>
               <a:t>Attacks: sign-flip (laundering), label-flip, backdoor. Baselines: mean, trimmed, median, Krum, Bulyan, RFA, FLTrust, FedGT.</a:t>
             </a:r>
@@ -5732,9 +5733,9 @@
             <a:r>
               <a:rPr sz="800" b="0" i="1">
                 <a:solidFill>
-                  <a:srgbClr val="2A78D6"/>
-                </a:solidFill>
-                <a:latin typeface="Segoe UI"/>
+                  <a:srgbClr val="26251F"/>
+                </a:solidFill>
+                <a:latin typeface="Calibri"/>
               </a:rPr>
               <a:t>[1] M. Xhemrishi, J. Östman, A. Wachter-Zeh, and A. Graell i Amat, "FedGT: Identification of malicious clients in federated learning with secure aggregation," IEEE Trans. Inf. Forensics Security, vol. 20, pp. 2577–2592, 2025.</a:t>
             </a:r>
@@ -5748,9 +5749,9 @@
             <a:r>
               <a:rPr sz="800" b="0" i="1">
                 <a:solidFill>
-                  <a:srgbClr val="2A78D6"/>
-                </a:solidFill>
-                <a:latin typeface="Segoe UI"/>
+                  <a:srgbClr val="26251F"/>
+                </a:solidFill>
+                <a:latin typeface="Calibri"/>
               </a:rPr>
               <a:t>[6] D. Yin, Y. Chen, R. Kannan, and P. Bartlett, "Byzantine-robust distributed learning: Towards optimal statistical rates," in Proc. ICML, 2018, pp. 5650–5659.</a:t>
             </a:r>
@@ -5785,9 +5786,9 @@
                 <a:solidFill>
                   <a:srgbClr val="898781"/>
                 </a:solidFill>
-                <a:latin typeface="Segoe UI"/>
-              </a:rPr>
-              <a:t>17 / 22</a:t>
+                <a:latin typeface="Calibri"/>
+              </a:rPr>
+              <a:t>17 / 23</a:t>
             </a:r>
           </a:p>
         </p:txBody>
@@ -5837,7 +5838,7 @@
                 <a:solidFill>
                   <a:srgbClr val="0B0B0B"/>
                 </a:solidFill>
-                <a:latin typeface="Segoe UI"/>
+                <a:latin typeface="Calibri"/>
               </a:rPr>
               <a:t>Results: Robustness</a:t>
             </a:r>
@@ -5871,7 +5872,7 @@
                 <a:solidFill>
                   <a:srgbClr val="26251F"/>
                 </a:solidFill>
-                <a:latin typeface="Segoe UI"/>
+                <a:latin typeface="Calibri"/>
               </a:rPr>
               <a:t>Sign-flip test accuracy across four datasets (from the paper, Table V).</a:t>
             </a:r>
@@ -5910,7 +5911,7 @@
                 <a:solidFill>
                   <a:srgbClr val="2A78D6"/>
                 </a:solidFill>
-                <a:latin typeface="Segoe UI"/>
+                <a:latin typeface="Calibri"/>
               </a:rPr>
               <a:t>▪  </a:t>
             </a:r>
@@ -5919,7 +5920,7 @@
                 <a:solidFill>
                   <a:srgbClr val="26251F"/>
                 </a:solidFill>
-                <a:latin typeface="Segoe UI"/>
+                <a:latin typeface="Calibri"/>
               </a:rPr>
               <a:t>Under sign-flip at f ≥ 0.2 every coordinate-wise rule collapses to chance; CB-SAFE+ holds and ties FedGT.</a:t>
             </a:r>
@@ -5980,9 +5981,9 @@
             <a:r>
               <a:rPr sz="800" b="0" i="1">
                 <a:solidFill>
-                  <a:srgbClr val="2A78D6"/>
-                </a:solidFill>
-                <a:latin typeface="Segoe UI"/>
+                  <a:srgbClr val="26251F"/>
+                </a:solidFill>
+                <a:latin typeface="Calibri"/>
               </a:rPr>
               <a:t>[1] M. Xhemrishi, J. Östman, A. Wachter-Zeh, and A. Graell i Amat, "FedGT: Identification of malicious clients in federated learning with secure aggregation," IEEE Trans. Inf. Forensics Security, vol. 20, pp. 2577–2592, 2025.</a:t>
             </a:r>
@@ -6017,9 +6018,9 @@
                 <a:solidFill>
                   <a:srgbClr val="898781"/>
                 </a:solidFill>
-                <a:latin typeface="Segoe UI"/>
-              </a:rPr>
-              <a:t>18 / 22</a:t>
+                <a:latin typeface="Calibri"/>
+              </a:rPr>
+              <a:t>18 / 23</a:t>
             </a:r>
           </a:p>
         </p:txBody>
@@ -6069,7 +6070,7 @@
                 <a:solidFill>
                   <a:srgbClr val="0B0B0B"/>
                 </a:solidFill>
-                <a:latin typeface="Segoe UI"/>
+                <a:latin typeface="Calibri"/>
               </a:rPr>
               <a:t>Introduction</a:t>
             </a:r>
@@ -6108,7 +6109,7 @@
                 <a:solidFill>
                   <a:srgbClr val="2A78D6"/>
                 </a:solidFill>
-                <a:latin typeface="Segoe UI"/>
+                <a:latin typeface="Calibri"/>
               </a:rPr>
               <a:t>▪  </a:t>
             </a:r>
@@ -6117,7 +6118,7 @@
                 <a:solidFill>
                   <a:srgbClr val="26251F"/>
                 </a:solidFill>
-                <a:latin typeface="Segoe UI"/>
+                <a:latin typeface="Calibri"/>
               </a:rPr>
               <a:t>Federated learning shares model updates, not raw data, yet </a:t>
             </a:r>
@@ -6126,7 +6127,7 @@
                 <a:solidFill>
                   <a:srgbClr val="0B0B0B"/>
                 </a:solidFill>
-                <a:latin typeface="Segoe UI"/>
+                <a:latin typeface="Calibri"/>
               </a:rPr>
               <a:t>those updates still leak private training data</a:t>
             </a:r>
@@ -6135,7 +6136,7 @@
                 <a:solidFill>
                   <a:srgbClr val="26251F"/>
                 </a:solidFill>
-                <a:latin typeface="Segoe UI"/>
+                <a:latin typeface="Calibri"/>
               </a:rPr>
               <a:t>.</a:t>
             </a:r>
@@ -6151,7 +6152,7 @@
                 <a:solidFill>
                   <a:srgbClr val="2A78D6"/>
                 </a:solidFill>
-                <a:latin typeface="Segoe UI"/>
+                <a:latin typeface="Calibri"/>
               </a:rPr>
               <a:t>▪  </a:t>
             </a:r>
@@ -6160,7 +6161,7 @@
                 <a:solidFill>
                   <a:srgbClr val="26251F"/>
                 </a:solidFill>
-                <a:latin typeface="Segoe UI"/>
+                <a:latin typeface="Calibri"/>
               </a:rPr>
               <a:t>Secure aggregation hides updates behind masks, but its key exchange </a:t>
             </a:r>
@@ -6169,7 +6170,7 @@
                 <a:solidFill>
                   <a:srgbClr val="0B0B0B"/>
                 </a:solidFill>
-                <a:latin typeface="Segoe UI"/>
+                <a:latin typeface="Calibri"/>
               </a:rPr>
               <a:t>breaks under a quantum computer</a:t>
             </a:r>
@@ -6178,7 +6179,7 @@
                 <a:solidFill>
                   <a:srgbClr val="26251F"/>
                 </a:solidFill>
-                <a:latin typeface="Segoe UI"/>
+                <a:latin typeface="Calibri"/>
               </a:rPr>
               <a:t> (harvest-now, decrypt-later).</a:t>
             </a:r>
@@ -6194,7 +6195,7 @@
                 <a:solidFill>
                   <a:srgbClr val="2A78D6"/>
                 </a:solidFill>
-                <a:latin typeface="Segoe UI"/>
+                <a:latin typeface="Calibri"/>
               </a:rPr>
               <a:t>▪  </a:t>
             </a:r>
@@ -6203,7 +6204,7 @@
                 <a:solidFill>
                   <a:srgbClr val="26251F"/>
                 </a:solidFill>
-                <a:latin typeface="Segoe UI"/>
+                <a:latin typeface="Calibri"/>
               </a:rPr>
               <a:t>Every post-quantum fix today is </a:t>
             </a:r>
@@ -6212,7 +6213,7 @@
                 <a:solidFill>
                   <a:srgbClr val="0B0B0B"/>
                 </a:solidFill>
-                <a:latin typeface="Segoe UI"/>
+                <a:latin typeface="Calibri"/>
               </a:rPr>
               <a:t>lattice-only, a monoculture</a:t>
             </a:r>
@@ -6221,7 +6222,7 @@
                 <a:solidFill>
                   <a:srgbClr val="26251F"/>
                 </a:solidFill>
-                <a:latin typeface="Segoe UI"/>
+                <a:latin typeface="Calibri"/>
               </a:rPr>
               <a:t>; and hiding updates also blinds the server to poisoned ones.</a:t>
             </a:r>
@@ -6237,7 +6238,7 @@
                 <a:solidFill>
                   <a:srgbClr val="2A78D6"/>
                 </a:solidFill>
-                <a:latin typeface="Segoe UI"/>
+                <a:latin typeface="Calibri"/>
               </a:rPr>
               <a:t>▪  </a:t>
             </a:r>
@@ -6246,7 +6247,7 @@
                 <a:solidFill>
                   <a:srgbClr val="26251F"/>
                 </a:solidFill>
-                <a:latin typeface="Segoe UI"/>
+                <a:latin typeface="Calibri"/>
               </a:rPr>
               <a:t>Goal: one protocol that is </a:t>
             </a:r>
@@ -6255,7 +6256,7 @@
                 <a:solidFill>
                   <a:srgbClr val="0B0B0B"/>
                 </a:solidFill>
-                <a:latin typeface="Segoe UI"/>
+                <a:latin typeface="Calibri"/>
               </a:rPr>
               <a:t>private, post-quantum with crypto diversity, and Byzantine-robust</a:t>
             </a:r>
@@ -6264,7 +6265,7 @@
                 <a:solidFill>
                   <a:srgbClr val="26251F"/>
                 </a:solidFill>
-                <a:latin typeface="Segoe UI"/>
+                <a:latin typeface="Calibri"/>
               </a:rPr>
               <a:t>.</a:t>
             </a:r>
@@ -6301,9 +6302,9 @@
             <a:r>
               <a:rPr sz="800" b="0" i="1">
                 <a:solidFill>
-                  <a:srgbClr val="2A78D6"/>
-                </a:solidFill>
-                <a:latin typeface="Segoe UI"/>
+                  <a:srgbClr val="26251F"/>
+                </a:solidFill>
+                <a:latin typeface="Calibri"/>
               </a:rPr>
               <a:t>[2] K. Bonawitz, V. Ivanov, B. Kreuter, A. Marcedone, H. B. McMahan, S. Patel, D. Ramage, A. Segal, and K. Seth, "Practical secure aggregation for privacy-preserving machine learning," in Proc. ACM CCS, 2017, pp. 1175–1191.</a:t>
             </a:r>
@@ -6338,9 +6339,9 @@
                 <a:solidFill>
                   <a:srgbClr val="898781"/>
                 </a:solidFill>
-                <a:latin typeface="Segoe UI"/>
-              </a:rPr>
-              <a:t>1 / 22</a:t>
+                <a:latin typeface="Calibri"/>
+              </a:rPr>
+              <a:t>1 / 23</a:t>
             </a:r>
           </a:p>
         </p:txBody>
@@ -6390,9 +6391,9 @@
                 <a:solidFill>
                   <a:srgbClr val="0B0B0B"/>
                 </a:solidFill>
-                <a:latin typeface="Segoe UI"/>
-              </a:rPr>
-              <a:t>Results: Detection</a:t>
+                <a:latin typeface="Calibri"/>
+              </a:rPr>
+              <a:t>Results: Training Dynamics</a:t>
             </a:r>
           </a:p>
         </p:txBody>
@@ -6424,64 +6425,16 @@
                 <a:solidFill>
                   <a:srgbClr val="26251F"/>
                 </a:solidFill>
-                <a:latin typeface="Segoe UI"/>
-              </a:rPr>
-              <a:t>Temporal suspicion separation (from the paper, Fig. 8).</a:t>
-            </a:r>
-          </a:p>
-        </p:txBody>
-      </p:sp>
-      <p:sp>
-        <p:nvSpPr>
-          <p:cNvPr id="4" name="TextBox 3"/>
-          <p:cNvSpPr txBox="1"/>
-          <p:nvPr/>
-        </p:nvSpPr>
-        <p:spPr>
-          <a:xfrm>
-            <a:off x="685800" y="1828800"/>
-            <a:ext cx="10881360" cy="3931920"/>
-          </a:xfrm>
-          <a:prstGeom prst="rect">
-            <a:avLst/>
-          </a:prstGeom>
-          <a:noFill/>
-        </p:spPr>
-        <p:txBody>
-          <a:bodyPr wrap="square">
-            <a:spAutoFit/>
-          </a:bodyPr>
-          <a:lstStyle/>
-          <a:p>
-            <a:pPr>
-              <a:spcAft>
-                <a:spcPts val="800"/>
-              </a:spcAft>
-            </a:pPr>
-            <a:r>
-              <a:rPr sz="1500">
-                <a:solidFill>
-                  <a:srgbClr val="2A78D6"/>
-                </a:solidFill>
-                <a:latin typeface="Segoe UI"/>
-              </a:rPr>
-              <a:t>▪  </a:t>
-            </a:r>
-            <a:r>
-              <a:rPr sz="1500" b="0" i="0">
-                <a:solidFill>
-                  <a:srgbClr val="26251F"/>
-                </a:solidFill>
-                <a:latin typeface="Segoe UI"/>
-              </a:rPr>
-              <a:t>Malicious and honest suspicion separate within a few rounds; attackers are named from group-level observations alone.</a:t>
+                <a:latin typeface="Calibri"/>
+              </a:rPr>
+              <a:t>Test accuracy vs. round for eight rules, over three datasets (rows) and three malicious fractions (columns); CB-SAFE+ tracks the clean baseline while the others diverge (from the paper, Fig. 7).</a:t>
             </a:r>
           </a:p>
         </p:txBody>
       </p:sp>
       <p:pic>
         <p:nvPicPr>
-          <p:cNvPr id="5" name="Picture 4" descr="shot_suspicion_fig.png"/>
+          <p:cNvPr id="4" name="Picture 3" descr="shot_dynamics_fig.png"/>
           <p:cNvPicPr>
             <a:picLocks noChangeAspect="1"/>
           </p:cNvPicPr>
@@ -6495,8 +6448,8 @@
         </p:blipFill>
         <p:spPr>
           <a:xfrm>
-            <a:off x="2306507" y="2514600"/>
-            <a:ext cx="7578681" cy="3108960"/>
+            <a:off x="3602817" y="1965960"/>
+            <a:ext cx="4986061" cy="3913632"/>
           </a:xfrm>
           <a:prstGeom prst="rect">
             <a:avLst/>
@@ -6505,7 +6458,7 @@
       </p:pic>
       <p:sp>
         <p:nvSpPr>
-          <p:cNvPr id="6" name="TextBox 5"/>
+          <p:cNvPr id="5" name="TextBox 4"/>
           <p:cNvSpPr txBox="1"/>
           <p:nvPr/>
         </p:nvSpPr>
@@ -6533,9 +6486,9 @@
             <a:r>
               <a:rPr sz="800" b="0" i="1">
                 <a:solidFill>
-                  <a:srgbClr val="2A78D6"/>
-                </a:solidFill>
-                <a:latin typeface="Segoe UI"/>
+                  <a:srgbClr val="26251F"/>
+                </a:solidFill>
+                <a:latin typeface="Calibri"/>
               </a:rPr>
               <a:t>[1] M. Xhemrishi, J. Östman, A. Wachter-Zeh, and A. Graell i Amat, "FedGT: Identification of malicious clients in federated learning with secure aggregation," IEEE Trans. Inf. Forensics Security, vol. 20, pp. 2577–2592, 2025.</a:t>
             </a:r>
@@ -6544,7 +6497,7 @@
       </p:sp>
       <p:sp>
         <p:nvSpPr>
-          <p:cNvPr id="7" name="TextBox 6"/>
+          <p:cNvPr id="6" name="TextBox 5"/>
           <p:cNvSpPr txBox="1"/>
           <p:nvPr/>
         </p:nvSpPr>
@@ -6570,9 +6523,9 @@
                 <a:solidFill>
                   <a:srgbClr val="898781"/>
                 </a:solidFill>
-                <a:latin typeface="Segoe UI"/>
-              </a:rPr>
-              <a:t>19 / 22</a:t>
+                <a:latin typeface="Calibri"/>
+              </a:rPr>
+              <a:t>19 / 23</a:t>
             </a:r>
           </a:p>
         </p:txBody>
@@ -6622,9 +6575,9 @@
                 <a:solidFill>
                   <a:srgbClr val="0B0B0B"/>
                 </a:solidFill>
-                <a:latin typeface="Segoe UI"/>
-              </a:rPr>
-              <a:t>Results: Generalization</a:t>
+                <a:latin typeface="Calibri"/>
+              </a:rPr>
+              <a:t>Results: Detection</a:t>
             </a:r>
           </a:p>
         </p:txBody>
@@ -6656,9 +6609,9 @@
                 <a:solidFill>
                   <a:srgbClr val="26251F"/>
                 </a:solidFill>
-                <a:latin typeface="Segoe UI"/>
-              </a:rPr>
-              <a:t>Label-flip test accuracy (from the paper, Table VI); CB-SAFE+ matches FedGT and leads at the hardest setting (f=0.3).</a:t>
+                <a:latin typeface="Calibri"/>
+              </a:rPr>
+              <a:t>Temporal suspicion separation (from the paper, Fig. 8).</a:t>
             </a:r>
           </a:p>
         </p:txBody>
@@ -6695,7 +6648,7 @@
                 <a:solidFill>
                   <a:srgbClr val="2A78D6"/>
                 </a:solidFill>
-                <a:latin typeface="Segoe UI"/>
+                <a:latin typeface="Calibri"/>
               </a:rPr>
               <a:t>▪  </a:t>
             </a:r>
@@ -6704,16 +6657,16 @@
                 <a:solidFill>
                   <a:srgbClr val="26251F"/>
                 </a:solidFill>
-                <a:latin typeface="Segoe UI"/>
-              </a:rPr>
-              <a:t>Label-flip is milder: no coordinate-wise rule collapses, which isolates laundering as the cause of the sign-flip failures.</a:t>
+                <a:latin typeface="Calibri"/>
+              </a:rPr>
+              <a:t>Malicious and honest suspicion separate within a few rounds; attackers are named from group-level observations alone.</a:t>
             </a:r>
           </a:p>
         </p:txBody>
       </p:sp>
       <p:pic>
         <p:nvPicPr>
-          <p:cNvPr id="5" name="Picture 4" descr="shot_labelflip_table.png"/>
+          <p:cNvPr id="5" name="Picture 4" descr="shot_suspicion_fig.png"/>
           <p:cNvPicPr>
             <a:picLocks noChangeAspect="1"/>
           </p:cNvPicPr>
@@ -6727,8 +6680,8 @@
         </p:blipFill>
         <p:spPr>
           <a:xfrm>
-            <a:off x="1082746" y="2331720"/>
-            <a:ext cx="10026203" cy="3200400"/>
+            <a:off x="2306507" y="2514600"/>
+            <a:ext cx="7578681" cy="3108960"/>
           </a:xfrm>
           <a:prstGeom prst="rect">
             <a:avLst/>
@@ -6765,9 +6718,9 @@
             <a:r>
               <a:rPr sz="800" b="0" i="1">
                 <a:solidFill>
-                  <a:srgbClr val="2A78D6"/>
-                </a:solidFill>
-                <a:latin typeface="Segoe UI"/>
+                  <a:srgbClr val="26251F"/>
+                </a:solidFill>
+                <a:latin typeface="Calibri"/>
               </a:rPr>
               <a:t>[1] M. Xhemrishi, J. Östman, A. Wachter-Zeh, and A. Graell i Amat, "FedGT: Identification of malicious clients in federated learning with secure aggregation," IEEE Trans. Inf. Forensics Security, vol. 20, pp. 2577–2592, 2025.</a:t>
             </a:r>
@@ -6802,9 +6755,9 @@
                 <a:solidFill>
                   <a:srgbClr val="898781"/>
                 </a:solidFill>
-                <a:latin typeface="Segoe UI"/>
-              </a:rPr>
-              <a:t>20 / 22</a:t>
+                <a:latin typeface="Calibri"/>
+              </a:rPr>
+              <a:t>20 / 23</a:t>
             </a:r>
           </a:p>
         </p:txBody>
@@ -6854,9 +6807,9 @@
                 <a:solidFill>
                   <a:srgbClr val="0B0B0B"/>
                 </a:solidFill>
-                <a:latin typeface="Segoe UI"/>
-              </a:rPr>
-              <a:t>Results: Efficiency</a:t>
+                <a:latin typeface="Calibri"/>
+              </a:rPr>
+              <a:t>Results: Generalization</a:t>
             </a:r>
           </a:p>
         </p:txBody>
@@ -6888,9 +6841,9 @@
                 <a:solidFill>
                   <a:srgbClr val="26251F"/>
                 </a:solidFill>
-                <a:latin typeface="Segoe UI"/>
-              </a:rPr>
-              <a:t>Measured per-client overhead (from the paper, Table II).</a:t>
+                <a:latin typeface="Calibri"/>
+              </a:rPr>
+              <a:t>Label-flip test accuracy (from the paper, Table VI); CB-SAFE+ matches FedGT and leads at the hardest setting (f=0.3).</a:t>
             </a:r>
           </a:p>
         </p:txBody>
@@ -6927,7 +6880,7 @@
                 <a:solidFill>
                   <a:srgbClr val="2A78D6"/>
                 </a:solidFill>
-                <a:latin typeface="Segoe UI"/>
+                <a:latin typeface="Calibri"/>
               </a:rPr>
               <a:t>▪  </a:t>
             </a:r>
@@ -6936,41 +6889,16 @@
                 <a:solidFill>
                   <a:srgbClr val="26251F"/>
                 </a:solidFill>
-                <a:latin typeface="Segoe UI"/>
-              </a:rPr>
-              <a:t>Code-based (HQC) confidentiality gives crypto diversity beyond lattices; ML-KEM swaps in unchanged.</a:t>
-            </a:r>
-          </a:p>
-          <a:p>
-            <a:pPr>
-              <a:spcAft>
-                <a:spcPts val="800"/>
-              </a:spcAft>
-            </a:pPr>
-            <a:r>
-              <a:rPr sz="1500">
-                <a:solidFill>
-                  <a:srgbClr val="2A78D6"/>
-                </a:solidFill>
-                <a:latin typeface="Segoe UI"/>
-              </a:rPr>
-              <a:t>▪  </a:t>
-            </a:r>
-            <a:r>
-              <a:rPr sz="1500" b="0" i="0">
-                <a:solidFill>
-                  <a:srgbClr val="26251F"/>
-                </a:solidFill>
-                <a:latin typeface="Segoe UI"/>
-              </a:rPr>
-              <a:t>One-time setup is paid once and stays under 0.03% of total traffic; per-round bytes are KEM-independent.</a:t>
+                <a:latin typeface="Calibri"/>
+              </a:rPr>
+              <a:t>Label-flip is milder: no coordinate-wise rule collapses, which isolates laundering as the cause of the sign-flip failures.</a:t>
             </a:r>
           </a:p>
         </p:txBody>
       </p:sp>
       <p:pic>
         <p:nvPicPr>
-          <p:cNvPr id="5" name="Picture 4" descr="shot_overhead_table.png"/>
+          <p:cNvPr id="5" name="Picture 4" descr="shot_labelflip_table.png"/>
           <p:cNvPicPr>
             <a:picLocks noChangeAspect="1"/>
           </p:cNvPicPr>
@@ -6984,8 +6912,8 @@
         </p:blipFill>
         <p:spPr>
           <a:xfrm>
-            <a:off x="2856259" y="3063240"/>
-            <a:ext cx="6479177" cy="2926080"/>
+            <a:off x="1082746" y="2331720"/>
+            <a:ext cx="10026203" cy="3200400"/>
           </a:xfrm>
           <a:prstGeom prst="rect">
             <a:avLst/>
@@ -7022,27 +6950,11 @@
             <a:r>
               <a:rPr sz="800" b="0" i="1">
                 <a:solidFill>
-                  <a:srgbClr val="2A78D6"/>
-                </a:solidFill>
-                <a:latin typeface="Segoe UI"/>
-              </a:rPr>
-              <a:t>[3] National Institute of Standards and Technology, "Status report on the fourth round of the NIST post-quantum cryptography standardization process," NIST IR 8545, Mar. 2025.</a:t>
-            </a:r>
-          </a:p>
-          <a:p>
-            <a:pPr>
-              <a:spcAft>
-                <a:spcPts val="100"/>
-              </a:spcAft>
-            </a:pPr>
-            <a:r>
-              <a:rPr sz="800" b="0" i="1">
-                <a:solidFill>
-                  <a:srgbClr val="2A78D6"/>
-                </a:solidFill>
-                <a:latin typeface="Segoe UI"/>
-              </a:rPr>
-              <a:t>[9] National Institute of Standards and Technology, "Module-lattice-based key-encapsulation mechanism standard," FIPS 203, Aug. 2024.</a:t>
+                  <a:srgbClr val="26251F"/>
+                </a:solidFill>
+                <a:latin typeface="Calibri"/>
+              </a:rPr>
+              <a:t>[1] M. Xhemrishi, J. Östman, A. Wachter-Zeh, and A. Graell i Amat, "FedGT: Identification of malicious clients in federated learning with secure aggregation," IEEE Trans. Inf. Forensics Security, vol. 20, pp. 2577–2592, 2025.</a:t>
             </a:r>
           </a:p>
         </p:txBody>
@@ -7075,9 +6987,9 @@
                 <a:solidFill>
                   <a:srgbClr val="898781"/>
                 </a:solidFill>
-                <a:latin typeface="Segoe UI"/>
-              </a:rPr>
-              <a:t>21 / 22</a:t>
+                <a:latin typeface="Calibri"/>
+              </a:rPr>
+              <a:t>21 / 23</a:t>
             </a:r>
           </a:p>
         </p:txBody>
@@ -7127,9 +7039,9 @@
                 <a:solidFill>
                   <a:srgbClr val="0B0B0B"/>
                 </a:solidFill>
-                <a:latin typeface="Segoe UI"/>
-              </a:rPr>
-              <a:t>Conclusion</a:t>
+                <a:latin typeface="Calibri"/>
+              </a:rPr>
+              <a:t>Results: Efficiency</a:t>
             </a:r>
           </a:p>
         </p:txBody>
@@ -7143,6 +7055,40 @@
         <p:spPr>
           <a:xfrm>
             <a:off x="685800" y="1371600"/>
+            <a:ext cx="10881360" cy="457200"/>
+          </a:xfrm>
+          <a:prstGeom prst="rect">
+            <a:avLst/>
+          </a:prstGeom>
+          <a:noFill/>
+        </p:spPr>
+        <p:txBody>
+          <a:bodyPr wrap="square">
+            <a:spAutoFit/>
+          </a:bodyPr>
+          <a:lstStyle/>
+          <a:p>
+            <a:r>
+              <a:rPr sz="1400" b="0" i="1">
+                <a:solidFill>
+                  <a:srgbClr val="26251F"/>
+                </a:solidFill>
+                <a:latin typeface="Calibri"/>
+              </a:rPr>
+              <a:t>Measured per-client overhead (from the paper, Table II).</a:t>
+            </a:r>
+          </a:p>
+        </p:txBody>
+      </p:sp>
+      <p:sp>
+        <p:nvSpPr>
+          <p:cNvPr id="4" name="TextBox 3"/>
+          <p:cNvSpPr txBox="1"/>
+          <p:nvPr/>
+        </p:nvSpPr>
+        <p:spPr>
+          <a:xfrm>
+            <a:off x="685800" y="1828800"/>
             <a:ext cx="10881360" cy="3931920"/>
           </a:xfrm>
           <a:prstGeom prst="rect">
@@ -7166,7 +7112,7 @@
                 <a:solidFill>
                   <a:srgbClr val="2A78D6"/>
                 </a:solidFill>
-                <a:latin typeface="Segoe UI"/>
+                <a:latin typeface="Calibri"/>
               </a:rPr>
               <a:t>▪  </a:t>
             </a:r>
@@ -7175,9 +7121,9 @@
                 <a:solidFill>
                   <a:srgbClr val="26251F"/>
                 </a:solidFill>
-                <a:latin typeface="Segoe UI"/>
-              </a:rPr>
-              <a:t>CB-SAFE unifies code-based PQ secure aggregation with temporal group-testing robustness in one protocol.</a:t>
+                <a:latin typeface="Calibri"/>
+              </a:rPr>
+              <a:t>Code-based (HQC) confidentiality gives crypto diversity beyond lattices; ML-KEM swaps in unchanged.</a:t>
             </a:r>
           </a:p>
           <a:p>
@@ -7191,7 +7137,7 @@
                 <a:solidFill>
                   <a:srgbClr val="2A78D6"/>
                 </a:solidFill>
-                <a:latin typeface="Segoe UI"/>
+                <a:latin typeface="Calibri"/>
               </a:rPr>
               <a:t>▪  </a:t>
             </a:r>
@@ -7200,66 +7146,40 @@
                 <a:solidFill>
                   <a:srgbClr val="26251F"/>
                 </a:solidFill>
-                <a:latin typeface="Segoe UI"/>
-              </a:rPr>
-              <a:t>It ties the state of the art (FedGT) on robustness and detection, at lower cost, and adds crypto diversity plus a failure theory.</a:t>
-            </a:r>
-          </a:p>
-          <a:p>
-            <a:pPr>
-              <a:spcAft>
-                <a:spcPts val="800"/>
-              </a:spcAft>
-            </a:pPr>
-            <a:r>
-              <a:rPr sz="1500">
-                <a:solidFill>
-                  <a:srgbClr val="2A78D6"/>
-                </a:solidFill>
-                <a:latin typeface="Segoe UI"/>
-              </a:rPr>
-              <a:t>▪  </a:t>
-            </a:r>
-            <a:r>
-              <a:rPr sz="1500" b="0" i="0">
-                <a:solidFill>
-                  <a:srgbClr val="26251F"/>
-                </a:solidFill>
-                <a:latin typeface="Segoe UI"/>
-              </a:rPr>
-              <a:t>Limitations: update authentication is out of the code-based scope; EMNIST detection uses a single seed.</a:t>
-            </a:r>
-          </a:p>
-          <a:p>
-            <a:pPr>
-              <a:spcAft>
-                <a:spcPts val="800"/>
-              </a:spcAft>
-            </a:pPr>
-            <a:r>
-              <a:rPr sz="1500">
-                <a:solidFill>
-                  <a:srgbClr val="2A78D6"/>
-                </a:solidFill>
-                <a:latin typeface="Segoe UI"/>
-              </a:rPr>
-              <a:t>▪  </a:t>
-            </a:r>
-            <a:r>
-              <a:rPr sz="1500" b="0" i="0">
-                <a:solidFill>
-                  <a:srgbClr val="26251F"/>
-                </a:solidFill>
-                <a:latin typeface="Segoe UI"/>
-              </a:rPr>
-              <a:t>Future work: code-based signatures for authentication, larger client populations, and adaptive attackers.</a:t>
-            </a:r>
-          </a:p>
-        </p:txBody>
-      </p:sp>
-      <p:sp>
-        <p:nvSpPr>
-          <p:cNvPr id="4" name="TextBox 3"/>
+                <a:latin typeface="Calibri"/>
+              </a:rPr>
+              <a:t>One-time setup is paid once and stays under 0.03% of total traffic; per-round bytes are KEM-independent.</a:t>
+            </a:r>
+          </a:p>
+        </p:txBody>
+      </p:sp>
+      <p:pic>
+        <p:nvPicPr>
+          <p:cNvPr id="5" name="Picture 4" descr="shot_overhead_table.png"/>
+          <p:cNvPicPr>
+            <a:picLocks noChangeAspect="1"/>
+          </p:cNvPicPr>
+          <p:nvPr/>
+        </p:nvPicPr>
+        <p:blipFill>
+          <a:blip r:embed="rId2"/>
+          <a:stretch>
+            <a:fillRect/>
+          </a:stretch>
+        </p:blipFill>
+        <p:spPr>
+          <a:xfrm>
+            <a:off x="2856259" y="3063240"/>
+            <a:ext cx="6479177" cy="2926080"/>
+          </a:xfrm>
+          <a:prstGeom prst="rect">
+            <a:avLst/>
+          </a:prstGeom>
+        </p:spPr>
+      </p:pic>
+      <p:sp>
+        <p:nvSpPr>
+          <p:cNvPr id="6" name="TextBox 5"/>
           <p:cNvSpPr txBox="1"/>
           <p:nvPr/>
         </p:nvSpPr>
@@ -7287,11 +7207,11 @@
             <a:r>
               <a:rPr sz="800" b="0" i="1">
                 <a:solidFill>
-                  <a:srgbClr val="2A78D6"/>
-                </a:solidFill>
-                <a:latin typeface="Segoe UI"/>
-              </a:rPr>
-              <a:t>[1] M. Xhemrishi, J. Östman, A. Wachter-Zeh, and A. Graell i Amat, "FedGT: Identification of malicious clients in federated learning with secure aggregation," IEEE Trans. Inf. Forensics Security, vol. 20, pp. 2577–2592, 2025.</a:t>
+                  <a:srgbClr val="26251F"/>
+                </a:solidFill>
+                <a:latin typeface="Calibri"/>
+              </a:rPr>
+              <a:t>[3] National Institute of Standards and Technology, "Status report on the fourth round of the NIST post-quantum cryptography standardization process," NIST IR 8545, Mar. 2025.</a:t>
             </a:r>
           </a:p>
           <a:p>
@@ -7303,34 +7223,18 @@
             <a:r>
               <a:rPr sz="800" b="0" i="1">
                 <a:solidFill>
-                  <a:srgbClr val="2A78D6"/>
-                </a:solidFill>
-                <a:latin typeface="Segoe UI"/>
-              </a:rPr>
-              <a:t>[2] K. Bonawitz, V. Ivanov, B. Kreuter, A. Marcedone, H. B. McMahan, S. Patel, D. Ramage, A. Segal, and K. Seth, "Practical secure aggregation for privacy-preserving machine learning," in Proc. ACM CCS, 2017, pp. 1175–1191.</a:t>
-            </a:r>
-          </a:p>
-          <a:p>
-            <a:pPr>
-              <a:spcAft>
-                <a:spcPts val="100"/>
-              </a:spcAft>
-            </a:pPr>
-            <a:r>
-              <a:rPr sz="800" b="0" i="1">
-                <a:solidFill>
-                  <a:srgbClr val="2A78D6"/>
-                </a:solidFill>
-                <a:latin typeface="Segoe UI"/>
-              </a:rPr>
-              <a:t>[3] National Institute of Standards and Technology, "Status report on the fourth round of the NIST post-quantum cryptography standardization process," NIST IR 8545, Mar. 2025.</a:t>
-            </a:r>
-          </a:p>
-        </p:txBody>
-      </p:sp>
-      <p:sp>
-        <p:nvSpPr>
-          <p:cNvPr id="5" name="TextBox 4"/>
+                  <a:srgbClr val="26251F"/>
+                </a:solidFill>
+                <a:latin typeface="Calibri"/>
+              </a:rPr>
+              <a:t>[9] National Institute of Standards and Technology, "Module-lattice-based key-encapsulation mechanism standard," FIPS 203, Aug. 2024.</a:t>
+            </a:r>
+          </a:p>
+        </p:txBody>
+      </p:sp>
+      <p:sp>
+        <p:nvSpPr>
+          <p:cNvPr id="7" name="TextBox 6"/>
           <p:cNvSpPr txBox="1"/>
           <p:nvPr/>
         </p:nvSpPr>
@@ -7356,9 +7260,9 @@
                 <a:solidFill>
                   <a:srgbClr val="898781"/>
                 </a:solidFill>
-                <a:latin typeface="Segoe UI"/>
-              </a:rPr>
-              <a:t>22 / 22</a:t>
+                <a:latin typeface="Calibri"/>
+              </a:rPr>
+              <a:t>22 / 23</a:t>
             </a:r>
           </a:p>
         </p:txBody>
@@ -7408,7 +7312,288 @@
                 <a:solidFill>
                   <a:srgbClr val="0B0B0B"/>
                 </a:solidFill>
-                <a:latin typeface="Segoe UI"/>
+                <a:latin typeface="Calibri"/>
+              </a:rPr>
+              <a:t>Conclusion</a:t>
+            </a:r>
+          </a:p>
+        </p:txBody>
+      </p:sp>
+      <p:sp>
+        <p:nvSpPr>
+          <p:cNvPr id="3" name="TextBox 2"/>
+          <p:cNvSpPr txBox="1"/>
+          <p:nvPr/>
+        </p:nvSpPr>
+        <p:spPr>
+          <a:xfrm>
+            <a:off x="685800" y="1371600"/>
+            <a:ext cx="10881360" cy="3931920"/>
+          </a:xfrm>
+          <a:prstGeom prst="rect">
+            <a:avLst/>
+          </a:prstGeom>
+          <a:noFill/>
+        </p:spPr>
+        <p:txBody>
+          <a:bodyPr wrap="square">
+            <a:spAutoFit/>
+          </a:bodyPr>
+          <a:lstStyle/>
+          <a:p>
+            <a:pPr>
+              <a:spcAft>
+                <a:spcPts val="800"/>
+              </a:spcAft>
+            </a:pPr>
+            <a:r>
+              <a:rPr sz="1500">
+                <a:solidFill>
+                  <a:srgbClr val="2A78D6"/>
+                </a:solidFill>
+                <a:latin typeface="Calibri"/>
+              </a:rPr>
+              <a:t>▪  </a:t>
+            </a:r>
+            <a:r>
+              <a:rPr sz="1500" b="0" i="0">
+                <a:solidFill>
+                  <a:srgbClr val="26251F"/>
+                </a:solidFill>
+                <a:latin typeface="Calibri"/>
+              </a:rPr>
+              <a:t>CB-SAFE unifies code-based PQ secure aggregation with temporal group-testing robustness in one protocol.</a:t>
+            </a:r>
+          </a:p>
+          <a:p>
+            <a:pPr>
+              <a:spcAft>
+                <a:spcPts val="800"/>
+              </a:spcAft>
+            </a:pPr>
+            <a:r>
+              <a:rPr sz="1500">
+                <a:solidFill>
+                  <a:srgbClr val="2A78D6"/>
+                </a:solidFill>
+                <a:latin typeface="Calibri"/>
+              </a:rPr>
+              <a:t>▪  </a:t>
+            </a:r>
+            <a:r>
+              <a:rPr sz="1500" b="0" i="0">
+                <a:solidFill>
+                  <a:srgbClr val="26251F"/>
+                </a:solidFill>
+                <a:latin typeface="Calibri"/>
+              </a:rPr>
+              <a:t>It ties the state of the art (FedGT) on robustness and detection, at lower cost, and adds crypto diversity plus a failure theory.</a:t>
+            </a:r>
+          </a:p>
+          <a:p>
+            <a:pPr>
+              <a:spcAft>
+                <a:spcPts val="800"/>
+              </a:spcAft>
+            </a:pPr>
+            <a:r>
+              <a:rPr sz="1500">
+                <a:solidFill>
+                  <a:srgbClr val="2A78D6"/>
+                </a:solidFill>
+                <a:latin typeface="Calibri"/>
+              </a:rPr>
+              <a:t>▪  </a:t>
+            </a:r>
+            <a:r>
+              <a:rPr sz="1500" b="0" i="0">
+                <a:solidFill>
+                  <a:srgbClr val="26251F"/>
+                </a:solidFill>
+                <a:latin typeface="Calibri"/>
+              </a:rPr>
+              <a:t>Limitations: update authentication is out of the code-based scope; EMNIST detection uses a single seed.</a:t>
+            </a:r>
+          </a:p>
+          <a:p>
+            <a:pPr>
+              <a:spcAft>
+                <a:spcPts val="800"/>
+              </a:spcAft>
+            </a:pPr>
+            <a:r>
+              <a:rPr sz="1500">
+                <a:solidFill>
+                  <a:srgbClr val="2A78D6"/>
+                </a:solidFill>
+                <a:latin typeface="Calibri"/>
+              </a:rPr>
+              <a:t>▪  </a:t>
+            </a:r>
+            <a:r>
+              <a:rPr sz="1500" b="0" i="0">
+                <a:solidFill>
+                  <a:srgbClr val="26251F"/>
+                </a:solidFill>
+                <a:latin typeface="Calibri"/>
+              </a:rPr>
+              <a:t>Future work: code-based signatures for authentication, larger client populations, and adaptive attackers.</a:t>
+            </a:r>
+          </a:p>
+        </p:txBody>
+      </p:sp>
+      <p:sp>
+        <p:nvSpPr>
+          <p:cNvPr id="4" name="TextBox 3"/>
+          <p:cNvSpPr txBox="1"/>
+          <p:nvPr/>
+        </p:nvSpPr>
+        <p:spPr>
+          <a:xfrm>
+            <a:off x="685800" y="5943600"/>
+            <a:ext cx="10881360" cy="502920"/>
+          </a:xfrm>
+          <a:prstGeom prst="rect">
+            <a:avLst/>
+          </a:prstGeom>
+          <a:noFill/>
+        </p:spPr>
+        <p:txBody>
+          <a:bodyPr wrap="square">
+            <a:spAutoFit/>
+          </a:bodyPr>
+          <a:lstStyle/>
+          <a:p>
+            <a:pPr>
+              <a:spcAft>
+                <a:spcPts val="100"/>
+              </a:spcAft>
+            </a:pPr>
+            <a:r>
+              <a:rPr sz="800" b="0" i="1">
+                <a:solidFill>
+                  <a:srgbClr val="26251F"/>
+                </a:solidFill>
+                <a:latin typeface="Calibri"/>
+              </a:rPr>
+              <a:t>[1] M. Xhemrishi, J. Östman, A. Wachter-Zeh, and A. Graell i Amat, "FedGT: Identification of malicious clients in federated learning with secure aggregation," IEEE Trans. Inf. Forensics Security, vol. 20, pp. 2577–2592, 2025.</a:t>
+            </a:r>
+          </a:p>
+          <a:p>
+            <a:pPr>
+              <a:spcAft>
+                <a:spcPts val="100"/>
+              </a:spcAft>
+            </a:pPr>
+            <a:r>
+              <a:rPr sz="800" b="0" i="1">
+                <a:solidFill>
+                  <a:srgbClr val="26251F"/>
+                </a:solidFill>
+                <a:latin typeface="Calibri"/>
+              </a:rPr>
+              <a:t>[2] K. Bonawitz, V. Ivanov, B. Kreuter, A. Marcedone, H. B. McMahan, S. Patel, D. Ramage, A. Segal, and K. Seth, "Practical secure aggregation for privacy-preserving machine learning," in Proc. ACM CCS, 2017, pp. 1175–1191.</a:t>
+            </a:r>
+          </a:p>
+          <a:p>
+            <a:pPr>
+              <a:spcAft>
+                <a:spcPts val="100"/>
+              </a:spcAft>
+            </a:pPr>
+            <a:r>
+              <a:rPr sz="800" b="0" i="1">
+                <a:solidFill>
+                  <a:srgbClr val="26251F"/>
+                </a:solidFill>
+                <a:latin typeface="Calibri"/>
+              </a:rPr>
+              <a:t>[3] National Institute of Standards and Technology, "Status report on the fourth round of the NIST post-quantum cryptography standardization process," NIST IR 8545, Mar. 2025.</a:t>
+            </a:r>
+          </a:p>
+        </p:txBody>
+      </p:sp>
+      <p:sp>
+        <p:nvSpPr>
+          <p:cNvPr id="5" name="TextBox 4"/>
+          <p:cNvSpPr txBox="1"/>
+          <p:nvPr/>
+        </p:nvSpPr>
+        <p:spPr>
+          <a:xfrm>
+            <a:off x="11018520" y="6446520"/>
+            <a:ext cx="914400" cy="274320"/>
+          </a:xfrm>
+          <a:prstGeom prst="rect">
+            <a:avLst/>
+          </a:prstGeom>
+          <a:noFill/>
+        </p:spPr>
+        <p:txBody>
+          <a:bodyPr wrap="square">
+            <a:spAutoFit/>
+          </a:bodyPr>
+          <a:lstStyle/>
+          <a:p>
+            <a:pPr algn="r"/>
+            <a:r>
+              <a:rPr sz="1050" b="0" i="0">
+                <a:solidFill>
+                  <a:srgbClr val="898781"/>
+                </a:solidFill>
+                <a:latin typeface="Calibri"/>
+              </a:rPr>
+              <a:t>23 / 23</a:t>
+            </a:r>
+          </a:p>
+        </p:txBody>
+      </p:sp>
+    </p:spTree>
+  </p:cSld>
+  <p:clrMapOvr>
+    <a:masterClrMapping/>
+  </p:clrMapOvr>
+</p:sld>
+</file>
+
+<file path=ppt/slides/slide25.xml><?xml version="1.0" encoding="utf-8"?>
+<p:sld xmlns:a="http://schemas.openxmlformats.org/drawingml/2006/main" xmlns:p="http://schemas.openxmlformats.org/presentationml/2006/main" xmlns:r="http://schemas.openxmlformats.org/officeDocument/2006/relationships">
+  <p:cSld>
+    <p:spTree>
+      <p:nvGrpSpPr>
+        <p:cNvPr id="1" name=""/>
+        <p:cNvGrpSpPr/>
+        <p:nvPr/>
+      </p:nvGrpSpPr>
+      <p:grpSpPr/>
+      <p:sp>
+        <p:nvSpPr>
+          <p:cNvPr id="2" name="TextBox 1"/>
+          <p:cNvSpPr txBox="1"/>
+          <p:nvPr/>
+        </p:nvSpPr>
+        <p:spPr>
+          <a:xfrm>
+            <a:off x="685800" y="438912"/>
+            <a:ext cx="10881360" cy="822960"/>
+          </a:xfrm>
+          <a:prstGeom prst="rect">
+            <a:avLst/>
+          </a:prstGeom>
+          <a:noFill/>
+        </p:spPr>
+        <p:txBody>
+          <a:bodyPr wrap="square">
+            <a:spAutoFit/>
+          </a:bodyPr>
+          <a:lstStyle/>
+          <a:p>
+            <a:r>
+              <a:rPr sz="3000" b="1" i="0">
+                <a:solidFill>
+                  <a:srgbClr val="0B0B0B"/>
+                </a:solidFill>
+                <a:latin typeface="Calibri"/>
               </a:rPr>
               <a:t>References</a:t>
             </a:r>
@@ -7447,7 +7632,7 @@
                 <a:solidFill>
                   <a:srgbClr val="26251F"/>
                 </a:solidFill>
-                <a:latin typeface="Segoe UI"/>
+                <a:latin typeface="Calibri"/>
               </a:rPr>
               <a:t>[1] M. Xhemrishi, J. Östman, A. Wachter-Zeh, and A. Graell i Amat, "FedGT: Identification of malicious clients in federated learning with secure aggregation," IEEE Trans. Inf. Forensics Security, vol. 20, pp. 2577–2592, 2025.</a:t>
             </a:r>
@@ -7463,7 +7648,7 @@
                 <a:solidFill>
                   <a:srgbClr val="26251F"/>
                 </a:solidFill>
-                <a:latin typeface="Segoe UI"/>
+                <a:latin typeface="Calibri"/>
               </a:rPr>
               <a:t>[2] K. Bonawitz, V. Ivanov, B. Kreuter, A. Marcedone, H. B. McMahan, S. Patel, D. Ramage, A. Segal, and K. Seth, "Practical secure aggregation for privacy-preserving machine learning," in Proc. ACM CCS, 2017, pp. 1175–1191.</a:t>
             </a:r>
@@ -7479,7 +7664,7 @@
                 <a:solidFill>
                   <a:srgbClr val="26251F"/>
                 </a:solidFill>
-                <a:latin typeface="Segoe UI"/>
+                <a:latin typeface="Calibri"/>
               </a:rPr>
               <a:t>[3] National Institute of Standards and Technology, "Status report on the fourth round of the NIST post-quantum cryptography standardization process," NIST IR 8545, Mar. 2025.</a:t>
             </a:r>
@@ -7495,7 +7680,7 @@
                 <a:solidFill>
                   <a:srgbClr val="26251F"/>
                 </a:solidFill>
-                <a:latin typeface="Segoe UI"/>
+                <a:latin typeface="Calibri"/>
               </a:rPr>
               <a:t>[4] P. W. Shor, "Polynomial-time algorithms for prime factorization and discrete logarithms on a quantum computer," SIAM J. Comput., vol. 26, no. 5, pp. 1484–1509, 1997.</a:t>
             </a:r>
@@ -7511,7 +7696,7 @@
                 <a:solidFill>
                   <a:srgbClr val="26251F"/>
                 </a:solidFill>
-                <a:latin typeface="Segoe UI"/>
+                <a:latin typeface="Calibri"/>
               </a:rPr>
               <a:t>[5] X. Cao, M. Fang, J. Liu, and N. Z. Gong, "FLTrust: Byzantine-robust federated learning via trust bootstrapping," in Proc. NDSS, 2021.</a:t>
             </a:r>
@@ -7527,7 +7712,7 @@
                 <a:solidFill>
                   <a:srgbClr val="26251F"/>
                 </a:solidFill>
-                <a:latin typeface="Segoe UI"/>
+                <a:latin typeface="Calibri"/>
               </a:rPr>
               <a:t>[6] D. Yin, Y. Chen, R. Kannan, and P. Bartlett, "Byzantine-robust distributed learning: Towards optimal statistical rates," in Proc. ICML, 2018, pp. 5650–5659.</a:t>
             </a:r>
@@ -7543,7 +7728,7 @@
                 <a:solidFill>
                   <a:srgbClr val="26251F"/>
                 </a:solidFill>
-                <a:latin typeface="Segoe UI"/>
+                <a:latin typeface="Calibri"/>
               </a:rPr>
               <a:t>[7] P. Blanchard, E. M. El Mhamdi, R. Guerraoui, and J. Stainer, "Machine learning with adversaries: Byzantine tolerant gradient descent," in Proc. NeurIPS, 2017, pp. 119–129.</a:t>
             </a:r>
@@ -7559,7 +7744,7 @@
                 <a:solidFill>
                   <a:srgbClr val="26251F"/>
                 </a:solidFill>
-                <a:latin typeface="Segoe UI"/>
+                <a:latin typeface="Calibri"/>
               </a:rPr>
               <a:t>[8] K. Pillutla, S. M. Kakade, and Z. Harchaoui, "Robust aggregation for federated learning," IEEE Trans. Signal Process., vol. 70, pp. 1142–1154, 2022.</a:t>
             </a:r>
@@ -7575,7 +7760,7 @@
                 <a:solidFill>
                   <a:srgbClr val="26251F"/>
                 </a:solidFill>
-                <a:latin typeface="Segoe UI"/>
+                <a:latin typeface="Calibri"/>
               </a:rPr>
               <a:t>[9] National Institute of Standards and Technology, "Module-lattice-based key-encapsulation mechanism standard," FIPS 203, Aug. 2024.</a:t>
             </a:r>
@@ -7627,7 +7812,7 @@
                 <a:solidFill>
                   <a:srgbClr val="0B0B0B"/>
                 </a:solidFill>
-                <a:latin typeface="Segoe UI"/>
+                <a:latin typeface="Calibri"/>
               </a:rPr>
               <a:t>Background and Motivation</a:t>
             </a:r>
@@ -7666,7 +7851,7 @@
                 <a:solidFill>
                   <a:srgbClr val="2A78D6"/>
                 </a:solidFill>
-                <a:latin typeface="Segoe UI"/>
+                <a:latin typeface="Calibri"/>
               </a:rPr>
               <a:t>▪  </a:t>
             </a:r>
@@ -7675,7 +7860,7 @@
                 <a:solidFill>
                   <a:srgbClr val="26251F"/>
                 </a:solidFill>
-                <a:latin typeface="Segoe UI"/>
+                <a:latin typeface="Calibri"/>
               </a:rPr>
               <a:t>Secure aggregation = pairwise masks that cancel in the sum; the server sees only the aggregate, never an individual.</a:t>
             </a:r>
@@ -7691,7 +7876,7 @@
                 <a:solidFill>
                   <a:srgbClr val="2A78D6"/>
                 </a:solidFill>
-                <a:latin typeface="Segoe UI"/>
+                <a:latin typeface="Calibri"/>
               </a:rPr>
               <a:t>▪  </a:t>
             </a:r>
@@ -7700,7 +7885,7 @@
                 <a:solidFill>
                   <a:srgbClr val="26251F"/>
                 </a:solidFill>
-                <a:latin typeface="Segoe UI"/>
+                <a:latin typeface="Calibri"/>
               </a:rPr>
               <a:t>Quantum threat: Shor's algorithm breaks classical key exchange, and traffic recorded today is decryptable later.</a:t>
             </a:r>
@@ -7716,7 +7901,7 @@
                 <a:solidFill>
                   <a:srgbClr val="2A78D6"/>
                 </a:solidFill>
-                <a:latin typeface="Segoe UI"/>
+                <a:latin typeface="Calibri"/>
               </a:rPr>
               <a:t>▪  </a:t>
             </a:r>
@@ -7725,7 +7910,7 @@
                 <a:solidFill>
                   <a:srgbClr val="26251F"/>
                 </a:solidFill>
-                <a:latin typeface="Segoe UI"/>
+                <a:latin typeface="Calibri"/>
               </a:rPr>
               <a:t>Crypto diversity: NIST selected the code-based KEM HQC in 2025 to hedge a lattice break; that diversity has not reached FL.</a:t>
             </a:r>
@@ -7741,7 +7926,7 @@
                 <a:solidFill>
                   <a:srgbClr val="2A78D6"/>
                 </a:solidFill>
-                <a:latin typeface="Segoe UI"/>
+                <a:latin typeface="Calibri"/>
               </a:rPr>
               <a:t>▪  </a:t>
             </a:r>
@@ -7750,7 +7935,7 @@
                 <a:solidFill>
                   <a:srgbClr val="26251F"/>
                 </a:solidFill>
-                <a:latin typeface="Segoe UI"/>
+                <a:latin typeface="Calibri"/>
               </a:rPr>
               <a:t>Robustness tension: privacy hides exactly the per-client signal that poisoning defenses need.</a:t>
             </a:r>
@@ -7787,9 +7972,9 @@
             <a:r>
               <a:rPr sz="800" b="0" i="1">
                 <a:solidFill>
-                  <a:srgbClr val="2A78D6"/>
-                </a:solidFill>
-                <a:latin typeface="Segoe UI"/>
+                  <a:srgbClr val="26251F"/>
+                </a:solidFill>
+                <a:latin typeface="Calibri"/>
               </a:rPr>
               <a:t>[3] National Institute of Standards and Technology, "Status report on the fourth round of the NIST post-quantum cryptography standardization process," NIST IR 8545, Mar. 2025.</a:t>
             </a:r>
@@ -7803,9 +7988,9 @@
             <a:r>
               <a:rPr sz="800" b="0" i="1">
                 <a:solidFill>
-                  <a:srgbClr val="2A78D6"/>
-                </a:solidFill>
-                <a:latin typeface="Segoe UI"/>
+                  <a:srgbClr val="26251F"/>
+                </a:solidFill>
+                <a:latin typeface="Calibri"/>
               </a:rPr>
               <a:t>[4] P. W. Shor, "Polynomial-time algorithms for prime factorization and discrete logarithms on a quantum computer," SIAM J. Comput., vol. 26, no. 5, pp. 1484–1509, 1997.</a:t>
             </a:r>
@@ -7840,9 +8025,9 @@
                 <a:solidFill>
                   <a:srgbClr val="898781"/>
                 </a:solidFill>
-                <a:latin typeface="Segoe UI"/>
-              </a:rPr>
-              <a:t>2 / 22</a:t>
+                <a:latin typeface="Calibri"/>
+              </a:rPr>
+              <a:t>2 / 23</a:t>
             </a:r>
           </a:p>
         </p:txBody>
@@ -7892,7 +8077,7 @@
                 <a:solidFill>
                   <a:srgbClr val="0B0B0B"/>
                 </a:solidFill>
-                <a:latin typeface="Segoe UI"/>
+                <a:latin typeface="Calibri"/>
               </a:rPr>
               <a:t>Related Work</a:t>
             </a:r>
@@ -7931,7 +8116,7 @@
                 <a:solidFill>
                   <a:srgbClr val="2A78D6"/>
                 </a:solidFill>
-                <a:latin typeface="Segoe UI"/>
+                <a:latin typeface="Calibri"/>
               </a:rPr>
               <a:t>▪  </a:t>
             </a:r>
@@ -7940,7 +8125,7 @@
                 <a:solidFill>
                   <a:srgbClr val="26251F"/>
                 </a:solidFill>
-                <a:latin typeface="Segoe UI"/>
+                <a:latin typeface="Calibri"/>
               </a:rPr>
               <a:t>FedGT (IEEE TIFS, 2025) is the closest peer to our robustness mechanism.</a:t>
             </a:r>
@@ -7956,7 +8141,7 @@
                 <a:solidFill>
                   <a:srgbClr val="2A78D6"/>
                 </a:solidFill>
-                <a:latin typeface="Segoe UI"/>
+                <a:latin typeface="Calibri"/>
               </a:rPr>
               <a:t>▪  </a:t>
             </a:r>
@@ -7965,7 +8150,7 @@
                 <a:solidFill>
                   <a:srgbClr val="26251F"/>
                 </a:solidFill>
-                <a:latin typeface="Segoe UI"/>
+                <a:latin typeface="Calibri"/>
               </a:rPr>
               <a:t>Idea: group clients into overlapping test groups; the server sees only group aggregates, so privacy is preserved.</a:t>
             </a:r>
@@ -7981,7 +8166,7 @@
                 <a:solidFill>
                   <a:srgbClr val="2A78D6"/>
                 </a:solidFill>
-                <a:latin typeface="Segoe UI"/>
+                <a:latin typeface="Calibri"/>
               </a:rPr>
               <a:t>▪  </a:t>
             </a:r>
@@ -7990,7 +8175,7 @@
                 <a:solidFill>
                   <a:srgbClr val="26251F"/>
                 </a:solidFill>
-                <a:latin typeface="Segoe UI"/>
+                <a:latin typeface="Calibri"/>
               </a:rPr>
               <a:t>A statistical test flags groups that contain malicious clients; a decoder then identifies and removes the culprits.</a:t>
             </a:r>
@@ -8006,7 +8191,7 @@
                 <a:solidFill>
                   <a:srgbClr val="2A78D6"/>
                 </a:solidFill>
-                <a:latin typeface="Segoe UI"/>
+                <a:latin typeface="Calibri"/>
               </a:rPr>
               <a:t>▪  </a:t>
             </a:r>
@@ -8015,7 +8200,7 @@
                 <a:solidFill>
                   <a:srgbClr val="26251F"/>
                 </a:solidFill>
-                <a:latin typeface="Segoe UI"/>
+                <a:latin typeface="Calibri"/>
               </a:rPr>
               <a:t>Borrowed from group testing: find a few defectives with far fewer pooled tests than testing everyone.</a:t>
             </a:r>
@@ -8052,9 +8237,9 @@
             <a:r>
               <a:rPr sz="800" b="0" i="1">
                 <a:solidFill>
-                  <a:srgbClr val="2A78D6"/>
-                </a:solidFill>
-                <a:latin typeface="Segoe UI"/>
+                  <a:srgbClr val="26251F"/>
+                </a:solidFill>
+                <a:latin typeface="Calibri"/>
               </a:rPr>
               <a:t>[1] M. Xhemrishi, J. Östman, A. Wachter-Zeh, and A. Graell i Amat, "FedGT: Identification of malicious clients in federated learning with secure aggregation," IEEE Trans. Inf. Forensics Security, vol. 20, pp. 2577–2592, 2025.</a:t>
             </a:r>
@@ -8089,9 +8274,9 @@
                 <a:solidFill>
                   <a:srgbClr val="898781"/>
                 </a:solidFill>
-                <a:latin typeface="Segoe UI"/>
-              </a:rPr>
-              <a:t>3 / 22</a:t>
+                <a:latin typeface="Calibri"/>
+              </a:rPr>
+              <a:t>3 / 23</a:t>
             </a:r>
           </a:p>
         </p:txBody>
@@ -8141,7 +8326,7 @@
                 <a:solidFill>
                   <a:srgbClr val="0B0B0B"/>
                 </a:solidFill>
-                <a:latin typeface="Segoe UI"/>
+                <a:latin typeface="Calibri"/>
               </a:rPr>
               <a:t>Methodology (Base Paper)</a:t>
             </a:r>
@@ -8180,7 +8365,7 @@
                 <a:solidFill>
                   <a:srgbClr val="2A78D6"/>
                 </a:solidFill>
-                <a:latin typeface="Segoe UI"/>
+                <a:latin typeface="Calibri"/>
               </a:rPr>
               <a:t>▪  </a:t>
             </a:r>
@@ -8189,7 +8374,7 @@
                 <a:solidFill>
                   <a:srgbClr val="26251F"/>
                 </a:solidFill>
-                <a:latin typeface="Segoe UI"/>
+                <a:latin typeface="Calibri"/>
               </a:rPr>
               <a:t>An assignment matrix groups n clients into m overlapping groups (the parity-check structure of a code).</a:t>
             </a:r>
@@ -8205,7 +8390,7 @@
                 <a:solidFill>
                   <a:srgbClr val="2A78D6"/>
                 </a:solidFill>
-                <a:latin typeface="Segoe UI"/>
+                <a:latin typeface="Calibri"/>
               </a:rPr>
               <a:t>▪  </a:t>
             </a:r>
@@ -8214,7 +8399,7 @@
                 <a:solidFill>
                   <a:srgbClr val="26251F"/>
                 </a:solidFill>
-                <a:latin typeface="Segoe UI"/>
+                <a:latin typeface="Calibri"/>
               </a:rPr>
               <a:t>Each group is securely aggregated; a test on the group aggregate is positive if any member is malicious.</a:t>
             </a:r>
@@ -8230,7 +8415,7 @@
                 <a:solidFill>
                   <a:srgbClr val="2A78D6"/>
                 </a:solidFill>
-                <a:latin typeface="Segoe UI"/>
+                <a:latin typeface="Calibri"/>
               </a:rPr>
               <a:t>▪  </a:t>
             </a:r>
@@ -8239,7 +8424,7 @@
                 <a:solidFill>
                   <a:srgbClr val="26251F"/>
                 </a:solidFill>
-                <a:latin typeface="Segoe UI"/>
+                <a:latin typeface="Calibri"/>
               </a:rPr>
               <a:t>A COMP / Neyman-Pearson decoder infers which clients are malicious from the group test results.</a:t>
             </a:r>
@@ -8255,7 +8440,7 @@
                 <a:solidFill>
                   <a:srgbClr val="2A78D6"/>
                 </a:solidFill>
-                <a:latin typeface="Segoe UI"/>
+                <a:latin typeface="Calibri"/>
               </a:rPr>
               <a:t>▪  </a:t>
             </a:r>
@@ -8264,7 +8449,7 @@
                 <a:solidFill>
                   <a:srgbClr val="26251F"/>
                 </a:solidFill>
-                <a:latin typeface="Segoe UI"/>
+                <a:latin typeface="Calibri"/>
               </a:rPr>
               <a:t>Flagged clients are excluded; the remaining clean clients are aggregated into the global model.</a:t>
             </a:r>
@@ -8301,9 +8486,9 @@
             <a:r>
               <a:rPr sz="800" b="0" i="1">
                 <a:solidFill>
-                  <a:srgbClr val="2A78D6"/>
-                </a:solidFill>
-                <a:latin typeface="Segoe UI"/>
+                  <a:srgbClr val="26251F"/>
+                </a:solidFill>
+                <a:latin typeface="Calibri"/>
               </a:rPr>
               <a:t>[1] M. Xhemrishi, J. Östman, A. Wachter-Zeh, and A. Graell i Amat, "FedGT: Identification of malicious clients in federated learning with secure aggregation," IEEE Trans. Inf. Forensics Security, vol. 20, pp. 2577–2592, 2025.</a:t>
             </a:r>
@@ -8338,9 +8523,9 @@
                 <a:solidFill>
                   <a:srgbClr val="898781"/>
                 </a:solidFill>
-                <a:latin typeface="Segoe UI"/>
-              </a:rPr>
-              <a:t>4 / 22</a:t>
+                <a:latin typeface="Calibri"/>
+              </a:rPr>
+              <a:t>4 / 23</a:t>
             </a:r>
           </a:p>
         </p:txBody>
@@ -8390,7 +8575,7 @@
                 <a:solidFill>
                   <a:srgbClr val="0B0B0B"/>
                 </a:solidFill>
-                <a:latin typeface="Segoe UI"/>
+                <a:latin typeface="Calibri"/>
               </a:rPr>
               <a:t>Limitations</a:t>
             </a:r>
@@ -8429,7 +8614,7 @@
                 <a:solidFill>
                   <a:srgbClr val="2A78D6"/>
                 </a:solidFill>
-                <a:latin typeface="Segoe UI"/>
+                <a:latin typeface="Calibri"/>
               </a:rPr>
               <a:t>▪  </a:t>
             </a:r>
@@ -8438,7 +8623,7 @@
                 <a:solidFill>
                   <a:srgbClr val="26251F"/>
                 </a:solidFill>
-                <a:latin typeface="Segoe UI"/>
+                <a:latin typeface="Calibri"/>
               </a:rPr>
               <a:t>Crypto: it treats secure aggregation as a black box, with </a:t>
             </a:r>
@@ -8447,7 +8632,7 @@
                 <a:solidFill>
                   <a:srgbClr val="0B0B0B"/>
                 </a:solidFill>
-                <a:latin typeface="Segoe UI"/>
+                <a:latin typeface="Calibri"/>
               </a:rPr>
               <a:t>no post-quantum layer</a:t>
             </a:r>
@@ -8456,7 +8641,7 @@
                 <a:solidFill>
                   <a:srgbClr val="26251F"/>
                 </a:solidFill>
-                <a:latin typeface="Segoe UI"/>
+                <a:latin typeface="Calibri"/>
               </a:rPr>
               <a:t>, in a lattice-only field.</a:t>
             </a:r>
@@ -8472,7 +8657,7 @@
                 <a:solidFill>
                   <a:srgbClr val="2A78D6"/>
                 </a:solidFill>
-                <a:latin typeface="Segoe UI"/>
+                <a:latin typeface="Calibri"/>
               </a:rPr>
               <a:t>▪  </a:t>
             </a:r>
@@ -8481,7 +8666,7 @@
                 <a:solidFill>
                   <a:srgbClr val="26251F"/>
                 </a:solidFill>
-                <a:latin typeface="Segoe UI"/>
+                <a:latin typeface="Calibri"/>
               </a:rPr>
               <a:t>Cost: it needs a </a:t>
             </a:r>
@@ -8490,7 +8675,7 @@
                 <a:solidFill>
                   <a:srgbClr val="0B0B0B"/>
                 </a:solidFill>
-                <a:latin typeface="Segoe UI"/>
+                <a:latin typeface="Calibri"/>
               </a:rPr>
               <a:t>server validation set</a:t>
             </a:r>
@@ -8499,7 +8684,7 @@
                 <a:solidFill>
                   <a:srgbClr val="26251F"/>
                 </a:solidFill>
-                <a:latin typeface="Segoe UI"/>
+                <a:latin typeface="Calibri"/>
               </a:rPr>
               <a:t> and per-round group testing over fixed overlapping groups.</a:t>
             </a:r>
@@ -8515,7 +8700,7 @@
                 <a:solidFill>
                   <a:srgbClr val="2A78D6"/>
                 </a:solidFill>
-                <a:latin typeface="Segoe UI"/>
+                <a:latin typeface="Calibri"/>
               </a:rPr>
               <a:t>▪  </a:t>
             </a:r>
@@ -8524,7 +8709,7 @@
                 <a:solidFill>
                   <a:srgbClr val="26251F"/>
                 </a:solidFill>
-                <a:latin typeface="Segoe UI"/>
+                <a:latin typeface="Calibri"/>
               </a:rPr>
               <a:t>Single-round decode: it identifies attackers from </a:t>
             </a:r>
@@ -8533,7 +8718,7 @@
                 <a:solidFill>
                   <a:srgbClr val="0B0B0B"/>
                 </a:solidFill>
-                <a:latin typeface="Segoe UI"/>
+                <a:latin typeface="Calibri"/>
               </a:rPr>
               <a:t>one round's tests</a:t>
             </a:r>
@@ -8542,7 +8727,7 @@
                 <a:solidFill>
                   <a:srgbClr val="26251F"/>
                 </a:solidFill>
-                <a:latin typeface="Segoe UI"/>
+                <a:latin typeface="Calibri"/>
               </a:rPr>
               <a:t>, using no information across rounds.</a:t>
             </a:r>
@@ -8558,7 +8743,7 @@
                 <a:solidFill>
                   <a:srgbClr val="2A78D6"/>
                 </a:solidFill>
-                <a:latin typeface="Segoe UI"/>
+                <a:latin typeface="Calibri"/>
               </a:rPr>
               <a:t>▪  </a:t>
             </a:r>
@@ -8567,7 +8752,7 @@
                 <a:solidFill>
                   <a:srgbClr val="26251F"/>
                 </a:solidFill>
-                <a:latin typeface="Segoe UI"/>
+                <a:latin typeface="Calibri"/>
               </a:rPr>
               <a:t>Unexplained failure: it does not characterize </a:t>
             </a:r>
@@ -8576,7 +8761,7 @@
                 <a:solidFill>
                   <a:srgbClr val="0B0B0B"/>
                 </a:solidFill>
-                <a:latin typeface="Segoe UI"/>
+                <a:latin typeface="Calibri"/>
               </a:rPr>
               <a:t>why ordinary robust aggregation breaks</a:t>
             </a:r>
@@ -8585,7 +8770,7 @@
                 <a:solidFill>
                   <a:srgbClr val="26251F"/>
                 </a:solidFill>
-                <a:latin typeface="Segoe UI"/>
+                <a:latin typeface="Calibri"/>
               </a:rPr>
               <a:t> once updates are hidden.</a:t>
             </a:r>
@@ -8622,9 +8807,9 @@
             <a:r>
               <a:rPr sz="800" b="0" i="1">
                 <a:solidFill>
-                  <a:srgbClr val="2A78D6"/>
-                </a:solidFill>
-                <a:latin typeface="Segoe UI"/>
+                  <a:srgbClr val="26251F"/>
+                </a:solidFill>
+                <a:latin typeface="Calibri"/>
               </a:rPr>
               <a:t>[1] M. Xhemrishi, J. Östman, A. Wachter-Zeh, and A. Graell i Amat, "FedGT: Identification of malicious clients in federated learning with secure aggregation," IEEE Trans. Inf. Forensics Security, vol. 20, pp. 2577–2592, 2025.</a:t>
             </a:r>
@@ -8659,9 +8844,9 @@
                 <a:solidFill>
                   <a:srgbClr val="898781"/>
                 </a:solidFill>
-                <a:latin typeface="Segoe UI"/>
-              </a:rPr>
-              <a:t>5 / 22</a:t>
+                <a:latin typeface="Calibri"/>
+              </a:rPr>
+              <a:t>5 / 23</a:t>
             </a:r>
           </a:p>
         </p:txBody>
@@ -8711,7 +8896,7 @@
                 <a:solidFill>
                   <a:srgbClr val="0B0B0B"/>
                 </a:solidFill>
-                <a:latin typeface="Segoe UI"/>
+                <a:latin typeface="Calibri"/>
               </a:rPr>
               <a:t>Paper Selection</a:t>
             </a:r>
@@ -8750,7 +8935,7 @@
                 <a:solidFill>
                   <a:srgbClr val="2A78D6"/>
                 </a:solidFill>
-                <a:latin typeface="Segoe UI"/>
+                <a:latin typeface="Calibri"/>
               </a:rPr>
               <a:t>▪  </a:t>
             </a:r>
@@ -8759,7 +8944,7 @@
                 <a:solidFill>
                   <a:srgbClr val="26251F"/>
                 </a:solidFill>
-                <a:latin typeface="Segoe UI"/>
+                <a:latin typeface="Calibri"/>
               </a:rPr>
               <a:t>Venue quality: IEEE TIFS, a Q1 security journal. Recency: published 2025.</a:t>
             </a:r>
@@ -8775,7 +8960,7 @@
                 <a:solidFill>
                   <a:srgbClr val="2A78D6"/>
                 </a:solidFill>
-                <a:latin typeface="Segoe UI"/>
+                <a:latin typeface="Calibri"/>
               </a:rPr>
               <a:t>▪  </a:t>
             </a:r>
@@ -8784,7 +8969,7 @@
                 <a:solidFill>
                   <a:srgbClr val="26251F"/>
                 </a:solidFill>
-                <a:latin typeface="Segoe UI"/>
+                <a:latin typeface="Calibri"/>
               </a:rPr>
               <a:t>Relevance: it solves our exact sub-problem, malicious-client identification under secure aggregation.</a:t>
             </a:r>
@@ -8800,7 +8985,7 @@
                 <a:solidFill>
                   <a:srgbClr val="2A78D6"/>
                 </a:solidFill>
-                <a:latin typeface="Segoe UI"/>
+                <a:latin typeface="Calibri"/>
               </a:rPr>
               <a:t>▪  </a:t>
             </a:r>
@@ -8809,7 +8994,7 @@
                 <a:solidFill>
                   <a:srgbClr val="26251F"/>
                 </a:solidFill>
-                <a:latin typeface="Segoe UI"/>
+                <a:latin typeface="Calibri"/>
               </a:rPr>
               <a:t>Method strength: its group testing outperforms the geometric median (RFA) and Multi-Krum in its own study.</a:t>
             </a:r>
@@ -8825,7 +9010,7 @@
                 <a:solidFill>
                   <a:srgbClr val="2A78D6"/>
                 </a:solidFill>
-                <a:latin typeface="Segoe UI"/>
+                <a:latin typeface="Calibri"/>
               </a:rPr>
               <a:t>▪  </a:t>
             </a:r>
@@ -8834,7 +9019,7 @@
                 <a:solidFill>
                   <a:srgbClr val="26251F"/>
                 </a:solidFill>
-                <a:latin typeface="Segoe UI"/>
+                <a:latin typeface="Calibri"/>
               </a:rPr>
               <a:t>Reproducible: public code and a clearly specified protocol, a solid foundation to build on.</a:t>
             </a:r>
@@ -8871,9 +9056,9 @@
             <a:r>
               <a:rPr sz="800" b="0" i="1">
                 <a:solidFill>
-                  <a:srgbClr val="2A78D6"/>
-                </a:solidFill>
-                <a:latin typeface="Segoe UI"/>
+                  <a:srgbClr val="26251F"/>
+                </a:solidFill>
+                <a:latin typeface="Calibri"/>
               </a:rPr>
               <a:t>[1] M. Xhemrishi, J. Östman, A. Wachter-Zeh, and A. Graell i Amat, "FedGT: Identification of malicious clients in federated learning with secure aggregation," IEEE Trans. Inf. Forensics Security, vol. 20, pp. 2577–2592, 2025.</a:t>
             </a:r>
@@ -8887,9 +9072,9 @@
             <a:r>
               <a:rPr sz="800" b="0" i="1">
                 <a:solidFill>
-                  <a:srgbClr val="2A78D6"/>
-                </a:solidFill>
-                <a:latin typeface="Segoe UI"/>
+                  <a:srgbClr val="26251F"/>
+                </a:solidFill>
+                <a:latin typeface="Calibri"/>
               </a:rPr>
               <a:t>[8] K. Pillutla, S. M. Kakade, and Z. Harchaoui, "Robust aggregation for federated learning," IEEE Trans. Signal Process., vol. 70, pp. 1142–1154, 2022.</a:t>
             </a:r>
@@ -8924,9 +9109,9 @@
                 <a:solidFill>
                   <a:srgbClr val="898781"/>
                 </a:solidFill>
-                <a:latin typeface="Segoe UI"/>
-              </a:rPr>
-              <a:t>6 / 22</a:t>
+                <a:latin typeface="Calibri"/>
+              </a:rPr>
+              <a:t>6 / 23</a:t>
             </a:r>
           </a:p>
         </p:txBody>
@@ -8976,7 +9161,7 @@
                 <a:solidFill>
                   <a:srgbClr val="0B0B0B"/>
                 </a:solidFill>
-                <a:latin typeface="Segoe UI"/>
+                <a:latin typeface="Calibri"/>
               </a:rPr>
               <a:t>Proposed Method</a:t>
             </a:r>
@@ -9010,7 +9195,7 @@
                 <a:solidFill>
                   <a:srgbClr val="26251F"/>
                 </a:solidFill>
-                <a:latin typeface="Segoe UI"/>
+                <a:latin typeface="Calibri"/>
               </a:rPr>
               <a:t>One framework that is private, post-quantum, and Byzantine-robust at the same time.</a:t>
             </a:r>
@@ -9049,7 +9234,7 @@
                 <a:solidFill>
                   <a:srgbClr val="2A78D6"/>
                 </a:solidFill>
-                <a:latin typeface="Segoe UI"/>
+                <a:latin typeface="Calibri"/>
               </a:rPr>
               <a:t>▪  </a:t>
             </a:r>
@@ -9058,7 +9243,7 @@
                 <a:solidFill>
                   <a:srgbClr val="26251F"/>
                 </a:solidFill>
-                <a:latin typeface="Segoe UI"/>
+                <a:latin typeface="Calibri"/>
               </a:rPr>
               <a:t>Hide updates within clusters using a code-based (HQC) masking protocol: the server sees only cluster sums.</a:t>
             </a:r>
@@ -9074,7 +9259,7 @@
                 <a:solidFill>
                   <a:srgbClr val="2A78D6"/>
                 </a:solidFill>
-                <a:latin typeface="Segoe UI"/>
+                <a:latin typeface="Calibri"/>
               </a:rPr>
               <a:t>▪  </a:t>
             </a:r>
@@ -9083,7 +9268,7 @@
                 <a:solidFill>
                   <a:srgbClr val="26251F"/>
                 </a:solidFill>
-                <a:latin typeface="Segoe UI"/>
+                <a:latin typeface="Calibri"/>
               </a:rPr>
               <a:t>Run group testing across re-randomized clusters over rounds to identify attackers (CB-SAFE+).</a:t>
             </a:r>
@@ -9099,7 +9284,7 @@
                 <a:solidFill>
                   <a:srgbClr val="2A78D6"/>
                 </a:solidFill>
-                <a:latin typeface="Segoe UI"/>
+                <a:latin typeface="Calibri"/>
               </a:rPr>
               <a:t>▪  </a:t>
             </a:r>
@@ -9108,7 +9293,7 @@
                 <a:solidFill>
                   <a:srgbClr val="26251F"/>
                 </a:solidFill>
-                <a:latin typeface="Segoe UI"/>
+                <a:latin typeface="Calibri"/>
               </a:rPr>
               <a:t>Confidentiality lives below the cluster boundary; robustness operates above it; post-quantum by construction.</a:t>
             </a:r>
@@ -9145,9 +9330,9 @@
             <a:r>
               <a:rPr sz="800" b="0" i="1">
                 <a:solidFill>
-                  <a:srgbClr val="2A78D6"/>
-                </a:solidFill>
-                <a:latin typeface="Segoe UI"/>
+                  <a:srgbClr val="26251F"/>
+                </a:solidFill>
+                <a:latin typeface="Calibri"/>
               </a:rPr>
               <a:t>[1] M. Xhemrishi, J. Östman, A. Wachter-Zeh, and A. Graell i Amat, "FedGT: Identification of malicious clients in federated learning with secure aggregation," IEEE Trans. Inf. Forensics Security, vol. 20, pp. 2577–2592, 2025.</a:t>
             </a:r>
@@ -9161,9 +9346,9 @@
             <a:r>
               <a:rPr sz="800" b="0" i="1">
                 <a:solidFill>
-                  <a:srgbClr val="2A78D6"/>
-                </a:solidFill>
-                <a:latin typeface="Segoe UI"/>
+                  <a:srgbClr val="26251F"/>
+                </a:solidFill>
+                <a:latin typeface="Calibri"/>
               </a:rPr>
               <a:t>[2] K. Bonawitz, V. Ivanov, B. Kreuter, A. Marcedone, H. B. McMahan, S. Patel, D. Ramage, A. Segal, and K. Seth, "Practical secure aggregation for privacy-preserving machine learning," in Proc. ACM CCS, 2017, pp. 1175–1191.</a:t>
             </a:r>
@@ -9198,9 +9383,9 @@
                 <a:solidFill>
                   <a:srgbClr val="898781"/>
                 </a:solidFill>
-                <a:latin typeface="Segoe UI"/>
-              </a:rPr>
-              <a:t>7 / 22</a:t>
+                <a:latin typeface="Calibri"/>
+              </a:rPr>
+              <a:t>7 / 23</a:t>
             </a:r>
           </a:p>
         </p:txBody>
@@ -9250,7 +9435,7 @@
                 <a:solidFill>
                   <a:srgbClr val="0B0B0B"/>
                 </a:solidFill>
-                <a:latin typeface="Segoe UI"/>
+                <a:latin typeface="Calibri"/>
               </a:rPr>
               <a:t>Methodology (Ours): Masking</a:t>
             </a:r>
@@ -9289,7 +9474,7 @@
                 <a:solidFill>
                   <a:srgbClr val="2A78D6"/>
                 </a:solidFill>
-                <a:latin typeface="Segoe UI"/>
+                <a:latin typeface="Calibri"/>
               </a:rPr>
               <a:t>▪  </a:t>
             </a:r>
@@ -9298,7 +9483,7 @@
                 <a:solidFill>
                   <a:srgbClr val="26251F"/>
                 </a:solidFill>
-                <a:latin typeface="Segoe UI"/>
+                <a:latin typeface="Calibri"/>
               </a:rPr>
               <a:t>We adopt Bonawitz-style double masking: pairwise masks cancel in the cluster sum, so individuals stay hidden.</a:t>
             </a:r>
@@ -9314,7 +9499,7 @@
                 <a:solidFill>
                   <a:srgbClr val="2A78D6"/>
                 </a:solidFill>
-                <a:latin typeface="Segoe UI"/>
+                <a:latin typeface="Calibri"/>
               </a:rPr>
               <a:t>▪  </a:t>
             </a:r>
@@ -9323,7 +9508,7 @@
                 <a:solidFill>
                   <a:srgbClr val="26251F"/>
                 </a:solidFill>
-                <a:latin typeface="Segoe UI"/>
+                <a:latin typeface="Calibri"/>
               </a:rPr>
               <a:t>Dropout resilience via Shamir secret sharing of the self-masks.</a:t>
             </a:r>
@@ -9339,7 +9524,7 @@
                 <a:solidFill>
                   <a:srgbClr val="2A78D6"/>
                 </a:solidFill>
-                <a:latin typeface="Segoe UI"/>
+                <a:latin typeface="Calibri"/>
               </a:rPr>
               <a:t>▪  </a:t>
             </a:r>
@@ -9348,7 +9533,7 @@
                 <a:solidFill>
                   <a:srgbClr val="26251F"/>
                 </a:solidFill>
-                <a:latin typeface="Segoe UI"/>
+                <a:latin typeface="Calibri"/>
               </a:rPr>
               <a:t>Our change: masks are seeded from a KEM, so per-round traffic carries no cryptographic bytes at all.</a:t>
             </a:r>
@@ -9409,9 +9594,9 @@
             <a:r>
               <a:rPr sz="800" b="0" i="1">
                 <a:solidFill>
-                  <a:srgbClr val="2A78D6"/>
-                </a:solidFill>
-                <a:latin typeface="Segoe UI"/>
+                  <a:srgbClr val="26251F"/>
+                </a:solidFill>
+                <a:latin typeface="Calibri"/>
               </a:rPr>
               <a:t>[2] K. Bonawitz, V. Ivanov, B. Kreuter, A. Marcedone, H. B. McMahan, S. Patel, D. Ramage, A. Segal, and K. Seth, "Practical secure aggregation for privacy-preserving machine learning," in Proc. ACM CCS, 2017, pp. 1175–1191.</a:t>
             </a:r>
@@ -9446,9 +9631,9 @@
                 <a:solidFill>
                   <a:srgbClr val="898781"/>
                 </a:solidFill>
-                <a:latin typeface="Segoe UI"/>
-              </a:rPr>
-              <a:t>8 / 22</a:t>
+                <a:latin typeface="Calibri"/>
+              </a:rPr>
+              <a:t>8 / 23</a:t>
             </a:r>
           </a:p>
         </p:txBody>

--- a/paper/cbsafe_deck.pptx
+++ b/paper/cbsafe_deck.pptx
@@ -3377,7 +3377,7 @@
                 </a:solidFill>
                 <a:latin typeface="Calibri"/>
               </a:rPr>
-              <a:t>We adopt the core idea: identify malicious clients from group-level observations, never from individual updates.</a:t>
+              <a:t>We adopt the core idea from FedGT [1]: identify malicious clients from group-level observations, never from individual updates.</a:t>
             </a:r>
           </a:p>
           <a:p>
@@ -3601,7 +3601,7 @@
                 </a:solidFill>
                 <a:latin typeface="Calibri"/>
               </a:rPr>
-              <a:t>We adopt HQC, the code-based KEM NIST selected in 2025, for post-quantum confidentiality.</a:t>
+              <a:t>We adopt HQC, the code-based KEM NIST selected in 2025 [3], for post-quantum confidentiality.</a:t>
             </a:r>
           </a:p>
           <a:p>
@@ -3651,7 +3651,7 @@
                 </a:solidFill>
                 <a:latin typeface="Calibri"/>
               </a:rPr>
-              <a:t>Our change: HQC sits behind a KEM-agnostic interface, so ML-KEM swaps in with one configuration line.</a:t>
+              <a:t>Our change: HQC sits behind a KEM-agnostic interface, so ML-KEM [9] swaps in with one configuration line.</a:t>
             </a:r>
           </a:p>
         </p:txBody>
@@ -4008,6 +4008,22 @@
               <a:t>[2] K. Bonawitz, V. Ivanov, B. Kreuter, A. Marcedone, H. B. McMahan, S. Patel, D. Ramage, A. Segal, and K. Seth, "Practical secure aggregation for privacy-preserving machine learning," in Proc. ACM CCS, 2017, pp. 1175–1191.</a:t>
             </a:r>
           </a:p>
+          <a:p>
+            <a:pPr>
+              <a:spcAft>
+                <a:spcPts val="100"/>
+              </a:spcAft>
+            </a:pPr>
+            <a:r>
+              <a:rPr sz="800" b="0" i="1">
+                <a:solidFill>
+                  <a:srgbClr val="26251F"/>
+                </a:solidFill>
+                <a:latin typeface="Calibri"/>
+              </a:rPr>
+              <a:t>[3] National Institute of Standards and Technology, "Status report on the fourth round of the NIST post-quantum cryptography standardization process," NIST IR 8545, Mar. 2025.</a:t>
+            </a:r>
+          </a:p>
         </p:txBody>
       </p:sp>
       <p:sp>
@@ -4140,7 +4156,7 @@
                 </a:solidFill>
                 <a:latin typeface="Calibri"/>
               </a:rPr>
-              <a:t>Crypto: FedGT is crypto-agnostic → </a:t>
+              <a:t>Crypto: FedGT [1] is crypto-agnostic → </a:t>
             </a:r>
             <a:r>
               <a:rPr sz="1500" b="1" i="0">
@@ -4571,7 +4587,7 @@
                 </a:solidFill>
                 <a:latin typeface="Calibri"/>
               </a:rPr>
-              <a:t> over re-randomized clusters with a root-loss probe: identifies attackers the server never sees.</a:t>
+              <a:t> over re-randomized clusters (extending FedGT [1]) with a root-loss probe [5]: identifies attackers the server never sees.</a:t>
             </a:r>
           </a:p>
           <a:p>
@@ -4828,7 +4844,7 @@
                 </a:solidFill>
                 <a:latin typeface="Calibri"/>
               </a:rPr>
-              <a:t>Venue and recency: the basis paper is Q1 (IEEE TIFS), 2025; supporting sources are top-tier (ACM CCS, NIST).</a:t>
+              <a:t>Venue and recency: the basis paper [1] is Q1 (IEEE TIFS), 2025; supporting sources are top-tier (ACM CCS [2], NIST [3]).</a:t>
             </a:r>
           </a:p>
           <a:p>
@@ -5410,7 +5426,7 @@
                 </a:solidFill>
                 <a:latin typeface="Calibri"/>
               </a:rPr>
-              <a:t>One training round: confidentiality within clusters, temporal group testing over re-randomized clusters, robust aggregation.</a:t>
+              <a:t>One training round: confidentiality within clusters [2], temporal group testing over re-randomized clusters [1], robust aggregation.</a:t>
             </a:r>
           </a:p>
         </p:txBody>
@@ -5674,7 +5690,7 @@
                 </a:solidFill>
                 <a:latin typeface="Calibri"/>
               </a:rPr>
-              <a:t>Attacks: sign-flip (laundering), label-flip, backdoor. Baselines: mean, trimmed, median, Krum, Bulyan, RFA, FLTrust, FedGT.</a:t>
+              <a:t>Attacks: sign-flip (laundering), label-flip, backdoor. Baselines: mean, trimmed, median [6], Krum, Bulyan, RFA, FLTrust, FedGT [1].</a:t>
             </a:r>
           </a:p>
         </p:txBody>
@@ -5922,7 +5938,7 @@
                 </a:solidFill>
                 <a:latin typeface="Calibri"/>
               </a:rPr>
-              <a:t>Under sign-flip at f ≥ 0.2 every coordinate-wise rule collapses to chance; CB-SAFE+ holds and ties FedGT.</a:t>
+              <a:t>Under sign-flip at f ≥ 0.2 every coordinate-wise rule collapses to chance; CB-SAFE+ holds and ties FedGT [1].</a:t>
             </a:r>
           </a:p>
         </p:txBody>
@@ -6163,7 +6179,7 @@
                 </a:solidFill>
                 <a:latin typeface="Calibri"/>
               </a:rPr>
-              <a:t>Secure aggregation hides updates behind masks, but its key exchange </a:t>
+              <a:t>Secure aggregation [2] hides updates behind masks, but its key exchange </a:t>
             </a:r>
             <a:r>
               <a:rPr sz="1500" b="1" i="0">
@@ -6427,7 +6443,7 @@
                 </a:solidFill>
                 <a:latin typeface="Calibri"/>
               </a:rPr>
-              <a:t>Test accuracy vs. round for eight rules, over three datasets (rows) and three malicious fractions (columns); CB-SAFE+ tracks the clean baseline while the others diverge (from the paper, Fig. 7).</a:t>
+              <a:t>Test accuracy vs. round for eight rules including FedGT [1], over three datasets (rows) and three malicious fractions (columns); CB-SAFE+ tracks the clean baseline while the others diverge (from the paper, Fig. 7).</a:t>
             </a:r>
           </a:p>
         </p:txBody>
@@ -6659,7 +6675,7 @@
                 </a:solidFill>
                 <a:latin typeface="Calibri"/>
               </a:rPr>
-              <a:t>Malicious and honest suspicion separate within a few rounds; attackers are named from group-level observations alone.</a:t>
+              <a:t>Malicious and honest suspicion separate within a few rounds; attackers are named from group-level observations alone, following the group-testing idea of FedGT [1].</a:t>
             </a:r>
           </a:p>
         </p:txBody>
@@ -6843,7 +6859,7 @@
                 </a:solidFill>
                 <a:latin typeface="Calibri"/>
               </a:rPr>
-              <a:t>Label-flip test accuracy (from the paper, Table VI); CB-SAFE+ matches FedGT and leads at the hardest setting (f=0.3).</a:t>
+              <a:t>Label-flip test accuracy (from the paper, Table VI); CB-SAFE+ matches FedGT [1] and leads at the hardest setting (f=0.3).</a:t>
             </a:r>
           </a:p>
         </p:txBody>
@@ -7123,7 +7139,7 @@
                 </a:solidFill>
                 <a:latin typeface="Calibri"/>
               </a:rPr>
-              <a:t>Code-based (HQC) confidentiality gives crypto diversity beyond lattices; ML-KEM swaps in unchanged.</a:t>
+              <a:t>Code-based (HQC [3]) confidentiality gives crypto diversity beyond lattices; ML-KEM [9] swaps in unchanged.</a:t>
             </a:r>
           </a:p>
           <a:p>
@@ -7362,7 +7378,7 @@
                 </a:solidFill>
                 <a:latin typeface="Calibri"/>
               </a:rPr>
-              <a:t>CB-SAFE unifies code-based PQ secure aggregation with temporal group-testing robustness in one protocol.</a:t>
+              <a:t>CB-SAFE unifies code-based PQ secure aggregation [2], [3] with temporal group-testing robustness [1] in one protocol.</a:t>
             </a:r>
           </a:p>
           <a:p>
@@ -7887,7 +7903,7 @@
                 </a:solidFill>
                 <a:latin typeface="Calibri"/>
               </a:rPr>
-              <a:t>Quantum threat: Shor's algorithm breaks classical key exchange, and traffic recorded today is decryptable later.</a:t>
+              <a:t>Quantum threat: Shor's algorithm [4] breaks classical key exchange, and traffic recorded today is decryptable later.</a:t>
             </a:r>
           </a:p>
           <a:p>
@@ -7912,7 +7928,7 @@
                 </a:solidFill>
                 <a:latin typeface="Calibri"/>
               </a:rPr>
-              <a:t>Crypto diversity: NIST selected the code-based KEM HQC in 2025 to hedge a lattice break; that diversity has not reached FL.</a:t>
+              <a:t>Crypto diversity: NIST selected the code-based KEM HQC in 2025 [3] to hedge a lattice break; that diversity has not reached FL.</a:t>
             </a:r>
           </a:p>
           <a:p>
@@ -8127,7 +8143,7 @@
                 </a:solidFill>
                 <a:latin typeface="Calibri"/>
               </a:rPr>
-              <a:t>FedGT (IEEE TIFS, 2025) is the closest peer to our robustness mechanism.</a:t>
+              <a:t>FedGT [1] (IEEE TIFS, 2025) is the closest peer to our robustness mechanism.</a:t>
             </a:r>
           </a:p>
           <a:p>
@@ -8376,7 +8392,7 @@
                 </a:solidFill>
                 <a:latin typeface="Calibri"/>
               </a:rPr>
-              <a:t>An assignment matrix groups n clients into m overlapping groups (the parity-check structure of a code).</a:t>
+              <a:t>In FedGT [1], an assignment matrix groups n clients into m overlapping groups (the parity-check structure of a code).</a:t>
             </a:r>
           </a:p>
           <a:p>
@@ -8625,7 +8641,7 @@
                 </a:solidFill>
                 <a:latin typeface="Calibri"/>
               </a:rPr>
-              <a:t>Crypto: it treats secure aggregation as a black box, with </a:t>
+              <a:t>Crypto: FedGT [1] treats secure aggregation as a black box, with </a:t>
             </a:r>
             <a:r>
               <a:rPr sz="1500" b="1" i="0">
@@ -8946,7 +8962,7 @@
                 </a:solidFill>
                 <a:latin typeface="Calibri"/>
               </a:rPr>
-              <a:t>Venue quality: IEEE TIFS, a Q1 security journal. Recency: published 2025.</a:t>
+              <a:t>Venue quality: FedGT [1] is in IEEE TIFS, a Q1 security journal. Recency: published 2025.</a:t>
             </a:r>
           </a:p>
           <a:p>
@@ -8996,7 +9012,7 @@
                 </a:solidFill>
                 <a:latin typeface="Calibri"/>
               </a:rPr>
-              <a:t>Method strength: its group testing outperforms the geometric median (RFA) and Multi-Krum in its own study.</a:t>
+              <a:t>Method strength: its group testing outperforms the geometric median (RFA) [8] and Multi-Krum in its own study.</a:t>
             </a:r>
           </a:p>
           <a:p>
@@ -9245,7 +9261,7 @@
                 </a:solidFill>
                 <a:latin typeface="Calibri"/>
               </a:rPr>
-              <a:t>Hide updates within clusters using a code-based (HQC) masking protocol: the server sees only cluster sums.</a:t>
+              <a:t>Hide updates within clusters using a code-based (HQC) masking protocol [2]: the server sees only cluster sums.</a:t>
             </a:r>
           </a:p>
           <a:p>
@@ -9270,7 +9286,7 @@
                 </a:solidFill>
                 <a:latin typeface="Calibri"/>
               </a:rPr>
-              <a:t>Run group testing across re-randomized clusters over rounds to identify attackers (CB-SAFE+).</a:t>
+              <a:t>Run group testing [1] across re-randomized clusters over rounds to identify attackers (CB-SAFE+).</a:t>
             </a:r>
           </a:p>
           <a:p>
@@ -9485,7 +9501,7 @@
                 </a:solidFill>
                 <a:latin typeface="Calibri"/>
               </a:rPr>
-              <a:t>We adopt Bonawitz-style double masking: pairwise masks cancel in the cluster sum, so individuals stay hidden.</a:t>
+              <a:t>We adopt Bonawitz-style double masking [2]: pairwise masks cancel in the cluster sum, so individuals stay hidden.</a:t>
             </a:r>
           </a:p>
           <a:p>

--- a/paper/cbsafe_deck.pptx
+++ b/paper/cbsafe_deck.pptx
@@ -3120,7 +3120,7 @@
         </p:nvSpPr>
         <p:spPr>
           <a:xfrm>
-            <a:off x="685800" y="1783080"/>
+            <a:off x="685800" y="1737360"/>
             <a:ext cx="10881360" cy="365760"/>
           </a:xfrm>
           <a:prstGeom prst="rect">
@@ -3135,7 +3135,7 @@
           <a:lstStyle/>
           <a:p>
             <a:r>
-              <a:rPr sz="1300" b="1" i="0">
+              <a:rPr sz="1400" b="1" i="0">
                 <a:solidFill>
                   <a:srgbClr val="2A78D6"/>
                 </a:solidFill>
@@ -3154,7 +3154,7 @@
         </p:nvSpPr>
         <p:spPr>
           <a:xfrm>
-            <a:off x="685800" y="2286000"/>
+            <a:off x="685800" y="2240280"/>
             <a:ext cx="10698480" cy="1828800"/>
           </a:xfrm>
           <a:prstGeom prst="rect">
@@ -3169,7 +3169,7 @@
           <a:lstStyle/>
           <a:p>
             <a:r>
-              <a:rPr sz="3700" b="1" i="0">
+              <a:rPr sz="3800" b="1" i="0">
                 <a:solidFill>
                   <a:srgbClr val="0B0B0B"/>
                 </a:solidFill>
@@ -3203,7 +3203,7 @@
           <a:lstStyle/>
           <a:p>
             <a:r>
-              <a:rPr sz="1700" b="0" i="0">
+              <a:rPr sz="1800" b="0" i="0">
                 <a:solidFill>
                   <a:srgbClr val="26251F"/>
                 </a:solidFill>
@@ -3222,7 +3222,7 @@
         </p:nvSpPr>
         <p:spPr>
           <a:xfrm>
-            <a:off x="685800" y="4956048"/>
+            <a:off x="685800" y="4983480"/>
             <a:ext cx="10698480" cy="365760"/>
           </a:xfrm>
           <a:prstGeom prst="rect">
@@ -3237,47 +3237,13 @@
           <a:lstStyle/>
           <a:p>
             <a:r>
-              <a:rPr sz="1400" b="0" i="0">
+              <a:rPr sz="1500" b="0" i="0">
                 <a:solidFill>
                   <a:srgbClr val="898781"/>
                 </a:solidFill>
                 <a:latin typeface="Calibri"/>
               </a:rPr>
               <a:t>Department of Computer Science, American International University–Bangladesh</a:t>
-            </a:r>
-          </a:p>
-        </p:txBody>
-      </p:sp>
-      <p:sp>
-        <p:nvSpPr>
-          <p:cNvPr id="6" name="TextBox 5"/>
-          <p:cNvSpPr txBox="1"/>
-          <p:nvPr/>
-        </p:nvSpPr>
-        <p:spPr>
-          <a:xfrm>
-            <a:off x="685800" y="5806440"/>
-            <a:ext cx="10698480" cy="365760"/>
-          </a:xfrm>
-          <a:prstGeom prst="rect">
-            <a:avLst/>
-          </a:prstGeom>
-          <a:noFill/>
-        </p:spPr>
-        <p:txBody>
-          <a:bodyPr wrap="square">
-            <a:spAutoFit/>
-          </a:bodyPr>
-          <a:lstStyle/>
-          <a:p>
-            <a:r>
-              <a:rPr sz="1250" b="0" i="1">
-                <a:solidFill>
-                  <a:srgbClr val="898781"/>
-                </a:solidFill>
-                <a:latin typeface="Calibri"/>
-              </a:rPr>
-              <a:t>Slides 1–15: required method presentation.   Slides 16–23: full-paper research walkthrough.</a:t>
             </a:r>
           </a:p>
         </p:txBody>
@@ -3308,28 +3274,28 @@
         </p:nvSpPr>
         <p:spPr>
           <a:xfrm>
-            <a:off x="685800" y="438912"/>
-            <a:ext cx="10881360" cy="822960"/>
-          </a:xfrm>
-          <a:prstGeom prst="rect">
-            <a:avLst/>
-          </a:prstGeom>
-          <a:noFill/>
-        </p:spPr>
-        <p:txBody>
-          <a:bodyPr wrap="square">
-            <a:spAutoFit/>
-          </a:bodyPr>
-          <a:lstStyle/>
-          <a:p>
-            <a:r>
-              <a:rPr sz="3000" b="1" i="0">
+            <a:off x="685800" y="384048"/>
+            <a:ext cx="10881360" cy="868680"/>
+          </a:xfrm>
+          <a:prstGeom prst="rect">
+            <a:avLst/>
+          </a:prstGeom>
+          <a:noFill/>
+        </p:spPr>
+        <p:txBody>
+          <a:bodyPr wrap="square">
+            <a:spAutoFit/>
+          </a:bodyPr>
+          <a:lstStyle/>
+          <a:p>
+            <a:r>
+              <a:rPr sz="3400" b="1" i="0">
                 <a:solidFill>
                   <a:srgbClr val="0B0B0B"/>
                 </a:solidFill>
                 <a:latin typeface="Calibri"/>
               </a:rPr>
-              <a:t>Methodology (Ours): Detection</a:t>
+              <a:t>System Architecture (Ours)</a:t>
             </a:r>
           </a:p>
         </p:txBody>
@@ -3342,106 +3308,66 @@
         </p:nvSpPr>
         <p:spPr>
           <a:xfrm>
-            <a:off x="685800" y="1371600"/>
-            <a:ext cx="10881360" cy="3931920"/>
-          </a:xfrm>
-          <a:prstGeom prst="rect">
-            <a:avLst/>
-          </a:prstGeom>
-          <a:noFill/>
-        </p:spPr>
-        <p:txBody>
-          <a:bodyPr wrap="square">
-            <a:spAutoFit/>
-          </a:bodyPr>
-          <a:lstStyle/>
-          <a:p>
-            <a:pPr>
-              <a:spcAft>
-                <a:spcPts val="800"/>
-              </a:spcAft>
-            </a:pPr>
-            <a:r>
-              <a:rPr sz="1500">
-                <a:solidFill>
-                  <a:srgbClr val="2A78D6"/>
-                </a:solidFill>
-                <a:latin typeface="Calibri"/>
-              </a:rPr>
-              <a:t>▪  </a:t>
-            </a:r>
-            <a:r>
-              <a:rPr sz="1500" b="0" i="0">
-                <a:solidFill>
-                  <a:srgbClr val="26251F"/>
-                </a:solidFill>
-                <a:latin typeface="Calibri"/>
-              </a:rPr>
-              <a:t>We adopt the core idea from FedGT [1]: identify malicious clients from group-level observations, never from individual updates.</a:t>
-            </a:r>
-          </a:p>
-          <a:p>
-            <a:pPr>
-              <a:spcAft>
-                <a:spcPts val="800"/>
-              </a:spcAft>
-            </a:pPr>
-            <a:r>
-              <a:rPr sz="1500">
-                <a:solidFill>
-                  <a:srgbClr val="2A78D6"/>
-                </a:solidFill>
-                <a:latin typeface="Calibri"/>
-              </a:rPr>
-              <a:t>▪  </a:t>
-            </a:r>
-            <a:r>
-              <a:rPr sz="1500" b="0" i="0">
-                <a:solidFill>
-                  <a:srgbClr val="26251F"/>
-                </a:solidFill>
-                <a:latin typeface="Calibri"/>
-              </a:rPr>
-              <a:t>The groups are the privacy-preserving cluster sums (the pools); a probe flags contaminated pools.</a:t>
-            </a:r>
-          </a:p>
-          <a:p>
-            <a:pPr>
-              <a:spcAft>
-                <a:spcPts val="800"/>
-              </a:spcAft>
-            </a:pPr>
-            <a:r>
-              <a:rPr sz="1500">
-                <a:solidFill>
-                  <a:srgbClr val="2A78D6"/>
-                </a:solidFill>
-                <a:latin typeface="Calibri"/>
-              </a:rPr>
-              <a:t>▪  </a:t>
-            </a:r>
-            <a:r>
-              <a:rPr sz="1500" b="0" i="0">
-                <a:solidFill>
-                  <a:srgbClr val="26251F"/>
-                </a:solidFill>
-                <a:latin typeface="Calibri"/>
-              </a:rPr>
-              <a:t>Our change: tests repeat over re-randomized clusters and accumulate across rounds (temporal group testing).</a:t>
-            </a:r>
-          </a:p>
-        </p:txBody>
-      </p:sp>
-      <p:sp>
-        <p:nvSpPr>
-          <p:cNvPr id="4" name="TextBox 3"/>
-          <p:cNvSpPr txBox="1"/>
-          <p:nvPr/>
-        </p:nvSpPr>
-        <p:spPr>
-          <a:xfrm>
-            <a:off x="685800" y="5943600"/>
-            <a:ext cx="10881360" cy="502920"/>
+            <a:off x="685800" y="1417320"/>
+            <a:ext cx="10881360" cy="548640"/>
+          </a:xfrm>
+          <a:prstGeom prst="rect">
+            <a:avLst/>
+          </a:prstGeom>
+          <a:noFill/>
+        </p:spPr>
+        <p:txBody>
+          <a:bodyPr wrap="square">
+            <a:spAutoFit/>
+          </a:bodyPr>
+          <a:lstStyle/>
+          <a:p>
+            <a:r>
+              <a:rPr sz="1600" b="0" i="1">
+                <a:solidFill>
+                  <a:srgbClr val="26251F"/>
+                </a:solidFill>
+                <a:latin typeface="Calibri"/>
+              </a:rPr>
+              <a:t>One training round: confidentiality within clusters [2], temporal group testing over re-randomized clusters [1], robust aggregation.</a:t>
+            </a:r>
+          </a:p>
+        </p:txBody>
+      </p:sp>
+      <p:pic>
+        <p:nvPicPr>
+          <p:cNvPr id="4" name="Picture 3" descr="fig_architecture.png"/>
+          <p:cNvPicPr>
+            <a:picLocks noChangeAspect="1"/>
+          </p:cNvPicPr>
+          <p:nvPr/>
+        </p:nvPicPr>
+        <p:blipFill>
+          <a:blip r:embed="rId2"/>
+          <a:stretch>
+            <a:fillRect/>
+          </a:stretch>
+        </p:blipFill>
+        <p:spPr>
+          <a:xfrm>
+            <a:off x="2278856" y="2286000"/>
+            <a:ext cx="7633982" cy="3520440"/>
+          </a:xfrm>
+          <a:prstGeom prst="rect">
+            <a:avLst/>
+          </a:prstGeom>
+        </p:spPr>
+      </p:pic>
+      <p:sp>
+        <p:nvSpPr>
+          <p:cNvPr id="5" name="TextBox 4"/>
+          <p:cNvSpPr txBox="1"/>
+          <p:nvPr/>
+        </p:nvSpPr>
+        <p:spPr>
+          <a:xfrm>
+            <a:off x="685800" y="5888736"/>
+            <a:ext cx="10881360" cy="548640"/>
           </a:xfrm>
           <a:prstGeom prst="rect">
             <a:avLst/>
@@ -3460,7 +3386,7 @@
               </a:spcAft>
             </a:pPr>
             <a:r>
-              <a:rPr sz="800" b="0" i="1">
+              <a:rPr sz="900" b="0" i="1">
                 <a:solidFill>
                   <a:srgbClr val="26251F"/>
                 </a:solidFill>
@@ -3469,18 +3395,34 @@
               <a:t>[1] M. Xhemrishi, J. Östman, A. Wachter-Zeh, and A. Graell i Amat, "FedGT: Identification of malicious clients in federated learning with secure aggregation," IEEE Trans. Inf. Forensics Security, vol. 20, pp. 2577–2592, 2025.</a:t>
             </a:r>
           </a:p>
-        </p:txBody>
-      </p:sp>
-      <p:sp>
-        <p:nvSpPr>
-          <p:cNvPr id="5" name="TextBox 4"/>
-          <p:cNvSpPr txBox="1"/>
-          <p:nvPr/>
-        </p:nvSpPr>
-        <p:spPr>
-          <a:xfrm>
-            <a:off x="11018520" y="6446520"/>
-            <a:ext cx="914400" cy="274320"/>
+          <a:p>
+            <a:pPr>
+              <a:spcAft>
+                <a:spcPts val="100"/>
+              </a:spcAft>
+            </a:pPr>
+            <a:r>
+              <a:rPr sz="900" b="0" i="1">
+                <a:solidFill>
+                  <a:srgbClr val="26251F"/>
+                </a:solidFill>
+                <a:latin typeface="Calibri"/>
+              </a:rPr>
+              <a:t>[2] K. Bonawitz, V. Ivanov, B. Kreuter, A. Marcedone, H. B. McMahan, S. Patel, D. Ramage, A. Segal, and K. Seth, "Practical secure aggregation for privacy-preserving machine learning," in Proc. ACM CCS, 2017, pp. 1175–1191.</a:t>
+            </a:r>
+          </a:p>
+        </p:txBody>
+      </p:sp>
+      <p:sp>
+        <p:nvSpPr>
+          <p:cNvPr id="6" name="TextBox 5"/>
+          <p:cNvSpPr txBox="1"/>
+          <p:nvPr/>
+        </p:nvSpPr>
+        <p:spPr>
+          <a:xfrm>
+            <a:off x="10927080" y="6419088"/>
+            <a:ext cx="1005840" cy="292608"/>
           </a:xfrm>
           <a:prstGeom prst="rect">
             <a:avLst/>
@@ -3495,7 +3437,7 @@
           <a:p>
             <a:pPr algn="r"/>
             <a:r>
-              <a:rPr sz="1050" b="0" i="0">
+              <a:rPr sz="1200" b="0" i="0">
                 <a:solidFill>
                   <a:srgbClr val="898781"/>
                 </a:solidFill>
@@ -3532,28 +3474,28 @@
         </p:nvSpPr>
         <p:spPr>
           <a:xfrm>
-            <a:off x="685800" y="438912"/>
-            <a:ext cx="10881360" cy="822960"/>
-          </a:xfrm>
-          <a:prstGeom prst="rect">
-            <a:avLst/>
-          </a:prstGeom>
-          <a:noFill/>
-        </p:spPr>
-        <p:txBody>
-          <a:bodyPr wrap="square">
-            <a:spAutoFit/>
-          </a:bodyPr>
-          <a:lstStyle/>
-          <a:p>
-            <a:r>
-              <a:rPr sz="3000" b="1" i="0">
+            <a:off x="685800" y="384048"/>
+            <a:ext cx="10881360" cy="868680"/>
+          </a:xfrm>
+          <a:prstGeom prst="rect">
+            <a:avLst/>
+          </a:prstGeom>
+          <a:noFill/>
+        </p:spPr>
+        <p:txBody>
+          <a:bodyPr wrap="square">
+            <a:spAutoFit/>
+          </a:bodyPr>
+          <a:lstStyle/>
+          <a:p>
+            <a:r>
+              <a:rPr sz="3400" b="1" i="0">
                 <a:solidFill>
                   <a:srgbClr val="0B0B0B"/>
                 </a:solidFill>
                 <a:latin typeface="Calibri"/>
               </a:rPr>
-              <a:t>Methodology (Ours): Cryptography</a:t>
+              <a:t>Methodology (Ours): Masking</a:t>
             </a:r>
           </a:p>
         </p:txBody>
@@ -3566,27 +3508,27 @@
         </p:nvSpPr>
         <p:spPr>
           <a:xfrm>
-            <a:off x="685800" y="1371600"/>
-            <a:ext cx="10881360" cy="3931920"/>
-          </a:xfrm>
-          <a:prstGeom prst="rect">
-            <a:avLst/>
-          </a:prstGeom>
-          <a:noFill/>
-        </p:spPr>
-        <p:txBody>
-          <a:bodyPr wrap="square">
-            <a:spAutoFit/>
-          </a:bodyPr>
-          <a:lstStyle/>
-          <a:p>
-            <a:pPr>
-              <a:spcAft>
-                <a:spcPts val="800"/>
-              </a:spcAft>
-            </a:pPr>
-            <a:r>
-              <a:rPr sz="1500">
+            <a:off x="685800" y="1417320"/>
+            <a:ext cx="6400800" cy="4023360"/>
+          </a:xfrm>
+          <a:prstGeom prst="rect">
+            <a:avLst/>
+          </a:prstGeom>
+          <a:noFill/>
+        </p:spPr>
+        <p:txBody>
+          <a:bodyPr wrap="square">
+            <a:spAutoFit/>
+          </a:bodyPr>
+          <a:lstStyle/>
+          <a:p>
+            <a:pPr>
+              <a:spcAft>
+                <a:spcPts val="900"/>
+              </a:spcAft>
+            </a:pPr>
+            <a:r>
+              <a:rPr sz="1800">
                 <a:solidFill>
                   <a:srgbClr val="2A78D6"/>
                 </a:solidFill>
@@ -3595,23 +3537,23 @@
               <a:t>▪  </a:t>
             </a:r>
             <a:r>
-              <a:rPr sz="1500" b="0" i="0">
-                <a:solidFill>
-                  <a:srgbClr val="26251F"/>
-                </a:solidFill>
-                <a:latin typeface="Calibri"/>
-              </a:rPr>
-              <a:t>We adopt HQC, the code-based KEM NIST selected in 2025 [3], for post-quantum confidentiality.</a:t>
-            </a:r>
-          </a:p>
-          <a:p>
-            <a:pPr>
-              <a:spcAft>
-                <a:spcPts val="800"/>
-              </a:spcAft>
-            </a:pPr>
-            <a:r>
-              <a:rPr sz="1500">
+              <a:rPr sz="1800" b="0" i="0">
+                <a:solidFill>
+                  <a:srgbClr val="26251F"/>
+                </a:solidFill>
+                <a:latin typeface="Calibri"/>
+              </a:rPr>
+              <a:t>We adopt Bonawitz-style double masking [2]: pairwise masks cancel in the cluster sum, so individuals stay hidden.</a:t>
+            </a:r>
+          </a:p>
+          <a:p>
+            <a:pPr>
+              <a:spcAft>
+                <a:spcPts val="900"/>
+              </a:spcAft>
+            </a:pPr>
+            <a:r>
+              <a:rPr sz="1800">
                 <a:solidFill>
                   <a:srgbClr val="2A78D6"/>
                 </a:solidFill>
@@ -3620,23 +3562,23 @@
               <a:t>▪  </a:t>
             </a:r>
             <a:r>
-              <a:rPr sz="1500" b="0" i="0">
-                <a:solidFill>
-                  <a:srgbClr val="26251F"/>
-                </a:solidFill>
-                <a:latin typeface="Calibri"/>
-              </a:rPr>
-              <a:t>Its security rests on syndrome decoding of quasi-cyclic codes, not lattices: genuine cryptographic diversity.</a:t>
-            </a:r>
-          </a:p>
-          <a:p>
-            <a:pPr>
-              <a:spcAft>
-                <a:spcPts val="800"/>
-              </a:spcAft>
-            </a:pPr>
-            <a:r>
-              <a:rPr sz="1500">
+              <a:rPr sz="1800" b="0" i="0">
+                <a:solidFill>
+                  <a:srgbClr val="26251F"/>
+                </a:solidFill>
+                <a:latin typeface="Calibri"/>
+              </a:rPr>
+              <a:t>Dropout resilience via Shamir secret sharing of the self-masks.</a:t>
+            </a:r>
+          </a:p>
+          <a:p>
+            <a:pPr>
+              <a:spcAft>
+                <a:spcPts val="900"/>
+              </a:spcAft>
+            </a:pPr>
+            <a:r>
+              <a:rPr sz="1800">
                 <a:solidFill>
                   <a:srgbClr val="2A78D6"/>
                 </a:solidFill>
@@ -3645,27 +3587,51 @@
               <a:t>▪  </a:t>
             </a:r>
             <a:r>
-              <a:rPr sz="1500" b="0" i="0">
-                <a:solidFill>
-                  <a:srgbClr val="26251F"/>
-                </a:solidFill>
-                <a:latin typeface="Calibri"/>
-              </a:rPr>
-              <a:t>Our change: HQC sits behind a KEM-agnostic interface, so ML-KEM [9] swaps in with one configuration line.</a:t>
-            </a:r>
-          </a:p>
-        </p:txBody>
-      </p:sp>
-      <p:sp>
-        <p:nvSpPr>
-          <p:cNvPr id="4" name="TextBox 3"/>
-          <p:cNvSpPr txBox="1"/>
-          <p:nvPr/>
-        </p:nvSpPr>
-        <p:spPr>
-          <a:xfrm>
-            <a:off x="685800" y="5943600"/>
-            <a:ext cx="10881360" cy="502920"/>
+              <a:rPr sz="1800" b="0" i="0">
+                <a:solidFill>
+                  <a:srgbClr val="26251F"/>
+                </a:solidFill>
+                <a:latin typeface="Calibri"/>
+              </a:rPr>
+              <a:t>Our change: masks are seeded from a KEM, so per-round traffic carries no cryptographic bytes at all.</a:t>
+            </a:r>
+          </a:p>
+        </p:txBody>
+      </p:sp>
+      <p:pic>
+        <p:nvPicPr>
+          <p:cNvPr id="4" name="Picture 3" descr="fig_masking.png"/>
+          <p:cNvPicPr>
+            <a:picLocks noChangeAspect="1"/>
+          </p:cNvPicPr>
+          <p:nvPr/>
+        </p:nvPicPr>
+        <p:blipFill>
+          <a:blip r:embed="rId2"/>
+          <a:stretch>
+            <a:fillRect/>
+          </a:stretch>
+        </p:blipFill>
+        <p:spPr>
+          <a:xfrm>
+            <a:off x="7360920" y="1508760"/>
+            <a:ext cx="4434840" cy="3240664"/>
+          </a:xfrm>
+          <a:prstGeom prst="rect">
+            <a:avLst/>
+          </a:prstGeom>
+        </p:spPr>
+      </p:pic>
+      <p:sp>
+        <p:nvSpPr>
+          <p:cNvPr id="5" name="TextBox 4"/>
+          <p:cNvSpPr txBox="1"/>
+          <p:nvPr/>
+        </p:nvSpPr>
+        <p:spPr>
+          <a:xfrm>
+            <a:off x="685800" y="5888736"/>
+            <a:ext cx="10881360" cy="548640"/>
           </a:xfrm>
           <a:prstGeom prst="rect">
             <a:avLst/>
@@ -3684,43 +3650,27 @@
               </a:spcAft>
             </a:pPr>
             <a:r>
-              <a:rPr sz="800" b="0" i="1">
-                <a:solidFill>
-                  <a:srgbClr val="26251F"/>
-                </a:solidFill>
-                <a:latin typeface="Calibri"/>
-              </a:rPr>
-              <a:t>[3] National Institute of Standards and Technology, "Status report on the fourth round of the NIST post-quantum cryptography standardization process," NIST IR 8545, Mar. 2025.</a:t>
-            </a:r>
-          </a:p>
-          <a:p>
-            <a:pPr>
-              <a:spcAft>
-                <a:spcPts val="100"/>
-              </a:spcAft>
-            </a:pPr>
-            <a:r>
-              <a:rPr sz="800" b="0" i="1">
-                <a:solidFill>
-                  <a:srgbClr val="26251F"/>
-                </a:solidFill>
-                <a:latin typeface="Calibri"/>
-              </a:rPr>
-              <a:t>[9] National Institute of Standards and Technology, "Module-lattice-based key-encapsulation mechanism standard," FIPS 203, Aug. 2024.</a:t>
-            </a:r>
-          </a:p>
-        </p:txBody>
-      </p:sp>
-      <p:sp>
-        <p:nvSpPr>
-          <p:cNvPr id="5" name="TextBox 4"/>
-          <p:cNvSpPr txBox="1"/>
-          <p:nvPr/>
-        </p:nvSpPr>
-        <p:spPr>
-          <a:xfrm>
-            <a:off x="11018520" y="6446520"/>
-            <a:ext cx="914400" cy="274320"/>
+              <a:rPr sz="900" b="0" i="1">
+                <a:solidFill>
+                  <a:srgbClr val="26251F"/>
+                </a:solidFill>
+                <a:latin typeface="Calibri"/>
+              </a:rPr>
+              <a:t>[2] K. Bonawitz, V. Ivanov, B. Kreuter, A. Marcedone, H. B. McMahan, S. Patel, D. Ramage, A. Segal, and K. Seth, "Practical secure aggregation for privacy-preserving machine learning," in Proc. ACM CCS, 2017, pp. 1175–1191.</a:t>
+            </a:r>
+          </a:p>
+        </p:txBody>
+      </p:sp>
+      <p:sp>
+        <p:nvSpPr>
+          <p:cNvPr id="6" name="TextBox 5"/>
+          <p:cNvSpPr txBox="1"/>
+          <p:nvPr/>
+        </p:nvSpPr>
+        <p:spPr>
+          <a:xfrm>
+            <a:off x="10927080" y="6419088"/>
+            <a:ext cx="1005840" cy="292608"/>
           </a:xfrm>
           <a:prstGeom prst="rect">
             <a:avLst/>
@@ -3735,7 +3685,7 @@
           <a:p>
             <a:pPr algn="r"/>
             <a:r>
-              <a:rPr sz="1050" b="0" i="0">
+              <a:rPr sz="1200" b="0" i="0">
                 <a:solidFill>
                   <a:srgbClr val="898781"/>
                 </a:solidFill>
@@ -3772,28 +3722,28 @@
         </p:nvSpPr>
         <p:spPr>
           <a:xfrm>
-            <a:off x="685800" y="438912"/>
-            <a:ext cx="10881360" cy="822960"/>
-          </a:xfrm>
-          <a:prstGeom prst="rect">
-            <a:avLst/>
-          </a:prstGeom>
-          <a:noFill/>
-        </p:spPr>
-        <p:txBody>
-          <a:bodyPr wrap="square">
-            <a:spAutoFit/>
-          </a:bodyPr>
-          <a:lstStyle/>
-          <a:p>
-            <a:r>
-              <a:rPr sz="3000" b="1" i="0">
+            <a:off x="685800" y="384048"/>
+            <a:ext cx="10881360" cy="868680"/>
+          </a:xfrm>
+          <a:prstGeom prst="rect">
+            <a:avLst/>
+          </a:prstGeom>
+          <a:noFill/>
+        </p:spPr>
+        <p:txBody>
+          <a:bodyPr wrap="square">
+            <a:spAutoFit/>
+          </a:bodyPr>
+          <a:lstStyle/>
+          <a:p>
+            <a:r>
+              <a:rPr sz="3400" b="1" i="0">
                 <a:solidFill>
                   <a:srgbClr val="0B0B0B"/>
                 </a:solidFill>
                 <a:latin typeface="Calibri"/>
               </a:rPr>
-              <a:t>Methodology (Ours): Integration</a:t>
+              <a:t>Methodology (Ours): Detection</a:t>
             </a:r>
           </a:p>
         </p:txBody>
@@ -3806,28 +3756,92 @@
         </p:nvSpPr>
         <p:spPr>
           <a:xfrm>
-            <a:off x="685800" y="1371600"/>
-            <a:ext cx="10881360" cy="457200"/>
-          </a:xfrm>
-          <a:prstGeom prst="rect">
-            <a:avLst/>
-          </a:prstGeom>
-          <a:noFill/>
-        </p:spPr>
-        <p:txBody>
-          <a:bodyPr wrap="square">
-            <a:spAutoFit/>
-          </a:bodyPr>
-          <a:lstStyle/>
-          <a:p>
-            <a:r>
-              <a:rPr sz="1400" b="0" i="1">
-                <a:solidFill>
-                  <a:srgbClr val="26251F"/>
-                </a:solidFill>
-                <a:latin typeface="Calibri"/>
-              </a:rPr>
-              <a:t>Masking + group testing + a code-based KEM become one coherent framework.</a:t>
+            <a:off x="685800" y="1417320"/>
+            <a:ext cx="10881360" cy="4023360"/>
+          </a:xfrm>
+          <a:prstGeom prst="rect">
+            <a:avLst/>
+          </a:prstGeom>
+          <a:noFill/>
+        </p:spPr>
+        <p:txBody>
+          <a:bodyPr wrap="square">
+            <a:spAutoFit/>
+          </a:bodyPr>
+          <a:lstStyle/>
+          <a:p>
+            <a:pPr>
+              <a:spcAft>
+                <a:spcPts val="900"/>
+              </a:spcAft>
+            </a:pPr>
+            <a:r>
+              <a:rPr sz="1800">
+                <a:solidFill>
+                  <a:srgbClr val="2A78D6"/>
+                </a:solidFill>
+                <a:latin typeface="Calibri"/>
+              </a:rPr>
+              <a:t>▪  </a:t>
+            </a:r>
+            <a:r>
+              <a:rPr sz="1800" b="0" i="0">
+                <a:solidFill>
+                  <a:srgbClr val="26251F"/>
+                </a:solidFill>
+                <a:latin typeface="Calibri"/>
+              </a:rPr>
+              <a:t>We adopt the core idea from FedGT [1]: identify malicious clients from group-level observations, never from individual updates.</a:t>
+            </a:r>
+          </a:p>
+          <a:p>
+            <a:pPr>
+              <a:spcAft>
+                <a:spcPts val="900"/>
+              </a:spcAft>
+            </a:pPr>
+            <a:r>
+              <a:rPr sz="1800">
+                <a:solidFill>
+                  <a:srgbClr val="2A78D6"/>
+                </a:solidFill>
+                <a:latin typeface="Calibri"/>
+              </a:rPr>
+              <a:t>▪  </a:t>
+            </a:r>
+            <a:r>
+              <a:rPr sz="1800" b="0" i="0">
+                <a:solidFill>
+                  <a:srgbClr val="26251F"/>
+                </a:solidFill>
+                <a:latin typeface="Calibri"/>
+              </a:rPr>
+              <a:t>The groups are the privacy-preserving cluster sums (the pools); a probe flags contaminated pools.</a:t>
+            </a:r>
+          </a:p>
+          <a:p>
+            <a:pPr>
+              <a:spcAft>
+                <a:spcPts val="900"/>
+              </a:spcAft>
+            </a:pPr>
+            <a:r>
+              <a:rPr sz="1800">
+                <a:solidFill>
+                  <a:srgbClr val="2A78D6"/>
+                </a:solidFill>
+                <a:latin typeface="Calibri"/>
+              </a:rPr>
+              <a:t>▪  </a:t>
+            </a:r>
+            <a:r>
+              <a:rPr sz="1800" b="0" i="0">
+                <a:solidFill>
+                  <a:srgbClr val="26251F"/>
+                </a:solidFill>
+                <a:latin typeface="Calibri"/>
+              </a:rPr>
+              <a:t>Our change: tests repeat over re-randomized clusters and accumulate across rounds (temporal group testing).</a:t>
             </a:r>
           </a:p>
         </p:txBody>
@@ -3840,117 +3854,33 @@
         </p:nvSpPr>
         <p:spPr>
           <a:xfrm>
-            <a:off x="685800" y="1828800"/>
-            <a:ext cx="10881360" cy="3931920"/>
-          </a:xfrm>
-          <a:prstGeom prst="rect">
-            <a:avLst/>
-          </a:prstGeom>
-          <a:noFill/>
-        </p:spPr>
-        <p:txBody>
-          <a:bodyPr wrap="square">
-            <a:spAutoFit/>
-          </a:bodyPr>
-          <a:lstStyle/>
-          <a:p>
-            <a:pPr>
-              <a:spcAft>
-                <a:spcPts val="800"/>
-              </a:spcAft>
-            </a:pPr>
-            <a:r>
-              <a:rPr sz="1500">
-                <a:solidFill>
-                  <a:srgbClr val="2A78D6"/>
-                </a:solidFill>
-                <a:latin typeface="Calibri"/>
-              </a:rPr>
-              <a:t>▪  </a:t>
-            </a:r>
-            <a:r>
-              <a:rPr sz="1500" b="0" i="0">
-                <a:solidFill>
-                  <a:srgbClr val="26251F"/>
-                </a:solidFill>
-                <a:latin typeface="Calibri"/>
-              </a:rPr>
-              <a:t>HQC-seeded masking [2], [3] hides updates inside clusters, so the server sees only cluster sums.</a:t>
-            </a:r>
-          </a:p>
-          <a:p>
-            <a:pPr>
-              <a:spcAft>
-                <a:spcPts val="800"/>
-              </a:spcAft>
-            </a:pPr>
-            <a:r>
-              <a:rPr sz="1500">
-                <a:solidFill>
-                  <a:srgbClr val="2A78D6"/>
-                </a:solidFill>
-                <a:latin typeface="Calibri"/>
-              </a:rPr>
-              <a:t>▪  </a:t>
-            </a:r>
-            <a:r>
-              <a:rPr sz="1500" b="0" i="0">
-                <a:solidFill>
-                  <a:srgbClr val="26251F"/>
-                </a:solidFill>
-                <a:latin typeface="Calibri"/>
-              </a:rPr>
-              <a:t>Group testing [1] then runs across those cluster sums, over re-randomized rounds, to name the attackers.</a:t>
-            </a:r>
-          </a:p>
-          <a:p>
-            <a:pPr>
-              <a:spcAft>
-                <a:spcPts val="800"/>
-              </a:spcAft>
-            </a:pPr>
-            <a:r>
-              <a:rPr sz="1500">
-                <a:solidFill>
-                  <a:srgbClr val="2A78D6"/>
-                </a:solidFill>
-                <a:latin typeface="Calibri"/>
-              </a:rPr>
-              <a:t>▪  </a:t>
-            </a:r>
-            <a:r>
-              <a:rPr sz="1500" b="0" i="0">
-                <a:solidFill>
-                  <a:srgbClr val="26251F"/>
-                </a:solidFill>
-                <a:latin typeface="Calibri"/>
-              </a:rPr>
-              <a:t>Net design: privacy below the cluster boundary, robustness above it, code-based crypto throughout.</a:t>
-            </a:r>
-          </a:p>
-          <a:p>
-            <a:pPr>
-              <a:spcAft>
-                <a:spcPts val="800"/>
-              </a:spcAft>
-            </a:pPr>
-            <a:r>
-              <a:rPr sz="1500">
-                <a:solidFill>
-                  <a:srgbClr val="2A78D6"/>
-                </a:solidFill>
-                <a:latin typeface="Calibri"/>
-              </a:rPr>
-              <a:t>▪  </a:t>
-            </a:r>
-            <a:r>
-              <a:rPr sz="1500" b="0" i="0">
-                <a:solidFill>
-                  <a:srgbClr val="26251F"/>
-                </a:solidFill>
-                <a:latin typeface="Calibri"/>
-              </a:rPr>
-              <a:t>On top we add our own pieces: the laundering theorem and a server root-loss probe.</a:t>
+            <a:off x="685800" y="5888736"/>
+            <a:ext cx="10881360" cy="548640"/>
+          </a:xfrm>
+          <a:prstGeom prst="rect">
+            <a:avLst/>
+          </a:prstGeom>
+          <a:noFill/>
+        </p:spPr>
+        <p:txBody>
+          <a:bodyPr wrap="square">
+            <a:spAutoFit/>
+          </a:bodyPr>
+          <a:lstStyle/>
+          <a:p>
+            <a:pPr>
+              <a:spcAft>
+                <a:spcPts val="100"/>
+              </a:spcAft>
+            </a:pPr>
+            <a:r>
+              <a:rPr sz="900" b="0" i="1">
+                <a:solidFill>
+                  <a:srgbClr val="26251F"/>
+                </a:solidFill>
+                <a:latin typeface="Calibri"/>
+              </a:rPr>
+              <a:t>[1] M. Xhemrishi, J. Östman, A. Wachter-Zeh, and A. Graell i Amat, "FedGT: Identification of malicious clients in federated learning with secure aggregation," IEEE Trans. Inf. Forensics Security, vol. 20, pp. 2577–2592, 2025.</a:t>
             </a:r>
           </a:p>
         </p:txBody>
@@ -3963,79 +3893,8 @@
         </p:nvSpPr>
         <p:spPr>
           <a:xfrm>
-            <a:off x="685800" y="5943600"/>
-            <a:ext cx="10881360" cy="502920"/>
-          </a:xfrm>
-          <a:prstGeom prst="rect">
-            <a:avLst/>
-          </a:prstGeom>
-          <a:noFill/>
-        </p:spPr>
-        <p:txBody>
-          <a:bodyPr wrap="square">
-            <a:spAutoFit/>
-          </a:bodyPr>
-          <a:lstStyle/>
-          <a:p>
-            <a:pPr>
-              <a:spcAft>
-                <a:spcPts val="100"/>
-              </a:spcAft>
-            </a:pPr>
-            <a:r>
-              <a:rPr sz="800" b="0" i="1">
-                <a:solidFill>
-                  <a:srgbClr val="26251F"/>
-                </a:solidFill>
-                <a:latin typeface="Calibri"/>
-              </a:rPr>
-              <a:t>[1] M. Xhemrishi, J. Östman, A. Wachter-Zeh, and A. Graell i Amat, "FedGT: Identification of malicious clients in federated learning with secure aggregation," IEEE Trans. Inf. Forensics Security, vol. 20, pp. 2577–2592, 2025.</a:t>
-            </a:r>
-          </a:p>
-          <a:p>
-            <a:pPr>
-              <a:spcAft>
-                <a:spcPts val="100"/>
-              </a:spcAft>
-            </a:pPr>
-            <a:r>
-              <a:rPr sz="800" b="0" i="1">
-                <a:solidFill>
-                  <a:srgbClr val="26251F"/>
-                </a:solidFill>
-                <a:latin typeface="Calibri"/>
-              </a:rPr>
-              <a:t>[2] K. Bonawitz, V. Ivanov, B. Kreuter, A. Marcedone, H. B. McMahan, S. Patel, D. Ramage, A. Segal, and K. Seth, "Practical secure aggregation for privacy-preserving machine learning," in Proc. ACM CCS, 2017, pp. 1175–1191.</a:t>
-            </a:r>
-          </a:p>
-          <a:p>
-            <a:pPr>
-              <a:spcAft>
-                <a:spcPts val="100"/>
-              </a:spcAft>
-            </a:pPr>
-            <a:r>
-              <a:rPr sz="800" b="0" i="1">
-                <a:solidFill>
-                  <a:srgbClr val="26251F"/>
-                </a:solidFill>
-                <a:latin typeface="Calibri"/>
-              </a:rPr>
-              <a:t>[3] National Institute of Standards and Technology, "Status report on the fourth round of the NIST post-quantum cryptography standardization process," NIST IR 8545, Mar. 2025.</a:t>
-            </a:r>
-          </a:p>
-        </p:txBody>
-      </p:sp>
-      <p:sp>
-        <p:nvSpPr>
-          <p:cNvPr id="6" name="TextBox 5"/>
-          <p:cNvSpPr txBox="1"/>
-          <p:nvPr/>
-        </p:nvSpPr>
-        <p:spPr>
-          <a:xfrm>
-            <a:off x="11018520" y="6446520"/>
-            <a:ext cx="914400" cy="274320"/>
+            <a:off x="10927080" y="6419088"/>
+            <a:ext cx="1005840" cy="292608"/>
           </a:xfrm>
           <a:prstGeom prst="rect">
             <a:avLst/>
@@ -4050,7 +3909,7 @@
           <a:p>
             <a:pPr algn="r"/>
             <a:r>
-              <a:rPr sz="1050" b="0" i="0">
+              <a:rPr sz="1200" b="0" i="0">
                 <a:solidFill>
                   <a:srgbClr val="898781"/>
                 </a:solidFill>
@@ -4087,28 +3946,28 @@
         </p:nvSpPr>
         <p:spPr>
           <a:xfrm>
-            <a:off x="685800" y="438912"/>
-            <a:ext cx="10881360" cy="822960"/>
-          </a:xfrm>
-          <a:prstGeom prst="rect">
-            <a:avLst/>
-          </a:prstGeom>
-          <a:noFill/>
-        </p:spPr>
-        <p:txBody>
-          <a:bodyPr wrap="square">
-            <a:spAutoFit/>
-          </a:bodyPr>
-          <a:lstStyle/>
-          <a:p>
-            <a:r>
-              <a:rPr sz="3000" b="1" i="0">
+            <a:off x="685800" y="384048"/>
+            <a:ext cx="10881360" cy="868680"/>
+          </a:xfrm>
+          <a:prstGeom prst="rect">
+            <a:avLst/>
+          </a:prstGeom>
+          <a:noFill/>
+        </p:spPr>
+        <p:txBody>
+          <a:bodyPr wrap="square">
+            <a:spAutoFit/>
+          </a:bodyPr>
+          <a:lstStyle/>
+          <a:p>
+            <a:r>
+              <a:rPr sz="3400" b="1" i="0">
                 <a:solidFill>
                   <a:srgbClr val="0B0B0B"/>
                 </a:solidFill>
                 <a:latin typeface="Calibri"/>
               </a:rPr>
-              <a:t>Comparison</a:t>
+              <a:t>Methodology (Ours): Cryptography</a:t>
             </a:r>
           </a:p>
         </p:txBody>
@@ -4121,27 +3980,27 @@
         </p:nvSpPr>
         <p:spPr>
           <a:xfrm>
-            <a:off x="685800" y="1371600"/>
-            <a:ext cx="6400800" cy="3931920"/>
-          </a:xfrm>
-          <a:prstGeom prst="rect">
-            <a:avLst/>
-          </a:prstGeom>
-          <a:noFill/>
-        </p:spPr>
-        <p:txBody>
-          <a:bodyPr wrap="square">
-            <a:spAutoFit/>
-          </a:bodyPr>
-          <a:lstStyle/>
-          <a:p>
-            <a:pPr>
-              <a:spcAft>
-                <a:spcPts val="800"/>
-              </a:spcAft>
-            </a:pPr>
-            <a:r>
-              <a:rPr sz="1500">
+            <a:off x="685800" y="1417320"/>
+            <a:ext cx="10881360" cy="4023360"/>
+          </a:xfrm>
+          <a:prstGeom prst="rect">
+            <a:avLst/>
+          </a:prstGeom>
+          <a:noFill/>
+        </p:spPr>
+        <p:txBody>
+          <a:bodyPr wrap="square">
+            <a:spAutoFit/>
+          </a:bodyPr>
+          <a:lstStyle/>
+          <a:p>
+            <a:pPr>
+              <a:spcAft>
+                <a:spcPts val="900"/>
+              </a:spcAft>
+            </a:pPr>
+            <a:r>
+              <a:rPr sz="1800">
                 <a:solidFill>
                   <a:srgbClr val="2A78D6"/>
                 </a:solidFill>
@@ -4150,41 +4009,23 @@
               <a:t>▪  </a:t>
             </a:r>
             <a:r>
-              <a:rPr sz="1500" b="0" i="0">
-                <a:solidFill>
-                  <a:srgbClr val="26251F"/>
-                </a:solidFill>
-                <a:latin typeface="Calibri"/>
-              </a:rPr>
-              <a:t>Crypto: FedGT [1] is crypto-agnostic → </a:t>
-            </a:r>
-            <a:r>
-              <a:rPr sz="1500" b="1" i="0">
-                <a:solidFill>
-                  <a:srgbClr val="0B0B0B"/>
-                </a:solidFill>
-                <a:latin typeface="Calibri"/>
-              </a:rPr>
-              <a:t>CB-SAFE is code-based post-quantum</a:t>
-            </a:r>
-            <a:r>
-              <a:rPr sz="1500" b="0" i="0">
-                <a:solidFill>
-                  <a:srgbClr val="26251F"/>
-                </a:solidFill>
-                <a:latin typeface="Calibri"/>
-              </a:rPr>
-              <a:t>.</a:t>
-            </a:r>
-          </a:p>
-          <a:p>
-            <a:pPr>
-              <a:spcAft>
-                <a:spcPts val="800"/>
-              </a:spcAft>
-            </a:pPr>
-            <a:r>
-              <a:rPr sz="1500">
+              <a:rPr sz="1800" b="0" i="0">
+                <a:solidFill>
+                  <a:srgbClr val="26251F"/>
+                </a:solidFill>
+                <a:latin typeface="Calibri"/>
+              </a:rPr>
+              <a:t>We adopt HQC, the code-based KEM NIST selected in 2025 [3], for post-quantum confidentiality.</a:t>
+            </a:r>
+          </a:p>
+          <a:p>
+            <a:pPr>
+              <a:spcAft>
+                <a:spcPts val="900"/>
+              </a:spcAft>
+            </a:pPr>
+            <a:r>
+              <a:rPr sz="1800">
                 <a:solidFill>
                   <a:srgbClr val="2A78D6"/>
                 </a:solidFill>
@@ -4193,41 +4034,23 @@
               <a:t>▪  </a:t>
             </a:r>
             <a:r>
-              <a:rPr sz="1500" b="0" i="0">
-                <a:solidFill>
-                  <a:srgbClr val="26251F"/>
-                </a:solidFill>
-                <a:latin typeface="Calibri"/>
-              </a:rPr>
-              <a:t>Detection: FedGT uses single-round COMP + a validation set → </a:t>
-            </a:r>
-            <a:r>
-              <a:rPr sz="1500" b="1" i="0">
-                <a:solidFill>
-                  <a:srgbClr val="0B0B0B"/>
-                </a:solidFill>
-                <a:latin typeface="Calibri"/>
-              </a:rPr>
-              <a:t>CB-SAFE uses temporal accumulation + a root-loss probe</a:t>
-            </a:r>
-            <a:r>
-              <a:rPr sz="1500" b="0" i="0">
-                <a:solidFill>
-                  <a:srgbClr val="26251F"/>
-                </a:solidFill>
-                <a:latin typeface="Calibri"/>
-              </a:rPr>
-              <a:t>.</a:t>
-            </a:r>
-          </a:p>
-          <a:p>
-            <a:pPr>
-              <a:spcAft>
-                <a:spcPts val="800"/>
-              </a:spcAft>
-            </a:pPr>
-            <a:r>
-              <a:rPr sz="1500">
+              <a:rPr sz="1800" b="0" i="0">
+                <a:solidFill>
+                  <a:srgbClr val="26251F"/>
+                </a:solidFill>
+                <a:latin typeface="Calibri"/>
+              </a:rPr>
+              <a:t>Its security rests on syndrome decoding of quasi-cyclic codes, not lattices: genuine cryptographic diversity.</a:t>
+            </a:r>
+          </a:p>
+          <a:p>
+            <a:pPr>
+              <a:spcAft>
+                <a:spcPts val="900"/>
+              </a:spcAft>
+            </a:pPr>
+            <a:r>
+              <a:rPr sz="1800">
                 <a:solidFill>
                   <a:srgbClr val="2A78D6"/>
                 </a:solidFill>
@@ -4236,102 +4059,72 @@
               <a:t>▪  </a:t>
             </a:r>
             <a:r>
-              <a:rPr sz="1500" b="0" i="0">
-                <a:solidFill>
-                  <a:srgbClr val="26251F"/>
-                </a:solidFill>
-                <a:latin typeface="Calibri"/>
-              </a:rPr>
-              <a:t>Theory: FedGT gives no failure model → </a:t>
-            </a:r>
-            <a:r>
-              <a:rPr sz="1500" b="1" i="0">
-                <a:solidFill>
-                  <a:srgbClr val="0B0B0B"/>
-                </a:solidFill>
-                <a:latin typeface="Calibri"/>
-              </a:rPr>
-              <a:t>CB-SAFE proves the laundering boundary</a:t>
-            </a:r>
-            <a:r>
-              <a:rPr sz="1500" b="0" i="0">
-                <a:solidFill>
-                  <a:srgbClr val="26251F"/>
-                </a:solidFill>
-                <a:latin typeface="Calibri"/>
-              </a:rPr>
-              <a:t>.</a:t>
-            </a:r>
-          </a:p>
-          <a:p>
-            <a:pPr>
-              <a:spcAft>
-                <a:spcPts val="800"/>
-              </a:spcAft>
-            </a:pPr>
-            <a:r>
-              <a:rPr sz="1500">
-                <a:solidFill>
-                  <a:srgbClr val="2A78D6"/>
-                </a:solidFill>
-                <a:latin typeface="Calibri"/>
-              </a:rPr>
-              <a:t>▪  </a:t>
-            </a:r>
-            <a:r>
-              <a:rPr sz="1500" b="0" i="0">
-                <a:solidFill>
-                  <a:srgbClr val="26251F"/>
-                </a:solidFill>
-                <a:latin typeface="Calibri"/>
-              </a:rPr>
-              <a:t>Results: accuracy ties FedGT with </a:t>
-            </a:r>
-            <a:r>
-              <a:rPr sz="1500" b="1" i="0">
-                <a:solidFill>
-                  <a:srgbClr val="0B0B0B"/>
-                </a:solidFill>
-                <a:latin typeface="Calibri"/>
-              </a:rPr>
-              <a:t>fewer false exclusions and ~4× lower cost</a:t>
-            </a:r>
-            <a:r>
-              <a:rPr sz="1500" b="0" i="0">
-                <a:solidFill>
-                  <a:srgbClr val="26251F"/>
-                </a:solidFill>
-                <a:latin typeface="Calibri"/>
-              </a:rPr>
-              <a:t>.</a:t>
-            </a:r>
-          </a:p>
-        </p:txBody>
-      </p:sp>
-      <p:pic>
-        <p:nvPicPr>
-          <p:cNvPr id="4" name="Picture 3" descr="fig_signflip_acc_slide.png"/>
-          <p:cNvPicPr>
-            <a:picLocks noChangeAspect="1"/>
-          </p:cNvPicPr>
-          <p:nvPr/>
-        </p:nvPicPr>
-        <p:blipFill>
-          <a:blip r:embed="rId2"/>
-          <a:stretch>
-            <a:fillRect/>
-          </a:stretch>
-        </p:blipFill>
-        <p:spPr>
-          <a:xfrm>
-            <a:off x="7315200" y="1463040"/>
-            <a:ext cx="4480560" cy="3669013"/>
-          </a:xfrm>
-          <a:prstGeom prst="rect">
-            <a:avLst/>
-          </a:prstGeom>
-        </p:spPr>
-      </p:pic>
+              <a:rPr sz="1800" b="0" i="0">
+                <a:solidFill>
+                  <a:srgbClr val="26251F"/>
+                </a:solidFill>
+                <a:latin typeface="Calibri"/>
+              </a:rPr>
+              <a:t>Our change: HQC sits behind a KEM-agnostic interface, so ML-KEM [9] swaps in with one configuration line.</a:t>
+            </a:r>
+          </a:p>
+        </p:txBody>
+      </p:sp>
+      <p:sp>
+        <p:nvSpPr>
+          <p:cNvPr id="4" name="TextBox 3"/>
+          <p:cNvSpPr txBox="1"/>
+          <p:nvPr/>
+        </p:nvSpPr>
+        <p:spPr>
+          <a:xfrm>
+            <a:off x="685800" y="5888736"/>
+            <a:ext cx="10881360" cy="548640"/>
+          </a:xfrm>
+          <a:prstGeom prst="rect">
+            <a:avLst/>
+          </a:prstGeom>
+          <a:noFill/>
+        </p:spPr>
+        <p:txBody>
+          <a:bodyPr wrap="square">
+            <a:spAutoFit/>
+          </a:bodyPr>
+          <a:lstStyle/>
+          <a:p>
+            <a:pPr>
+              <a:spcAft>
+                <a:spcPts val="100"/>
+              </a:spcAft>
+            </a:pPr>
+            <a:r>
+              <a:rPr sz="900" b="0" i="1">
+                <a:solidFill>
+                  <a:srgbClr val="26251F"/>
+                </a:solidFill>
+                <a:latin typeface="Calibri"/>
+              </a:rPr>
+              <a:t>[3] National Institute of Standards and Technology, "Status report on the fourth round of the NIST post-quantum cryptography standardization process," NIST IR 8545, Mar. 2025.</a:t>
+            </a:r>
+          </a:p>
+          <a:p>
+            <a:pPr>
+              <a:spcAft>
+                <a:spcPts val="100"/>
+              </a:spcAft>
+            </a:pPr>
+            <a:r>
+              <a:rPr sz="900" b="0" i="1">
+                <a:solidFill>
+                  <a:srgbClr val="26251F"/>
+                </a:solidFill>
+                <a:latin typeface="Calibri"/>
+              </a:rPr>
+              <a:t>[9] National Institute of Standards and Technology, "Module-lattice-based key-encapsulation mechanism standard," FIPS 203, Aug. 2024.</a:t>
+            </a:r>
+          </a:p>
+        </p:txBody>
+      </p:sp>
       <p:sp>
         <p:nvSpPr>
           <p:cNvPr id="5" name="TextBox 4"/>
@@ -4340,47 +4133,8 @@
         </p:nvSpPr>
         <p:spPr>
           <a:xfrm>
-            <a:off x="685800" y="5943600"/>
-            <a:ext cx="10881360" cy="502920"/>
-          </a:xfrm>
-          <a:prstGeom prst="rect">
-            <a:avLst/>
-          </a:prstGeom>
-          <a:noFill/>
-        </p:spPr>
-        <p:txBody>
-          <a:bodyPr wrap="square">
-            <a:spAutoFit/>
-          </a:bodyPr>
-          <a:lstStyle/>
-          <a:p>
-            <a:pPr>
-              <a:spcAft>
-                <a:spcPts val="100"/>
-              </a:spcAft>
-            </a:pPr>
-            <a:r>
-              <a:rPr sz="800" b="0" i="1">
-                <a:solidFill>
-                  <a:srgbClr val="26251F"/>
-                </a:solidFill>
-                <a:latin typeface="Calibri"/>
-              </a:rPr>
-              <a:t>[1] M. Xhemrishi, J. Östman, A. Wachter-Zeh, and A. Graell i Amat, "FedGT: Identification of malicious clients in federated learning with secure aggregation," IEEE Trans. Inf. Forensics Security, vol. 20, pp. 2577–2592, 2025.</a:t>
-            </a:r>
-          </a:p>
-        </p:txBody>
-      </p:sp>
-      <p:sp>
-        <p:nvSpPr>
-          <p:cNvPr id="6" name="TextBox 5"/>
-          <p:cNvSpPr txBox="1"/>
-          <p:nvPr/>
-        </p:nvSpPr>
-        <p:spPr>
-          <a:xfrm>
-            <a:off x="11018520" y="6446520"/>
-            <a:ext cx="914400" cy="274320"/>
+            <a:off x="10927080" y="6419088"/>
+            <a:ext cx="1005840" cy="292608"/>
           </a:xfrm>
           <a:prstGeom prst="rect">
             <a:avLst/>
@@ -4395,7 +4149,7 @@
           <a:p>
             <a:pPr algn="r"/>
             <a:r>
-              <a:rPr sz="1050" b="0" i="0">
+              <a:rPr sz="1200" b="0" i="0">
                 <a:solidFill>
                   <a:srgbClr val="898781"/>
                 </a:solidFill>
@@ -4432,28 +4186,28 @@
         </p:nvSpPr>
         <p:spPr>
           <a:xfrm>
-            <a:off x="685800" y="438912"/>
-            <a:ext cx="10881360" cy="822960"/>
-          </a:xfrm>
-          <a:prstGeom prst="rect">
-            <a:avLst/>
-          </a:prstGeom>
-          <a:noFill/>
-        </p:spPr>
-        <p:txBody>
-          <a:bodyPr wrap="square">
-            <a:spAutoFit/>
-          </a:bodyPr>
-          <a:lstStyle/>
-          <a:p>
-            <a:r>
-              <a:rPr sz="3000" b="1" i="0">
+            <a:off x="685800" y="384048"/>
+            <a:ext cx="10881360" cy="868680"/>
+          </a:xfrm>
+          <a:prstGeom prst="rect">
+            <a:avLst/>
+          </a:prstGeom>
+          <a:noFill/>
+        </p:spPr>
+        <p:txBody>
+          <a:bodyPr wrap="square">
+            <a:spAutoFit/>
+          </a:bodyPr>
+          <a:lstStyle/>
+          <a:p>
+            <a:r>
+              <a:rPr sz="3400" b="1" i="0">
                 <a:solidFill>
                   <a:srgbClr val="0B0B0B"/>
                 </a:solidFill>
                 <a:latin typeface="Calibri"/>
               </a:rPr>
-              <a:t>Contributions</a:t>
+              <a:t>Methodology (Ours): Integration</a:t>
             </a:r>
           </a:p>
         </p:txBody>
@@ -4466,27 +4220,61 @@
         </p:nvSpPr>
         <p:spPr>
           <a:xfrm>
-            <a:off x="685800" y="1371600"/>
-            <a:ext cx="6400800" cy="3931920"/>
-          </a:xfrm>
-          <a:prstGeom prst="rect">
-            <a:avLst/>
-          </a:prstGeom>
-          <a:noFill/>
-        </p:spPr>
-        <p:txBody>
-          <a:bodyPr wrap="square">
-            <a:spAutoFit/>
-          </a:bodyPr>
-          <a:lstStyle/>
-          <a:p>
-            <a:pPr>
-              <a:spcAft>
-                <a:spcPts val="800"/>
-              </a:spcAft>
-            </a:pPr>
-            <a:r>
-              <a:rPr sz="1500">
+            <a:off x="685800" y="1417320"/>
+            <a:ext cx="10881360" cy="548640"/>
+          </a:xfrm>
+          <a:prstGeom prst="rect">
+            <a:avLst/>
+          </a:prstGeom>
+          <a:noFill/>
+        </p:spPr>
+        <p:txBody>
+          <a:bodyPr wrap="square">
+            <a:spAutoFit/>
+          </a:bodyPr>
+          <a:lstStyle/>
+          <a:p>
+            <a:r>
+              <a:rPr sz="1600" b="0" i="1">
+                <a:solidFill>
+                  <a:srgbClr val="26251F"/>
+                </a:solidFill>
+                <a:latin typeface="Calibri"/>
+              </a:rPr>
+              <a:t>Masking + group testing + a code-based KEM become one coherent framework.</a:t>
+            </a:r>
+          </a:p>
+        </p:txBody>
+      </p:sp>
+      <p:sp>
+        <p:nvSpPr>
+          <p:cNvPr id="4" name="TextBox 3"/>
+          <p:cNvSpPr txBox="1"/>
+          <p:nvPr/>
+        </p:nvSpPr>
+        <p:spPr>
+          <a:xfrm>
+            <a:off x="685800" y="1947672"/>
+            <a:ext cx="10881360" cy="4023360"/>
+          </a:xfrm>
+          <a:prstGeom prst="rect">
+            <a:avLst/>
+          </a:prstGeom>
+          <a:noFill/>
+        </p:spPr>
+        <p:txBody>
+          <a:bodyPr wrap="square">
+            <a:spAutoFit/>
+          </a:bodyPr>
+          <a:lstStyle/>
+          <a:p>
+            <a:pPr>
+              <a:spcAft>
+                <a:spcPts val="900"/>
+              </a:spcAft>
+            </a:pPr>
+            <a:r>
+              <a:rPr sz="1800">
                 <a:solidFill>
                   <a:srgbClr val="2A78D6"/>
                 </a:solidFill>
@@ -4495,32 +4283,23 @@
               <a:t>▪  </a:t>
             </a:r>
             <a:r>
-              <a:rPr sz="1500" b="1" i="0">
-                <a:solidFill>
-                  <a:srgbClr val="0B0B0B"/>
-                </a:solidFill>
-                <a:latin typeface="Calibri"/>
-              </a:rPr>
-              <a:t>First code-based post-quantum secure aggregation</a:t>
-            </a:r>
-            <a:r>
-              <a:rPr sz="1500" b="0" i="0">
-                <a:solidFill>
-                  <a:srgbClr val="26251F"/>
-                </a:solidFill>
-                <a:latin typeface="Calibri"/>
-              </a:rPr>
-              <a:t> for FL: cryptographic diversity beyond lattices.</a:t>
-            </a:r>
-          </a:p>
-          <a:p>
-            <a:pPr>
-              <a:spcAft>
-                <a:spcPts val="800"/>
-              </a:spcAft>
-            </a:pPr>
-            <a:r>
-              <a:rPr sz="1500">
+              <a:rPr sz="1800" b="0" i="0">
+                <a:solidFill>
+                  <a:srgbClr val="26251F"/>
+                </a:solidFill>
+                <a:latin typeface="Calibri"/>
+              </a:rPr>
+              <a:t>HQC-seeded masking [2], [3] hides updates inside clusters, so the server sees only cluster sums.</a:t>
+            </a:r>
+          </a:p>
+          <a:p>
+            <a:pPr>
+              <a:spcAft>
+                <a:spcPts val="900"/>
+              </a:spcAft>
+            </a:pPr>
+            <a:r>
+              <a:rPr sz="1800">
                 <a:solidFill>
                   <a:srgbClr val="2A78D6"/>
                 </a:solidFill>
@@ -4529,41 +4308,23 @@
               <a:t>▪  </a:t>
             </a:r>
             <a:r>
-              <a:rPr sz="1500" b="0" i="0">
-                <a:solidFill>
-                  <a:srgbClr val="26251F"/>
-                </a:solidFill>
-                <a:latin typeface="Calibri"/>
-              </a:rPr>
-              <a:t>The </a:t>
-            </a:r>
-            <a:r>
-              <a:rPr sz="1500" b="1" i="0">
-                <a:solidFill>
-                  <a:srgbClr val="0B0B0B"/>
-                </a:solidFill>
-                <a:latin typeface="Calibri"/>
-              </a:rPr>
-              <a:t>laundering theorem</a:t>
-            </a:r>
-            <a:r>
-              <a:rPr sz="1500" b="0" i="0">
-                <a:solidFill>
-                  <a:srgbClr val="26251F"/>
-                </a:solidFill>
-                <a:latin typeface="Calibri"/>
-              </a:rPr>
-              <a:t>: at γ*=2c/m−1 a poisoned cluster mean is magnitude-invisible, explaining why robust rules fail.</a:t>
-            </a:r>
-          </a:p>
-          <a:p>
-            <a:pPr>
-              <a:spcAft>
-                <a:spcPts val="800"/>
-              </a:spcAft>
-            </a:pPr>
-            <a:r>
-              <a:rPr sz="1500">
+              <a:rPr sz="1800" b="0" i="0">
+                <a:solidFill>
+                  <a:srgbClr val="26251F"/>
+                </a:solidFill>
+                <a:latin typeface="Calibri"/>
+              </a:rPr>
+              <a:t>Group testing [1] then runs across those cluster sums, over re-randomized rounds, to name the attackers.</a:t>
+            </a:r>
+          </a:p>
+          <a:p>
+            <a:pPr>
+              <a:spcAft>
+                <a:spcPts val="900"/>
+              </a:spcAft>
+            </a:pPr>
+            <a:r>
+              <a:rPr sz="1800">
                 <a:solidFill>
                   <a:srgbClr val="2A78D6"/>
                 </a:solidFill>
@@ -4572,32 +4333,23 @@
               <a:t>▪  </a:t>
             </a:r>
             <a:r>
-              <a:rPr sz="1500" b="1" i="0">
-                <a:solidFill>
-                  <a:srgbClr val="0B0B0B"/>
-                </a:solidFill>
-                <a:latin typeface="Calibri"/>
-              </a:rPr>
-              <a:t>Temporal group testing</a:t>
-            </a:r>
-            <a:r>
-              <a:rPr sz="1500" b="0" i="0">
-                <a:solidFill>
-                  <a:srgbClr val="26251F"/>
-                </a:solidFill>
-                <a:latin typeface="Calibri"/>
-              </a:rPr>
-              <a:t> over re-randomized clusters (extending FedGT [1]) with a root-loss probe [5]: identifies attackers the server never sees.</a:t>
-            </a:r>
-          </a:p>
-          <a:p>
-            <a:pPr>
-              <a:spcAft>
-                <a:spcPts val="800"/>
-              </a:spcAft>
-            </a:pPr>
-            <a:r>
-              <a:rPr sz="1500">
+              <a:rPr sz="1800" b="0" i="0">
+                <a:solidFill>
+                  <a:srgbClr val="26251F"/>
+                </a:solidFill>
+                <a:latin typeface="Calibri"/>
+              </a:rPr>
+              <a:t>Net design: privacy below the cluster boundary, robustness above it, code-based crypto throughout.</a:t>
+            </a:r>
+          </a:p>
+          <a:p>
+            <a:pPr>
+              <a:spcAft>
+                <a:spcPts val="900"/>
+              </a:spcAft>
+            </a:pPr>
+            <a:r>
+              <a:rPr sz="1800">
                 <a:solidFill>
                   <a:srgbClr val="2A78D6"/>
                 </a:solidFill>
@@ -4606,59 +4358,17 @@
               <a:t>▪  </a:t>
             </a:r>
             <a:r>
-              <a:rPr sz="1500" b="0" i="0">
-                <a:solidFill>
-                  <a:srgbClr val="26251F"/>
-                </a:solidFill>
-                <a:latin typeface="Calibri"/>
-              </a:rPr>
-              <a:t>A </a:t>
-            </a:r>
-            <a:r>
-              <a:rPr sz="1500" b="1" i="0">
-                <a:solidFill>
-                  <a:srgbClr val="0B0B0B"/>
-                </a:solidFill>
-                <a:latin typeface="Calibri"/>
-              </a:rPr>
-              <a:t>trust-free variant</a:t>
-            </a:r>
-            <a:r>
-              <a:rPr sz="1500" b="0" i="0">
-                <a:solidFill>
-                  <a:srgbClr val="26251F"/>
-                </a:solidFill>
-                <a:latin typeface="Calibri"/>
-              </a:rPr>
-              <a:t> that needs no root dataset, a capability FedGT does not offer.</a:t>
-            </a:r>
-          </a:p>
-        </p:txBody>
-      </p:sp>
-      <p:pic>
-        <p:nvPicPr>
-          <p:cNvPr id="4" name="Picture 3" descr="fig_launder_geo.png"/>
-          <p:cNvPicPr>
-            <a:picLocks noChangeAspect="1"/>
-          </p:cNvPicPr>
-          <p:nvPr/>
-        </p:nvPicPr>
-        <p:blipFill>
-          <a:blip r:embed="rId2"/>
-          <a:stretch>
-            <a:fillRect/>
-          </a:stretch>
-        </p:blipFill>
-        <p:spPr>
-          <a:xfrm>
-            <a:off x="7315200" y="1463040"/>
-            <a:ext cx="4480560" cy="3312414"/>
-          </a:xfrm>
-          <a:prstGeom prst="rect">
-            <a:avLst/>
-          </a:prstGeom>
-        </p:spPr>
-      </p:pic>
+              <a:rPr sz="1800" b="0" i="0">
+                <a:solidFill>
+                  <a:srgbClr val="26251F"/>
+                </a:solidFill>
+                <a:latin typeface="Calibri"/>
+              </a:rPr>
+              <a:t>On top we add our own pieces: the laundering theorem and a server root-loss probe.</a:t>
+            </a:r>
+          </a:p>
+        </p:txBody>
+      </p:sp>
       <p:sp>
         <p:nvSpPr>
           <p:cNvPr id="5" name="TextBox 4"/>
@@ -4667,8 +4377,8 @@
         </p:nvSpPr>
         <p:spPr>
           <a:xfrm>
-            <a:off x="685800" y="5943600"/>
-            <a:ext cx="10881360" cy="502920"/>
+            <a:off x="685800" y="5888736"/>
+            <a:ext cx="10881360" cy="548640"/>
           </a:xfrm>
           <a:prstGeom prst="rect">
             <a:avLst/>
@@ -4687,7 +4397,7 @@
               </a:spcAft>
             </a:pPr>
             <a:r>
-              <a:rPr sz="800" b="0" i="1">
+              <a:rPr sz="900" b="0" i="1">
                 <a:solidFill>
                   <a:srgbClr val="26251F"/>
                 </a:solidFill>
@@ -4703,13 +4413,29 @@
               </a:spcAft>
             </a:pPr>
             <a:r>
-              <a:rPr sz="800" b="0" i="1">
-                <a:solidFill>
-                  <a:srgbClr val="26251F"/>
-                </a:solidFill>
-                <a:latin typeface="Calibri"/>
-              </a:rPr>
-              <a:t>[5] X. Cao, M. Fang, J. Liu, and N. Z. Gong, "FLTrust: Byzantine-robust federated learning via trust bootstrapping," in Proc. NDSS, 2021.</a:t>
+              <a:rPr sz="900" b="0" i="1">
+                <a:solidFill>
+                  <a:srgbClr val="26251F"/>
+                </a:solidFill>
+                <a:latin typeface="Calibri"/>
+              </a:rPr>
+              <a:t>[2] K. Bonawitz, V. Ivanov, B. Kreuter, A. Marcedone, H. B. McMahan, S. Patel, D. Ramage, A. Segal, and K. Seth, "Practical secure aggregation for privacy-preserving machine learning," in Proc. ACM CCS, 2017, pp. 1175–1191.</a:t>
+            </a:r>
+          </a:p>
+          <a:p>
+            <a:pPr>
+              <a:spcAft>
+                <a:spcPts val="100"/>
+              </a:spcAft>
+            </a:pPr>
+            <a:r>
+              <a:rPr sz="900" b="0" i="1">
+                <a:solidFill>
+                  <a:srgbClr val="26251F"/>
+                </a:solidFill>
+                <a:latin typeface="Calibri"/>
+              </a:rPr>
+              <a:t>[3] National Institute of Standards and Technology, "Status report on the fourth round of the NIST post-quantum cryptography standardization process," NIST IR 8545, Mar. 2025.</a:t>
             </a:r>
           </a:p>
         </p:txBody>
@@ -4722,8 +4448,8 @@
         </p:nvSpPr>
         <p:spPr>
           <a:xfrm>
-            <a:off x="11018520" y="6446520"/>
-            <a:ext cx="914400" cy="274320"/>
+            <a:off x="10927080" y="6419088"/>
+            <a:ext cx="1005840" cy="292608"/>
           </a:xfrm>
           <a:prstGeom prst="rect">
             <a:avLst/>
@@ -4738,7 +4464,7 @@
           <a:p>
             <a:pPr algn="r"/>
             <a:r>
-              <a:rPr sz="1050" b="0" i="0">
+              <a:rPr sz="1200" b="0" i="0">
                 <a:solidFill>
                   <a:srgbClr val="898781"/>
                 </a:solidFill>
@@ -4775,28 +4501,28 @@
         </p:nvSpPr>
         <p:spPr>
           <a:xfrm>
-            <a:off x="685800" y="438912"/>
-            <a:ext cx="10881360" cy="822960"/>
-          </a:xfrm>
-          <a:prstGeom prst="rect">
-            <a:avLst/>
-          </a:prstGeom>
-          <a:noFill/>
-        </p:spPr>
-        <p:txBody>
-          <a:bodyPr wrap="square">
-            <a:spAutoFit/>
-          </a:bodyPr>
-          <a:lstStyle/>
-          <a:p>
-            <a:r>
-              <a:rPr sz="3000" b="1" i="0">
+            <a:off x="685800" y="384048"/>
+            <a:ext cx="10881360" cy="868680"/>
+          </a:xfrm>
+          <a:prstGeom prst="rect">
+            <a:avLst/>
+          </a:prstGeom>
+          <a:noFill/>
+        </p:spPr>
+        <p:txBody>
+          <a:bodyPr wrap="square">
+            <a:spAutoFit/>
+          </a:bodyPr>
+          <a:lstStyle/>
+          <a:p>
+            <a:r>
+              <a:rPr sz="3400" b="1" i="0">
                 <a:solidFill>
                   <a:srgbClr val="0B0B0B"/>
                 </a:solidFill>
                 <a:latin typeface="Calibri"/>
               </a:rPr>
-              <a:t>Selection Criteria</a:t>
+              <a:t>Comparison</a:t>
             </a:r>
           </a:p>
         </p:txBody>
@@ -4809,27 +4535,27 @@
         </p:nvSpPr>
         <p:spPr>
           <a:xfrm>
-            <a:off x="685800" y="1371600"/>
-            <a:ext cx="10881360" cy="3931920"/>
-          </a:xfrm>
-          <a:prstGeom prst="rect">
-            <a:avLst/>
-          </a:prstGeom>
-          <a:noFill/>
-        </p:spPr>
-        <p:txBody>
-          <a:bodyPr wrap="square">
-            <a:spAutoFit/>
-          </a:bodyPr>
-          <a:lstStyle/>
-          <a:p>
-            <a:pPr>
-              <a:spcAft>
-                <a:spcPts val="800"/>
-              </a:spcAft>
-            </a:pPr>
-            <a:r>
-              <a:rPr sz="1500">
+            <a:off x="685800" y="1417320"/>
+            <a:ext cx="6400800" cy="4023360"/>
+          </a:xfrm>
+          <a:prstGeom prst="rect">
+            <a:avLst/>
+          </a:prstGeom>
+          <a:noFill/>
+        </p:spPr>
+        <p:txBody>
+          <a:bodyPr wrap="square">
+            <a:spAutoFit/>
+          </a:bodyPr>
+          <a:lstStyle/>
+          <a:p>
+            <a:pPr>
+              <a:spcAft>
+                <a:spcPts val="900"/>
+              </a:spcAft>
+            </a:pPr>
+            <a:r>
+              <a:rPr sz="1800">
                 <a:solidFill>
                   <a:srgbClr val="2A78D6"/>
                 </a:solidFill>
@@ -4838,23 +4564,41 @@
               <a:t>▪  </a:t>
             </a:r>
             <a:r>
-              <a:rPr sz="1500" b="0" i="0">
-                <a:solidFill>
-                  <a:srgbClr val="26251F"/>
-                </a:solidFill>
-                <a:latin typeface="Calibri"/>
-              </a:rPr>
-              <a:t>Venue and recency: the basis paper [1] is Q1 (IEEE TIFS), 2025; supporting sources are top-tier (ACM CCS [2], NIST [3]).</a:t>
-            </a:r>
-          </a:p>
-          <a:p>
-            <a:pPr>
-              <a:spcAft>
-                <a:spcPts val="800"/>
-              </a:spcAft>
-            </a:pPr>
-            <a:r>
-              <a:rPr sz="1500">
+              <a:rPr sz="1800" b="0" i="0">
+                <a:solidFill>
+                  <a:srgbClr val="26251F"/>
+                </a:solidFill>
+                <a:latin typeface="Calibri"/>
+              </a:rPr>
+              <a:t>Crypto: FedGT [1] is crypto-agnostic → </a:t>
+            </a:r>
+            <a:r>
+              <a:rPr sz="1800" b="1" i="0">
+                <a:solidFill>
+                  <a:srgbClr val="0B0B0B"/>
+                </a:solidFill>
+                <a:latin typeface="Calibri"/>
+              </a:rPr>
+              <a:t>CB-SAFE is code-based post-quantum</a:t>
+            </a:r>
+            <a:r>
+              <a:rPr sz="1800" b="0" i="0">
+                <a:solidFill>
+                  <a:srgbClr val="26251F"/>
+                </a:solidFill>
+                <a:latin typeface="Calibri"/>
+              </a:rPr>
+              <a:t>.</a:t>
+            </a:r>
+          </a:p>
+          <a:p>
+            <a:pPr>
+              <a:spcAft>
+                <a:spcPts val="900"/>
+              </a:spcAft>
+            </a:pPr>
+            <a:r>
+              <a:rPr sz="1800">
                 <a:solidFill>
                   <a:srgbClr val="2A78D6"/>
                 </a:solidFill>
@@ -4863,23 +4607,41 @@
               <a:t>▪  </a:t>
             </a:r>
             <a:r>
-              <a:rPr sz="1500" b="0" i="0">
-                <a:solidFill>
-                  <a:srgbClr val="26251F"/>
-                </a:solidFill>
-                <a:latin typeface="Calibri"/>
-              </a:rPr>
-              <a:t>Relevance: every borrowed idea maps directly onto a component of our exact problem.</a:t>
-            </a:r>
-          </a:p>
-          <a:p>
-            <a:pPr>
-              <a:spcAft>
-                <a:spcPts val="800"/>
-              </a:spcAft>
-            </a:pPr>
-            <a:r>
-              <a:rPr sz="1500">
+              <a:rPr sz="1800" b="0" i="0">
+                <a:solidFill>
+                  <a:srgbClr val="26251F"/>
+                </a:solidFill>
+                <a:latin typeface="Calibri"/>
+              </a:rPr>
+              <a:t>Detection: FedGT uses single-round COMP + a validation set → </a:t>
+            </a:r>
+            <a:r>
+              <a:rPr sz="1800" b="1" i="0">
+                <a:solidFill>
+                  <a:srgbClr val="0B0B0B"/>
+                </a:solidFill>
+                <a:latin typeface="Calibri"/>
+              </a:rPr>
+              <a:t>CB-SAFE uses temporal accumulation + a root-loss probe</a:t>
+            </a:r>
+            <a:r>
+              <a:rPr sz="1800" b="0" i="0">
+                <a:solidFill>
+                  <a:srgbClr val="26251F"/>
+                </a:solidFill>
+                <a:latin typeface="Calibri"/>
+              </a:rPr>
+              <a:t>.</a:t>
+            </a:r>
+          </a:p>
+          <a:p>
+            <a:pPr>
+              <a:spcAft>
+                <a:spcPts val="900"/>
+              </a:spcAft>
+            </a:pPr>
+            <a:r>
+              <a:rPr sz="1800">
                 <a:solidFill>
                   <a:srgbClr val="2A78D6"/>
                 </a:solidFill>
@@ -4888,23 +4650,41 @@
               <a:t>▪  </a:t>
             </a:r>
             <a:r>
-              <a:rPr sz="1500" b="0" i="0">
-                <a:solidFill>
-                  <a:srgbClr val="26251F"/>
-                </a:solidFill>
-                <a:latin typeface="Calibri"/>
-              </a:rPr>
-              <a:t>Method strength: we match SOTA (FedGT) on robustness at ~4× lower cost, add PQC, and prove the failure mechanism.</a:t>
-            </a:r>
-          </a:p>
-          <a:p>
-            <a:pPr>
-              <a:spcAft>
-                <a:spcPts val="800"/>
-              </a:spcAft>
-            </a:pPr>
-            <a:r>
-              <a:rPr sz="1500">
+              <a:rPr sz="1800" b="0" i="0">
+                <a:solidFill>
+                  <a:srgbClr val="26251F"/>
+                </a:solidFill>
+                <a:latin typeface="Calibri"/>
+              </a:rPr>
+              <a:t>Theory: FedGT gives no failure model → </a:t>
+            </a:r>
+            <a:r>
+              <a:rPr sz="1800" b="1" i="0">
+                <a:solidFill>
+                  <a:srgbClr val="0B0B0B"/>
+                </a:solidFill>
+                <a:latin typeface="Calibri"/>
+              </a:rPr>
+              <a:t>CB-SAFE proves the laundering boundary</a:t>
+            </a:r>
+            <a:r>
+              <a:rPr sz="1800" b="0" i="0">
+                <a:solidFill>
+                  <a:srgbClr val="26251F"/>
+                </a:solidFill>
+                <a:latin typeface="Calibri"/>
+              </a:rPr>
+              <a:t>.</a:t>
+            </a:r>
+          </a:p>
+          <a:p>
+            <a:pPr>
+              <a:spcAft>
+                <a:spcPts val="900"/>
+              </a:spcAft>
+            </a:pPr>
+            <a:r>
+              <a:rPr sz="1800">
                 <a:solidFill>
                   <a:srgbClr val="2A78D6"/>
                 </a:solidFill>
@@ -4913,27 +4693,69 @@
               <a:t>▪  </a:t>
             </a:r>
             <a:r>
-              <a:rPr sz="1500" b="0" i="0">
-                <a:solidFill>
-                  <a:srgbClr val="26251F"/>
-                </a:solidFill>
-                <a:latin typeface="Calibri"/>
-              </a:rPr>
-              <a:t>Breadth and rigor: validated on four datasets and two modalities, multiple seeds, with significance testing.</a:t>
-            </a:r>
-          </a:p>
-        </p:txBody>
-      </p:sp>
-      <p:sp>
-        <p:nvSpPr>
-          <p:cNvPr id="4" name="TextBox 3"/>
-          <p:cNvSpPr txBox="1"/>
-          <p:nvPr/>
-        </p:nvSpPr>
-        <p:spPr>
-          <a:xfrm>
-            <a:off x="685800" y="5943600"/>
-            <a:ext cx="10881360" cy="502920"/>
+              <a:rPr sz="1800" b="0" i="0">
+                <a:solidFill>
+                  <a:srgbClr val="26251F"/>
+                </a:solidFill>
+                <a:latin typeface="Calibri"/>
+              </a:rPr>
+              <a:t>Results: accuracy ties FedGT with </a:t>
+            </a:r>
+            <a:r>
+              <a:rPr sz="1800" b="1" i="0">
+                <a:solidFill>
+                  <a:srgbClr val="0B0B0B"/>
+                </a:solidFill>
+                <a:latin typeface="Calibri"/>
+              </a:rPr>
+              <a:t>fewer false exclusions and ~4× lower cost</a:t>
+            </a:r>
+            <a:r>
+              <a:rPr sz="1800" b="0" i="0">
+                <a:solidFill>
+                  <a:srgbClr val="26251F"/>
+                </a:solidFill>
+                <a:latin typeface="Calibri"/>
+              </a:rPr>
+              <a:t>.</a:t>
+            </a:r>
+          </a:p>
+        </p:txBody>
+      </p:sp>
+      <p:pic>
+        <p:nvPicPr>
+          <p:cNvPr id="4" name="Picture 3" descr="fig_signflip_acc_slide.png"/>
+          <p:cNvPicPr>
+            <a:picLocks noChangeAspect="1"/>
+          </p:cNvPicPr>
+          <p:nvPr/>
+        </p:nvPicPr>
+        <p:blipFill>
+          <a:blip r:embed="rId2"/>
+          <a:stretch>
+            <a:fillRect/>
+          </a:stretch>
+        </p:blipFill>
+        <p:spPr>
+          <a:xfrm>
+            <a:off x="7360920" y="1508760"/>
+            <a:ext cx="4434840" cy="3631574"/>
+          </a:xfrm>
+          <a:prstGeom prst="rect">
+            <a:avLst/>
+          </a:prstGeom>
+        </p:spPr>
+      </p:pic>
+      <p:sp>
+        <p:nvSpPr>
+          <p:cNvPr id="5" name="TextBox 4"/>
+          <p:cNvSpPr txBox="1"/>
+          <p:nvPr/>
+        </p:nvSpPr>
+        <p:spPr>
+          <a:xfrm>
+            <a:off x="685800" y="5888736"/>
+            <a:ext cx="10881360" cy="548640"/>
           </a:xfrm>
           <a:prstGeom prst="rect">
             <a:avLst/>
@@ -4952,7 +4774,7 @@
               </a:spcAft>
             </a:pPr>
             <a:r>
-              <a:rPr sz="800" b="0" i="1">
+              <a:rPr sz="900" b="0" i="1">
                 <a:solidFill>
                   <a:srgbClr val="26251F"/>
                 </a:solidFill>
@@ -4961,50 +4783,18 @@
               <a:t>[1] M. Xhemrishi, J. Östman, A. Wachter-Zeh, and A. Graell i Amat, "FedGT: Identification of malicious clients in federated learning with secure aggregation," IEEE Trans. Inf. Forensics Security, vol. 20, pp. 2577–2592, 2025.</a:t>
             </a:r>
           </a:p>
-          <a:p>
-            <a:pPr>
-              <a:spcAft>
-                <a:spcPts val="100"/>
-              </a:spcAft>
-            </a:pPr>
-            <a:r>
-              <a:rPr sz="800" b="0" i="1">
-                <a:solidFill>
-                  <a:srgbClr val="26251F"/>
-                </a:solidFill>
-                <a:latin typeface="Calibri"/>
-              </a:rPr>
-              <a:t>[2] K. Bonawitz, V. Ivanov, B. Kreuter, A. Marcedone, H. B. McMahan, S. Patel, D. Ramage, A. Segal, and K. Seth, "Practical secure aggregation for privacy-preserving machine learning," in Proc. ACM CCS, 2017, pp. 1175–1191.</a:t>
-            </a:r>
-          </a:p>
-          <a:p>
-            <a:pPr>
-              <a:spcAft>
-                <a:spcPts val="100"/>
-              </a:spcAft>
-            </a:pPr>
-            <a:r>
-              <a:rPr sz="800" b="0" i="1">
-                <a:solidFill>
-                  <a:srgbClr val="26251F"/>
-                </a:solidFill>
-                <a:latin typeface="Calibri"/>
-              </a:rPr>
-              <a:t>[3] National Institute of Standards and Technology, "Status report on the fourth round of the NIST post-quantum cryptography standardization process," NIST IR 8545, Mar. 2025.</a:t>
-            </a:r>
-          </a:p>
-        </p:txBody>
-      </p:sp>
-      <p:sp>
-        <p:nvSpPr>
-          <p:cNvPr id="5" name="TextBox 4"/>
-          <p:cNvSpPr txBox="1"/>
-          <p:nvPr/>
-        </p:nvSpPr>
-        <p:spPr>
-          <a:xfrm>
-            <a:off x="11018520" y="6446520"/>
-            <a:ext cx="914400" cy="274320"/>
+        </p:txBody>
+      </p:sp>
+      <p:sp>
+        <p:nvSpPr>
+          <p:cNvPr id="6" name="TextBox 5"/>
+          <p:cNvSpPr txBox="1"/>
+          <p:nvPr/>
+        </p:nvSpPr>
+        <p:spPr>
+          <a:xfrm>
+            <a:off x="10927080" y="6419088"/>
+            <a:ext cx="1005840" cy="292608"/>
           </a:xfrm>
           <a:prstGeom prst="rect">
             <a:avLst/>
@@ -5019,7 +4809,7 @@
           <a:p>
             <a:pPr algn="r"/>
             <a:r>
-              <a:rPr sz="1050" b="0" i="0">
+              <a:rPr sz="1200" b="0" i="0">
                 <a:solidFill>
                   <a:srgbClr val="898781"/>
                 </a:solidFill>
@@ -5056,28 +4846,28 @@
         </p:nvSpPr>
         <p:spPr>
           <a:xfrm>
-            <a:off x="685800" y="438912"/>
-            <a:ext cx="10881360" cy="822960"/>
-          </a:xfrm>
-          <a:prstGeom prst="rect">
-            <a:avLst/>
-          </a:prstGeom>
-          <a:noFill/>
-        </p:spPr>
-        <p:txBody>
-          <a:bodyPr wrap="square">
-            <a:spAutoFit/>
-          </a:bodyPr>
-          <a:lstStyle/>
-          <a:p>
-            <a:r>
-              <a:rPr sz="3000" b="1" i="0">
+            <a:off x="685800" y="384048"/>
+            <a:ext cx="10881360" cy="868680"/>
+          </a:xfrm>
+          <a:prstGeom prst="rect">
+            <a:avLst/>
+          </a:prstGeom>
+          <a:noFill/>
+        </p:spPr>
+        <p:txBody>
+          <a:bodyPr wrap="square">
+            <a:spAutoFit/>
+          </a:bodyPr>
+          <a:lstStyle/>
+          <a:p>
+            <a:r>
+              <a:rPr sz="3400" b="1" i="0">
                 <a:solidFill>
                   <a:srgbClr val="0B0B0B"/>
                 </a:solidFill>
                 <a:latin typeface="Calibri"/>
               </a:rPr>
-              <a:t>Summary</a:t>
+              <a:t>Contributions</a:t>
             </a:r>
           </a:p>
         </p:txBody>
@@ -5090,61 +4880,27 @@
         </p:nvSpPr>
         <p:spPr>
           <a:xfrm>
-            <a:off x="685800" y="1371600"/>
-            <a:ext cx="10881360" cy="457200"/>
-          </a:xfrm>
-          <a:prstGeom prst="rect">
-            <a:avLst/>
-          </a:prstGeom>
-          <a:noFill/>
-        </p:spPr>
-        <p:txBody>
-          <a:bodyPr wrap="square">
-            <a:spAutoFit/>
-          </a:bodyPr>
-          <a:lstStyle/>
-          <a:p>
-            <a:r>
-              <a:rPr sz="1400" b="0" i="1">
-                <a:solidFill>
-                  <a:srgbClr val="26251F"/>
-                </a:solidFill>
-                <a:latin typeface="Calibri"/>
-              </a:rPr>
-              <a:t>End of the required method presentation. Slides 16–22 present the full paper and results.</a:t>
-            </a:r>
-          </a:p>
-        </p:txBody>
-      </p:sp>
-      <p:sp>
-        <p:nvSpPr>
-          <p:cNvPr id="4" name="TextBox 3"/>
-          <p:cNvSpPr txBox="1"/>
-          <p:nvPr/>
-        </p:nvSpPr>
-        <p:spPr>
-          <a:xfrm>
-            <a:off x="685800" y="1828800"/>
-            <a:ext cx="10881360" cy="3931920"/>
-          </a:xfrm>
-          <a:prstGeom prst="rect">
-            <a:avLst/>
-          </a:prstGeom>
-          <a:noFill/>
-        </p:spPr>
-        <p:txBody>
-          <a:bodyPr wrap="square">
-            <a:spAutoFit/>
-          </a:bodyPr>
-          <a:lstStyle/>
-          <a:p>
-            <a:pPr>
-              <a:spcAft>
-                <a:spcPts val="800"/>
-              </a:spcAft>
-            </a:pPr>
-            <a:r>
-              <a:rPr sz="1500">
+            <a:off x="685800" y="1417320"/>
+            <a:ext cx="6400800" cy="4023360"/>
+          </a:xfrm>
+          <a:prstGeom prst="rect">
+            <a:avLst/>
+          </a:prstGeom>
+          <a:noFill/>
+        </p:spPr>
+        <p:txBody>
+          <a:bodyPr wrap="square">
+            <a:spAutoFit/>
+          </a:bodyPr>
+          <a:lstStyle/>
+          <a:p>
+            <a:pPr>
+              <a:spcAft>
+                <a:spcPts val="900"/>
+              </a:spcAft>
+            </a:pPr>
+            <a:r>
+              <a:rPr sz="1800">
                 <a:solidFill>
                   <a:srgbClr val="2A78D6"/>
                 </a:solidFill>
@@ -5153,23 +4909,32 @@
               <a:t>▪  </a:t>
             </a:r>
             <a:r>
-              <a:rPr sz="1500" b="0" i="0">
-                <a:solidFill>
-                  <a:srgbClr val="26251F"/>
-                </a:solidFill>
-                <a:latin typeface="Calibri"/>
-              </a:rPr>
-              <a:t>Took: masking [2], group testing [1], and a code-based KEM [3].</a:t>
-            </a:r>
-          </a:p>
-          <a:p>
-            <a:pPr>
-              <a:spcAft>
-                <a:spcPts val="800"/>
-              </a:spcAft>
-            </a:pPr>
-            <a:r>
-              <a:rPr sz="1500">
+              <a:rPr sz="1800" b="1" i="0">
+                <a:solidFill>
+                  <a:srgbClr val="0B0B0B"/>
+                </a:solidFill>
+                <a:latin typeface="Calibri"/>
+              </a:rPr>
+              <a:t>First code-based post-quantum secure aggregation</a:t>
+            </a:r>
+            <a:r>
+              <a:rPr sz="1800" b="0" i="0">
+                <a:solidFill>
+                  <a:srgbClr val="26251F"/>
+                </a:solidFill>
+                <a:latin typeface="Calibri"/>
+              </a:rPr>
+              <a:t> for FL: cryptographic diversity beyond lattices.</a:t>
+            </a:r>
+          </a:p>
+          <a:p>
+            <a:pPr>
+              <a:spcAft>
+                <a:spcPts val="900"/>
+              </a:spcAft>
+            </a:pPr>
+            <a:r>
+              <a:rPr sz="1800">
                 <a:solidFill>
                   <a:srgbClr val="2A78D6"/>
                 </a:solidFill>
@@ -5178,23 +4943,41 @@
               <a:t>▪  </a:t>
             </a:r>
             <a:r>
-              <a:rPr sz="1500" b="0" i="0">
-                <a:solidFill>
-                  <a:srgbClr val="26251F"/>
-                </a:solidFill>
-                <a:latin typeface="Calibri"/>
-              </a:rPr>
-              <a:t>Changed: temporal group testing over re-randomized clusters; HQC-seeded, KEM-agnostic masking.</a:t>
-            </a:r>
-          </a:p>
-          <a:p>
-            <a:pPr>
-              <a:spcAft>
-                <a:spcPts val="800"/>
-              </a:spcAft>
-            </a:pPr>
-            <a:r>
-              <a:rPr sz="1500">
+              <a:rPr sz="1800" b="0" i="0">
+                <a:solidFill>
+                  <a:srgbClr val="26251F"/>
+                </a:solidFill>
+                <a:latin typeface="Calibri"/>
+              </a:rPr>
+              <a:t>The </a:t>
+            </a:r>
+            <a:r>
+              <a:rPr sz="1800" b="1" i="0">
+                <a:solidFill>
+                  <a:srgbClr val="0B0B0B"/>
+                </a:solidFill>
+                <a:latin typeface="Calibri"/>
+              </a:rPr>
+              <a:t>laundering theorem</a:t>
+            </a:r>
+            <a:r>
+              <a:rPr sz="1800" b="0" i="0">
+                <a:solidFill>
+                  <a:srgbClr val="26251F"/>
+                </a:solidFill>
+                <a:latin typeface="Calibri"/>
+              </a:rPr>
+              <a:t>: at γ*=2c/m−1 a poisoned cluster mean is magnitude-invisible, explaining why robust rules fail.</a:t>
+            </a:r>
+          </a:p>
+          <a:p>
+            <a:pPr>
+              <a:spcAft>
+                <a:spcPts val="900"/>
+              </a:spcAft>
+            </a:pPr>
+            <a:r>
+              <a:rPr sz="1800">
                 <a:solidFill>
                   <a:srgbClr val="2A78D6"/>
                 </a:solidFill>
@@ -5203,23 +4986,32 @@
               <a:t>▪  </a:t>
             </a:r>
             <a:r>
-              <a:rPr sz="1500" b="0" i="0">
-                <a:solidFill>
-                  <a:srgbClr val="26251F"/>
-                </a:solidFill>
-                <a:latin typeface="Calibri"/>
-              </a:rPr>
-              <a:t>New: the laundering theorem, the first code-based PQ secure aggregation, and trust-free detection.</a:t>
-            </a:r>
-          </a:p>
-          <a:p>
-            <a:pPr>
-              <a:spcAft>
-                <a:spcPts val="800"/>
-              </a:spcAft>
-            </a:pPr>
-            <a:r>
-              <a:rPr sz="1500">
+              <a:rPr sz="1800" b="1" i="0">
+                <a:solidFill>
+                  <a:srgbClr val="0B0B0B"/>
+                </a:solidFill>
+                <a:latin typeface="Calibri"/>
+              </a:rPr>
+              <a:t>Temporal group testing</a:t>
+            </a:r>
+            <a:r>
+              <a:rPr sz="1800" b="0" i="0">
+                <a:solidFill>
+                  <a:srgbClr val="26251F"/>
+                </a:solidFill>
+                <a:latin typeface="Calibri"/>
+              </a:rPr>
+              <a:t> over re-randomized clusters (extending FedGT [1]) with a root-loss probe [5]: identifies attackers the server never sees.</a:t>
+            </a:r>
+          </a:p>
+          <a:p>
+            <a:pPr>
+              <a:spcAft>
+                <a:spcPts val="900"/>
+              </a:spcAft>
+            </a:pPr>
+            <a:r>
+              <a:rPr sz="1800">
                 <a:solidFill>
                   <a:srgbClr val="2A78D6"/>
                 </a:solidFill>
@@ -5228,17 +5020,59 @@
               <a:t>▪  </a:t>
             </a:r>
             <a:r>
-              <a:rPr sz="1500" b="0" i="0">
-                <a:solidFill>
-                  <a:srgbClr val="26251F"/>
-                </a:solidFill>
-                <a:latin typeface="Calibri"/>
-              </a:rPr>
-              <a:t>Payoff: private, post-quantum, and Byzantine-robust FL that ties the state of the art at lower cost.</a:t>
-            </a:r>
-          </a:p>
-        </p:txBody>
-      </p:sp>
+              <a:rPr sz="1800" b="0" i="0">
+                <a:solidFill>
+                  <a:srgbClr val="26251F"/>
+                </a:solidFill>
+                <a:latin typeface="Calibri"/>
+              </a:rPr>
+              <a:t>A </a:t>
+            </a:r>
+            <a:r>
+              <a:rPr sz="1800" b="1" i="0">
+                <a:solidFill>
+                  <a:srgbClr val="0B0B0B"/>
+                </a:solidFill>
+                <a:latin typeface="Calibri"/>
+              </a:rPr>
+              <a:t>trust-free variant</a:t>
+            </a:r>
+            <a:r>
+              <a:rPr sz="1800" b="0" i="0">
+                <a:solidFill>
+                  <a:srgbClr val="26251F"/>
+                </a:solidFill>
+                <a:latin typeface="Calibri"/>
+              </a:rPr>
+              <a:t> that needs no root dataset, a capability FedGT does not offer.</a:t>
+            </a:r>
+          </a:p>
+        </p:txBody>
+      </p:sp>
+      <p:pic>
+        <p:nvPicPr>
+          <p:cNvPr id="4" name="Picture 3" descr="fig_launder_geo.png"/>
+          <p:cNvPicPr>
+            <a:picLocks noChangeAspect="1"/>
+          </p:cNvPicPr>
+          <p:nvPr/>
+        </p:nvPicPr>
+        <p:blipFill>
+          <a:blip r:embed="rId2"/>
+          <a:stretch>
+            <a:fillRect/>
+          </a:stretch>
+        </p:blipFill>
+        <p:spPr>
+          <a:xfrm>
+            <a:off x="7360920" y="1508760"/>
+            <a:ext cx="4434840" cy="3278614"/>
+          </a:xfrm>
+          <a:prstGeom prst="rect">
+            <a:avLst/>
+          </a:prstGeom>
+        </p:spPr>
+      </p:pic>
       <p:sp>
         <p:nvSpPr>
           <p:cNvPr id="5" name="TextBox 4"/>
@@ -5247,8 +5081,8 @@
         </p:nvSpPr>
         <p:spPr>
           <a:xfrm>
-            <a:off x="685800" y="5943600"/>
-            <a:ext cx="10881360" cy="502920"/>
+            <a:off x="685800" y="5888736"/>
+            <a:ext cx="10881360" cy="548640"/>
           </a:xfrm>
           <a:prstGeom prst="rect">
             <a:avLst/>
@@ -5267,7 +5101,7 @@
               </a:spcAft>
             </a:pPr>
             <a:r>
-              <a:rPr sz="800" b="0" i="1">
+              <a:rPr sz="900" b="0" i="1">
                 <a:solidFill>
                   <a:srgbClr val="26251F"/>
                 </a:solidFill>
@@ -5283,29 +5117,13 @@
               </a:spcAft>
             </a:pPr>
             <a:r>
-              <a:rPr sz="800" b="0" i="1">
-                <a:solidFill>
-                  <a:srgbClr val="26251F"/>
-                </a:solidFill>
-                <a:latin typeface="Calibri"/>
-              </a:rPr>
-              <a:t>[2] K. Bonawitz, V. Ivanov, B. Kreuter, A. Marcedone, H. B. McMahan, S. Patel, D. Ramage, A. Segal, and K. Seth, "Practical secure aggregation for privacy-preserving machine learning," in Proc. ACM CCS, 2017, pp. 1175–1191.</a:t>
-            </a:r>
-          </a:p>
-          <a:p>
-            <a:pPr>
-              <a:spcAft>
-                <a:spcPts val="100"/>
-              </a:spcAft>
-            </a:pPr>
-            <a:r>
-              <a:rPr sz="800" b="0" i="1">
-                <a:solidFill>
-                  <a:srgbClr val="26251F"/>
-                </a:solidFill>
-                <a:latin typeface="Calibri"/>
-              </a:rPr>
-              <a:t>[3] National Institute of Standards and Technology, "Status report on the fourth round of the NIST post-quantum cryptography standardization process," NIST IR 8545, Mar. 2025.</a:t>
+              <a:rPr sz="900" b="0" i="1">
+                <a:solidFill>
+                  <a:srgbClr val="26251F"/>
+                </a:solidFill>
+                <a:latin typeface="Calibri"/>
+              </a:rPr>
+              <a:t>[5] X. Cao, M. Fang, J. Liu, and N. Z. Gong, "FLTrust: Byzantine-robust federated learning via trust bootstrapping," in Proc. NDSS, 2021.</a:t>
             </a:r>
           </a:p>
         </p:txBody>
@@ -5318,8 +5136,8 @@
         </p:nvSpPr>
         <p:spPr>
           <a:xfrm>
-            <a:off x="11018520" y="6446520"/>
-            <a:ext cx="914400" cy="274320"/>
+            <a:off x="10927080" y="6419088"/>
+            <a:ext cx="1005840" cy="292608"/>
           </a:xfrm>
           <a:prstGeom prst="rect">
             <a:avLst/>
@@ -5334,7 +5152,7 @@
           <a:p>
             <a:pPr algn="r"/>
             <a:r>
-              <a:rPr sz="1050" b="0" i="0">
+              <a:rPr sz="1200" b="0" i="0">
                 <a:solidFill>
                   <a:srgbClr val="898781"/>
                 </a:solidFill>
@@ -5371,28 +5189,28 @@
         </p:nvSpPr>
         <p:spPr>
           <a:xfrm>
-            <a:off x="685800" y="438912"/>
-            <a:ext cx="10881360" cy="822960"/>
-          </a:xfrm>
-          <a:prstGeom prst="rect">
-            <a:avLst/>
-          </a:prstGeom>
-          <a:noFill/>
-        </p:spPr>
-        <p:txBody>
-          <a:bodyPr wrap="square">
-            <a:spAutoFit/>
-          </a:bodyPr>
-          <a:lstStyle/>
-          <a:p>
-            <a:r>
-              <a:rPr sz="3000" b="1" i="0">
+            <a:off x="685800" y="384048"/>
+            <a:ext cx="10881360" cy="868680"/>
+          </a:xfrm>
+          <a:prstGeom prst="rect">
+            <a:avLst/>
+          </a:prstGeom>
+          <a:noFill/>
+        </p:spPr>
+        <p:txBody>
+          <a:bodyPr wrap="square">
+            <a:spAutoFit/>
+          </a:bodyPr>
+          <a:lstStyle/>
+          <a:p>
+            <a:r>
+              <a:rPr sz="3400" b="1" i="0">
                 <a:solidFill>
                   <a:srgbClr val="0B0B0B"/>
                 </a:solidFill>
                 <a:latin typeface="Calibri"/>
               </a:rPr>
-              <a:t>System Architecture</a:t>
+              <a:t>Summary</a:t>
             </a:r>
           </a:p>
         </p:txBody>
@@ -5405,56 +5223,155 @@
         </p:nvSpPr>
         <p:spPr>
           <a:xfrm>
-            <a:off x="685800" y="1371600"/>
-            <a:ext cx="10881360" cy="457200"/>
-          </a:xfrm>
-          <a:prstGeom prst="rect">
-            <a:avLst/>
-          </a:prstGeom>
-          <a:noFill/>
-        </p:spPr>
-        <p:txBody>
-          <a:bodyPr wrap="square">
-            <a:spAutoFit/>
-          </a:bodyPr>
-          <a:lstStyle/>
-          <a:p>
-            <a:r>
-              <a:rPr sz="1400" b="0" i="1">
-                <a:solidFill>
-                  <a:srgbClr val="26251F"/>
-                </a:solidFill>
-                <a:latin typeface="Calibri"/>
-              </a:rPr>
-              <a:t>One training round: confidentiality within clusters [2], temporal group testing over re-randomized clusters [1], robust aggregation.</a:t>
-            </a:r>
-          </a:p>
-        </p:txBody>
-      </p:sp>
-      <p:pic>
-        <p:nvPicPr>
-          <p:cNvPr id="4" name="Picture 3" descr="fig_architecture.png"/>
-          <p:cNvPicPr>
-            <a:picLocks noChangeAspect="1"/>
-          </p:cNvPicPr>
-          <p:nvPr/>
-        </p:nvPicPr>
-        <p:blipFill>
-          <a:blip r:embed="rId2"/>
-          <a:stretch>
-            <a:fillRect/>
-          </a:stretch>
-        </p:blipFill>
-        <p:spPr>
-          <a:xfrm>
-            <a:off x="2179714" y="2240280"/>
-            <a:ext cx="7832267" cy="3611880"/>
-          </a:xfrm>
-          <a:prstGeom prst="rect">
-            <a:avLst/>
-          </a:prstGeom>
-        </p:spPr>
-      </p:pic>
+            <a:off x="685800" y="1417320"/>
+            <a:ext cx="10881360" cy="548640"/>
+          </a:xfrm>
+          <a:prstGeom prst="rect">
+            <a:avLst/>
+          </a:prstGeom>
+          <a:noFill/>
+        </p:spPr>
+        <p:txBody>
+          <a:bodyPr wrap="square">
+            <a:spAutoFit/>
+          </a:bodyPr>
+          <a:lstStyle/>
+          <a:p>
+            <a:r>
+              <a:rPr sz="1600" b="0" i="1">
+                <a:solidFill>
+                  <a:srgbClr val="26251F"/>
+                </a:solidFill>
+                <a:latin typeface="Calibri"/>
+              </a:rPr>
+              <a:t>End of the method presentation; the full-paper results and figures follow.</a:t>
+            </a:r>
+          </a:p>
+        </p:txBody>
+      </p:sp>
+      <p:sp>
+        <p:nvSpPr>
+          <p:cNvPr id="4" name="TextBox 3"/>
+          <p:cNvSpPr txBox="1"/>
+          <p:nvPr/>
+        </p:nvSpPr>
+        <p:spPr>
+          <a:xfrm>
+            <a:off x="685800" y="1947672"/>
+            <a:ext cx="10881360" cy="4023360"/>
+          </a:xfrm>
+          <a:prstGeom prst="rect">
+            <a:avLst/>
+          </a:prstGeom>
+          <a:noFill/>
+        </p:spPr>
+        <p:txBody>
+          <a:bodyPr wrap="square">
+            <a:spAutoFit/>
+          </a:bodyPr>
+          <a:lstStyle/>
+          <a:p>
+            <a:pPr>
+              <a:spcAft>
+                <a:spcPts val="900"/>
+              </a:spcAft>
+            </a:pPr>
+            <a:r>
+              <a:rPr sz="1800">
+                <a:solidFill>
+                  <a:srgbClr val="2A78D6"/>
+                </a:solidFill>
+                <a:latin typeface="Calibri"/>
+              </a:rPr>
+              <a:t>▪  </a:t>
+            </a:r>
+            <a:r>
+              <a:rPr sz="1800" b="0" i="0">
+                <a:solidFill>
+                  <a:srgbClr val="26251F"/>
+                </a:solidFill>
+                <a:latin typeface="Calibri"/>
+              </a:rPr>
+              <a:t>Took: masking [2], group testing [1], and a code-based KEM [3].</a:t>
+            </a:r>
+          </a:p>
+          <a:p>
+            <a:pPr>
+              <a:spcAft>
+                <a:spcPts val="900"/>
+              </a:spcAft>
+            </a:pPr>
+            <a:r>
+              <a:rPr sz="1800">
+                <a:solidFill>
+                  <a:srgbClr val="2A78D6"/>
+                </a:solidFill>
+                <a:latin typeface="Calibri"/>
+              </a:rPr>
+              <a:t>▪  </a:t>
+            </a:r>
+            <a:r>
+              <a:rPr sz="1800" b="0" i="0">
+                <a:solidFill>
+                  <a:srgbClr val="26251F"/>
+                </a:solidFill>
+                <a:latin typeface="Calibri"/>
+              </a:rPr>
+              <a:t>Changed: temporal group testing over re-randomized clusters; HQC-seeded, KEM-agnostic masking.</a:t>
+            </a:r>
+          </a:p>
+          <a:p>
+            <a:pPr>
+              <a:spcAft>
+                <a:spcPts val="900"/>
+              </a:spcAft>
+            </a:pPr>
+            <a:r>
+              <a:rPr sz="1800">
+                <a:solidFill>
+                  <a:srgbClr val="2A78D6"/>
+                </a:solidFill>
+                <a:latin typeface="Calibri"/>
+              </a:rPr>
+              <a:t>▪  </a:t>
+            </a:r>
+            <a:r>
+              <a:rPr sz="1800" b="0" i="0">
+                <a:solidFill>
+                  <a:srgbClr val="26251F"/>
+                </a:solidFill>
+                <a:latin typeface="Calibri"/>
+              </a:rPr>
+              <a:t>New: the laundering theorem, the first code-based PQ secure aggregation, and trust-free detection.</a:t>
+            </a:r>
+          </a:p>
+          <a:p>
+            <a:pPr>
+              <a:spcAft>
+                <a:spcPts val="900"/>
+              </a:spcAft>
+            </a:pPr>
+            <a:r>
+              <a:rPr sz="1800">
+                <a:solidFill>
+                  <a:srgbClr val="2A78D6"/>
+                </a:solidFill>
+                <a:latin typeface="Calibri"/>
+              </a:rPr>
+              <a:t>▪  </a:t>
+            </a:r>
+            <a:r>
+              <a:rPr sz="1800" b="0" i="0">
+                <a:solidFill>
+                  <a:srgbClr val="26251F"/>
+                </a:solidFill>
+                <a:latin typeface="Calibri"/>
+              </a:rPr>
+              <a:t>Payoff: private, post-quantum, and Byzantine-robust FL that ties the state of the art at lower cost.</a:t>
+            </a:r>
+          </a:p>
+        </p:txBody>
+      </p:sp>
       <p:sp>
         <p:nvSpPr>
           <p:cNvPr id="5" name="TextBox 4"/>
@@ -5463,8 +5380,8 @@
         </p:nvSpPr>
         <p:spPr>
           <a:xfrm>
-            <a:off x="685800" y="5943600"/>
-            <a:ext cx="10881360" cy="502920"/>
+            <a:off x="685800" y="5888736"/>
+            <a:ext cx="10881360" cy="548640"/>
           </a:xfrm>
           <a:prstGeom prst="rect">
             <a:avLst/>
@@ -5483,7 +5400,7 @@
               </a:spcAft>
             </a:pPr>
             <a:r>
-              <a:rPr sz="800" b="0" i="1">
+              <a:rPr sz="900" b="0" i="1">
                 <a:solidFill>
                   <a:srgbClr val="26251F"/>
                 </a:solidFill>
@@ -5499,7 +5416,7 @@
               </a:spcAft>
             </a:pPr>
             <a:r>
-              <a:rPr sz="800" b="0" i="1">
+              <a:rPr sz="900" b="0" i="1">
                 <a:solidFill>
                   <a:srgbClr val="26251F"/>
                 </a:solidFill>
@@ -5508,6 +5425,22 @@
               <a:t>[2] K. Bonawitz, V. Ivanov, B. Kreuter, A. Marcedone, H. B. McMahan, S. Patel, D. Ramage, A. Segal, and K. Seth, "Practical secure aggregation for privacy-preserving machine learning," in Proc. ACM CCS, 2017, pp. 1175–1191.</a:t>
             </a:r>
           </a:p>
+          <a:p>
+            <a:pPr>
+              <a:spcAft>
+                <a:spcPts val="100"/>
+              </a:spcAft>
+            </a:pPr>
+            <a:r>
+              <a:rPr sz="900" b="0" i="1">
+                <a:solidFill>
+                  <a:srgbClr val="26251F"/>
+                </a:solidFill>
+                <a:latin typeface="Calibri"/>
+              </a:rPr>
+              <a:t>[3] National Institute of Standards and Technology, "Status report on the fourth round of the NIST post-quantum cryptography standardization process," NIST IR 8545, Mar. 2025.</a:t>
+            </a:r>
+          </a:p>
         </p:txBody>
       </p:sp>
       <p:sp>
@@ -5518,8 +5451,8 @@
         </p:nvSpPr>
         <p:spPr>
           <a:xfrm>
-            <a:off x="11018520" y="6446520"/>
-            <a:ext cx="914400" cy="274320"/>
+            <a:off x="10927080" y="6419088"/>
+            <a:ext cx="1005840" cy="292608"/>
           </a:xfrm>
           <a:prstGeom prst="rect">
             <a:avLst/>
@@ -5534,7 +5467,7 @@
           <a:p>
             <a:pPr algn="r"/>
             <a:r>
-              <a:rPr sz="1050" b="0" i="0">
+              <a:rPr sz="1200" b="0" i="0">
                 <a:solidFill>
                   <a:srgbClr val="898781"/>
                 </a:solidFill>
@@ -5571,22 +5504,22 @@
         </p:nvSpPr>
         <p:spPr>
           <a:xfrm>
-            <a:off x="685800" y="438912"/>
-            <a:ext cx="10881360" cy="822960"/>
-          </a:xfrm>
-          <a:prstGeom prst="rect">
-            <a:avLst/>
-          </a:prstGeom>
-          <a:noFill/>
-        </p:spPr>
-        <p:txBody>
-          <a:bodyPr wrap="square">
-            <a:spAutoFit/>
-          </a:bodyPr>
-          <a:lstStyle/>
-          <a:p>
-            <a:r>
-              <a:rPr sz="3000" b="1" i="0">
+            <a:off x="685800" y="384048"/>
+            <a:ext cx="10881360" cy="868680"/>
+          </a:xfrm>
+          <a:prstGeom prst="rect">
+            <a:avLst/>
+          </a:prstGeom>
+          <a:noFill/>
+        </p:spPr>
+        <p:txBody>
+          <a:bodyPr wrap="square">
+            <a:spAutoFit/>
+          </a:bodyPr>
+          <a:lstStyle/>
+          <a:p>
+            <a:r>
+              <a:rPr sz="3400" b="1" i="0">
                 <a:solidFill>
                   <a:srgbClr val="0B0B0B"/>
                 </a:solidFill>
@@ -5605,27 +5538,27 @@
         </p:nvSpPr>
         <p:spPr>
           <a:xfrm>
-            <a:off x="685800" y="1371600"/>
-            <a:ext cx="6949440" cy="3931920"/>
-          </a:xfrm>
-          <a:prstGeom prst="rect">
-            <a:avLst/>
-          </a:prstGeom>
-          <a:noFill/>
-        </p:spPr>
-        <p:txBody>
-          <a:bodyPr wrap="square">
-            <a:spAutoFit/>
-          </a:bodyPr>
-          <a:lstStyle/>
-          <a:p>
-            <a:pPr>
-              <a:spcAft>
-                <a:spcPts val="800"/>
-              </a:spcAft>
-            </a:pPr>
-            <a:r>
-              <a:rPr sz="1500">
+            <a:off x="685800" y="1417320"/>
+            <a:ext cx="6949440" cy="4023360"/>
+          </a:xfrm>
+          <a:prstGeom prst="rect">
+            <a:avLst/>
+          </a:prstGeom>
+          <a:noFill/>
+        </p:spPr>
+        <p:txBody>
+          <a:bodyPr wrap="square">
+            <a:spAutoFit/>
+          </a:bodyPr>
+          <a:lstStyle/>
+          <a:p>
+            <a:pPr>
+              <a:spcAft>
+                <a:spcPts val="900"/>
+              </a:spcAft>
+            </a:pPr>
+            <a:r>
+              <a:rPr sz="1800">
                 <a:solidFill>
                   <a:srgbClr val="2A78D6"/>
                 </a:solidFill>
@@ -5634,7 +5567,7 @@
               <a:t>▪  </a:t>
             </a:r>
             <a:r>
-              <a:rPr sz="1500" b="0" i="0">
+              <a:rPr sz="1800" b="0" i="0">
                 <a:solidFill>
                   <a:srgbClr val="26251F"/>
                 </a:solidFill>
@@ -5646,11 +5579,11 @@
           <a:p>
             <a:pPr>
               <a:spcAft>
-                <a:spcPts val="800"/>
-              </a:spcAft>
-            </a:pPr>
-            <a:r>
-              <a:rPr sz="1500">
+                <a:spcPts val="900"/>
+              </a:spcAft>
+            </a:pPr>
+            <a:r>
+              <a:rPr sz="1800">
                 <a:solidFill>
                   <a:srgbClr val="2A78D6"/>
                 </a:solidFill>
@@ -5659,7 +5592,7 @@
               <a:t>▪  </a:t>
             </a:r>
             <a:r>
-              <a:rPr sz="1500" b="0" i="0">
+              <a:rPr sz="1800" b="0" i="0">
                 <a:solidFill>
                   <a:srgbClr val="26251F"/>
                 </a:solidFill>
@@ -5671,11 +5604,11 @@
           <a:p>
             <a:pPr>
               <a:spcAft>
-                <a:spcPts val="800"/>
-              </a:spcAft>
-            </a:pPr>
-            <a:r>
-              <a:rPr sz="1500">
+                <a:spcPts val="900"/>
+              </a:spcAft>
+            </a:pPr>
+            <a:r>
+              <a:rPr sz="1800">
                 <a:solidFill>
                   <a:srgbClr val="2A78D6"/>
                 </a:solidFill>
@@ -5684,7 +5617,7 @@
               <a:t>▪  </a:t>
             </a:r>
             <a:r>
-              <a:rPr sz="1500" b="0" i="0">
+              <a:rPr sz="1800" b="0" i="0">
                 <a:solidFill>
                   <a:srgbClr val="26251F"/>
                 </a:solidFill>
@@ -5711,8 +5644,8 @@
         </p:blipFill>
         <p:spPr>
           <a:xfrm>
-            <a:off x="7315200" y="1463040"/>
-            <a:ext cx="4480560" cy="4785619"/>
+            <a:off x="7360920" y="1508760"/>
+            <a:ext cx="4434840" cy="4736787"/>
           </a:xfrm>
           <a:prstGeom prst="rect">
             <a:avLst/>
@@ -5727,8 +5660,8 @@
         </p:nvSpPr>
         <p:spPr>
           <a:xfrm>
-            <a:off x="685800" y="5943600"/>
-            <a:ext cx="10881360" cy="502920"/>
+            <a:off x="685800" y="5888736"/>
+            <a:ext cx="10881360" cy="548640"/>
           </a:xfrm>
           <a:prstGeom prst="rect">
             <a:avLst/>
@@ -5747,7 +5680,7 @@
               </a:spcAft>
             </a:pPr>
             <a:r>
-              <a:rPr sz="800" b="0" i="1">
+              <a:rPr sz="900" b="0" i="1">
                 <a:solidFill>
                   <a:srgbClr val="26251F"/>
                 </a:solidFill>
@@ -5763,7 +5696,7 @@
               </a:spcAft>
             </a:pPr>
             <a:r>
-              <a:rPr sz="800" b="0" i="1">
+              <a:rPr sz="900" b="0" i="1">
                 <a:solidFill>
                   <a:srgbClr val="26251F"/>
                 </a:solidFill>
@@ -5782,8 +5715,8 @@
         </p:nvSpPr>
         <p:spPr>
           <a:xfrm>
-            <a:off x="11018520" y="6446520"/>
-            <a:ext cx="914400" cy="274320"/>
+            <a:off x="10927080" y="6419088"/>
+            <a:ext cx="1005840" cy="292608"/>
           </a:xfrm>
           <a:prstGeom prst="rect">
             <a:avLst/>
@@ -5798,7 +5731,7 @@
           <a:p>
             <a:pPr algn="r"/>
             <a:r>
-              <a:rPr sz="1050" b="0" i="0">
+              <a:rPr sz="1200" b="0" i="0">
                 <a:solidFill>
                   <a:srgbClr val="898781"/>
                 </a:solidFill>
@@ -5835,22 +5768,22 @@
         </p:nvSpPr>
         <p:spPr>
           <a:xfrm>
-            <a:off x="685800" y="438912"/>
-            <a:ext cx="10881360" cy="822960"/>
-          </a:xfrm>
-          <a:prstGeom prst="rect">
-            <a:avLst/>
-          </a:prstGeom>
-          <a:noFill/>
-        </p:spPr>
-        <p:txBody>
-          <a:bodyPr wrap="square">
-            <a:spAutoFit/>
-          </a:bodyPr>
-          <a:lstStyle/>
-          <a:p>
-            <a:r>
-              <a:rPr sz="3000" b="1" i="0">
+            <a:off x="685800" y="384048"/>
+            <a:ext cx="10881360" cy="868680"/>
+          </a:xfrm>
+          <a:prstGeom prst="rect">
+            <a:avLst/>
+          </a:prstGeom>
+          <a:noFill/>
+        </p:spPr>
+        <p:txBody>
+          <a:bodyPr wrap="square">
+            <a:spAutoFit/>
+          </a:bodyPr>
+          <a:lstStyle/>
+          <a:p>
+            <a:r>
+              <a:rPr sz="3400" b="1" i="0">
                 <a:solidFill>
                   <a:srgbClr val="0B0B0B"/>
                 </a:solidFill>
@@ -5869,22 +5802,22 @@
         </p:nvSpPr>
         <p:spPr>
           <a:xfrm>
-            <a:off x="685800" y="1371600"/>
-            <a:ext cx="10881360" cy="457200"/>
-          </a:xfrm>
-          <a:prstGeom prst="rect">
-            <a:avLst/>
-          </a:prstGeom>
-          <a:noFill/>
-        </p:spPr>
-        <p:txBody>
-          <a:bodyPr wrap="square">
-            <a:spAutoFit/>
-          </a:bodyPr>
-          <a:lstStyle/>
-          <a:p>
-            <a:r>
-              <a:rPr sz="1400" b="0" i="1">
+            <a:off x="685800" y="1417320"/>
+            <a:ext cx="10881360" cy="548640"/>
+          </a:xfrm>
+          <a:prstGeom prst="rect">
+            <a:avLst/>
+          </a:prstGeom>
+          <a:noFill/>
+        </p:spPr>
+        <p:txBody>
+          <a:bodyPr wrap="square">
+            <a:spAutoFit/>
+          </a:bodyPr>
+          <a:lstStyle/>
+          <a:p>
+            <a:r>
+              <a:rPr sz="1600" b="0" i="1">
                 <a:solidFill>
                   <a:srgbClr val="26251F"/>
                 </a:solidFill>
@@ -5903,27 +5836,27 @@
         </p:nvSpPr>
         <p:spPr>
           <a:xfrm>
-            <a:off x="685800" y="1828800"/>
-            <a:ext cx="10881360" cy="3931920"/>
-          </a:xfrm>
-          <a:prstGeom prst="rect">
-            <a:avLst/>
-          </a:prstGeom>
-          <a:noFill/>
-        </p:spPr>
-        <p:txBody>
-          <a:bodyPr wrap="square">
-            <a:spAutoFit/>
-          </a:bodyPr>
-          <a:lstStyle/>
-          <a:p>
-            <a:pPr>
-              <a:spcAft>
-                <a:spcPts val="800"/>
-              </a:spcAft>
-            </a:pPr>
-            <a:r>
-              <a:rPr sz="1500">
+            <a:off x="685800" y="1947672"/>
+            <a:ext cx="10881360" cy="4023360"/>
+          </a:xfrm>
+          <a:prstGeom prst="rect">
+            <a:avLst/>
+          </a:prstGeom>
+          <a:noFill/>
+        </p:spPr>
+        <p:txBody>
+          <a:bodyPr wrap="square">
+            <a:spAutoFit/>
+          </a:bodyPr>
+          <a:lstStyle/>
+          <a:p>
+            <a:pPr>
+              <a:spcAft>
+                <a:spcPts val="900"/>
+              </a:spcAft>
+            </a:pPr>
+            <a:r>
+              <a:rPr sz="1800">
                 <a:solidFill>
                   <a:srgbClr val="2A78D6"/>
                 </a:solidFill>
@@ -5932,7 +5865,7 @@
               <a:t>▪  </a:t>
             </a:r>
             <a:r>
-              <a:rPr sz="1500" b="0" i="0">
+              <a:rPr sz="1800" b="0" i="0">
                 <a:solidFill>
                   <a:srgbClr val="26251F"/>
                 </a:solidFill>
@@ -5959,8 +5892,8 @@
         </p:blipFill>
         <p:spPr>
           <a:xfrm>
-            <a:off x="831602" y="2331720"/>
-            <a:ext cx="10528491" cy="3246120"/>
+            <a:off x="979890" y="2468880"/>
+            <a:ext cx="10231913" cy="3154680"/>
           </a:xfrm>
           <a:prstGeom prst="rect">
             <a:avLst/>
@@ -5975,8 +5908,8 @@
         </p:nvSpPr>
         <p:spPr>
           <a:xfrm>
-            <a:off x="685800" y="5943600"/>
-            <a:ext cx="10881360" cy="502920"/>
+            <a:off x="685800" y="5888736"/>
+            <a:ext cx="10881360" cy="548640"/>
           </a:xfrm>
           <a:prstGeom prst="rect">
             <a:avLst/>
@@ -5995,7 +5928,7 @@
               </a:spcAft>
             </a:pPr>
             <a:r>
-              <a:rPr sz="800" b="0" i="1">
+              <a:rPr sz="900" b="0" i="1">
                 <a:solidFill>
                   <a:srgbClr val="26251F"/>
                 </a:solidFill>
@@ -6014,8 +5947,8 @@
         </p:nvSpPr>
         <p:spPr>
           <a:xfrm>
-            <a:off x="11018520" y="6446520"/>
-            <a:ext cx="914400" cy="274320"/>
+            <a:off x="10927080" y="6419088"/>
+            <a:ext cx="1005840" cy="292608"/>
           </a:xfrm>
           <a:prstGeom prst="rect">
             <a:avLst/>
@@ -6030,7 +5963,7 @@
           <a:p>
             <a:pPr algn="r"/>
             <a:r>
-              <a:rPr sz="1050" b="0" i="0">
+              <a:rPr sz="1200" b="0" i="0">
                 <a:solidFill>
                   <a:srgbClr val="898781"/>
                 </a:solidFill>
@@ -6067,22 +6000,22 @@
         </p:nvSpPr>
         <p:spPr>
           <a:xfrm>
-            <a:off x="685800" y="438912"/>
-            <a:ext cx="10881360" cy="822960"/>
-          </a:xfrm>
-          <a:prstGeom prst="rect">
-            <a:avLst/>
-          </a:prstGeom>
-          <a:noFill/>
-        </p:spPr>
-        <p:txBody>
-          <a:bodyPr wrap="square">
-            <a:spAutoFit/>
-          </a:bodyPr>
-          <a:lstStyle/>
-          <a:p>
-            <a:r>
-              <a:rPr sz="3000" b="1" i="0">
+            <a:off x="685800" y="384048"/>
+            <a:ext cx="10881360" cy="868680"/>
+          </a:xfrm>
+          <a:prstGeom prst="rect">
+            <a:avLst/>
+          </a:prstGeom>
+          <a:noFill/>
+        </p:spPr>
+        <p:txBody>
+          <a:bodyPr wrap="square">
+            <a:spAutoFit/>
+          </a:bodyPr>
+          <a:lstStyle/>
+          <a:p>
+            <a:r>
+              <a:rPr sz="3400" b="1" i="0">
                 <a:solidFill>
                   <a:srgbClr val="0B0B0B"/>
                 </a:solidFill>
@@ -6101,27 +6034,27 @@
         </p:nvSpPr>
         <p:spPr>
           <a:xfrm>
-            <a:off x="685800" y="1371600"/>
-            <a:ext cx="10881360" cy="3931920"/>
-          </a:xfrm>
-          <a:prstGeom prst="rect">
-            <a:avLst/>
-          </a:prstGeom>
-          <a:noFill/>
-        </p:spPr>
-        <p:txBody>
-          <a:bodyPr wrap="square">
-            <a:spAutoFit/>
-          </a:bodyPr>
-          <a:lstStyle/>
-          <a:p>
-            <a:pPr>
-              <a:spcAft>
-                <a:spcPts val="800"/>
-              </a:spcAft>
-            </a:pPr>
-            <a:r>
-              <a:rPr sz="1500">
+            <a:off x="685800" y="1417320"/>
+            <a:ext cx="10881360" cy="4023360"/>
+          </a:xfrm>
+          <a:prstGeom prst="rect">
+            <a:avLst/>
+          </a:prstGeom>
+          <a:noFill/>
+        </p:spPr>
+        <p:txBody>
+          <a:bodyPr wrap="square">
+            <a:spAutoFit/>
+          </a:bodyPr>
+          <a:lstStyle/>
+          <a:p>
+            <a:pPr>
+              <a:spcAft>
+                <a:spcPts val="900"/>
+              </a:spcAft>
+            </a:pPr>
+            <a:r>
+              <a:rPr sz="1800">
                 <a:solidFill>
                   <a:srgbClr val="2A78D6"/>
                 </a:solidFill>
@@ -6130,7 +6063,7 @@
               <a:t>▪  </a:t>
             </a:r>
             <a:r>
-              <a:rPr sz="1500" b="0" i="0">
+              <a:rPr sz="1800" b="0" i="0">
                 <a:solidFill>
                   <a:srgbClr val="26251F"/>
                 </a:solidFill>
@@ -6139,7 +6072,7 @@
               <a:t>Federated learning shares model updates, not raw data, yet </a:t>
             </a:r>
             <a:r>
-              <a:rPr sz="1500" b="1" i="0">
+              <a:rPr sz="1800" b="1" i="0">
                 <a:solidFill>
                   <a:srgbClr val="0B0B0B"/>
                 </a:solidFill>
@@ -6148,7 +6081,7 @@
               <a:t>those updates still leak private training data</a:t>
             </a:r>
             <a:r>
-              <a:rPr sz="1500" b="0" i="0">
+              <a:rPr sz="1800" b="0" i="0">
                 <a:solidFill>
                   <a:srgbClr val="26251F"/>
                 </a:solidFill>
@@ -6160,11 +6093,11 @@
           <a:p>
             <a:pPr>
               <a:spcAft>
-                <a:spcPts val="800"/>
-              </a:spcAft>
-            </a:pPr>
-            <a:r>
-              <a:rPr sz="1500">
+                <a:spcPts val="900"/>
+              </a:spcAft>
+            </a:pPr>
+            <a:r>
+              <a:rPr sz="1800">
                 <a:solidFill>
                   <a:srgbClr val="2A78D6"/>
                 </a:solidFill>
@@ -6173,7 +6106,7 @@
               <a:t>▪  </a:t>
             </a:r>
             <a:r>
-              <a:rPr sz="1500" b="0" i="0">
+              <a:rPr sz="1800" b="0" i="0">
                 <a:solidFill>
                   <a:srgbClr val="26251F"/>
                 </a:solidFill>
@@ -6182,7 +6115,7 @@
               <a:t>Secure aggregation [2] hides updates behind masks, but its key exchange </a:t>
             </a:r>
             <a:r>
-              <a:rPr sz="1500" b="1" i="0">
+              <a:rPr sz="1800" b="1" i="0">
                 <a:solidFill>
                   <a:srgbClr val="0B0B0B"/>
                 </a:solidFill>
@@ -6191,7 +6124,7 @@
               <a:t>breaks under a quantum computer</a:t>
             </a:r>
             <a:r>
-              <a:rPr sz="1500" b="0" i="0">
+              <a:rPr sz="1800" b="0" i="0">
                 <a:solidFill>
                   <a:srgbClr val="26251F"/>
                 </a:solidFill>
@@ -6203,11 +6136,11 @@
           <a:p>
             <a:pPr>
               <a:spcAft>
-                <a:spcPts val="800"/>
-              </a:spcAft>
-            </a:pPr>
-            <a:r>
-              <a:rPr sz="1500">
+                <a:spcPts val="900"/>
+              </a:spcAft>
+            </a:pPr>
+            <a:r>
+              <a:rPr sz="1800">
                 <a:solidFill>
                   <a:srgbClr val="2A78D6"/>
                 </a:solidFill>
@@ -6216,7 +6149,7 @@
               <a:t>▪  </a:t>
             </a:r>
             <a:r>
-              <a:rPr sz="1500" b="0" i="0">
+              <a:rPr sz="1800" b="0" i="0">
                 <a:solidFill>
                   <a:srgbClr val="26251F"/>
                 </a:solidFill>
@@ -6225,7 +6158,7 @@
               <a:t>Every post-quantum fix today is </a:t>
             </a:r>
             <a:r>
-              <a:rPr sz="1500" b="1" i="0">
+              <a:rPr sz="1800" b="1" i="0">
                 <a:solidFill>
                   <a:srgbClr val="0B0B0B"/>
                 </a:solidFill>
@@ -6234,7 +6167,7 @@
               <a:t>lattice-only, a monoculture</a:t>
             </a:r>
             <a:r>
-              <a:rPr sz="1500" b="0" i="0">
+              <a:rPr sz="1800" b="0" i="0">
                 <a:solidFill>
                   <a:srgbClr val="26251F"/>
                 </a:solidFill>
@@ -6246,11 +6179,11 @@
           <a:p>
             <a:pPr>
               <a:spcAft>
-                <a:spcPts val="800"/>
-              </a:spcAft>
-            </a:pPr>
-            <a:r>
-              <a:rPr sz="1500">
+                <a:spcPts val="900"/>
+              </a:spcAft>
+            </a:pPr>
+            <a:r>
+              <a:rPr sz="1800">
                 <a:solidFill>
                   <a:srgbClr val="2A78D6"/>
                 </a:solidFill>
@@ -6259,7 +6192,7 @@
               <a:t>▪  </a:t>
             </a:r>
             <a:r>
-              <a:rPr sz="1500" b="0" i="0">
+              <a:rPr sz="1800" b="0" i="0">
                 <a:solidFill>
                   <a:srgbClr val="26251F"/>
                 </a:solidFill>
@@ -6268,7 +6201,7 @@
               <a:t>Goal: one protocol that is </a:t>
             </a:r>
             <a:r>
-              <a:rPr sz="1500" b="1" i="0">
+              <a:rPr sz="1800" b="1" i="0">
                 <a:solidFill>
                   <a:srgbClr val="0B0B0B"/>
                 </a:solidFill>
@@ -6277,7 +6210,7 @@
               <a:t>private, post-quantum with crypto diversity, and Byzantine-robust</a:t>
             </a:r>
             <a:r>
-              <a:rPr sz="1500" b="0" i="0">
+              <a:rPr sz="1800" b="0" i="0">
                 <a:solidFill>
                   <a:srgbClr val="26251F"/>
                 </a:solidFill>
@@ -6296,8 +6229,8 @@
         </p:nvSpPr>
         <p:spPr>
           <a:xfrm>
-            <a:off x="685800" y="5943600"/>
-            <a:ext cx="10881360" cy="502920"/>
+            <a:off x="685800" y="5888736"/>
+            <a:ext cx="10881360" cy="548640"/>
           </a:xfrm>
           <a:prstGeom prst="rect">
             <a:avLst/>
@@ -6316,7 +6249,7 @@
               </a:spcAft>
             </a:pPr>
             <a:r>
-              <a:rPr sz="800" b="0" i="1">
+              <a:rPr sz="900" b="0" i="1">
                 <a:solidFill>
                   <a:srgbClr val="26251F"/>
                 </a:solidFill>
@@ -6335,8 +6268,8 @@
         </p:nvSpPr>
         <p:spPr>
           <a:xfrm>
-            <a:off x="11018520" y="6446520"/>
-            <a:ext cx="914400" cy="274320"/>
+            <a:off x="10927080" y="6419088"/>
+            <a:ext cx="1005840" cy="292608"/>
           </a:xfrm>
           <a:prstGeom prst="rect">
             <a:avLst/>
@@ -6351,7 +6284,7 @@
           <a:p>
             <a:pPr algn="r"/>
             <a:r>
-              <a:rPr sz="1050" b="0" i="0">
+              <a:rPr sz="1200" b="0" i="0">
                 <a:solidFill>
                   <a:srgbClr val="898781"/>
                 </a:solidFill>
@@ -6388,22 +6321,22 @@
         </p:nvSpPr>
         <p:spPr>
           <a:xfrm>
-            <a:off x="685800" y="438912"/>
-            <a:ext cx="10881360" cy="822960"/>
-          </a:xfrm>
-          <a:prstGeom prst="rect">
-            <a:avLst/>
-          </a:prstGeom>
-          <a:noFill/>
-        </p:spPr>
-        <p:txBody>
-          <a:bodyPr wrap="square">
-            <a:spAutoFit/>
-          </a:bodyPr>
-          <a:lstStyle/>
-          <a:p>
-            <a:r>
-              <a:rPr sz="3000" b="1" i="0">
+            <a:off x="685800" y="384048"/>
+            <a:ext cx="10881360" cy="868680"/>
+          </a:xfrm>
+          <a:prstGeom prst="rect">
+            <a:avLst/>
+          </a:prstGeom>
+          <a:noFill/>
+        </p:spPr>
+        <p:txBody>
+          <a:bodyPr wrap="square">
+            <a:spAutoFit/>
+          </a:bodyPr>
+          <a:lstStyle/>
+          <a:p>
+            <a:r>
+              <a:rPr sz="3400" b="1" i="0">
                 <a:solidFill>
                   <a:srgbClr val="0B0B0B"/>
                 </a:solidFill>
@@ -6422,28 +6355,28 @@
         </p:nvSpPr>
         <p:spPr>
           <a:xfrm>
-            <a:off x="685800" y="1371600"/>
-            <a:ext cx="10881360" cy="457200"/>
-          </a:xfrm>
-          <a:prstGeom prst="rect">
-            <a:avLst/>
-          </a:prstGeom>
-          <a:noFill/>
-        </p:spPr>
-        <p:txBody>
-          <a:bodyPr wrap="square">
-            <a:spAutoFit/>
-          </a:bodyPr>
-          <a:lstStyle/>
-          <a:p>
-            <a:r>
-              <a:rPr sz="1400" b="0" i="1">
-                <a:solidFill>
-                  <a:srgbClr val="26251F"/>
-                </a:solidFill>
-                <a:latin typeface="Calibri"/>
-              </a:rPr>
-              <a:t>Test accuracy vs. round for eight rules including FedGT [1], over three datasets (rows) and three malicious fractions (columns); CB-SAFE+ tracks the clean baseline while the others diverge (from the paper, Fig. 7).</a:t>
+            <a:off x="685800" y="1417320"/>
+            <a:ext cx="10881360" cy="548640"/>
+          </a:xfrm>
+          <a:prstGeom prst="rect">
+            <a:avLst/>
+          </a:prstGeom>
+          <a:noFill/>
+        </p:spPr>
+        <p:txBody>
+          <a:bodyPr wrap="square">
+            <a:spAutoFit/>
+          </a:bodyPr>
+          <a:lstStyle/>
+          <a:p>
+            <a:r>
+              <a:rPr sz="1600" b="0" i="1">
+                <a:solidFill>
+                  <a:srgbClr val="26251F"/>
+                </a:solidFill>
+                <a:latin typeface="Calibri"/>
+              </a:rPr>
+              <a:t>Accuracy vs. round for eight rules incl. FedGT [1], over three datasets and three malicious fractions; CB-SAFE+ tracks the clean baseline while the others diverge (paper, Fig. 7).</a:t>
             </a:r>
           </a:p>
         </p:txBody>
@@ -6464,8 +6397,8 @@
         </p:blipFill>
         <p:spPr>
           <a:xfrm>
-            <a:off x="3602817" y="1965960"/>
-            <a:ext cx="4986061" cy="3913632"/>
+            <a:off x="3824160" y="2240280"/>
+            <a:ext cx="4543374" cy="3566160"/>
           </a:xfrm>
           <a:prstGeom prst="rect">
             <a:avLst/>
@@ -6480,8 +6413,8 @@
         </p:nvSpPr>
         <p:spPr>
           <a:xfrm>
-            <a:off x="685800" y="5943600"/>
-            <a:ext cx="10881360" cy="502920"/>
+            <a:off x="685800" y="5888736"/>
+            <a:ext cx="10881360" cy="548640"/>
           </a:xfrm>
           <a:prstGeom prst="rect">
             <a:avLst/>
@@ -6500,7 +6433,7 @@
               </a:spcAft>
             </a:pPr>
             <a:r>
-              <a:rPr sz="800" b="0" i="1">
+              <a:rPr sz="900" b="0" i="1">
                 <a:solidFill>
                   <a:srgbClr val="26251F"/>
                 </a:solidFill>
@@ -6519,8 +6452,8 @@
         </p:nvSpPr>
         <p:spPr>
           <a:xfrm>
-            <a:off x="11018520" y="6446520"/>
-            <a:ext cx="914400" cy="274320"/>
+            <a:off x="10927080" y="6419088"/>
+            <a:ext cx="1005840" cy="292608"/>
           </a:xfrm>
           <a:prstGeom prst="rect">
             <a:avLst/>
@@ -6535,7 +6468,7 @@
           <a:p>
             <a:pPr algn="r"/>
             <a:r>
-              <a:rPr sz="1050" b="0" i="0">
+              <a:rPr sz="1200" b="0" i="0">
                 <a:solidFill>
                   <a:srgbClr val="898781"/>
                 </a:solidFill>
@@ -6572,22 +6505,22 @@
         </p:nvSpPr>
         <p:spPr>
           <a:xfrm>
-            <a:off x="685800" y="438912"/>
-            <a:ext cx="10881360" cy="822960"/>
-          </a:xfrm>
-          <a:prstGeom prst="rect">
-            <a:avLst/>
-          </a:prstGeom>
-          <a:noFill/>
-        </p:spPr>
-        <p:txBody>
-          <a:bodyPr wrap="square">
-            <a:spAutoFit/>
-          </a:bodyPr>
-          <a:lstStyle/>
-          <a:p>
-            <a:r>
-              <a:rPr sz="3000" b="1" i="0">
+            <a:off x="685800" y="384048"/>
+            <a:ext cx="10881360" cy="868680"/>
+          </a:xfrm>
+          <a:prstGeom prst="rect">
+            <a:avLst/>
+          </a:prstGeom>
+          <a:noFill/>
+        </p:spPr>
+        <p:txBody>
+          <a:bodyPr wrap="square">
+            <a:spAutoFit/>
+          </a:bodyPr>
+          <a:lstStyle/>
+          <a:p>
+            <a:r>
+              <a:rPr sz="3400" b="1" i="0">
                 <a:solidFill>
                   <a:srgbClr val="0B0B0B"/>
                 </a:solidFill>
@@ -6606,22 +6539,22 @@
         </p:nvSpPr>
         <p:spPr>
           <a:xfrm>
-            <a:off x="685800" y="1371600"/>
-            <a:ext cx="10881360" cy="457200"/>
-          </a:xfrm>
-          <a:prstGeom prst="rect">
-            <a:avLst/>
-          </a:prstGeom>
-          <a:noFill/>
-        </p:spPr>
-        <p:txBody>
-          <a:bodyPr wrap="square">
-            <a:spAutoFit/>
-          </a:bodyPr>
-          <a:lstStyle/>
-          <a:p>
-            <a:r>
-              <a:rPr sz="1400" b="0" i="1">
+            <a:off x="685800" y="1417320"/>
+            <a:ext cx="10881360" cy="548640"/>
+          </a:xfrm>
+          <a:prstGeom prst="rect">
+            <a:avLst/>
+          </a:prstGeom>
+          <a:noFill/>
+        </p:spPr>
+        <p:txBody>
+          <a:bodyPr wrap="square">
+            <a:spAutoFit/>
+          </a:bodyPr>
+          <a:lstStyle/>
+          <a:p>
+            <a:r>
+              <a:rPr sz="1600" b="0" i="1">
                 <a:solidFill>
                   <a:srgbClr val="26251F"/>
                 </a:solidFill>
@@ -6640,27 +6573,27 @@
         </p:nvSpPr>
         <p:spPr>
           <a:xfrm>
-            <a:off x="685800" y="1828800"/>
-            <a:ext cx="10881360" cy="3931920"/>
-          </a:xfrm>
-          <a:prstGeom prst="rect">
-            <a:avLst/>
-          </a:prstGeom>
-          <a:noFill/>
-        </p:spPr>
-        <p:txBody>
-          <a:bodyPr wrap="square">
-            <a:spAutoFit/>
-          </a:bodyPr>
-          <a:lstStyle/>
-          <a:p>
-            <a:pPr>
-              <a:spcAft>
-                <a:spcPts val="800"/>
-              </a:spcAft>
-            </a:pPr>
-            <a:r>
-              <a:rPr sz="1500">
+            <a:off x="685800" y="1947672"/>
+            <a:ext cx="10881360" cy="4023360"/>
+          </a:xfrm>
+          <a:prstGeom prst="rect">
+            <a:avLst/>
+          </a:prstGeom>
+          <a:noFill/>
+        </p:spPr>
+        <p:txBody>
+          <a:bodyPr wrap="square">
+            <a:spAutoFit/>
+          </a:bodyPr>
+          <a:lstStyle/>
+          <a:p>
+            <a:pPr>
+              <a:spcAft>
+                <a:spcPts val="900"/>
+              </a:spcAft>
+            </a:pPr>
+            <a:r>
+              <a:rPr sz="1800">
                 <a:solidFill>
                   <a:srgbClr val="2A78D6"/>
                 </a:solidFill>
@@ -6669,7 +6602,7 @@
               <a:t>▪  </a:t>
             </a:r>
             <a:r>
-              <a:rPr sz="1500" b="0" i="0">
+              <a:rPr sz="1800" b="0" i="0">
                 <a:solidFill>
                   <a:srgbClr val="26251F"/>
                 </a:solidFill>
@@ -6696,8 +6629,8 @@
         </p:blipFill>
         <p:spPr>
           <a:xfrm>
-            <a:off x="2306507" y="2514600"/>
-            <a:ext cx="7578681" cy="3108960"/>
+            <a:off x="2473684" y="2697480"/>
+            <a:ext cx="7244327" cy="2971800"/>
           </a:xfrm>
           <a:prstGeom prst="rect">
             <a:avLst/>
@@ -6712,8 +6645,8 @@
         </p:nvSpPr>
         <p:spPr>
           <a:xfrm>
-            <a:off x="685800" y="5943600"/>
-            <a:ext cx="10881360" cy="502920"/>
+            <a:off x="685800" y="5888736"/>
+            <a:ext cx="10881360" cy="548640"/>
           </a:xfrm>
           <a:prstGeom prst="rect">
             <a:avLst/>
@@ -6732,7 +6665,7 @@
               </a:spcAft>
             </a:pPr>
             <a:r>
-              <a:rPr sz="800" b="0" i="1">
+              <a:rPr sz="900" b="0" i="1">
                 <a:solidFill>
                   <a:srgbClr val="26251F"/>
                 </a:solidFill>
@@ -6751,8 +6684,8 @@
         </p:nvSpPr>
         <p:spPr>
           <a:xfrm>
-            <a:off x="11018520" y="6446520"/>
-            <a:ext cx="914400" cy="274320"/>
+            <a:off x="10927080" y="6419088"/>
+            <a:ext cx="1005840" cy="292608"/>
           </a:xfrm>
           <a:prstGeom prst="rect">
             <a:avLst/>
@@ -6767,7 +6700,7 @@
           <a:p>
             <a:pPr algn="r"/>
             <a:r>
-              <a:rPr sz="1050" b="0" i="0">
+              <a:rPr sz="1200" b="0" i="0">
                 <a:solidFill>
                   <a:srgbClr val="898781"/>
                 </a:solidFill>
@@ -6804,22 +6737,22 @@
         </p:nvSpPr>
         <p:spPr>
           <a:xfrm>
-            <a:off x="685800" y="438912"/>
-            <a:ext cx="10881360" cy="822960"/>
-          </a:xfrm>
-          <a:prstGeom prst="rect">
-            <a:avLst/>
-          </a:prstGeom>
-          <a:noFill/>
-        </p:spPr>
-        <p:txBody>
-          <a:bodyPr wrap="square">
-            <a:spAutoFit/>
-          </a:bodyPr>
-          <a:lstStyle/>
-          <a:p>
-            <a:r>
-              <a:rPr sz="3000" b="1" i="0">
+            <a:off x="685800" y="384048"/>
+            <a:ext cx="10881360" cy="868680"/>
+          </a:xfrm>
+          <a:prstGeom prst="rect">
+            <a:avLst/>
+          </a:prstGeom>
+          <a:noFill/>
+        </p:spPr>
+        <p:txBody>
+          <a:bodyPr wrap="square">
+            <a:spAutoFit/>
+          </a:bodyPr>
+          <a:lstStyle/>
+          <a:p>
+            <a:r>
+              <a:rPr sz="3400" b="1" i="0">
                 <a:solidFill>
                   <a:srgbClr val="0B0B0B"/>
                 </a:solidFill>
@@ -6838,22 +6771,22 @@
         </p:nvSpPr>
         <p:spPr>
           <a:xfrm>
-            <a:off x="685800" y="1371600"/>
-            <a:ext cx="10881360" cy="457200"/>
-          </a:xfrm>
-          <a:prstGeom prst="rect">
-            <a:avLst/>
-          </a:prstGeom>
-          <a:noFill/>
-        </p:spPr>
-        <p:txBody>
-          <a:bodyPr wrap="square">
-            <a:spAutoFit/>
-          </a:bodyPr>
-          <a:lstStyle/>
-          <a:p>
-            <a:r>
-              <a:rPr sz="1400" b="0" i="1">
+            <a:off x="685800" y="1417320"/>
+            <a:ext cx="10881360" cy="548640"/>
+          </a:xfrm>
+          <a:prstGeom prst="rect">
+            <a:avLst/>
+          </a:prstGeom>
+          <a:noFill/>
+        </p:spPr>
+        <p:txBody>
+          <a:bodyPr wrap="square">
+            <a:spAutoFit/>
+          </a:bodyPr>
+          <a:lstStyle/>
+          <a:p>
+            <a:r>
+              <a:rPr sz="1600" b="0" i="1">
                 <a:solidFill>
                   <a:srgbClr val="26251F"/>
                 </a:solidFill>
@@ -6872,27 +6805,27 @@
         </p:nvSpPr>
         <p:spPr>
           <a:xfrm>
-            <a:off x="685800" y="1828800"/>
-            <a:ext cx="10881360" cy="3931920"/>
-          </a:xfrm>
-          <a:prstGeom prst="rect">
-            <a:avLst/>
-          </a:prstGeom>
-          <a:noFill/>
-        </p:spPr>
-        <p:txBody>
-          <a:bodyPr wrap="square">
-            <a:spAutoFit/>
-          </a:bodyPr>
-          <a:lstStyle/>
-          <a:p>
-            <a:pPr>
-              <a:spcAft>
-                <a:spcPts val="800"/>
-              </a:spcAft>
-            </a:pPr>
-            <a:r>
-              <a:rPr sz="1500">
+            <a:off x="685800" y="1947672"/>
+            <a:ext cx="10881360" cy="4023360"/>
+          </a:xfrm>
+          <a:prstGeom prst="rect">
+            <a:avLst/>
+          </a:prstGeom>
+          <a:noFill/>
+        </p:spPr>
+        <p:txBody>
+          <a:bodyPr wrap="square">
+            <a:spAutoFit/>
+          </a:bodyPr>
+          <a:lstStyle/>
+          <a:p>
+            <a:pPr>
+              <a:spcAft>
+                <a:spcPts val="900"/>
+              </a:spcAft>
+            </a:pPr>
+            <a:r>
+              <a:rPr sz="1800">
                 <a:solidFill>
                   <a:srgbClr val="2A78D6"/>
                 </a:solidFill>
@@ -6901,7 +6834,7 @@
               <a:t>▪  </a:t>
             </a:r>
             <a:r>
-              <a:rPr sz="1500" b="0" i="0">
+              <a:rPr sz="1800" b="0" i="0">
                 <a:solidFill>
                   <a:srgbClr val="26251F"/>
                 </a:solidFill>
@@ -6928,8 +6861,8 @@
         </p:blipFill>
         <p:spPr>
           <a:xfrm>
-            <a:off x="1082746" y="2331720"/>
-            <a:ext cx="10026203" cy="3200400"/>
+            <a:off x="1225977" y="2468880"/>
+            <a:ext cx="9739740" cy="3108960"/>
           </a:xfrm>
           <a:prstGeom prst="rect">
             <a:avLst/>
@@ -6944,8 +6877,8 @@
         </p:nvSpPr>
         <p:spPr>
           <a:xfrm>
-            <a:off x="685800" y="5943600"/>
-            <a:ext cx="10881360" cy="502920"/>
+            <a:off x="685800" y="5888736"/>
+            <a:ext cx="10881360" cy="548640"/>
           </a:xfrm>
           <a:prstGeom prst="rect">
             <a:avLst/>
@@ -6964,7 +6897,7 @@
               </a:spcAft>
             </a:pPr>
             <a:r>
-              <a:rPr sz="800" b="0" i="1">
+              <a:rPr sz="900" b="0" i="1">
                 <a:solidFill>
                   <a:srgbClr val="26251F"/>
                 </a:solidFill>
@@ -6983,8 +6916,8 @@
         </p:nvSpPr>
         <p:spPr>
           <a:xfrm>
-            <a:off x="11018520" y="6446520"/>
-            <a:ext cx="914400" cy="274320"/>
+            <a:off x="10927080" y="6419088"/>
+            <a:ext cx="1005840" cy="292608"/>
           </a:xfrm>
           <a:prstGeom prst="rect">
             <a:avLst/>
@@ -6999,7 +6932,7 @@
           <a:p>
             <a:pPr algn="r"/>
             <a:r>
-              <a:rPr sz="1050" b="0" i="0">
+              <a:rPr sz="1200" b="0" i="0">
                 <a:solidFill>
                   <a:srgbClr val="898781"/>
                 </a:solidFill>
@@ -7036,22 +6969,22 @@
         </p:nvSpPr>
         <p:spPr>
           <a:xfrm>
-            <a:off x="685800" y="438912"/>
-            <a:ext cx="10881360" cy="822960"/>
-          </a:xfrm>
-          <a:prstGeom prst="rect">
-            <a:avLst/>
-          </a:prstGeom>
-          <a:noFill/>
-        </p:spPr>
-        <p:txBody>
-          <a:bodyPr wrap="square">
-            <a:spAutoFit/>
-          </a:bodyPr>
-          <a:lstStyle/>
-          <a:p>
-            <a:r>
-              <a:rPr sz="3000" b="1" i="0">
+            <a:off x="685800" y="384048"/>
+            <a:ext cx="10881360" cy="868680"/>
+          </a:xfrm>
+          <a:prstGeom prst="rect">
+            <a:avLst/>
+          </a:prstGeom>
+          <a:noFill/>
+        </p:spPr>
+        <p:txBody>
+          <a:bodyPr wrap="square">
+            <a:spAutoFit/>
+          </a:bodyPr>
+          <a:lstStyle/>
+          <a:p>
+            <a:r>
+              <a:rPr sz="3400" b="1" i="0">
                 <a:solidFill>
                   <a:srgbClr val="0B0B0B"/>
                 </a:solidFill>
@@ -7070,22 +7003,22 @@
         </p:nvSpPr>
         <p:spPr>
           <a:xfrm>
-            <a:off x="685800" y="1371600"/>
-            <a:ext cx="10881360" cy="457200"/>
-          </a:xfrm>
-          <a:prstGeom prst="rect">
-            <a:avLst/>
-          </a:prstGeom>
-          <a:noFill/>
-        </p:spPr>
-        <p:txBody>
-          <a:bodyPr wrap="square">
-            <a:spAutoFit/>
-          </a:bodyPr>
-          <a:lstStyle/>
-          <a:p>
-            <a:r>
-              <a:rPr sz="1400" b="0" i="1">
+            <a:off x="685800" y="1417320"/>
+            <a:ext cx="10881360" cy="548640"/>
+          </a:xfrm>
+          <a:prstGeom prst="rect">
+            <a:avLst/>
+          </a:prstGeom>
+          <a:noFill/>
+        </p:spPr>
+        <p:txBody>
+          <a:bodyPr wrap="square">
+            <a:spAutoFit/>
+          </a:bodyPr>
+          <a:lstStyle/>
+          <a:p>
+            <a:r>
+              <a:rPr sz="1600" b="0" i="1">
                 <a:solidFill>
                   <a:srgbClr val="26251F"/>
                 </a:solidFill>
@@ -7104,27 +7037,27 @@
         </p:nvSpPr>
         <p:spPr>
           <a:xfrm>
-            <a:off x="685800" y="1828800"/>
-            <a:ext cx="10881360" cy="3931920"/>
-          </a:xfrm>
-          <a:prstGeom prst="rect">
-            <a:avLst/>
-          </a:prstGeom>
-          <a:noFill/>
-        </p:spPr>
-        <p:txBody>
-          <a:bodyPr wrap="square">
-            <a:spAutoFit/>
-          </a:bodyPr>
-          <a:lstStyle/>
-          <a:p>
-            <a:pPr>
-              <a:spcAft>
-                <a:spcPts val="800"/>
-              </a:spcAft>
-            </a:pPr>
-            <a:r>
-              <a:rPr sz="1500">
+            <a:off x="685800" y="1947672"/>
+            <a:ext cx="10881360" cy="4023360"/>
+          </a:xfrm>
+          <a:prstGeom prst="rect">
+            <a:avLst/>
+          </a:prstGeom>
+          <a:noFill/>
+        </p:spPr>
+        <p:txBody>
+          <a:bodyPr wrap="square">
+            <a:spAutoFit/>
+          </a:bodyPr>
+          <a:lstStyle/>
+          <a:p>
+            <a:pPr>
+              <a:spcAft>
+                <a:spcPts val="900"/>
+              </a:spcAft>
+            </a:pPr>
+            <a:r>
+              <a:rPr sz="1800">
                 <a:solidFill>
                   <a:srgbClr val="2A78D6"/>
                 </a:solidFill>
@@ -7133,7 +7066,7 @@
               <a:t>▪  </a:t>
             </a:r>
             <a:r>
-              <a:rPr sz="1500" b="0" i="0">
+              <a:rPr sz="1800" b="0" i="0">
                 <a:solidFill>
                   <a:srgbClr val="26251F"/>
                 </a:solidFill>
@@ -7145,11 +7078,11 @@
           <a:p>
             <a:pPr>
               <a:spcAft>
-                <a:spcPts val="800"/>
-              </a:spcAft>
-            </a:pPr>
-            <a:r>
-              <a:rPr sz="1500">
+                <a:spcPts val="900"/>
+              </a:spcAft>
+            </a:pPr>
+            <a:r>
+              <a:rPr sz="1800">
                 <a:solidFill>
                   <a:srgbClr val="2A78D6"/>
                 </a:solidFill>
@@ -7158,7 +7091,7 @@
               <a:t>▪  </a:t>
             </a:r>
             <a:r>
-              <a:rPr sz="1500" b="0" i="0">
+              <a:rPr sz="1800" b="0" i="0">
                 <a:solidFill>
                   <a:srgbClr val="26251F"/>
                 </a:solidFill>
@@ -7185,8 +7118,8 @@
         </p:blipFill>
         <p:spPr>
           <a:xfrm>
-            <a:off x="2856259" y="3063240"/>
-            <a:ext cx="6479177" cy="2926080"/>
+            <a:off x="3008114" y="3154680"/>
+            <a:ext cx="6175466" cy="2788920"/>
           </a:xfrm>
           <a:prstGeom prst="rect">
             <a:avLst/>
@@ -7201,8 +7134,8 @@
         </p:nvSpPr>
         <p:spPr>
           <a:xfrm>
-            <a:off x="685800" y="5943600"/>
-            <a:ext cx="10881360" cy="502920"/>
+            <a:off x="685800" y="5888736"/>
+            <a:ext cx="10881360" cy="548640"/>
           </a:xfrm>
           <a:prstGeom prst="rect">
             <a:avLst/>
@@ -7221,7 +7154,7 @@
               </a:spcAft>
             </a:pPr>
             <a:r>
-              <a:rPr sz="800" b="0" i="1">
+              <a:rPr sz="900" b="0" i="1">
                 <a:solidFill>
                   <a:srgbClr val="26251F"/>
                 </a:solidFill>
@@ -7237,7 +7170,7 @@
               </a:spcAft>
             </a:pPr>
             <a:r>
-              <a:rPr sz="800" b="0" i="1">
+              <a:rPr sz="900" b="0" i="1">
                 <a:solidFill>
                   <a:srgbClr val="26251F"/>
                 </a:solidFill>
@@ -7256,8 +7189,8 @@
         </p:nvSpPr>
         <p:spPr>
           <a:xfrm>
-            <a:off x="11018520" y="6446520"/>
-            <a:ext cx="914400" cy="274320"/>
+            <a:off x="10927080" y="6419088"/>
+            <a:ext cx="1005840" cy="292608"/>
           </a:xfrm>
           <a:prstGeom prst="rect">
             <a:avLst/>
@@ -7272,7 +7205,7 @@
           <a:p>
             <a:pPr algn="r"/>
             <a:r>
-              <a:rPr sz="1050" b="0" i="0">
+              <a:rPr sz="1200" b="0" i="0">
                 <a:solidFill>
                   <a:srgbClr val="898781"/>
                 </a:solidFill>
@@ -7309,22 +7242,22 @@
         </p:nvSpPr>
         <p:spPr>
           <a:xfrm>
-            <a:off x="685800" y="438912"/>
-            <a:ext cx="10881360" cy="822960"/>
-          </a:xfrm>
-          <a:prstGeom prst="rect">
-            <a:avLst/>
-          </a:prstGeom>
-          <a:noFill/>
-        </p:spPr>
-        <p:txBody>
-          <a:bodyPr wrap="square">
-            <a:spAutoFit/>
-          </a:bodyPr>
-          <a:lstStyle/>
-          <a:p>
-            <a:r>
-              <a:rPr sz="3000" b="1" i="0">
+            <a:off x="685800" y="384048"/>
+            <a:ext cx="10881360" cy="868680"/>
+          </a:xfrm>
+          <a:prstGeom prst="rect">
+            <a:avLst/>
+          </a:prstGeom>
+          <a:noFill/>
+        </p:spPr>
+        <p:txBody>
+          <a:bodyPr wrap="square">
+            <a:spAutoFit/>
+          </a:bodyPr>
+          <a:lstStyle/>
+          <a:p>
+            <a:r>
+              <a:rPr sz="3400" b="1" i="0">
                 <a:solidFill>
                   <a:srgbClr val="0B0B0B"/>
                 </a:solidFill>
@@ -7343,27 +7276,27 @@
         </p:nvSpPr>
         <p:spPr>
           <a:xfrm>
-            <a:off x="685800" y="1371600"/>
-            <a:ext cx="10881360" cy="3931920"/>
-          </a:xfrm>
-          <a:prstGeom prst="rect">
-            <a:avLst/>
-          </a:prstGeom>
-          <a:noFill/>
-        </p:spPr>
-        <p:txBody>
-          <a:bodyPr wrap="square">
-            <a:spAutoFit/>
-          </a:bodyPr>
-          <a:lstStyle/>
-          <a:p>
-            <a:pPr>
-              <a:spcAft>
-                <a:spcPts val="800"/>
-              </a:spcAft>
-            </a:pPr>
-            <a:r>
-              <a:rPr sz="1500">
+            <a:off x="685800" y="1417320"/>
+            <a:ext cx="10881360" cy="4023360"/>
+          </a:xfrm>
+          <a:prstGeom prst="rect">
+            <a:avLst/>
+          </a:prstGeom>
+          <a:noFill/>
+        </p:spPr>
+        <p:txBody>
+          <a:bodyPr wrap="square">
+            <a:spAutoFit/>
+          </a:bodyPr>
+          <a:lstStyle/>
+          <a:p>
+            <a:pPr>
+              <a:spcAft>
+                <a:spcPts val="900"/>
+              </a:spcAft>
+            </a:pPr>
+            <a:r>
+              <a:rPr sz="1800">
                 <a:solidFill>
                   <a:srgbClr val="2A78D6"/>
                 </a:solidFill>
@@ -7372,7 +7305,7 @@
               <a:t>▪  </a:t>
             </a:r>
             <a:r>
-              <a:rPr sz="1500" b="0" i="0">
+              <a:rPr sz="1800" b="0" i="0">
                 <a:solidFill>
                   <a:srgbClr val="26251F"/>
                 </a:solidFill>
@@ -7384,11 +7317,11 @@
           <a:p>
             <a:pPr>
               <a:spcAft>
-                <a:spcPts val="800"/>
-              </a:spcAft>
-            </a:pPr>
-            <a:r>
-              <a:rPr sz="1500">
+                <a:spcPts val="900"/>
+              </a:spcAft>
+            </a:pPr>
+            <a:r>
+              <a:rPr sz="1800">
                 <a:solidFill>
                   <a:srgbClr val="2A78D6"/>
                 </a:solidFill>
@@ -7397,23 +7330,23 @@
               <a:t>▪  </a:t>
             </a:r>
             <a:r>
-              <a:rPr sz="1500" b="0" i="0">
-                <a:solidFill>
-                  <a:srgbClr val="26251F"/>
-                </a:solidFill>
-                <a:latin typeface="Calibri"/>
-              </a:rPr>
-              <a:t>It ties the state of the art (FedGT) on robustness and detection, at lower cost, and adds crypto diversity plus a failure theory.</a:t>
-            </a:r>
-          </a:p>
-          <a:p>
-            <a:pPr>
-              <a:spcAft>
-                <a:spcPts val="800"/>
-              </a:spcAft>
-            </a:pPr>
-            <a:r>
-              <a:rPr sz="1500">
+              <a:rPr sz="1800" b="0" i="0">
+                <a:solidFill>
+                  <a:srgbClr val="26251F"/>
+                </a:solidFill>
+                <a:latin typeface="Calibri"/>
+              </a:rPr>
+              <a:t>It ties the state of the art (FedGT [1]) on robustness and detection, at lower cost, and adds crypto diversity plus a failure theory.</a:t>
+            </a:r>
+          </a:p>
+          <a:p>
+            <a:pPr>
+              <a:spcAft>
+                <a:spcPts val="900"/>
+              </a:spcAft>
+            </a:pPr>
+            <a:r>
+              <a:rPr sz="1800">
                 <a:solidFill>
                   <a:srgbClr val="2A78D6"/>
                 </a:solidFill>
@@ -7422,7 +7355,7 @@
               <a:t>▪  </a:t>
             </a:r>
             <a:r>
-              <a:rPr sz="1500" b="0" i="0">
+              <a:rPr sz="1800" b="0" i="0">
                 <a:solidFill>
                   <a:srgbClr val="26251F"/>
                 </a:solidFill>
@@ -7434,11 +7367,11 @@
           <a:p>
             <a:pPr>
               <a:spcAft>
-                <a:spcPts val="800"/>
-              </a:spcAft>
-            </a:pPr>
-            <a:r>
-              <a:rPr sz="1500">
+                <a:spcPts val="900"/>
+              </a:spcAft>
+            </a:pPr>
+            <a:r>
+              <a:rPr sz="1800">
                 <a:solidFill>
                   <a:srgbClr val="2A78D6"/>
                 </a:solidFill>
@@ -7447,7 +7380,7 @@
               <a:t>▪  </a:t>
             </a:r>
             <a:r>
-              <a:rPr sz="1500" b="0" i="0">
+              <a:rPr sz="1800" b="0" i="0">
                 <a:solidFill>
                   <a:srgbClr val="26251F"/>
                 </a:solidFill>
@@ -7466,8 +7399,8 @@
         </p:nvSpPr>
         <p:spPr>
           <a:xfrm>
-            <a:off x="685800" y="5943600"/>
-            <a:ext cx="10881360" cy="502920"/>
+            <a:off x="685800" y="5888736"/>
+            <a:ext cx="10881360" cy="548640"/>
           </a:xfrm>
           <a:prstGeom prst="rect">
             <a:avLst/>
@@ -7486,7 +7419,7 @@
               </a:spcAft>
             </a:pPr>
             <a:r>
-              <a:rPr sz="800" b="0" i="1">
+              <a:rPr sz="900" b="0" i="1">
                 <a:solidFill>
                   <a:srgbClr val="26251F"/>
                 </a:solidFill>
@@ -7502,7 +7435,7 @@
               </a:spcAft>
             </a:pPr>
             <a:r>
-              <a:rPr sz="800" b="0" i="1">
+              <a:rPr sz="900" b="0" i="1">
                 <a:solidFill>
                   <a:srgbClr val="26251F"/>
                 </a:solidFill>
@@ -7518,7 +7451,7 @@
               </a:spcAft>
             </a:pPr>
             <a:r>
-              <a:rPr sz="800" b="0" i="1">
+              <a:rPr sz="900" b="0" i="1">
                 <a:solidFill>
                   <a:srgbClr val="26251F"/>
                 </a:solidFill>
@@ -7537,8 +7470,8 @@
         </p:nvSpPr>
         <p:spPr>
           <a:xfrm>
-            <a:off x="11018520" y="6446520"/>
-            <a:ext cx="914400" cy="274320"/>
+            <a:off x="10927080" y="6419088"/>
+            <a:ext cx="1005840" cy="292608"/>
           </a:xfrm>
           <a:prstGeom prst="rect">
             <a:avLst/>
@@ -7553,7 +7486,7 @@
           <a:p>
             <a:pPr algn="r"/>
             <a:r>
-              <a:rPr sz="1050" b="0" i="0">
+              <a:rPr sz="1200" b="0" i="0">
                 <a:solidFill>
                   <a:srgbClr val="898781"/>
                 </a:solidFill>
@@ -7590,22 +7523,22 @@
         </p:nvSpPr>
         <p:spPr>
           <a:xfrm>
-            <a:off x="685800" y="438912"/>
-            <a:ext cx="10881360" cy="822960"/>
-          </a:xfrm>
-          <a:prstGeom prst="rect">
-            <a:avLst/>
-          </a:prstGeom>
-          <a:noFill/>
-        </p:spPr>
-        <p:txBody>
-          <a:bodyPr wrap="square">
-            <a:spAutoFit/>
-          </a:bodyPr>
-          <a:lstStyle/>
-          <a:p>
-            <a:r>
-              <a:rPr sz="3000" b="1" i="0">
+            <a:off x="685800" y="384048"/>
+            <a:ext cx="10881360" cy="868680"/>
+          </a:xfrm>
+          <a:prstGeom prst="rect">
+            <a:avLst/>
+          </a:prstGeom>
+          <a:noFill/>
+        </p:spPr>
+        <p:txBody>
+          <a:bodyPr wrap="square">
+            <a:spAutoFit/>
+          </a:bodyPr>
+          <a:lstStyle/>
+          <a:p>
+            <a:r>
+              <a:rPr sz="3400" b="1" i="0">
                 <a:solidFill>
                   <a:srgbClr val="0B0B0B"/>
                 </a:solidFill>
@@ -7624,27 +7557,27 @@
         </p:nvSpPr>
         <p:spPr>
           <a:xfrm>
-            <a:off x="685800" y="1463040"/>
-            <a:ext cx="10881360" cy="4754880"/>
-          </a:xfrm>
-          <a:prstGeom prst="rect">
-            <a:avLst/>
-          </a:prstGeom>
-          <a:noFill/>
-        </p:spPr>
-        <p:txBody>
-          <a:bodyPr wrap="square">
-            <a:spAutoFit/>
-          </a:bodyPr>
-          <a:lstStyle/>
-          <a:p>
-            <a:pPr>
-              <a:spcAft>
-                <a:spcPts val="800"/>
-              </a:spcAft>
-            </a:pPr>
-            <a:r>
-              <a:rPr sz="1150" b="0" i="0">
+            <a:off x="685800" y="1417320"/>
+            <a:ext cx="10881360" cy="4846320"/>
+          </a:xfrm>
+          <a:prstGeom prst="rect">
+            <a:avLst/>
+          </a:prstGeom>
+          <a:noFill/>
+        </p:spPr>
+        <p:txBody>
+          <a:bodyPr wrap="square">
+            <a:spAutoFit/>
+          </a:bodyPr>
+          <a:lstStyle/>
+          <a:p>
+            <a:pPr>
+              <a:spcAft>
+                <a:spcPts val="700"/>
+              </a:spcAft>
+            </a:pPr>
+            <a:r>
+              <a:rPr sz="1300" b="0" i="0">
                 <a:solidFill>
                   <a:srgbClr val="26251F"/>
                 </a:solidFill>
@@ -7656,11 +7589,11 @@
           <a:p>
             <a:pPr>
               <a:spcAft>
-                <a:spcPts val="800"/>
-              </a:spcAft>
-            </a:pPr>
-            <a:r>
-              <a:rPr sz="1150" b="0" i="0">
+                <a:spcPts val="700"/>
+              </a:spcAft>
+            </a:pPr>
+            <a:r>
+              <a:rPr sz="1300" b="0" i="0">
                 <a:solidFill>
                   <a:srgbClr val="26251F"/>
                 </a:solidFill>
@@ -7672,11 +7605,11 @@
           <a:p>
             <a:pPr>
               <a:spcAft>
-                <a:spcPts val="800"/>
-              </a:spcAft>
-            </a:pPr>
-            <a:r>
-              <a:rPr sz="1150" b="0" i="0">
+                <a:spcPts val="700"/>
+              </a:spcAft>
+            </a:pPr>
+            <a:r>
+              <a:rPr sz="1300" b="0" i="0">
                 <a:solidFill>
                   <a:srgbClr val="26251F"/>
                 </a:solidFill>
@@ -7688,11 +7621,11 @@
           <a:p>
             <a:pPr>
               <a:spcAft>
-                <a:spcPts val="800"/>
-              </a:spcAft>
-            </a:pPr>
-            <a:r>
-              <a:rPr sz="1150" b="0" i="0">
+                <a:spcPts val="700"/>
+              </a:spcAft>
+            </a:pPr>
+            <a:r>
+              <a:rPr sz="1300" b="0" i="0">
                 <a:solidFill>
                   <a:srgbClr val="26251F"/>
                 </a:solidFill>
@@ -7704,11 +7637,11 @@
           <a:p>
             <a:pPr>
               <a:spcAft>
-                <a:spcPts val="800"/>
-              </a:spcAft>
-            </a:pPr>
-            <a:r>
-              <a:rPr sz="1150" b="0" i="0">
+                <a:spcPts val="700"/>
+              </a:spcAft>
+            </a:pPr>
+            <a:r>
+              <a:rPr sz="1300" b="0" i="0">
                 <a:solidFill>
                   <a:srgbClr val="26251F"/>
                 </a:solidFill>
@@ -7720,11 +7653,11 @@
           <a:p>
             <a:pPr>
               <a:spcAft>
-                <a:spcPts val="800"/>
-              </a:spcAft>
-            </a:pPr>
-            <a:r>
-              <a:rPr sz="1150" b="0" i="0">
+                <a:spcPts val="700"/>
+              </a:spcAft>
+            </a:pPr>
+            <a:r>
+              <a:rPr sz="1300" b="0" i="0">
                 <a:solidFill>
                   <a:srgbClr val="26251F"/>
                 </a:solidFill>
@@ -7736,11 +7669,11 @@
           <a:p>
             <a:pPr>
               <a:spcAft>
-                <a:spcPts val="800"/>
-              </a:spcAft>
-            </a:pPr>
-            <a:r>
-              <a:rPr sz="1150" b="0" i="0">
+                <a:spcPts val="700"/>
+              </a:spcAft>
+            </a:pPr>
+            <a:r>
+              <a:rPr sz="1300" b="0" i="0">
                 <a:solidFill>
                   <a:srgbClr val="26251F"/>
                 </a:solidFill>
@@ -7752,11 +7685,11 @@
           <a:p>
             <a:pPr>
               <a:spcAft>
-                <a:spcPts val="800"/>
-              </a:spcAft>
-            </a:pPr>
-            <a:r>
-              <a:rPr sz="1150" b="0" i="0">
+                <a:spcPts val="700"/>
+              </a:spcAft>
+            </a:pPr>
+            <a:r>
+              <a:rPr sz="1300" b="0" i="0">
                 <a:solidFill>
                   <a:srgbClr val="26251F"/>
                 </a:solidFill>
@@ -7768,11 +7701,11 @@
           <a:p>
             <a:pPr>
               <a:spcAft>
-                <a:spcPts val="800"/>
-              </a:spcAft>
-            </a:pPr>
-            <a:r>
-              <a:rPr sz="1150" b="0" i="0">
+                <a:spcPts val="700"/>
+              </a:spcAft>
+            </a:pPr>
+            <a:r>
+              <a:rPr sz="1300" b="0" i="0">
                 <a:solidFill>
                   <a:srgbClr val="26251F"/>
                 </a:solidFill>
@@ -7809,22 +7742,22 @@
         </p:nvSpPr>
         <p:spPr>
           <a:xfrm>
-            <a:off x="685800" y="438912"/>
-            <a:ext cx="10881360" cy="822960"/>
-          </a:xfrm>
-          <a:prstGeom prst="rect">
-            <a:avLst/>
-          </a:prstGeom>
-          <a:noFill/>
-        </p:spPr>
-        <p:txBody>
-          <a:bodyPr wrap="square">
-            <a:spAutoFit/>
-          </a:bodyPr>
-          <a:lstStyle/>
-          <a:p>
-            <a:r>
-              <a:rPr sz="3000" b="1" i="0">
+            <a:off x="685800" y="384048"/>
+            <a:ext cx="10881360" cy="868680"/>
+          </a:xfrm>
+          <a:prstGeom prst="rect">
+            <a:avLst/>
+          </a:prstGeom>
+          <a:noFill/>
+        </p:spPr>
+        <p:txBody>
+          <a:bodyPr wrap="square">
+            <a:spAutoFit/>
+          </a:bodyPr>
+          <a:lstStyle/>
+          <a:p>
+            <a:r>
+              <a:rPr sz="3400" b="1" i="0">
                 <a:solidFill>
                   <a:srgbClr val="0B0B0B"/>
                 </a:solidFill>
@@ -7843,27 +7776,27 @@
         </p:nvSpPr>
         <p:spPr>
           <a:xfrm>
-            <a:off x="685800" y="1371600"/>
-            <a:ext cx="10881360" cy="3931920"/>
-          </a:xfrm>
-          <a:prstGeom prst="rect">
-            <a:avLst/>
-          </a:prstGeom>
-          <a:noFill/>
-        </p:spPr>
-        <p:txBody>
-          <a:bodyPr wrap="square">
-            <a:spAutoFit/>
-          </a:bodyPr>
-          <a:lstStyle/>
-          <a:p>
-            <a:pPr>
-              <a:spcAft>
-                <a:spcPts val="800"/>
-              </a:spcAft>
-            </a:pPr>
-            <a:r>
-              <a:rPr sz="1500">
+            <a:off x="685800" y="1417320"/>
+            <a:ext cx="10881360" cy="4023360"/>
+          </a:xfrm>
+          <a:prstGeom prst="rect">
+            <a:avLst/>
+          </a:prstGeom>
+          <a:noFill/>
+        </p:spPr>
+        <p:txBody>
+          <a:bodyPr wrap="square">
+            <a:spAutoFit/>
+          </a:bodyPr>
+          <a:lstStyle/>
+          <a:p>
+            <a:pPr>
+              <a:spcAft>
+                <a:spcPts val="900"/>
+              </a:spcAft>
+            </a:pPr>
+            <a:r>
+              <a:rPr sz="1800">
                 <a:solidFill>
                   <a:srgbClr val="2A78D6"/>
                 </a:solidFill>
@@ -7872,7 +7805,7 @@
               <a:t>▪  </a:t>
             </a:r>
             <a:r>
-              <a:rPr sz="1500" b="0" i="0">
+              <a:rPr sz="1800" b="0" i="0">
                 <a:solidFill>
                   <a:srgbClr val="26251F"/>
                 </a:solidFill>
@@ -7884,11 +7817,11 @@
           <a:p>
             <a:pPr>
               <a:spcAft>
-                <a:spcPts val="800"/>
-              </a:spcAft>
-            </a:pPr>
-            <a:r>
-              <a:rPr sz="1500">
+                <a:spcPts val="900"/>
+              </a:spcAft>
+            </a:pPr>
+            <a:r>
+              <a:rPr sz="1800">
                 <a:solidFill>
                   <a:srgbClr val="2A78D6"/>
                 </a:solidFill>
@@ -7897,7 +7830,7 @@
               <a:t>▪  </a:t>
             </a:r>
             <a:r>
-              <a:rPr sz="1500" b="0" i="0">
+              <a:rPr sz="1800" b="0" i="0">
                 <a:solidFill>
                   <a:srgbClr val="26251F"/>
                 </a:solidFill>
@@ -7909,11 +7842,11 @@
           <a:p>
             <a:pPr>
               <a:spcAft>
-                <a:spcPts val="800"/>
-              </a:spcAft>
-            </a:pPr>
-            <a:r>
-              <a:rPr sz="1500">
+                <a:spcPts val="900"/>
+              </a:spcAft>
+            </a:pPr>
+            <a:r>
+              <a:rPr sz="1800">
                 <a:solidFill>
                   <a:srgbClr val="2A78D6"/>
                 </a:solidFill>
@@ -7922,7 +7855,7 @@
               <a:t>▪  </a:t>
             </a:r>
             <a:r>
-              <a:rPr sz="1500" b="0" i="0">
+              <a:rPr sz="1800" b="0" i="0">
                 <a:solidFill>
                   <a:srgbClr val="26251F"/>
                 </a:solidFill>
@@ -7934,11 +7867,11 @@
           <a:p>
             <a:pPr>
               <a:spcAft>
-                <a:spcPts val="800"/>
-              </a:spcAft>
-            </a:pPr>
-            <a:r>
-              <a:rPr sz="1500">
+                <a:spcPts val="900"/>
+              </a:spcAft>
+            </a:pPr>
+            <a:r>
+              <a:rPr sz="1800">
                 <a:solidFill>
                   <a:srgbClr val="2A78D6"/>
                 </a:solidFill>
@@ -7947,7 +7880,7 @@
               <a:t>▪  </a:t>
             </a:r>
             <a:r>
-              <a:rPr sz="1500" b="0" i="0">
+              <a:rPr sz="1800" b="0" i="0">
                 <a:solidFill>
                   <a:srgbClr val="26251F"/>
                 </a:solidFill>
@@ -7966,8 +7899,8 @@
         </p:nvSpPr>
         <p:spPr>
           <a:xfrm>
-            <a:off x="685800" y="5943600"/>
-            <a:ext cx="10881360" cy="502920"/>
+            <a:off x="685800" y="5888736"/>
+            <a:ext cx="10881360" cy="548640"/>
           </a:xfrm>
           <a:prstGeom prst="rect">
             <a:avLst/>
@@ -7986,7 +7919,7 @@
               </a:spcAft>
             </a:pPr>
             <a:r>
-              <a:rPr sz="800" b="0" i="1">
+              <a:rPr sz="900" b="0" i="1">
                 <a:solidFill>
                   <a:srgbClr val="26251F"/>
                 </a:solidFill>
@@ -8002,7 +7935,7 @@
               </a:spcAft>
             </a:pPr>
             <a:r>
-              <a:rPr sz="800" b="0" i="1">
+              <a:rPr sz="900" b="0" i="1">
                 <a:solidFill>
                   <a:srgbClr val="26251F"/>
                 </a:solidFill>
@@ -8021,8 +7954,8 @@
         </p:nvSpPr>
         <p:spPr>
           <a:xfrm>
-            <a:off x="11018520" y="6446520"/>
-            <a:ext cx="914400" cy="274320"/>
+            <a:off x="10927080" y="6419088"/>
+            <a:ext cx="1005840" cy="292608"/>
           </a:xfrm>
           <a:prstGeom prst="rect">
             <a:avLst/>
@@ -8037,7 +7970,7 @@
           <a:p>
             <a:pPr algn="r"/>
             <a:r>
-              <a:rPr sz="1050" b="0" i="0">
+              <a:rPr sz="1200" b="0" i="0">
                 <a:solidFill>
                   <a:srgbClr val="898781"/>
                 </a:solidFill>
@@ -8074,22 +8007,22 @@
         </p:nvSpPr>
         <p:spPr>
           <a:xfrm>
-            <a:off x="685800" y="438912"/>
-            <a:ext cx="10881360" cy="822960"/>
-          </a:xfrm>
-          <a:prstGeom prst="rect">
-            <a:avLst/>
-          </a:prstGeom>
-          <a:noFill/>
-        </p:spPr>
-        <p:txBody>
-          <a:bodyPr wrap="square">
-            <a:spAutoFit/>
-          </a:bodyPr>
-          <a:lstStyle/>
-          <a:p>
-            <a:r>
-              <a:rPr sz="3000" b="1" i="0">
+            <a:off x="685800" y="384048"/>
+            <a:ext cx="10881360" cy="868680"/>
+          </a:xfrm>
+          <a:prstGeom prst="rect">
+            <a:avLst/>
+          </a:prstGeom>
+          <a:noFill/>
+        </p:spPr>
+        <p:txBody>
+          <a:bodyPr wrap="square">
+            <a:spAutoFit/>
+          </a:bodyPr>
+          <a:lstStyle/>
+          <a:p>
+            <a:r>
+              <a:rPr sz="3400" b="1" i="0">
                 <a:solidFill>
                   <a:srgbClr val="0B0B0B"/>
                 </a:solidFill>
@@ -8108,27 +8041,27 @@
         </p:nvSpPr>
         <p:spPr>
           <a:xfrm>
-            <a:off x="685800" y="1371600"/>
-            <a:ext cx="10881360" cy="3931920"/>
-          </a:xfrm>
-          <a:prstGeom prst="rect">
-            <a:avLst/>
-          </a:prstGeom>
-          <a:noFill/>
-        </p:spPr>
-        <p:txBody>
-          <a:bodyPr wrap="square">
-            <a:spAutoFit/>
-          </a:bodyPr>
-          <a:lstStyle/>
-          <a:p>
-            <a:pPr>
-              <a:spcAft>
-                <a:spcPts val="800"/>
-              </a:spcAft>
-            </a:pPr>
-            <a:r>
-              <a:rPr sz="1500">
+            <a:off x="685800" y="1417320"/>
+            <a:ext cx="10881360" cy="4023360"/>
+          </a:xfrm>
+          <a:prstGeom prst="rect">
+            <a:avLst/>
+          </a:prstGeom>
+          <a:noFill/>
+        </p:spPr>
+        <p:txBody>
+          <a:bodyPr wrap="square">
+            <a:spAutoFit/>
+          </a:bodyPr>
+          <a:lstStyle/>
+          <a:p>
+            <a:pPr>
+              <a:spcAft>
+                <a:spcPts val="900"/>
+              </a:spcAft>
+            </a:pPr>
+            <a:r>
+              <a:rPr sz="1800">
                 <a:solidFill>
                   <a:srgbClr val="2A78D6"/>
                 </a:solidFill>
@@ -8137,23 +8070,23 @@
               <a:t>▪  </a:t>
             </a:r>
             <a:r>
-              <a:rPr sz="1500" b="0" i="0">
-                <a:solidFill>
-                  <a:srgbClr val="26251F"/>
-                </a:solidFill>
-                <a:latin typeface="Calibri"/>
-              </a:rPr>
-              <a:t>FedGT [1] (IEEE TIFS, 2025) is the closest peer to our robustness mechanism.</a:t>
-            </a:r>
-          </a:p>
-          <a:p>
-            <a:pPr>
-              <a:spcAft>
-                <a:spcPts val="800"/>
-              </a:spcAft>
-            </a:pPr>
-            <a:r>
-              <a:rPr sz="1500">
+              <a:rPr sz="1800" b="0" i="0">
+                <a:solidFill>
+                  <a:srgbClr val="26251F"/>
+                </a:solidFill>
+                <a:latin typeface="Calibri"/>
+              </a:rPr>
+              <a:t>Secure aggregation lets the server learn only the sum, hiding each client's update [2]; later designs cut its overhead.</a:t>
+            </a:r>
+          </a:p>
+          <a:p>
+            <a:pPr>
+              <a:spcAft>
+                <a:spcPts val="900"/>
+              </a:spcAft>
+            </a:pPr>
+            <a:r>
+              <a:rPr sz="1800">
                 <a:solidFill>
                   <a:srgbClr val="2A78D6"/>
                 </a:solidFill>
@@ -8162,23 +8095,23 @@
               <a:t>▪  </a:t>
             </a:r>
             <a:r>
-              <a:rPr sz="1500" b="0" i="0">
-                <a:solidFill>
-                  <a:srgbClr val="26251F"/>
-                </a:solidFill>
-                <a:latin typeface="Calibri"/>
-              </a:rPr>
-              <a:t>Idea: group clients into overlapping test groups; the server sees only group aggregates, so privacy is preserved.</a:t>
-            </a:r>
-          </a:p>
-          <a:p>
-            <a:pPr>
-              <a:spcAft>
-                <a:spcPts val="800"/>
-              </a:spcAft>
-            </a:pPr>
-            <a:r>
-              <a:rPr sz="1500">
+              <a:rPr sz="1800" b="0" i="0">
+                <a:solidFill>
+                  <a:srgbClr val="26251F"/>
+                </a:solidFill>
+                <a:latin typeface="Calibri"/>
+              </a:rPr>
+              <a:t>Byzantine-robust aggregation resists poisoning but ignores privacy: coordinate-wise median [6] and Multi-Krum [7].</a:t>
+            </a:r>
+          </a:p>
+          <a:p>
+            <a:pPr>
+              <a:spcAft>
+                <a:spcPts val="900"/>
+              </a:spcAft>
+            </a:pPr>
+            <a:r>
+              <a:rPr sz="1800">
                 <a:solidFill>
                   <a:srgbClr val="2A78D6"/>
                 </a:solidFill>
@@ -8187,23 +8120,23 @@
               <a:t>▪  </a:t>
             </a:r>
             <a:r>
-              <a:rPr sz="1500" b="0" i="0">
-                <a:solidFill>
-                  <a:srgbClr val="26251F"/>
-                </a:solidFill>
-                <a:latin typeface="Calibri"/>
-              </a:rPr>
-              <a:t>A statistical test flags groups that contain malicious clients; a decoder then identifies and removes the culprits.</a:t>
-            </a:r>
-          </a:p>
-          <a:p>
-            <a:pPr>
-              <a:spcAft>
-                <a:spcPts val="800"/>
-              </a:spcAft>
-            </a:pPr>
-            <a:r>
-              <a:rPr sz="1500">
+              <a:rPr sz="1800" b="0" i="0">
+                <a:solidFill>
+                  <a:srgbClr val="26251F"/>
+                </a:solidFill>
+                <a:latin typeface="Calibri"/>
+              </a:rPr>
+              <a:t>Group testing identifies a few malicious clients from pooled tests; FedGT [1] brings this idea to secure-aggregation FL.</a:t>
+            </a:r>
+          </a:p>
+          <a:p>
+            <a:pPr>
+              <a:spcAft>
+                <a:spcPts val="900"/>
+              </a:spcAft>
+            </a:pPr>
+            <a:r>
+              <a:rPr sz="1800">
                 <a:solidFill>
                   <a:srgbClr val="2A78D6"/>
                 </a:solidFill>
@@ -8212,13 +8145,13 @@
               <a:t>▪  </a:t>
             </a:r>
             <a:r>
-              <a:rPr sz="1500" b="0" i="0">
-                <a:solidFill>
-                  <a:srgbClr val="26251F"/>
-                </a:solidFill>
-                <a:latin typeface="Calibri"/>
-              </a:rPr>
-              <a:t>Borrowed from group testing: find a few defectives with far fewer pooled tests than testing everyone.</a:t>
+              <a:rPr sz="1800" b="0" i="0">
+                <a:solidFill>
+                  <a:srgbClr val="26251F"/>
+                </a:solidFill>
+                <a:latin typeface="Calibri"/>
+              </a:rPr>
+              <a:t>Gap: no prior work delivers code-based post-quantum confidentiality and Byzantine robustness together.</a:t>
             </a:r>
           </a:p>
         </p:txBody>
@@ -8231,8 +8164,8 @@
         </p:nvSpPr>
         <p:spPr>
           <a:xfrm>
-            <a:off x="685800" y="5943600"/>
-            <a:ext cx="10881360" cy="502920"/>
+            <a:off x="685800" y="5888736"/>
+            <a:ext cx="10881360" cy="548640"/>
           </a:xfrm>
           <a:prstGeom prst="rect">
             <a:avLst/>
@@ -8251,7 +8184,7 @@
               </a:spcAft>
             </a:pPr>
             <a:r>
-              <a:rPr sz="800" b="0" i="1">
+              <a:rPr sz="900" b="0" i="1">
                 <a:solidFill>
                   <a:srgbClr val="26251F"/>
                 </a:solidFill>
@@ -8260,6 +8193,54 @@
               <a:t>[1] M. Xhemrishi, J. Östman, A. Wachter-Zeh, and A. Graell i Amat, "FedGT: Identification of malicious clients in federated learning with secure aggregation," IEEE Trans. Inf. Forensics Security, vol. 20, pp. 2577–2592, 2025.</a:t>
             </a:r>
           </a:p>
+          <a:p>
+            <a:pPr>
+              <a:spcAft>
+                <a:spcPts val="100"/>
+              </a:spcAft>
+            </a:pPr>
+            <a:r>
+              <a:rPr sz="900" b="0" i="1">
+                <a:solidFill>
+                  <a:srgbClr val="26251F"/>
+                </a:solidFill>
+                <a:latin typeface="Calibri"/>
+              </a:rPr>
+              <a:t>[2] K. Bonawitz, V. Ivanov, B. Kreuter, A. Marcedone, H. B. McMahan, S. Patel, D. Ramage, A. Segal, and K. Seth, "Practical secure aggregation for privacy-preserving machine learning," in Proc. ACM CCS, 2017, pp. 1175–1191.</a:t>
+            </a:r>
+          </a:p>
+          <a:p>
+            <a:pPr>
+              <a:spcAft>
+                <a:spcPts val="100"/>
+              </a:spcAft>
+            </a:pPr>
+            <a:r>
+              <a:rPr sz="900" b="0" i="1">
+                <a:solidFill>
+                  <a:srgbClr val="26251F"/>
+                </a:solidFill>
+                <a:latin typeface="Calibri"/>
+              </a:rPr>
+              <a:t>[6] D. Yin, Y. Chen, R. Kannan, and P. Bartlett, "Byzantine-robust distributed learning: Towards optimal statistical rates," in Proc. ICML, 2018, pp. 5650–5659.</a:t>
+            </a:r>
+          </a:p>
+          <a:p>
+            <a:pPr>
+              <a:spcAft>
+                <a:spcPts val="100"/>
+              </a:spcAft>
+            </a:pPr>
+            <a:r>
+              <a:rPr sz="900" b="0" i="1">
+                <a:solidFill>
+                  <a:srgbClr val="26251F"/>
+                </a:solidFill>
+                <a:latin typeface="Calibri"/>
+              </a:rPr>
+              <a:t>[7] P. Blanchard, E. M. El Mhamdi, R. Guerraoui, and J. Stainer, "Machine learning with adversaries: Byzantine tolerant gradient descent," in Proc. NeurIPS, 2017, pp. 119–129.</a:t>
+            </a:r>
+          </a:p>
         </p:txBody>
       </p:sp>
       <p:sp>
@@ -8270,8 +8251,8 @@
         </p:nvSpPr>
         <p:spPr>
           <a:xfrm>
-            <a:off x="11018520" y="6446520"/>
-            <a:ext cx="914400" cy="274320"/>
+            <a:off x="10927080" y="6419088"/>
+            <a:ext cx="1005840" cy="292608"/>
           </a:xfrm>
           <a:prstGeom prst="rect">
             <a:avLst/>
@@ -8286,7 +8267,7 @@
           <a:p>
             <a:pPr algn="r"/>
             <a:r>
-              <a:rPr sz="1050" b="0" i="0">
+              <a:rPr sz="1200" b="0" i="0">
                 <a:solidFill>
                   <a:srgbClr val="898781"/>
                 </a:solidFill>
@@ -8323,28 +8304,28 @@
         </p:nvSpPr>
         <p:spPr>
           <a:xfrm>
-            <a:off x="685800" y="438912"/>
-            <a:ext cx="10881360" cy="822960"/>
-          </a:xfrm>
-          <a:prstGeom prst="rect">
-            <a:avLst/>
-          </a:prstGeom>
-          <a:noFill/>
-        </p:spPr>
-        <p:txBody>
-          <a:bodyPr wrap="square">
-            <a:spAutoFit/>
-          </a:bodyPr>
-          <a:lstStyle/>
-          <a:p>
-            <a:r>
-              <a:rPr sz="3000" b="1" i="0">
+            <a:off x="685800" y="384048"/>
+            <a:ext cx="10881360" cy="868680"/>
+          </a:xfrm>
+          <a:prstGeom prst="rect">
+            <a:avLst/>
+          </a:prstGeom>
+          <a:noFill/>
+        </p:spPr>
+        <p:txBody>
+          <a:bodyPr wrap="square">
+            <a:spAutoFit/>
+          </a:bodyPr>
+          <a:lstStyle/>
+          <a:p>
+            <a:r>
+              <a:rPr sz="3400" b="1" i="0">
                 <a:solidFill>
                   <a:srgbClr val="0B0B0B"/>
                 </a:solidFill>
                 <a:latin typeface="Calibri"/>
               </a:rPr>
-              <a:t>Methodology (Base Paper)</a:t>
+              <a:t>Related Work: Closest Peer (FedGT)</a:t>
             </a:r>
           </a:p>
         </p:txBody>
@@ -8357,27 +8338,27 @@
         </p:nvSpPr>
         <p:spPr>
           <a:xfrm>
-            <a:off x="685800" y="1371600"/>
-            <a:ext cx="10881360" cy="3931920"/>
-          </a:xfrm>
-          <a:prstGeom prst="rect">
-            <a:avLst/>
-          </a:prstGeom>
-          <a:noFill/>
-        </p:spPr>
-        <p:txBody>
-          <a:bodyPr wrap="square">
-            <a:spAutoFit/>
-          </a:bodyPr>
-          <a:lstStyle/>
-          <a:p>
-            <a:pPr>
-              <a:spcAft>
-                <a:spcPts val="800"/>
-              </a:spcAft>
-            </a:pPr>
-            <a:r>
-              <a:rPr sz="1500">
+            <a:off x="685800" y="1417320"/>
+            <a:ext cx="10881360" cy="4023360"/>
+          </a:xfrm>
+          <a:prstGeom prst="rect">
+            <a:avLst/>
+          </a:prstGeom>
+          <a:noFill/>
+        </p:spPr>
+        <p:txBody>
+          <a:bodyPr wrap="square">
+            <a:spAutoFit/>
+          </a:bodyPr>
+          <a:lstStyle/>
+          <a:p>
+            <a:pPr>
+              <a:spcAft>
+                <a:spcPts val="900"/>
+              </a:spcAft>
+            </a:pPr>
+            <a:r>
+              <a:rPr sz="1800">
                 <a:solidFill>
                   <a:srgbClr val="2A78D6"/>
                 </a:solidFill>
@@ -8386,23 +8367,23 @@
               <a:t>▪  </a:t>
             </a:r>
             <a:r>
-              <a:rPr sz="1500" b="0" i="0">
-                <a:solidFill>
-                  <a:srgbClr val="26251F"/>
-                </a:solidFill>
-                <a:latin typeface="Calibri"/>
-              </a:rPr>
-              <a:t>In FedGT [1], an assignment matrix groups n clients into m overlapping groups (the parity-check structure of a code).</a:t>
-            </a:r>
-          </a:p>
-          <a:p>
-            <a:pPr>
-              <a:spcAft>
-                <a:spcPts val="800"/>
-              </a:spcAft>
-            </a:pPr>
-            <a:r>
-              <a:rPr sz="1500">
+              <a:rPr sz="1800" b="0" i="0">
+                <a:solidFill>
+                  <a:srgbClr val="26251F"/>
+                </a:solidFill>
+                <a:latin typeface="Calibri"/>
+              </a:rPr>
+              <a:t>FedGT [1] (IEEE TIFS, 2025) is the closest peer to our robustness mechanism.</a:t>
+            </a:r>
+          </a:p>
+          <a:p>
+            <a:pPr>
+              <a:spcAft>
+                <a:spcPts val="900"/>
+              </a:spcAft>
+            </a:pPr>
+            <a:r>
+              <a:rPr sz="1800">
                 <a:solidFill>
                   <a:srgbClr val="2A78D6"/>
                 </a:solidFill>
@@ -8411,23 +8392,23 @@
               <a:t>▪  </a:t>
             </a:r>
             <a:r>
-              <a:rPr sz="1500" b="0" i="0">
-                <a:solidFill>
-                  <a:srgbClr val="26251F"/>
-                </a:solidFill>
-                <a:latin typeface="Calibri"/>
-              </a:rPr>
-              <a:t>Each group is securely aggregated; a test on the group aggregate is positive if any member is malicious.</a:t>
-            </a:r>
-          </a:p>
-          <a:p>
-            <a:pPr>
-              <a:spcAft>
-                <a:spcPts val="800"/>
-              </a:spcAft>
-            </a:pPr>
-            <a:r>
-              <a:rPr sz="1500">
+              <a:rPr sz="1800" b="0" i="0">
+                <a:solidFill>
+                  <a:srgbClr val="26251F"/>
+                </a:solidFill>
+                <a:latin typeface="Calibri"/>
+              </a:rPr>
+              <a:t>Idea: group clients into overlapping test groups; the server sees only group aggregates, so privacy is preserved.</a:t>
+            </a:r>
+          </a:p>
+          <a:p>
+            <a:pPr>
+              <a:spcAft>
+                <a:spcPts val="900"/>
+              </a:spcAft>
+            </a:pPr>
+            <a:r>
+              <a:rPr sz="1800">
                 <a:solidFill>
                   <a:srgbClr val="2A78D6"/>
                 </a:solidFill>
@@ -8436,23 +8417,23 @@
               <a:t>▪  </a:t>
             </a:r>
             <a:r>
-              <a:rPr sz="1500" b="0" i="0">
-                <a:solidFill>
-                  <a:srgbClr val="26251F"/>
-                </a:solidFill>
-                <a:latin typeface="Calibri"/>
-              </a:rPr>
-              <a:t>A COMP / Neyman-Pearson decoder infers which clients are malicious from the group test results.</a:t>
-            </a:r>
-          </a:p>
-          <a:p>
-            <a:pPr>
-              <a:spcAft>
-                <a:spcPts val="800"/>
-              </a:spcAft>
-            </a:pPr>
-            <a:r>
-              <a:rPr sz="1500">
+              <a:rPr sz="1800" b="0" i="0">
+                <a:solidFill>
+                  <a:srgbClr val="26251F"/>
+                </a:solidFill>
+                <a:latin typeface="Calibri"/>
+              </a:rPr>
+              <a:t>A statistical test flags groups that contain malicious clients; a decoder then identifies and removes the culprits.</a:t>
+            </a:r>
+          </a:p>
+          <a:p>
+            <a:pPr>
+              <a:spcAft>
+                <a:spcPts val="900"/>
+              </a:spcAft>
+            </a:pPr>
+            <a:r>
+              <a:rPr sz="1800">
                 <a:solidFill>
                   <a:srgbClr val="2A78D6"/>
                 </a:solidFill>
@@ -8461,13 +8442,13 @@
               <a:t>▪  </a:t>
             </a:r>
             <a:r>
-              <a:rPr sz="1500" b="0" i="0">
-                <a:solidFill>
-                  <a:srgbClr val="26251F"/>
-                </a:solidFill>
-                <a:latin typeface="Calibri"/>
-              </a:rPr>
-              <a:t>Flagged clients are excluded; the remaining clean clients are aggregated into the global model.</a:t>
+              <a:rPr sz="1800" b="0" i="0">
+                <a:solidFill>
+                  <a:srgbClr val="26251F"/>
+                </a:solidFill>
+                <a:latin typeface="Calibri"/>
+              </a:rPr>
+              <a:t>Borrowed from group testing: find a few defectives with far fewer pooled tests than testing everyone.</a:t>
             </a:r>
           </a:p>
         </p:txBody>
@@ -8480,8 +8461,8 @@
         </p:nvSpPr>
         <p:spPr>
           <a:xfrm>
-            <a:off x="685800" y="5943600"/>
-            <a:ext cx="10881360" cy="502920"/>
+            <a:off x="685800" y="5888736"/>
+            <a:ext cx="10881360" cy="548640"/>
           </a:xfrm>
           <a:prstGeom prst="rect">
             <a:avLst/>
@@ -8500,7 +8481,7 @@
               </a:spcAft>
             </a:pPr>
             <a:r>
-              <a:rPr sz="800" b="0" i="1">
+              <a:rPr sz="900" b="0" i="1">
                 <a:solidFill>
                   <a:srgbClr val="26251F"/>
                 </a:solidFill>
@@ -8519,8 +8500,8 @@
         </p:nvSpPr>
         <p:spPr>
           <a:xfrm>
-            <a:off x="11018520" y="6446520"/>
-            <a:ext cx="914400" cy="274320"/>
+            <a:off x="10927080" y="6419088"/>
+            <a:ext cx="1005840" cy="292608"/>
           </a:xfrm>
           <a:prstGeom prst="rect">
             <a:avLst/>
@@ -8535,7 +8516,7 @@
           <a:p>
             <a:pPr algn="r"/>
             <a:r>
-              <a:rPr sz="1050" b="0" i="0">
+              <a:rPr sz="1200" b="0" i="0">
                 <a:solidFill>
                   <a:srgbClr val="898781"/>
                 </a:solidFill>
@@ -8572,28 +8553,28 @@
         </p:nvSpPr>
         <p:spPr>
           <a:xfrm>
-            <a:off x="685800" y="438912"/>
-            <a:ext cx="10881360" cy="822960"/>
-          </a:xfrm>
-          <a:prstGeom prst="rect">
-            <a:avLst/>
-          </a:prstGeom>
-          <a:noFill/>
-        </p:spPr>
-        <p:txBody>
-          <a:bodyPr wrap="square">
-            <a:spAutoFit/>
-          </a:bodyPr>
-          <a:lstStyle/>
-          <a:p>
-            <a:r>
-              <a:rPr sz="3000" b="1" i="0">
+            <a:off x="685800" y="384048"/>
+            <a:ext cx="10881360" cy="868680"/>
+          </a:xfrm>
+          <a:prstGeom prst="rect">
+            <a:avLst/>
+          </a:prstGeom>
+          <a:noFill/>
+        </p:spPr>
+        <p:txBody>
+          <a:bodyPr wrap="square">
+            <a:spAutoFit/>
+          </a:bodyPr>
+          <a:lstStyle/>
+          <a:p>
+            <a:r>
+              <a:rPr sz="3400" b="1" i="0">
                 <a:solidFill>
                   <a:srgbClr val="0B0B0B"/>
                 </a:solidFill>
                 <a:latin typeface="Calibri"/>
               </a:rPr>
-              <a:t>Limitations</a:t>
+              <a:t>Methodology (Base Paper)</a:t>
             </a:r>
           </a:p>
         </p:txBody>
@@ -8606,27 +8587,27 @@
         </p:nvSpPr>
         <p:spPr>
           <a:xfrm>
-            <a:off x="685800" y="1371600"/>
-            <a:ext cx="10881360" cy="3931920"/>
-          </a:xfrm>
-          <a:prstGeom prst="rect">
-            <a:avLst/>
-          </a:prstGeom>
-          <a:noFill/>
-        </p:spPr>
-        <p:txBody>
-          <a:bodyPr wrap="square">
-            <a:spAutoFit/>
-          </a:bodyPr>
-          <a:lstStyle/>
-          <a:p>
-            <a:pPr>
-              <a:spcAft>
-                <a:spcPts val="800"/>
-              </a:spcAft>
-            </a:pPr>
-            <a:r>
-              <a:rPr sz="1500">
+            <a:off x="685800" y="1417320"/>
+            <a:ext cx="10881360" cy="4023360"/>
+          </a:xfrm>
+          <a:prstGeom prst="rect">
+            <a:avLst/>
+          </a:prstGeom>
+          <a:noFill/>
+        </p:spPr>
+        <p:txBody>
+          <a:bodyPr wrap="square">
+            <a:spAutoFit/>
+          </a:bodyPr>
+          <a:lstStyle/>
+          <a:p>
+            <a:pPr>
+              <a:spcAft>
+                <a:spcPts val="900"/>
+              </a:spcAft>
+            </a:pPr>
+            <a:r>
+              <a:rPr sz="1800">
                 <a:solidFill>
                   <a:srgbClr val="2A78D6"/>
                 </a:solidFill>
@@ -8635,41 +8616,23 @@
               <a:t>▪  </a:t>
             </a:r>
             <a:r>
-              <a:rPr sz="1500" b="0" i="0">
-                <a:solidFill>
-                  <a:srgbClr val="26251F"/>
-                </a:solidFill>
-                <a:latin typeface="Calibri"/>
-              </a:rPr>
-              <a:t>Crypto: FedGT [1] treats secure aggregation as a black box, with </a:t>
-            </a:r>
-            <a:r>
-              <a:rPr sz="1500" b="1" i="0">
-                <a:solidFill>
-                  <a:srgbClr val="0B0B0B"/>
-                </a:solidFill>
-                <a:latin typeface="Calibri"/>
-              </a:rPr>
-              <a:t>no post-quantum layer</a:t>
-            </a:r>
-            <a:r>
-              <a:rPr sz="1500" b="0" i="0">
-                <a:solidFill>
-                  <a:srgbClr val="26251F"/>
-                </a:solidFill>
-                <a:latin typeface="Calibri"/>
-              </a:rPr>
-              <a:t>, in a lattice-only field.</a:t>
-            </a:r>
-          </a:p>
-          <a:p>
-            <a:pPr>
-              <a:spcAft>
-                <a:spcPts val="800"/>
-              </a:spcAft>
-            </a:pPr>
-            <a:r>
-              <a:rPr sz="1500">
+              <a:rPr sz="1800" b="0" i="0">
+                <a:solidFill>
+                  <a:srgbClr val="26251F"/>
+                </a:solidFill>
+                <a:latin typeface="Calibri"/>
+              </a:rPr>
+              <a:t>In FedGT [1], an assignment matrix groups n clients into m overlapping groups (the parity-check structure of a code).</a:t>
+            </a:r>
+          </a:p>
+          <a:p>
+            <a:pPr>
+              <a:spcAft>
+                <a:spcPts val="900"/>
+              </a:spcAft>
+            </a:pPr>
+            <a:r>
+              <a:rPr sz="1800">
                 <a:solidFill>
                   <a:srgbClr val="2A78D6"/>
                 </a:solidFill>
@@ -8678,41 +8641,23 @@
               <a:t>▪  </a:t>
             </a:r>
             <a:r>
-              <a:rPr sz="1500" b="0" i="0">
-                <a:solidFill>
-                  <a:srgbClr val="26251F"/>
-                </a:solidFill>
-                <a:latin typeface="Calibri"/>
-              </a:rPr>
-              <a:t>Cost: it needs a </a:t>
-            </a:r>
-            <a:r>
-              <a:rPr sz="1500" b="1" i="0">
-                <a:solidFill>
-                  <a:srgbClr val="0B0B0B"/>
-                </a:solidFill>
-                <a:latin typeface="Calibri"/>
-              </a:rPr>
-              <a:t>server validation set</a:t>
-            </a:r>
-            <a:r>
-              <a:rPr sz="1500" b="0" i="0">
-                <a:solidFill>
-                  <a:srgbClr val="26251F"/>
-                </a:solidFill>
-                <a:latin typeface="Calibri"/>
-              </a:rPr>
-              <a:t> and per-round group testing over fixed overlapping groups.</a:t>
-            </a:r>
-          </a:p>
-          <a:p>
-            <a:pPr>
-              <a:spcAft>
-                <a:spcPts val="800"/>
-              </a:spcAft>
-            </a:pPr>
-            <a:r>
-              <a:rPr sz="1500">
+              <a:rPr sz="1800" b="0" i="0">
+                <a:solidFill>
+                  <a:srgbClr val="26251F"/>
+                </a:solidFill>
+                <a:latin typeface="Calibri"/>
+              </a:rPr>
+              <a:t>Each group is securely aggregated; a test on the group aggregate is positive if any member is malicious.</a:t>
+            </a:r>
+          </a:p>
+          <a:p>
+            <a:pPr>
+              <a:spcAft>
+                <a:spcPts val="900"/>
+              </a:spcAft>
+            </a:pPr>
+            <a:r>
+              <a:rPr sz="1800">
                 <a:solidFill>
                   <a:srgbClr val="2A78D6"/>
                 </a:solidFill>
@@ -8721,41 +8666,23 @@
               <a:t>▪  </a:t>
             </a:r>
             <a:r>
-              <a:rPr sz="1500" b="0" i="0">
-                <a:solidFill>
-                  <a:srgbClr val="26251F"/>
-                </a:solidFill>
-                <a:latin typeface="Calibri"/>
-              </a:rPr>
-              <a:t>Single-round decode: it identifies attackers from </a:t>
-            </a:r>
-            <a:r>
-              <a:rPr sz="1500" b="1" i="0">
-                <a:solidFill>
-                  <a:srgbClr val="0B0B0B"/>
-                </a:solidFill>
-                <a:latin typeface="Calibri"/>
-              </a:rPr>
-              <a:t>one round's tests</a:t>
-            </a:r>
-            <a:r>
-              <a:rPr sz="1500" b="0" i="0">
-                <a:solidFill>
-                  <a:srgbClr val="26251F"/>
-                </a:solidFill>
-                <a:latin typeface="Calibri"/>
-              </a:rPr>
-              <a:t>, using no information across rounds.</a:t>
-            </a:r>
-          </a:p>
-          <a:p>
-            <a:pPr>
-              <a:spcAft>
-                <a:spcPts val="800"/>
-              </a:spcAft>
-            </a:pPr>
-            <a:r>
-              <a:rPr sz="1500">
+              <a:rPr sz="1800" b="0" i="0">
+                <a:solidFill>
+                  <a:srgbClr val="26251F"/>
+                </a:solidFill>
+                <a:latin typeface="Calibri"/>
+              </a:rPr>
+              <a:t>A COMP / Neyman-Pearson decoder infers which clients are malicious from the group test results.</a:t>
+            </a:r>
+          </a:p>
+          <a:p>
+            <a:pPr>
+              <a:spcAft>
+                <a:spcPts val="900"/>
+              </a:spcAft>
+            </a:pPr>
+            <a:r>
+              <a:rPr sz="1800">
                 <a:solidFill>
                   <a:srgbClr val="2A78D6"/>
                 </a:solidFill>
@@ -8764,31 +8691,13 @@
               <a:t>▪  </a:t>
             </a:r>
             <a:r>
-              <a:rPr sz="1500" b="0" i="0">
-                <a:solidFill>
-                  <a:srgbClr val="26251F"/>
-                </a:solidFill>
-                <a:latin typeface="Calibri"/>
-              </a:rPr>
-              <a:t>Unexplained failure: it does not characterize </a:t>
-            </a:r>
-            <a:r>
-              <a:rPr sz="1500" b="1" i="0">
-                <a:solidFill>
-                  <a:srgbClr val="0B0B0B"/>
-                </a:solidFill>
-                <a:latin typeface="Calibri"/>
-              </a:rPr>
-              <a:t>why ordinary robust aggregation breaks</a:t>
-            </a:r>
-            <a:r>
-              <a:rPr sz="1500" b="0" i="0">
-                <a:solidFill>
-                  <a:srgbClr val="26251F"/>
-                </a:solidFill>
-                <a:latin typeface="Calibri"/>
-              </a:rPr>
-              <a:t> once updates are hidden.</a:t>
+              <a:rPr sz="1800" b="0" i="0">
+                <a:solidFill>
+                  <a:srgbClr val="26251F"/>
+                </a:solidFill>
+                <a:latin typeface="Calibri"/>
+              </a:rPr>
+              <a:t>Flagged clients are excluded; the remaining clean clients are aggregated into the global model.</a:t>
             </a:r>
           </a:p>
         </p:txBody>
@@ -8801,8 +8710,8 @@
         </p:nvSpPr>
         <p:spPr>
           <a:xfrm>
-            <a:off x="685800" y="5943600"/>
-            <a:ext cx="10881360" cy="502920"/>
+            <a:off x="685800" y="5888736"/>
+            <a:ext cx="10881360" cy="548640"/>
           </a:xfrm>
           <a:prstGeom prst="rect">
             <a:avLst/>
@@ -8821,7 +8730,7 @@
               </a:spcAft>
             </a:pPr>
             <a:r>
-              <a:rPr sz="800" b="0" i="1">
+              <a:rPr sz="900" b="0" i="1">
                 <a:solidFill>
                   <a:srgbClr val="26251F"/>
                 </a:solidFill>
@@ -8840,8 +8749,8 @@
         </p:nvSpPr>
         <p:spPr>
           <a:xfrm>
-            <a:off x="11018520" y="6446520"/>
-            <a:ext cx="914400" cy="274320"/>
+            <a:off x="10927080" y="6419088"/>
+            <a:ext cx="1005840" cy="292608"/>
           </a:xfrm>
           <a:prstGeom prst="rect">
             <a:avLst/>
@@ -8856,7 +8765,7 @@
           <a:p>
             <a:pPr algn="r"/>
             <a:r>
-              <a:rPr sz="1050" b="0" i="0">
+              <a:rPr sz="1200" b="0" i="0">
                 <a:solidFill>
                   <a:srgbClr val="898781"/>
                 </a:solidFill>
@@ -8893,28 +8802,28 @@
         </p:nvSpPr>
         <p:spPr>
           <a:xfrm>
-            <a:off x="685800" y="438912"/>
-            <a:ext cx="10881360" cy="822960"/>
-          </a:xfrm>
-          <a:prstGeom prst="rect">
-            <a:avLst/>
-          </a:prstGeom>
-          <a:noFill/>
-        </p:spPr>
-        <p:txBody>
-          <a:bodyPr wrap="square">
-            <a:spAutoFit/>
-          </a:bodyPr>
-          <a:lstStyle/>
-          <a:p>
-            <a:r>
-              <a:rPr sz="3000" b="1" i="0">
+            <a:off x="685800" y="384048"/>
+            <a:ext cx="10881360" cy="868680"/>
+          </a:xfrm>
+          <a:prstGeom prst="rect">
+            <a:avLst/>
+          </a:prstGeom>
+          <a:noFill/>
+        </p:spPr>
+        <p:txBody>
+          <a:bodyPr wrap="square">
+            <a:spAutoFit/>
+          </a:bodyPr>
+          <a:lstStyle/>
+          <a:p>
+            <a:r>
+              <a:rPr sz="3400" b="1" i="0">
                 <a:solidFill>
                   <a:srgbClr val="0B0B0B"/>
                 </a:solidFill>
                 <a:latin typeface="Calibri"/>
               </a:rPr>
-              <a:t>Paper Selection</a:t>
+              <a:t>Limitations</a:t>
             </a:r>
           </a:p>
         </p:txBody>
@@ -8927,27 +8836,27 @@
         </p:nvSpPr>
         <p:spPr>
           <a:xfrm>
-            <a:off x="685800" y="1371600"/>
-            <a:ext cx="10881360" cy="3931920"/>
-          </a:xfrm>
-          <a:prstGeom prst="rect">
-            <a:avLst/>
-          </a:prstGeom>
-          <a:noFill/>
-        </p:spPr>
-        <p:txBody>
-          <a:bodyPr wrap="square">
-            <a:spAutoFit/>
-          </a:bodyPr>
-          <a:lstStyle/>
-          <a:p>
-            <a:pPr>
-              <a:spcAft>
-                <a:spcPts val="800"/>
-              </a:spcAft>
-            </a:pPr>
-            <a:r>
-              <a:rPr sz="1500">
+            <a:off x="685800" y="1417320"/>
+            <a:ext cx="10881360" cy="4023360"/>
+          </a:xfrm>
+          <a:prstGeom prst="rect">
+            <a:avLst/>
+          </a:prstGeom>
+          <a:noFill/>
+        </p:spPr>
+        <p:txBody>
+          <a:bodyPr wrap="square">
+            <a:spAutoFit/>
+          </a:bodyPr>
+          <a:lstStyle/>
+          <a:p>
+            <a:pPr>
+              <a:spcAft>
+                <a:spcPts val="900"/>
+              </a:spcAft>
+            </a:pPr>
+            <a:r>
+              <a:rPr sz="1800">
                 <a:solidFill>
                   <a:srgbClr val="2A78D6"/>
                 </a:solidFill>
@@ -8956,23 +8865,41 @@
               <a:t>▪  </a:t>
             </a:r>
             <a:r>
-              <a:rPr sz="1500" b="0" i="0">
-                <a:solidFill>
-                  <a:srgbClr val="26251F"/>
-                </a:solidFill>
-                <a:latin typeface="Calibri"/>
-              </a:rPr>
-              <a:t>Venue quality: FedGT [1] is in IEEE TIFS, a Q1 security journal. Recency: published 2025.</a:t>
-            </a:r>
-          </a:p>
-          <a:p>
-            <a:pPr>
-              <a:spcAft>
-                <a:spcPts val="800"/>
-              </a:spcAft>
-            </a:pPr>
-            <a:r>
-              <a:rPr sz="1500">
+              <a:rPr sz="1800" b="0" i="0">
+                <a:solidFill>
+                  <a:srgbClr val="26251F"/>
+                </a:solidFill>
+                <a:latin typeface="Calibri"/>
+              </a:rPr>
+              <a:t>Crypto: FedGT [1] treats secure aggregation as a black box, with </a:t>
+            </a:r>
+            <a:r>
+              <a:rPr sz="1800" b="1" i="0">
+                <a:solidFill>
+                  <a:srgbClr val="0B0B0B"/>
+                </a:solidFill>
+                <a:latin typeface="Calibri"/>
+              </a:rPr>
+              <a:t>no post-quantum layer</a:t>
+            </a:r>
+            <a:r>
+              <a:rPr sz="1800" b="0" i="0">
+                <a:solidFill>
+                  <a:srgbClr val="26251F"/>
+                </a:solidFill>
+                <a:latin typeface="Calibri"/>
+              </a:rPr>
+              <a:t>, in a lattice-only field.</a:t>
+            </a:r>
+          </a:p>
+          <a:p>
+            <a:pPr>
+              <a:spcAft>
+                <a:spcPts val="900"/>
+              </a:spcAft>
+            </a:pPr>
+            <a:r>
+              <a:rPr sz="1800">
                 <a:solidFill>
                   <a:srgbClr val="2A78D6"/>
                 </a:solidFill>
@@ -8981,23 +8908,41 @@
               <a:t>▪  </a:t>
             </a:r>
             <a:r>
-              <a:rPr sz="1500" b="0" i="0">
-                <a:solidFill>
-                  <a:srgbClr val="26251F"/>
-                </a:solidFill>
-                <a:latin typeface="Calibri"/>
-              </a:rPr>
-              <a:t>Relevance: it solves our exact sub-problem, malicious-client identification under secure aggregation.</a:t>
-            </a:r>
-          </a:p>
-          <a:p>
-            <a:pPr>
-              <a:spcAft>
-                <a:spcPts val="800"/>
-              </a:spcAft>
-            </a:pPr>
-            <a:r>
-              <a:rPr sz="1500">
+              <a:rPr sz="1800" b="0" i="0">
+                <a:solidFill>
+                  <a:srgbClr val="26251F"/>
+                </a:solidFill>
+                <a:latin typeface="Calibri"/>
+              </a:rPr>
+              <a:t>Cost: it needs a </a:t>
+            </a:r>
+            <a:r>
+              <a:rPr sz="1800" b="1" i="0">
+                <a:solidFill>
+                  <a:srgbClr val="0B0B0B"/>
+                </a:solidFill>
+                <a:latin typeface="Calibri"/>
+              </a:rPr>
+              <a:t>server validation set</a:t>
+            </a:r>
+            <a:r>
+              <a:rPr sz="1800" b="0" i="0">
+                <a:solidFill>
+                  <a:srgbClr val="26251F"/>
+                </a:solidFill>
+                <a:latin typeface="Calibri"/>
+              </a:rPr>
+              <a:t> and per-round group testing over fixed overlapping groups.</a:t>
+            </a:r>
+          </a:p>
+          <a:p>
+            <a:pPr>
+              <a:spcAft>
+                <a:spcPts val="900"/>
+              </a:spcAft>
+            </a:pPr>
+            <a:r>
+              <a:rPr sz="1800">
                 <a:solidFill>
                   <a:srgbClr val="2A78D6"/>
                 </a:solidFill>
@@ -9006,23 +8951,41 @@
               <a:t>▪  </a:t>
             </a:r>
             <a:r>
-              <a:rPr sz="1500" b="0" i="0">
-                <a:solidFill>
-                  <a:srgbClr val="26251F"/>
-                </a:solidFill>
-                <a:latin typeface="Calibri"/>
-              </a:rPr>
-              <a:t>Method strength: its group testing outperforms the geometric median (RFA) [8] and Multi-Krum in its own study.</a:t>
-            </a:r>
-          </a:p>
-          <a:p>
-            <a:pPr>
-              <a:spcAft>
-                <a:spcPts val="800"/>
-              </a:spcAft>
-            </a:pPr>
-            <a:r>
-              <a:rPr sz="1500">
+              <a:rPr sz="1800" b="0" i="0">
+                <a:solidFill>
+                  <a:srgbClr val="26251F"/>
+                </a:solidFill>
+                <a:latin typeface="Calibri"/>
+              </a:rPr>
+              <a:t>Single-round decode: it identifies attackers from </a:t>
+            </a:r>
+            <a:r>
+              <a:rPr sz="1800" b="1" i="0">
+                <a:solidFill>
+                  <a:srgbClr val="0B0B0B"/>
+                </a:solidFill>
+                <a:latin typeface="Calibri"/>
+              </a:rPr>
+              <a:t>one round's tests</a:t>
+            </a:r>
+            <a:r>
+              <a:rPr sz="1800" b="0" i="0">
+                <a:solidFill>
+                  <a:srgbClr val="26251F"/>
+                </a:solidFill>
+                <a:latin typeface="Calibri"/>
+              </a:rPr>
+              <a:t>, using no information across rounds.</a:t>
+            </a:r>
+          </a:p>
+          <a:p>
+            <a:pPr>
+              <a:spcAft>
+                <a:spcPts val="900"/>
+              </a:spcAft>
+            </a:pPr>
+            <a:r>
+              <a:rPr sz="1800">
                 <a:solidFill>
                   <a:srgbClr val="2A78D6"/>
                 </a:solidFill>
@@ -9031,13 +8994,31 @@
               <a:t>▪  </a:t>
             </a:r>
             <a:r>
-              <a:rPr sz="1500" b="0" i="0">
-                <a:solidFill>
-                  <a:srgbClr val="26251F"/>
-                </a:solidFill>
-                <a:latin typeface="Calibri"/>
-              </a:rPr>
-              <a:t>Reproducible: public code and a clearly specified protocol, a solid foundation to build on.</a:t>
+              <a:rPr sz="1800" b="0" i="0">
+                <a:solidFill>
+                  <a:srgbClr val="26251F"/>
+                </a:solidFill>
+                <a:latin typeface="Calibri"/>
+              </a:rPr>
+              <a:t>Unexplained failure: it does not characterize </a:t>
+            </a:r>
+            <a:r>
+              <a:rPr sz="1800" b="1" i="0">
+                <a:solidFill>
+                  <a:srgbClr val="0B0B0B"/>
+                </a:solidFill>
+                <a:latin typeface="Calibri"/>
+              </a:rPr>
+              <a:t>why ordinary robust aggregation breaks</a:t>
+            </a:r>
+            <a:r>
+              <a:rPr sz="1800" b="0" i="0">
+                <a:solidFill>
+                  <a:srgbClr val="26251F"/>
+                </a:solidFill>
+                <a:latin typeface="Calibri"/>
+              </a:rPr>
+              <a:t> once updates are hidden.</a:t>
             </a:r>
           </a:p>
         </p:txBody>
@@ -9050,8 +9031,8 @@
         </p:nvSpPr>
         <p:spPr>
           <a:xfrm>
-            <a:off x="685800" y="5943600"/>
-            <a:ext cx="10881360" cy="502920"/>
+            <a:off x="685800" y="5888736"/>
+            <a:ext cx="10881360" cy="548640"/>
           </a:xfrm>
           <a:prstGeom prst="rect">
             <a:avLst/>
@@ -9070,7 +9051,7 @@
               </a:spcAft>
             </a:pPr>
             <a:r>
-              <a:rPr sz="800" b="0" i="1">
+              <a:rPr sz="900" b="0" i="1">
                 <a:solidFill>
                   <a:srgbClr val="26251F"/>
                 </a:solidFill>
@@ -9079,22 +9060,6 @@
               <a:t>[1] M. Xhemrishi, J. Östman, A. Wachter-Zeh, and A. Graell i Amat, "FedGT: Identification of malicious clients in federated learning with secure aggregation," IEEE Trans. Inf. Forensics Security, vol. 20, pp. 2577–2592, 2025.</a:t>
             </a:r>
           </a:p>
-          <a:p>
-            <a:pPr>
-              <a:spcAft>
-                <a:spcPts val="100"/>
-              </a:spcAft>
-            </a:pPr>
-            <a:r>
-              <a:rPr sz="800" b="0" i="1">
-                <a:solidFill>
-                  <a:srgbClr val="26251F"/>
-                </a:solidFill>
-                <a:latin typeface="Calibri"/>
-              </a:rPr>
-              <a:t>[8] K. Pillutla, S. M. Kakade, and Z. Harchaoui, "Robust aggregation for federated learning," IEEE Trans. Signal Process., vol. 70, pp. 1142–1154, 2022.</a:t>
-            </a:r>
-          </a:p>
         </p:txBody>
       </p:sp>
       <p:sp>
@@ -9105,8 +9070,8 @@
         </p:nvSpPr>
         <p:spPr>
           <a:xfrm>
-            <a:off x="11018520" y="6446520"/>
-            <a:ext cx="914400" cy="274320"/>
+            <a:off x="10927080" y="6419088"/>
+            <a:ext cx="1005840" cy="292608"/>
           </a:xfrm>
           <a:prstGeom prst="rect">
             <a:avLst/>
@@ -9121,7 +9086,7 @@
           <a:p>
             <a:pPr algn="r"/>
             <a:r>
-              <a:rPr sz="1050" b="0" i="0">
+              <a:rPr sz="1200" b="0" i="0">
                 <a:solidFill>
                   <a:srgbClr val="898781"/>
                 </a:solidFill>
@@ -9158,28 +9123,28 @@
         </p:nvSpPr>
         <p:spPr>
           <a:xfrm>
-            <a:off x="685800" y="438912"/>
-            <a:ext cx="10881360" cy="822960"/>
-          </a:xfrm>
-          <a:prstGeom prst="rect">
-            <a:avLst/>
-          </a:prstGeom>
-          <a:noFill/>
-        </p:spPr>
-        <p:txBody>
-          <a:bodyPr wrap="square">
-            <a:spAutoFit/>
-          </a:bodyPr>
-          <a:lstStyle/>
-          <a:p>
-            <a:r>
-              <a:rPr sz="3000" b="1" i="0">
+            <a:off x="685800" y="384048"/>
+            <a:ext cx="10881360" cy="868680"/>
+          </a:xfrm>
+          <a:prstGeom prst="rect">
+            <a:avLst/>
+          </a:prstGeom>
+          <a:noFill/>
+        </p:spPr>
+        <p:txBody>
+          <a:bodyPr wrap="square">
+            <a:spAutoFit/>
+          </a:bodyPr>
+          <a:lstStyle/>
+          <a:p>
+            <a:r>
+              <a:rPr sz="3400" b="1" i="0">
                 <a:solidFill>
                   <a:srgbClr val="0B0B0B"/>
                 </a:solidFill>
                 <a:latin typeface="Calibri"/>
               </a:rPr>
-              <a:t>Proposed Method</a:t>
+              <a:t>Research Question and Objective</a:t>
             </a:r>
           </a:p>
         </p:txBody>
@@ -9192,28 +9157,28 @@
         </p:nvSpPr>
         <p:spPr>
           <a:xfrm>
-            <a:off x="685800" y="1371600"/>
-            <a:ext cx="10881360" cy="457200"/>
-          </a:xfrm>
-          <a:prstGeom prst="rect">
-            <a:avLst/>
-          </a:prstGeom>
-          <a:noFill/>
-        </p:spPr>
-        <p:txBody>
-          <a:bodyPr wrap="square">
-            <a:spAutoFit/>
-          </a:bodyPr>
-          <a:lstStyle/>
-          <a:p>
-            <a:r>
-              <a:rPr sz="1400" b="0" i="1">
-                <a:solidFill>
-                  <a:srgbClr val="26251F"/>
-                </a:solidFill>
-                <a:latin typeface="Calibri"/>
-              </a:rPr>
-              <a:t>One framework that is private, post-quantum, and Byzantine-robust at the same time.</a:t>
+            <a:off x="685800" y="1417320"/>
+            <a:ext cx="10881360" cy="548640"/>
+          </a:xfrm>
+          <a:prstGeom prst="rect">
+            <a:avLst/>
+          </a:prstGeom>
+          <a:noFill/>
+        </p:spPr>
+        <p:txBody>
+          <a:bodyPr wrap="square">
+            <a:spAutoFit/>
+          </a:bodyPr>
+          <a:lstStyle/>
+          <a:p>
+            <a:r>
+              <a:rPr sz="1600" b="0" i="1">
+                <a:solidFill>
+                  <a:srgbClr val="26251F"/>
+                </a:solidFill>
+                <a:latin typeface="Calibri"/>
+              </a:rPr>
+              <a:t>Can one protocol be private, post-quantum, and Byzantine-robust at the same time?</a:t>
             </a:r>
           </a:p>
         </p:txBody>
@@ -9226,27 +9191,27 @@
         </p:nvSpPr>
         <p:spPr>
           <a:xfrm>
-            <a:off x="685800" y="1828800"/>
-            <a:ext cx="10881360" cy="3931920"/>
-          </a:xfrm>
-          <a:prstGeom prst="rect">
-            <a:avLst/>
-          </a:prstGeom>
-          <a:noFill/>
-        </p:spPr>
-        <p:txBody>
-          <a:bodyPr wrap="square">
-            <a:spAutoFit/>
-          </a:bodyPr>
-          <a:lstStyle/>
-          <a:p>
-            <a:pPr>
-              <a:spcAft>
-                <a:spcPts val="800"/>
-              </a:spcAft>
-            </a:pPr>
-            <a:r>
-              <a:rPr sz="1500">
+            <a:off x="685800" y="1947672"/>
+            <a:ext cx="10881360" cy="4023360"/>
+          </a:xfrm>
+          <a:prstGeom prst="rect">
+            <a:avLst/>
+          </a:prstGeom>
+          <a:noFill/>
+        </p:spPr>
+        <p:txBody>
+          <a:bodyPr wrap="square">
+            <a:spAutoFit/>
+          </a:bodyPr>
+          <a:lstStyle/>
+          <a:p>
+            <a:pPr>
+              <a:spcAft>
+                <a:spcPts val="900"/>
+              </a:spcAft>
+            </a:pPr>
+            <a:r>
+              <a:rPr sz="1800">
                 <a:solidFill>
                   <a:srgbClr val="2A78D6"/>
                 </a:solidFill>
@@ -9255,23 +9220,32 @@
               <a:t>▪  </a:t>
             </a:r>
             <a:r>
-              <a:rPr sz="1500" b="0" i="0">
-                <a:solidFill>
-                  <a:srgbClr val="26251F"/>
-                </a:solidFill>
-                <a:latin typeface="Calibri"/>
-              </a:rPr>
-              <a:t>Hide updates within clusters using a code-based (HQC) masking protocol [2]: the server sees only cluster sums.</a:t>
-            </a:r>
-          </a:p>
-          <a:p>
-            <a:pPr>
-              <a:spcAft>
-                <a:spcPts val="800"/>
-              </a:spcAft>
-            </a:pPr>
-            <a:r>
-              <a:rPr sz="1500">
+              <a:rPr sz="1800" b="1" i="0">
+                <a:solidFill>
+                  <a:srgbClr val="0B0B0B"/>
+                </a:solidFill>
+                <a:latin typeface="Calibri"/>
+              </a:rPr>
+              <a:t>RQ1</a:t>
+            </a:r>
+            <a:r>
+              <a:rPr sz="1800" b="0" i="0">
+                <a:solidFill>
+                  <a:srgbClr val="26251F"/>
+                </a:solidFill>
+                <a:latin typeface="Calibri"/>
+              </a:rPr>
+              <a:t> Can code-based (non-lattice) cryptography secure FL aggregation at a practical cost?</a:t>
+            </a:r>
+          </a:p>
+          <a:p>
+            <a:pPr>
+              <a:spcAft>
+                <a:spcPts val="900"/>
+              </a:spcAft>
+            </a:pPr>
+            <a:r>
+              <a:rPr sz="1800">
                 <a:solidFill>
                   <a:srgbClr val="2A78D6"/>
                 </a:solidFill>
@@ -9280,23 +9254,32 @@
               <a:t>▪  </a:t>
             </a:r>
             <a:r>
-              <a:rPr sz="1500" b="0" i="0">
-                <a:solidFill>
-                  <a:srgbClr val="26251F"/>
-                </a:solidFill>
-                <a:latin typeface="Calibri"/>
-              </a:rPr>
-              <a:t>Run group testing [1] across re-randomized clusters over rounds to identify attackers (CB-SAFE+).</a:t>
-            </a:r>
-          </a:p>
-          <a:p>
-            <a:pPr>
-              <a:spcAft>
-                <a:spcPts val="800"/>
-              </a:spcAft>
-            </a:pPr>
-            <a:r>
-              <a:rPr sz="1500">
+              <a:rPr sz="1800" b="1" i="0">
+                <a:solidFill>
+                  <a:srgbClr val="0B0B0B"/>
+                </a:solidFill>
+                <a:latin typeface="Calibri"/>
+              </a:rPr>
+              <a:t>RQ2</a:t>
+            </a:r>
+            <a:r>
+              <a:rPr sz="1800" b="0" i="0">
+                <a:solidFill>
+                  <a:srgbClr val="26251F"/>
+                </a:solidFill>
+                <a:latin typeface="Calibri"/>
+              </a:rPr>
+              <a:t> Why do robust aggregation rules fail once updates are hidden inside secure cluster sums?</a:t>
+            </a:r>
+          </a:p>
+          <a:p>
+            <a:pPr>
+              <a:spcAft>
+                <a:spcPts val="900"/>
+              </a:spcAft>
+            </a:pPr>
+            <a:r>
+              <a:rPr sz="1800">
                 <a:solidFill>
                   <a:srgbClr val="2A78D6"/>
                 </a:solidFill>
@@ -9305,13 +9288,56 @@
               <a:t>▪  </a:t>
             </a:r>
             <a:r>
-              <a:rPr sz="1500" b="0" i="0">
-                <a:solidFill>
-                  <a:srgbClr val="26251F"/>
-                </a:solidFill>
-                <a:latin typeface="Calibri"/>
-              </a:rPr>
-              <a:t>Confidentiality lives below the cluster boundary; robustness operates above it; post-quantum by construction.</a:t>
+              <a:rPr sz="1800" b="1" i="0">
+                <a:solidFill>
+                  <a:srgbClr val="0B0B0B"/>
+                </a:solidFill>
+                <a:latin typeface="Calibri"/>
+              </a:rPr>
+              <a:t>RQ3</a:t>
+            </a:r>
+            <a:r>
+              <a:rPr sz="1800" b="0" i="0">
+                <a:solidFill>
+                  <a:srgbClr val="26251F"/>
+                </a:solidFill>
+                <a:latin typeface="Calibri"/>
+              </a:rPr>
+              <a:t> Can malicious clients be identified from group-level observations alone, without a validation set?</a:t>
+            </a:r>
+          </a:p>
+          <a:p>
+            <a:pPr>
+              <a:spcAft>
+                <a:spcPts val="900"/>
+              </a:spcAft>
+            </a:pPr>
+            <a:r>
+              <a:rPr sz="1800">
+                <a:solidFill>
+                  <a:srgbClr val="2A78D6"/>
+                </a:solidFill>
+                <a:latin typeface="Calibri"/>
+              </a:rPr>
+              <a:t>▪  </a:t>
+            </a:r>
+            <a:r>
+              <a:rPr sz="1800" b="1" i="0">
+                <a:solidFill>
+                  <a:srgbClr val="0B0B0B"/>
+                </a:solidFill>
+                <a:latin typeface="Calibri"/>
+              </a:rPr>
+              <a:t>Objective</a:t>
+            </a:r>
+            <a:r>
+              <a:rPr sz="1800" b="0" i="0">
+                <a:solidFill>
+                  <a:srgbClr val="26251F"/>
+                </a:solidFill>
+                <a:latin typeface="Calibri"/>
+              </a:rPr>
+              <a:t> Design CB-SAFE(+) to answer all three, and validate it on four datasets against eight baselines.</a:t>
             </a:r>
           </a:p>
         </p:txBody>
@@ -9324,63 +9350,8 @@
         </p:nvSpPr>
         <p:spPr>
           <a:xfrm>
-            <a:off x="685800" y="5943600"/>
-            <a:ext cx="10881360" cy="502920"/>
-          </a:xfrm>
-          <a:prstGeom prst="rect">
-            <a:avLst/>
-          </a:prstGeom>
-          <a:noFill/>
-        </p:spPr>
-        <p:txBody>
-          <a:bodyPr wrap="square">
-            <a:spAutoFit/>
-          </a:bodyPr>
-          <a:lstStyle/>
-          <a:p>
-            <a:pPr>
-              <a:spcAft>
-                <a:spcPts val="100"/>
-              </a:spcAft>
-            </a:pPr>
-            <a:r>
-              <a:rPr sz="800" b="0" i="1">
-                <a:solidFill>
-                  <a:srgbClr val="26251F"/>
-                </a:solidFill>
-                <a:latin typeface="Calibri"/>
-              </a:rPr>
-              <a:t>[1] M. Xhemrishi, J. Östman, A. Wachter-Zeh, and A. Graell i Amat, "FedGT: Identification of malicious clients in federated learning with secure aggregation," IEEE Trans. Inf. Forensics Security, vol. 20, pp. 2577–2592, 2025.</a:t>
-            </a:r>
-          </a:p>
-          <a:p>
-            <a:pPr>
-              <a:spcAft>
-                <a:spcPts val="100"/>
-              </a:spcAft>
-            </a:pPr>
-            <a:r>
-              <a:rPr sz="800" b="0" i="1">
-                <a:solidFill>
-                  <a:srgbClr val="26251F"/>
-                </a:solidFill>
-                <a:latin typeface="Calibri"/>
-              </a:rPr>
-              <a:t>[2] K. Bonawitz, V. Ivanov, B. Kreuter, A. Marcedone, H. B. McMahan, S. Patel, D. Ramage, A. Segal, and K. Seth, "Practical secure aggregation for privacy-preserving machine learning," in Proc. ACM CCS, 2017, pp. 1175–1191.</a:t>
-            </a:r>
-          </a:p>
-        </p:txBody>
-      </p:sp>
-      <p:sp>
-        <p:nvSpPr>
-          <p:cNvPr id="6" name="TextBox 5"/>
-          <p:cNvSpPr txBox="1"/>
-          <p:nvPr/>
-        </p:nvSpPr>
-        <p:spPr>
-          <a:xfrm>
-            <a:off x="11018520" y="6446520"/>
-            <a:ext cx="914400" cy="274320"/>
+            <a:off x="10927080" y="6419088"/>
+            <a:ext cx="1005840" cy="292608"/>
           </a:xfrm>
           <a:prstGeom prst="rect">
             <a:avLst/>
@@ -9395,7 +9366,7 @@
           <a:p>
             <a:pPr algn="r"/>
             <a:r>
-              <a:rPr sz="1050" b="0" i="0">
+              <a:rPr sz="1200" b="0" i="0">
                 <a:solidFill>
                   <a:srgbClr val="898781"/>
                 </a:solidFill>
@@ -9432,28 +9403,28 @@
         </p:nvSpPr>
         <p:spPr>
           <a:xfrm>
-            <a:off x="685800" y="438912"/>
-            <a:ext cx="10881360" cy="822960"/>
-          </a:xfrm>
-          <a:prstGeom prst="rect">
-            <a:avLst/>
-          </a:prstGeom>
-          <a:noFill/>
-        </p:spPr>
-        <p:txBody>
-          <a:bodyPr wrap="square">
-            <a:spAutoFit/>
-          </a:bodyPr>
-          <a:lstStyle/>
-          <a:p>
-            <a:r>
-              <a:rPr sz="3000" b="1" i="0">
+            <a:off x="685800" y="384048"/>
+            <a:ext cx="10881360" cy="868680"/>
+          </a:xfrm>
+          <a:prstGeom prst="rect">
+            <a:avLst/>
+          </a:prstGeom>
+          <a:noFill/>
+        </p:spPr>
+        <p:txBody>
+          <a:bodyPr wrap="square">
+            <a:spAutoFit/>
+          </a:bodyPr>
+          <a:lstStyle/>
+          <a:p>
+            <a:r>
+              <a:rPr sz="3400" b="1" i="0">
                 <a:solidFill>
                   <a:srgbClr val="0B0B0B"/>
                 </a:solidFill>
                 <a:latin typeface="Calibri"/>
               </a:rPr>
-              <a:t>Methodology (Ours): Masking</a:t>
+              <a:t>Proposed Method</a:t>
             </a:r>
           </a:p>
         </p:txBody>
@@ -9466,27 +9437,61 @@
         </p:nvSpPr>
         <p:spPr>
           <a:xfrm>
-            <a:off x="685800" y="1371600"/>
-            <a:ext cx="6400800" cy="3931920"/>
-          </a:xfrm>
-          <a:prstGeom prst="rect">
-            <a:avLst/>
-          </a:prstGeom>
-          <a:noFill/>
-        </p:spPr>
-        <p:txBody>
-          <a:bodyPr wrap="square">
-            <a:spAutoFit/>
-          </a:bodyPr>
-          <a:lstStyle/>
-          <a:p>
-            <a:pPr>
-              <a:spcAft>
-                <a:spcPts val="800"/>
-              </a:spcAft>
-            </a:pPr>
-            <a:r>
-              <a:rPr sz="1500">
+            <a:off x="685800" y="1417320"/>
+            <a:ext cx="10881360" cy="548640"/>
+          </a:xfrm>
+          <a:prstGeom prst="rect">
+            <a:avLst/>
+          </a:prstGeom>
+          <a:noFill/>
+        </p:spPr>
+        <p:txBody>
+          <a:bodyPr wrap="square">
+            <a:spAutoFit/>
+          </a:bodyPr>
+          <a:lstStyle/>
+          <a:p>
+            <a:r>
+              <a:rPr sz="1600" b="0" i="1">
+                <a:solidFill>
+                  <a:srgbClr val="26251F"/>
+                </a:solidFill>
+                <a:latin typeface="Calibri"/>
+              </a:rPr>
+              <a:t>One framework that is private, post-quantum, and Byzantine-robust at the same time.</a:t>
+            </a:r>
+          </a:p>
+        </p:txBody>
+      </p:sp>
+      <p:sp>
+        <p:nvSpPr>
+          <p:cNvPr id="4" name="TextBox 3"/>
+          <p:cNvSpPr txBox="1"/>
+          <p:nvPr/>
+        </p:nvSpPr>
+        <p:spPr>
+          <a:xfrm>
+            <a:off x="685800" y="1947672"/>
+            <a:ext cx="10881360" cy="4023360"/>
+          </a:xfrm>
+          <a:prstGeom prst="rect">
+            <a:avLst/>
+          </a:prstGeom>
+          <a:noFill/>
+        </p:spPr>
+        <p:txBody>
+          <a:bodyPr wrap="square">
+            <a:spAutoFit/>
+          </a:bodyPr>
+          <a:lstStyle/>
+          <a:p>
+            <a:pPr>
+              <a:spcAft>
+                <a:spcPts val="900"/>
+              </a:spcAft>
+            </a:pPr>
+            <a:r>
+              <a:rPr sz="1800">
                 <a:solidFill>
                   <a:srgbClr val="2A78D6"/>
                 </a:solidFill>
@@ -9495,23 +9500,23 @@
               <a:t>▪  </a:t>
             </a:r>
             <a:r>
-              <a:rPr sz="1500" b="0" i="0">
-                <a:solidFill>
-                  <a:srgbClr val="26251F"/>
-                </a:solidFill>
-                <a:latin typeface="Calibri"/>
-              </a:rPr>
-              <a:t>We adopt Bonawitz-style double masking [2]: pairwise masks cancel in the cluster sum, so individuals stay hidden.</a:t>
-            </a:r>
-          </a:p>
-          <a:p>
-            <a:pPr>
-              <a:spcAft>
-                <a:spcPts val="800"/>
-              </a:spcAft>
-            </a:pPr>
-            <a:r>
-              <a:rPr sz="1500">
+              <a:rPr sz="1800" b="0" i="0">
+                <a:solidFill>
+                  <a:srgbClr val="26251F"/>
+                </a:solidFill>
+                <a:latin typeface="Calibri"/>
+              </a:rPr>
+              <a:t>Hide updates within clusters using a code-based (HQC) masking protocol [2]: the server sees only cluster sums.</a:t>
+            </a:r>
+          </a:p>
+          <a:p>
+            <a:pPr>
+              <a:spcAft>
+                <a:spcPts val="900"/>
+              </a:spcAft>
+            </a:pPr>
+            <a:r>
+              <a:rPr sz="1800">
                 <a:solidFill>
                   <a:srgbClr val="2A78D6"/>
                 </a:solidFill>
@@ -9520,23 +9525,23 @@
               <a:t>▪  </a:t>
             </a:r>
             <a:r>
-              <a:rPr sz="1500" b="0" i="0">
-                <a:solidFill>
-                  <a:srgbClr val="26251F"/>
-                </a:solidFill>
-                <a:latin typeface="Calibri"/>
-              </a:rPr>
-              <a:t>Dropout resilience via Shamir secret sharing of the self-masks.</a:t>
-            </a:r>
-          </a:p>
-          <a:p>
-            <a:pPr>
-              <a:spcAft>
-                <a:spcPts val="800"/>
-              </a:spcAft>
-            </a:pPr>
-            <a:r>
-              <a:rPr sz="1500">
+              <a:rPr sz="1800" b="0" i="0">
+                <a:solidFill>
+                  <a:srgbClr val="26251F"/>
+                </a:solidFill>
+                <a:latin typeface="Calibri"/>
+              </a:rPr>
+              <a:t>Run group testing [1] across re-randomized clusters over rounds to identify attackers (CB-SAFE+).</a:t>
+            </a:r>
+          </a:p>
+          <a:p>
+            <a:pPr>
+              <a:spcAft>
+                <a:spcPts val="900"/>
+              </a:spcAft>
+            </a:pPr>
+            <a:r>
+              <a:rPr sz="1800">
                 <a:solidFill>
                   <a:srgbClr val="2A78D6"/>
                 </a:solidFill>
@@ -9545,41 +9550,17 @@
               <a:t>▪  </a:t>
             </a:r>
             <a:r>
-              <a:rPr sz="1500" b="0" i="0">
-                <a:solidFill>
-                  <a:srgbClr val="26251F"/>
-                </a:solidFill>
-                <a:latin typeface="Calibri"/>
-              </a:rPr>
-              <a:t>Our change: masks are seeded from a KEM, so per-round traffic carries no cryptographic bytes at all.</a:t>
-            </a:r>
-          </a:p>
-        </p:txBody>
-      </p:sp>
-      <p:pic>
-        <p:nvPicPr>
-          <p:cNvPr id="4" name="Picture 3" descr="fig_masking.png"/>
-          <p:cNvPicPr>
-            <a:picLocks noChangeAspect="1"/>
-          </p:cNvPicPr>
-          <p:nvPr/>
-        </p:nvPicPr>
-        <p:blipFill>
-          <a:blip r:embed="rId2"/>
-          <a:stretch>
-            <a:fillRect/>
-          </a:stretch>
-        </p:blipFill>
-        <p:spPr>
-          <a:xfrm>
-            <a:off x="7315200" y="1463040"/>
-            <a:ext cx="4480560" cy="3274073"/>
-          </a:xfrm>
-          <a:prstGeom prst="rect">
-            <a:avLst/>
-          </a:prstGeom>
-        </p:spPr>
-      </p:pic>
+              <a:rPr sz="1800" b="0" i="0">
+                <a:solidFill>
+                  <a:srgbClr val="26251F"/>
+                </a:solidFill>
+                <a:latin typeface="Calibri"/>
+              </a:rPr>
+              <a:t>Confidentiality lives below the cluster boundary; robustness operates above it; post-quantum by construction.</a:t>
+            </a:r>
+          </a:p>
+        </p:txBody>
+      </p:sp>
       <p:sp>
         <p:nvSpPr>
           <p:cNvPr id="5" name="TextBox 4"/>
@@ -9588,8 +9569,8 @@
         </p:nvSpPr>
         <p:spPr>
           <a:xfrm>
-            <a:off x="685800" y="5943600"/>
-            <a:ext cx="10881360" cy="502920"/>
+            <a:off x="685800" y="5888736"/>
+            <a:ext cx="10881360" cy="548640"/>
           </a:xfrm>
           <a:prstGeom prst="rect">
             <a:avLst/>
@@ -9608,7 +9589,23 @@
               </a:spcAft>
             </a:pPr>
             <a:r>
-              <a:rPr sz="800" b="0" i="1">
+              <a:rPr sz="900" b="0" i="1">
+                <a:solidFill>
+                  <a:srgbClr val="26251F"/>
+                </a:solidFill>
+                <a:latin typeface="Calibri"/>
+              </a:rPr>
+              <a:t>[1] M. Xhemrishi, J. Östman, A. Wachter-Zeh, and A. Graell i Amat, "FedGT: Identification of malicious clients in federated learning with secure aggregation," IEEE Trans. Inf. Forensics Security, vol. 20, pp. 2577–2592, 2025.</a:t>
+            </a:r>
+          </a:p>
+          <a:p>
+            <a:pPr>
+              <a:spcAft>
+                <a:spcPts val="100"/>
+              </a:spcAft>
+            </a:pPr>
+            <a:r>
+              <a:rPr sz="900" b="0" i="1">
                 <a:solidFill>
                   <a:srgbClr val="26251F"/>
                 </a:solidFill>
@@ -9627,8 +9624,8 @@
         </p:nvSpPr>
         <p:spPr>
           <a:xfrm>
-            <a:off x="11018520" y="6446520"/>
-            <a:ext cx="914400" cy="274320"/>
+            <a:off x="10927080" y="6419088"/>
+            <a:ext cx="1005840" cy="292608"/>
           </a:xfrm>
           <a:prstGeom prst="rect">
             <a:avLst/>
@@ -9643,7 +9640,7 @@
           <a:p>
             <a:pPr algn="r"/>
             <a:r>
-              <a:rPr sz="1050" b="0" i="0">
+              <a:rPr sz="1200" b="0" i="0">
                 <a:solidFill>
                   <a:srgbClr val="898781"/>
                 </a:solidFill>

--- a/paper/cbsafe_deck.pptx
+++ b/paper/cbsafe_deck.pptx
@@ -5892,8 +5892,8 @@
         </p:blipFill>
         <p:spPr>
           <a:xfrm>
-            <a:off x="979890" y="2468880"/>
-            <a:ext cx="10231913" cy="3154680"/>
+            <a:off x="1081726" y="2468880"/>
+            <a:ext cx="10028242" cy="3154680"/>
           </a:xfrm>
           <a:prstGeom prst="rect">
             <a:avLst/>

--- a/paper/cbsafe_deck.pptx
+++ b/paper/cbsafe_deck.pptx
@@ -30,6 +30,7 @@
     <p:sldId id="278" r:id="rId29"/>
     <p:sldId id="279" r:id="rId30"/>
     <p:sldId id="280" r:id="rId31"/>
+    <p:sldId id="281" r:id="rId32"/>
   </p:sldIdLst>
   <p:sldSz cx="12191695" cy="6858000" type="screen4x3"/>
   <p:notesSz cx="6858000" cy="9144000"/>
@@ -3350,8 +3351,8 @@
         </p:blipFill>
         <p:spPr>
           <a:xfrm>
-            <a:off x="2278856" y="2286000"/>
-            <a:ext cx="7633982" cy="3520440"/>
+            <a:off x="3141632" y="1828800"/>
+            <a:ext cx="5908429" cy="3977639"/>
           </a:xfrm>
           <a:prstGeom prst="rect">
             <a:avLst/>
@@ -3443,7 +3444,7 @@
                 </a:solidFill>
                 <a:latin typeface="Calibri"/>
               </a:rPr>
-              <a:t>9 / 23</a:t>
+              <a:t>9 / 24</a:t>
             </a:r>
           </a:p>
         </p:txBody>
@@ -3691,7 +3692,7 @@
                 </a:solidFill>
                 <a:latin typeface="Calibri"/>
               </a:rPr>
-              <a:t>10 / 23</a:t>
+              <a:t>10 / 24</a:t>
             </a:r>
           </a:p>
         </p:txBody>
@@ -3915,7 +3916,7 @@
                 </a:solidFill>
                 <a:latin typeface="Calibri"/>
               </a:rPr>
-              <a:t>11 / 23</a:t>
+              <a:t>11 / 24</a:t>
             </a:r>
           </a:p>
         </p:txBody>
@@ -4155,7 +4156,7 @@
                 </a:solidFill>
                 <a:latin typeface="Calibri"/>
               </a:rPr>
-              <a:t>12 / 23</a:t>
+              <a:t>12 / 24</a:t>
             </a:r>
           </a:p>
         </p:txBody>
@@ -4470,7 +4471,7 @@
                 </a:solidFill>
                 <a:latin typeface="Calibri"/>
               </a:rPr>
-              <a:t>13 / 23</a:t>
+              <a:t>13 / 24</a:t>
             </a:r>
           </a:p>
         </p:txBody>
@@ -4815,7 +4816,7 @@
                 </a:solidFill>
                 <a:latin typeface="Calibri"/>
               </a:rPr>
-              <a:t>14 / 23</a:t>
+              <a:t>14 / 24</a:t>
             </a:r>
           </a:p>
         </p:txBody>
@@ -5158,7 +5159,7 @@
                 </a:solidFill>
                 <a:latin typeface="Calibri"/>
               </a:rPr>
-              <a:t>15 / 23</a:t>
+              <a:t>15 / 24</a:t>
             </a:r>
           </a:p>
         </p:txBody>
@@ -5473,7 +5474,7 @@
                 </a:solidFill>
                 <a:latin typeface="Calibri"/>
               </a:rPr>
-              <a:t>16 / 23</a:t>
+              <a:t>16 / 24</a:t>
             </a:r>
           </a:p>
         </p:txBody>
@@ -5737,7 +5738,7 @@
                 </a:solidFill>
                 <a:latin typeface="Calibri"/>
               </a:rPr>
-              <a:t>17 / 23</a:t>
+              <a:t>17 / 24</a:t>
             </a:r>
           </a:p>
         </p:txBody>
@@ -5892,8 +5893,8 @@
         </p:blipFill>
         <p:spPr>
           <a:xfrm>
-            <a:off x="1081726" y="2468880"/>
-            <a:ext cx="10028242" cy="3154680"/>
+            <a:off x="1021059" y="2468880"/>
+            <a:ext cx="10149576" cy="3154680"/>
           </a:xfrm>
           <a:prstGeom prst="rect">
             <a:avLst/>
@@ -5969,7 +5970,7 @@
                 </a:solidFill>
                 <a:latin typeface="Calibri"/>
               </a:rPr>
-              <a:t>18 / 23</a:t>
+              <a:t>18 / 24</a:t>
             </a:r>
           </a:p>
         </p:txBody>
@@ -6290,7 +6291,7 @@
                 </a:solidFill>
                 <a:latin typeface="Calibri"/>
               </a:rPr>
-              <a:t>1 / 23</a:t>
+              <a:t>1 / 24</a:t>
             </a:r>
           </a:p>
         </p:txBody>
@@ -6474,7 +6475,7 @@
                 </a:solidFill>
                 <a:latin typeface="Calibri"/>
               </a:rPr>
-              <a:t>19 / 23</a:t>
+              <a:t>19 / 24</a:t>
             </a:r>
           </a:p>
         </p:txBody>
@@ -6706,7 +6707,7 @@
                 </a:solidFill>
                 <a:latin typeface="Calibri"/>
               </a:rPr>
-              <a:t>20 / 23</a:t>
+              <a:t>20 / 24</a:t>
             </a:r>
           </a:p>
         </p:txBody>
@@ -6861,8 +6862,8 @@
         </p:blipFill>
         <p:spPr>
           <a:xfrm>
-            <a:off x="1225977" y="2468880"/>
-            <a:ext cx="9739740" cy="3108960"/>
+            <a:off x="1450206" y="2468880"/>
+            <a:ext cx="9291281" cy="3108960"/>
           </a:xfrm>
           <a:prstGeom prst="rect">
             <a:avLst/>
@@ -6938,7 +6939,7 @@
                 </a:solidFill>
                 <a:latin typeface="Calibri"/>
               </a:rPr>
-              <a:t>21 / 23</a:t>
+              <a:t>21 / 24</a:t>
             </a:r>
           </a:p>
         </p:txBody>
@@ -7211,7 +7212,7 @@
                 </a:solidFill>
                 <a:latin typeface="Calibri"/>
               </a:rPr>
-              <a:t>22 / 23</a:t>
+              <a:t>22 / 24</a:t>
             </a:r>
           </a:p>
         </p:txBody>
@@ -7263,7 +7264,7 @@
                 </a:solidFill>
                 <a:latin typeface="Calibri"/>
               </a:rPr>
-              <a:t>Conclusion</a:t>
+              <a:t>Results: Scalability</a:t>
             </a:r>
           </a:p>
         </p:txBody>
@@ -7277,6 +7278,40 @@
         <p:spPr>
           <a:xfrm>
             <a:off x="685800" y="1417320"/>
+            <a:ext cx="10881360" cy="548640"/>
+          </a:xfrm>
+          <a:prstGeom prst="rect">
+            <a:avLst/>
+          </a:prstGeom>
+          <a:noFill/>
+        </p:spPr>
+        <p:txBody>
+          <a:bodyPr wrap="square">
+            <a:spAutoFit/>
+          </a:bodyPr>
+          <a:lstStyle/>
+          <a:p>
+            <a:r>
+              <a:rPr sz="1600" b="0" i="1">
+                <a:solidFill>
+                  <a:srgbClr val="26251F"/>
+                </a:solidFill>
+                <a:latin typeface="Calibri"/>
+              </a:rPr>
+              <a:t>Per-client cost vs client population (from the paper).</a:t>
+            </a:r>
+          </a:p>
+        </p:txBody>
+      </p:sp>
+      <p:sp>
+        <p:nvSpPr>
+          <p:cNvPr id="4" name="TextBox 3"/>
+          <p:cNvSpPr txBox="1"/>
+          <p:nvPr/>
+        </p:nvSpPr>
+        <p:spPr>
+          <a:xfrm>
+            <a:off x="685800" y="1947672"/>
             <a:ext cx="10881360" cy="4023360"/>
           </a:xfrm>
           <a:prstGeom prst="rect">
@@ -7311,7 +7346,7 @@
                 </a:solidFill>
                 <a:latin typeface="Calibri"/>
               </a:rPr>
-              <a:t>CB-SAFE unifies code-based PQ secure aggregation [2], [3] with temporal group-testing robustness [1] in one protocol.</a:t>
+              <a:t>CB-SAFE masks only within clusters of c=3, so each client keeps c−1 partners: per-client cost is flat in N, unlike all-pairs secure aggregation [2] which grows O(N).</a:t>
             </a:r>
           </a:p>
           <a:p>
@@ -7336,64 +7371,38 @@
                 </a:solidFill>
                 <a:latin typeface="Calibri"/>
               </a:rPr>
-              <a:t>It ties the state of the art (FedGT [1]) on robustness and detection, at lower cost, and adds crypto diversity plus a failure theory.</a:t>
-            </a:r>
-          </a:p>
-          <a:p>
-            <a:pPr>
-              <a:spcAft>
-                <a:spcPts val="900"/>
-              </a:spcAft>
-            </a:pPr>
-            <a:r>
-              <a:rPr sz="1800">
-                <a:solidFill>
-                  <a:srgbClr val="2A78D6"/>
-                </a:solidFill>
-                <a:latin typeface="Calibri"/>
-              </a:rPr>
-              <a:t>▪  </a:t>
-            </a:r>
-            <a:r>
-              <a:rPr sz="1800" b="0" i="0">
-                <a:solidFill>
-                  <a:srgbClr val="26251F"/>
-                </a:solidFill>
-                <a:latin typeface="Calibri"/>
-              </a:rPr>
-              <a:t>Limitations: update authentication is out of the code-based scope; EMNIST detection uses a single seed.</a:t>
-            </a:r>
-          </a:p>
-          <a:p>
-            <a:pPr>
-              <a:spcAft>
-                <a:spcPts val="900"/>
-              </a:spcAft>
-            </a:pPr>
-            <a:r>
-              <a:rPr sz="1800">
-                <a:solidFill>
-                  <a:srgbClr val="2A78D6"/>
-                </a:solidFill>
-                <a:latin typeface="Calibri"/>
-              </a:rPr>
-              <a:t>▪  </a:t>
-            </a:r>
-            <a:r>
-              <a:rPr sz="1800" b="0" i="0">
-                <a:solidFill>
-                  <a:srgbClr val="26251F"/>
-                </a:solidFill>
-                <a:latin typeface="Calibri"/>
-              </a:rPr>
-              <a:t>Future work: code-based signatures for authentication, larger client populations, and adaptive attackers.</a:t>
-            </a:r>
-          </a:p>
-        </p:txBody>
-      </p:sp>
-      <p:sp>
-        <p:nvSpPr>
-          <p:cNvPr id="4" name="TextBox 3"/>
+              <a:t>At N=1000, one-time setup is 15.2 KiB (HQC) vs 7.4 MiB for all-pairs — a 500× reduction; the privacy law (1−f)^c and the laundering bound are per-cluster, so guarantees are N-independent.</a:t>
+            </a:r>
+          </a:p>
+        </p:txBody>
+      </p:sp>
+      <p:pic>
+        <p:nvPicPr>
+          <p:cNvPr id="5" name="Picture 4" descr="fig_scaling_cost.png"/>
+          <p:cNvPicPr>
+            <a:picLocks noChangeAspect="1"/>
+          </p:cNvPicPr>
+          <p:nvPr/>
+        </p:nvPicPr>
+        <p:blipFill>
+          <a:blip r:embed="rId2"/>
+          <a:stretch>
+            <a:fillRect/>
+          </a:stretch>
+        </p:blipFill>
+        <p:spPr>
+          <a:xfrm>
+            <a:off x="2553474" y="3246120"/>
+            <a:ext cx="7084745" cy="2514600"/>
+          </a:xfrm>
+          <a:prstGeom prst="rect">
+            <a:avLst/>
+          </a:prstGeom>
+        </p:spPr>
+      </p:pic>
+      <p:sp>
+        <p:nvSpPr>
+          <p:cNvPr id="6" name="TextBox 5"/>
           <p:cNvSpPr txBox="1"/>
           <p:nvPr/>
         </p:nvSpPr>
@@ -7425,46 +7434,14 @@
                 </a:solidFill>
                 <a:latin typeface="Calibri"/>
               </a:rPr>
-              <a:t>[1] M. Xhemrishi, J. Östman, A. Wachter-Zeh, and A. Graell i Amat, "FedGT: Identification of malicious clients in federated learning with secure aggregation," IEEE Trans. Inf. Forensics Security, vol. 20, pp. 2577–2592, 2025.</a:t>
-            </a:r>
-          </a:p>
-          <a:p>
-            <a:pPr>
-              <a:spcAft>
-                <a:spcPts val="100"/>
-              </a:spcAft>
-            </a:pPr>
-            <a:r>
-              <a:rPr sz="900" b="0" i="1">
-                <a:solidFill>
-                  <a:srgbClr val="26251F"/>
-                </a:solidFill>
-                <a:latin typeface="Calibri"/>
-              </a:rPr>
               <a:t>[2] K. Bonawitz, V. Ivanov, B. Kreuter, A. Marcedone, H. B. McMahan, S. Patel, D. Ramage, A. Segal, and K. Seth, "Practical secure aggregation for privacy-preserving machine learning," in Proc. ACM CCS, 2017, pp. 1175–1191.</a:t>
             </a:r>
           </a:p>
-          <a:p>
-            <a:pPr>
-              <a:spcAft>
-                <a:spcPts val="100"/>
-              </a:spcAft>
-            </a:pPr>
-            <a:r>
-              <a:rPr sz="900" b="0" i="1">
-                <a:solidFill>
-                  <a:srgbClr val="26251F"/>
-                </a:solidFill>
-                <a:latin typeface="Calibri"/>
-              </a:rPr>
-              <a:t>[3] National Institute of Standards and Technology, "Status report on the fourth round of the NIST post-quantum cryptography standardization process," NIST IR 8545, Mar. 2025.</a:t>
-            </a:r>
-          </a:p>
-        </p:txBody>
-      </p:sp>
-      <p:sp>
-        <p:nvSpPr>
-          <p:cNvPr id="5" name="TextBox 4"/>
+        </p:txBody>
+      </p:sp>
+      <p:sp>
+        <p:nvSpPr>
+          <p:cNvPr id="7" name="TextBox 6"/>
           <p:cNvSpPr txBox="1"/>
           <p:nvPr/>
         </p:nvSpPr>
@@ -7492,7 +7469,7 @@
                 </a:solidFill>
                 <a:latin typeface="Calibri"/>
               </a:rPr>
-              <a:t>23 / 23</a:t>
+              <a:t>23 / 24</a:t>
             </a:r>
           </a:p>
         </p:txBody>
@@ -7544,6 +7521,287 @@
                 </a:solidFill>
                 <a:latin typeface="Calibri"/>
               </a:rPr>
+              <a:t>Conclusion</a:t>
+            </a:r>
+          </a:p>
+        </p:txBody>
+      </p:sp>
+      <p:sp>
+        <p:nvSpPr>
+          <p:cNvPr id="3" name="TextBox 2"/>
+          <p:cNvSpPr txBox="1"/>
+          <p:nvPr/>
+        </p:nvSpPr>
+        <p:spPr>
+          <a:xfrm>
+            <a:off x="685800" y="1417320"/>
+            <a:ext cx="10881360" cy="4023360"/>
+          </a:xfrm>
+          <a:prstGeom prst="rect">
+            <a:avLst/>
+          </a:prstGeom>
+          <a:noFill/>
+        </p:spPr>
+        <p:txBody>
+          <a:bodyPr wrap="square">
+            <a:spAutoFit/>
+          </a:bodyPr>
+          <a:lstStyle/>
+          <a:p>
+            <a:pPr>
+              <a:spcAft>
+                <a:spcPts val="900"/>
+              </a:spcAft>
+            </a:pPr>
+            <a:r>
+              <a:rPr sz="1800">
+                <a:solidFill>
+                  <a:srgbClr val="2A78D6"/>
+                </a:solidFill>
+                <a:latin typeface="Calibri"/>
+              </a:rPr>
+              <a:t>▪  </a:t>
+            </a:r>
+            <a:r>
+              <a:rPr sz="1800" b="0" i="0">
+                <a:solidFill>
+                  <a:srgbClr val="26251F"/>
+                </a:solidFill>
+                <a:latin typeface="Calibri"/>
+              </a:rPr>
+              <a:t>CB-SAFE unifies code-based PQ secure aggregation [2], [3] with temporal group-testing robustness [1] in one protocol.</a:t>
+            </a:r>
+          </a:p>
+          <a:p>
+            <a:pPr>
+              <a:spcAft>
+                <a:spcPts val="900"/>
+              </a:spcAft>
+            </a:pPr>
+            <a:r>
+              <a:rPr sz="1800">
+                <a:solidFill>
+                  <a:srgbClr val="2A78D6"/>
+                </a:solidFill>
+                <a:latin typeface="Calibri"/>
+              </a:rPr>
+              <a:t>▪  </a:t>
+            </a:r>
+            <a:r>
+              <a:rPr sz="1800" b="0" i="0">
+                <a:solidFill>
+                  <a:srgbClr val="26251F"/>
+                </a:solidFill>
+                <a:latin typeface="Calibri"/>
+              </a:rPr>
+              <a:t>It ties the state of the art (FedGT [1]) on robustness and detection, at lower cost, and adds crypto diversity plus a failure theory.</a:t>
+            </a:r>
+          </a:p>
+          <a:p>
+            <a:pPr>
+              <a:spcAft>
+                <a:spcPts val="900"/>
+              </a:spcAft>
+            </a:pPr>
+            <a:r>
+              <a:rPr sz="1800">
+                <a:solidFill>
+                  <a:srgbClr val="2A78D6"/>
+                </a:solidFill>
+                <a:latin typeface="Calibri"/>
+              </a:rPr>
+              <a:t>▪  </a:t>
+            </a:r>
+            <a:r>
+              <a:rPr sz="1800" b="0" i="0">
+                <a:solidFill>
+                  <a:srgbClr val="26251F"/>
+                </a:solidFill>
+                <a:latin typeface="Calibri"/>
+              </a:rPr>
+              <a:t>Limitations: update authentication is out of the code-based scope; EMNIST detection uses a single seed.</a:t>
+            </a:r>
+          </a:p>
+          <a:p>
+            <a:pPr>
+              <a:spcAft>
+                <a:spcPts val="900"/>
+              </a:spcAft>
+            </a:pPr>
+            <a:r>
+              <a:rPr sz="1800">
+                <a:solidFill>
+                  <a:srgbClr val="2A78D6"/>
+                </a:solidFill>
+                <a:latin typeface="Calibri"/>
+              </a:rPr>
+              <a:t>▪  </a:t>
+            </a:r>
+            <a:r>
+              <a:rPr sz="1800" b="0" i="0">
+                <a:solidFill>
+                  <a:srgbClr val="26251F"/>
+                </a:solidFill>
+                <a:latin typeface="Calibri"/>
+              </a:rPr>
+              <a:t>Future work: code-based signatures for authentication, larger client populations, and adaptive attackers.</a:t>
+            </a:r>
+          </a:p>
+        </p:txBody>
+      </p:sp>
+      <p:sp>
+        <p:nvSpPr>
+          <p:cNvPr id="4" name="TextBox 3"/>
+          <p:cNvSpPr txBox="1"/>
+          <p:nvPr/>
+        </p:nvSpPr>
+        <p:spPr>
+          <a:xfrm>
+            <a:off x="685800" y="5888736"/>
+            <a:ext cx="10881360" cy="548640"/>
+          </a:xfrm>
+          <a:prstGeom prst="rect">
+            <a:avLst/>
+          </a:prstGeom>
+          <a:noFill/>
+        </p:spPr>
+        <p:txBody>
+          <a:bodyPr wrap="square">
+            <a:spAutoFit/>
+          </a:bodyPr>
+          <a:lstStyle/>
+          <a:p>
+            <a:pPr>
+              <a:spcAft>
+                <a:spcPts val="100"/>
+              </a:spcAft>
+            </a:pPr>
+            <a:r>
+              <a:rPr sz="900" b="0" i="1">
+                <a:solidFill>
+                  <a:srgbClr val="26251F"/>
+                </a:solidFill>
+                <a:latin typeface="Calibri"/>
+              </a:rPr>
+              <a:t>[1] M. Xhemrishi, J. Östman, A. Wachter-Zeh, and A. Graell i Amat, "FedGT: Identification of malicious clients in federated learning with secure aggregation," IEEE Trans. Inf. Forensics Security, vol. 20, pp. 2577–2592, 2025.</a:t>
+            </a:r>
+          </a:p>
+          <a:p>
+            <a:pPr>
+              <a:spcAft>
+                <a:spcPts val="100"/>
+              </a:spcAft>
+            </a:pPr>
+            <a:r>
+              <a:rPr sz="900" b="0" i="1">
+                <a:solidFill>
+                  <a:srgbClr val="26251F"/>
+                </a:solidFill>
+                <a:latin typeface="Calibri"/>
+              </a:rPr>
+              <a:t>[2] K. Bonawitz, V. Ivanov, B. Kreuter, A. Marcedone, H. B. McMahan, S. Patel, D. Ramage, A. Segal, and K. Seth, "Practical secure aggregation for privacy-preserving machine learning," in Proc. ACM CCS, 2017, pp. 1175–1191.</a:t>
+            </a:r>
+          </a:p>
+          <a:p>
+            <a:pPr>
+              <a:spcAft>
+                <a:spcPts val="100"/>
+              </a:spcAft>
+            </a:pPr>
+            <a:r>
+              <a:rPr sz="900" b="0" i="1">
+                <a:solidFill>
+                  <a:srgbClr val="26251F"/>
+                </a:solidFill>
+                <a:latin typeface="Calibri"/>
+              </a:rPr>
+              <a:t>[3] National Institute of Standards and Technology, "Status report on the fourth round of the NIST post-quantum cryptography standardization process," NIST IR 8545, Mar. 2025.</a:t>
+            </a:r>
+          </a:p>
+        </p:txBody>
+      </p:sp>
+      <p:sp>
+        <p:nvSpPr>
+          <p:cNvPr id="5" name="TextBox 4"/>
+          <p:cNvSpPr txBox="1"/>
+          <p:nvPr/>
+        </p:nvSpPr>
+        <p:spPr>
+          <a:xfrm>
+            <a:off x="10927080" y="6419088"/>
+            <a:ext cx="1005840" cy="292608"/>
+          </a:xfrm>
+          <a:prstGeom prst="rect">
+            <a:avLst/>
+          </a:prstGeom>
+          <a:noFill/>
+        </p:spPr>
+        <p:txBody>
+          <a:bodyPr wrap="square">
+            <a:spAutoFit/>
+          </a:bodyPr>
+          <a:lstStyle/>
+          <a:p>
+            <a:pPr algn="r"/>
+            <a:r>
+              <a:rPr sz="1200" b="0" i="0">
+                <a:solidFill>
+                  <a:srgbClr val="898781"/>
+                </a:solidFill>
+                <a:latin typeface="Calibri"/>
+              </a:rPr>
+              <a:t>24 / 24</a:t>
+            </a:r>
+          </a:p>
+        </p:txBody>
+      </p:sp>
+    </p:spTree>
+  </p:cSld>
+  <p:clrMapOvr>
+    <a:masterClrMapping/>
+  </p:clrMapOvr>
+</p:sld>
+</file>
+
+<file path=ppt/slides/slide26.xml><?xml version="1.0" encoding="utf-8"?>
+<p:sld xmlns:a="http://schemas.openxmlformats.org/drawingml/2006/main" xmlns:p="http://schemas.openxmlformats.org/presentationml/2006/main" xmlns:r="http://schemas.openxmlformats.org/officeDocument/2006/relationships">
+  <p:cSld>
+    <p:spTree>
+      <p:nvGrpSpPr>
+        <p:cNvPr id="1" name=""/>
+        <p:cNvGrpSpPr/>
+        <p:nvPr/>
+      </p:nvGrpSpPr>
+      <p:grpSpPr/>
+      <p:sp>
+        <p:nvSpPr>
+          <p:cNvPr id="2" name="TextBox 1"/>
+          <p:cNvSpPr txBox="1"/>
+          <p:nvPr/>
+        </p:nvSpPr>
+        <p:spPr>
+          <a:xfrm>
+            <a:off x="685800" y="384048"/>
+            <a:ext cx="10881360" cy="868680"/>
+          </a:xfrm>
+          <a:prstGeom prst="rect">
+            <a:avLst/>
+          </a:prstGeom>
+          <a:noFill/>
+        </p:spPr>
+        <p:txBody>
+          <a:bodyPr wrap="square">
+            <a:spAutoFit/>
+          </a:bodyPr>
+          <a:lstStyle/>
+          <a:p>
+            <a:r>
+              <a:rPr sz="3400" b="1" i="0">
+                <a:solidFill>
+                  <a:srgbClr val="0B0B0B"/>
+                </a:solidFill>
+                <a:latin typeface="Calibri"/>
+              </a:rPr>
               <a:t>References</a:t>
             </a:r>
           </a:p>
@@ -7976,7 +8234,7 @@
                 </a:solidFill>
                 <a:latin typeface="Calibri"/>
               </a:rPr>
-              <a:t>2 / 23</a:t>
+              <a:t>2 / 24</a:t>
             </a:r>
           </a:p>
         </p:txBody>
@@ -8273,7 +8531,7 @@
                 </a:solidFill>
                 <a:latin typeface="Calibri"/>
               </a:rPr>
-              <a:t>3 / 23</a:t>
+              <a:t>3 / 24</a:t>
             </a:r>
           </a:p>
         </p:txBody>
@@ -8522,7 +8780,7 @@
                 </a:solidFill>
                 <a:latin typeface="Calibri"/>
               </a:rPr>
-              <a:t>4 / 23</a:t>
+              <a:t>4 / 24</a:t>
             </a:r>
           </a:p>
         </p:txBody>
@@ -8771,7 +9029,7 @@
                 </a:solidFill>
                 <a:latin typeface="Calibri"/>
               </a:rPr>
-              <a:t>5 / 23</a:t>
+              <a:t>5 / 24</a:t>
             </a:r>
           </a:p>
         </p:txBody>
@@ -9092,7 +9350,7 @@
                 </a:solidFill>
                 <a:latin typeface="Calibri"/>
               </a:rPr>
-              <a:t>6 / 23</a:t>
+              <a:t>6 / 24</a:t>
             </a:r>
           </a:p>
         </p:txBody>
@@ -9372,7 +9630,7 @@
                 </a:solidFill>
                 <a:latin typeface="Calibri"/>
               </a:rPr>
-              <a:t>7 / 23</a:t>
+              <a:t>7 / 24</a:t>
             </a:r>
           </a:p>
         </p:txBody>
@@ -9646,7 +9904,7 @@
                 </a:solidFill>
                 <a:latin typeface="Calibri"/>
               </a:rPr>
-              <a:t>8 / 23</a:t>
+              <a:t>8 / 24</a:t>
             </a:r>
           </a:p>
         </p:txBody>
